--- a/docs/soutenance-5hash.pptx
+++ b/docs/soutenance-5hash.pptx
@@ -513,9 +513,9 @@
           <a:p>
             <a:r>
               <a:rPr lang="en-US" dirty="0"/>
-              <a:t>Bonjour. Nous sommes l'agence 5HASH, et Taylor Shift nous a confié l'infrastructure de sa boutique de billetterie.
-L'application existe déjà : c'est PrestaShop, l'image générique publiée sur Docker Hub. Notre travail, ce n'est pas le code du site : c'est de lui donner une maison qui tienne debout le jour où les billets partent en vente.
-Tout ce que vous allez voir est décrit en code — Terraform pour l'infrastructure, Ansible pour la configuration — et tourne en ce moment sur un vrai compte AWS, en région Paris. Nous ferons la démonstration à la fin.</a:t>
+              <a:t>Bonjour à tous. On est l'agence 5HASH, et Taylor Shift nous a confié sa boutique de billets.
+Le site, il existe déjà : c'est PrestaShop. Nous, on ne touche pas au site. Notre travail, c'est de lui construire une maison — et surtout une maison qui tient debout le jour où des milliers de fans se connectent en même temps.
+Tout est écrit en code : Terraform pour construire, Ansible pour installer. Et ce n'est pas une maquette : ça tourne en ce moment sur un vrai compte AWS. On vous le montrera à la fin.</a:t>
             </a:r>
             <a:endParaRPr lang="en-US" dirty="0"/>
           </a:p>
@@ -603,11 +603,11 @@
           <a:p>
             <a:r>
               <a:rPr lang="en-US" dirty="0"/>
-              <a:t>Une architecture sans limite connue, c'est une architecture qu'on n'a pas comprise. Voici les nôtres.
-La première, la plus importante : notre montée en charge est déclarative, pas automatique. Un pic soudain demande un opérateur et deux commandes. Environ trois minutes. La suite logique, nous savons la décrire : figer le résultat d'Ansible dans une image machine avec Packer, puis placer un groupe d'autoscaling derrière le même groupe de cibles. Notre sonde de santé et notre rôle sont déjà écrits pour ça — c'est une évolution, pas une réécriture.
-La deuxième : nous avons mis toute la racine web sur EFS. Cela rend les instances interchangeables, mais cela coûte de la latence sur chaque inclusion de fichier PHP. Au-delà de quelques milliers de requêtes par minute, il faudrait mettre le code dans l'image, ne garder que les images produits sur EFS, et placer un CDN devant.
-La troisième : une seule base en écriture. On peut déporter les lectures sur un réplica, pas les écritures. Et une billetterie, ça écrit beaucoup.
-La quatrième : une seule région. Une panne régionale serait une interruption. À cette échelle, le multi-région coûterait plus cher que la panne qu'il évite. C'est un arbitrage assumé.</a:t>
+              <a:t>Une infrastructure dont on ne connaît pas les limites, c'est une infrastructure qu'on n'a pas comprise. Voilà les nôtres, en toute transparence.
+La première, la plus importante : ajouter des serveurs, ça demande quelqu'un. Ce n'est pas automatique. Un pic soudain, il faut un opérateur et deux commandes — trois minutes. Pour l'automatiser vraiment, il faudrait préparer à l'avance une image toute faite du serveur, avec tout déjà installé. Et bonne nouvelle : notre installation est déjà écrite pour ça, c'est une évolution, pas une réécriture.
+La deuxième : on a mis tout le site sur le disque partagé. C'est ce qui rend les serveurs interchangeables, mais un disque réseau est plus lent qu'un disque local. Au-delà de quelques milliers de visiteurs par minute, il faudrait mettre le site dans l'image et ne garder que les photos sur le disque partagé.
+La troisième : une seule base pour écrire. On peut ajouter des copies pour la lecture, mais une billetterie, ça écrit surtout.
+Et la quatrième : une seule région. Si toute la région Paris tombe, on tombe. Doubler ailleurs coûterait plus cher que la panne qu'on évite. C'est assumé.</a:t>
             </a:r>
             <a:endParaRPr lang="en-US" dirty="0"/>
           </a:p>
@@ -695,11 +695,11 @@
           <a:p>
             <a:r>
               <a:rPr lang="en-US" dirty="0"/>
-              <a:t>Passons à la démonstration. Voici la totalité de ce qu'il faut taper.
-Une fois par compte, on crée le backend d'état : un bucket S3 versionné, chiffré, avec verrouillage. C'est le seul prérequis, et il est documenté dans le README.
-Ensuite, Terraform : init, apply. Une douzaine de minutes, c'est la base de données qui est lente.
-Puis Ansible : on installe les dépendances depuis Galaxy, on vérifie que l'inventaire dynamique voit bien les machines — et je vous invite à regarder cette commande, parce qu'aucune adresse n'y est écrite — et on lance le playbook.
-Je vais vous montrer quatre choses : la boutique et son back-office ; le playbook relancé qui ne change rien ; l'ajout d'une instance qui entre en rotation toute seule ; et enfin, j'arrête le conteneur sur une instance pour vous montrer que la boutique reste debout.</a:t>
+              <a:t>Voilà tout ce qu'il y a à taper. Six commandes.
+La première, on ne la lance qu'une fois par compte : elle prépare l'endroit où Terraform range sa description de l'infrastructure.
+Ensuite Terraform construit. Une douzaine de minutes, et c'est la base de données qui prend tout le temps.
+Puis Ansible installe. Regardez bien la commande du milieu : c'est celle qui affiche la liste des serveurs. Aucune adresse n'y est écrite, elle est lue chez Terraform.
+On va vous montrer quatre choses : la boutique et son administration ; l'installation relancée qui ne change rien ; un serveur ajouté qui entre tout seul en service ; et enfin on en coupe un, en direct, pour vous montrer que la boutique tient.</a:t>
             </a:r>
             <a:endParaRPr lang="en-US" dirty="0"/>
           </a:p>
@@ -787,14 +787,14 @@
           <a:p>
             <a:r>
               <a:rPr lang="en-US" dirty="0"/>
-              <a:t>Pour conclure : la solution est déployée sur un vrai compte, elle est documentée dans un README qui sert de manuel d'exploitation — déployer, exploiter, mettre à l'échelle, dépanner, détruire — et elle est reproductible : nous l'avons détruite et redéployée pour en être sûrs.
-Nous sommes prêts pour vos questions.
-[Questions probables et réponses courtes :
-— Pourquoi pas d'autoscaling ? Parce que notre unité de déploiement est une instance configurée par Ansible, pas une image figée. Le faire proprement demande Packer et une image préconstruite ; nous avons préféré livrer quelque chose qui marche et dont nous connaissons la limite, plutôt qu'un groupe d'autoscaling qui lancerait des machines non configurées.
-— Pourquoi EFS et pas S3 ? Parce que PrestaShop écrit sur un système de fichiers. Utiliser S3 demanderait un module PrestaShop supplémentaire ; EFS est transparent pour l'application.
-— Où est le mot de passe de la base ? Nulle part dans le dépôt. Terraform le génère, le dépose dans Secrets Manager, et chaque instance va le chercher avec son propre rôle IAM. Il n'est même pas dans l'inventaire Ansible.
-— Combien ça coûte ? Environ deux à trois dollars par jour pour l'environnement de développement, et les postes principaux sont la passerelle NAT et le load balancer.
-— Comment gérez-vous les montées de version de PrestaShop ? C'est une variable dans les variables de groupe Ansible : on change le tag de l'image, on relance le playbook. On prend un instantané de la base avant.]</a:t>
+              <a:t>Pour conclure. La boutique est en ligne sur un vrai compte AWS. Elle est documentée : le README explique comment l'installer, la faire grandir, la dépanner et la supprimer. Et on sait la refaire : on l'a détruite et redéployée pour en être sûrs.
+Merci de votre attention, on est prêts pour vos questions.
+[Réponses courtes à avoir en tête :
+— Pourquoi pas d'ajout automatique de serveurs ? Parce qu'on installe les serveurs avec Ansible après leur création. Pour automatiser, il faudrait une image toute prête. On a préféré livrer quelque chose qui marche et dont on connaît la limite.
+— Pourquoi EFS et pas S3 ? Parce que PrestaShop écrit sur un disque, tout simplement. S3 demanderait un module en plus.
+— Où est le mot de passe de la base ? Nulle part chez nous. AWS le garde, et chaque serveur va le chercher avec sa propre autorisation.
+— Combien ça coûte ? Deux à trois dollars par jour pour l'environnement de test.
+— Comment vous changez de version de PrestaShop ? Une ligne dans un fichier Ansible, on relance, et on prend une sauvegarde de la base avant.]</a:t>
             </a:r>
             <a:endParaRPr lang="en-US" dirty="0"/>
           </a:p>
@@ -882,11 +882,11 @@
           <a:p>
             <a:r>
               <a:rPr lang="en-US" dirty="0"/>
-              <a:t>Le sujet nous demande trois choses : déployer, configurer, documenter. Mais derrière, il y a trois questions concrètes auxquelles une infrastructure doit savoir répondre.
-Première question : comment une requête arrive jusqu'à la boutique ? C'est la question du chemin réseau et de la sécurité.
-Deuxième question : que se passe-t-il quand le trafic est multiplié par dix ? C'est le cœur du sujet — une ouverture de billetterie, c'est un pic, pas une charge régulière.
-Troisième question : que se passe-t-il quand quelque chose casse ? Parce que quelque chose casse toujours.
-Chaque décision que nous allons présenter répond à l'une de ces trois questions. Si une décision ne répond à aucune, c'est qu'elle n'a pas sa place.</a:t>
+              <a:t>Avant de choisir la moindre technologie, on s'est posé trois questions toutes bêtes.
+Un : comment un client arrive jusqu'à la boutique ? Autrement dit, par où ça rentre, et qu'est-ce qu'on laisse ouvert.
+Deux : et si dix fois plus de monde arrive d'un coup ? Parce qu'une ouverture de billetterie, ce n'est pas un trafic régulier. C'est un mur.
+Trois : et si une machine tombe ? Parce qu'une machine finit toujours par tomber.
+Tout ce qu'on va vous montrer répond à l'une de ces trois questions.</a:t>
             </a:r>
             <a:endParaRPr lang="en-US" dirty="0"/>
           </a:p>
@@ -974,12 +974,12 @@
           <a:p>
             <a:r>
               <a:rPr lang="en-US" dirty="0"/>
-              <a:t>Voici l'architecture. Elle se lit de haut en bas, dans le sens d'une requête.
-En haut, le seul point d'entrée public : le load balancer applicatif. Il est présent dans chaque zone de disponibilité, il interroge chaque instance toutes les quinze secondes sur une page de santé, et il sait retirer une instance de la rotation.
-À côté, le bastion. Il ne sert jamais aux clients : c'est uniquement la porte par laquelle Ansible entre pour configurer la flotte. Il n'est ouvert qu'à l'adresse IP de l'opérateur.
-Au milieu, les instances EC2 qui font tourner le conteneur PrestaShop. Elles n'ont aucune adresse publique : on ne peut pas les joindre depuis Internet, seulement à travers le load balancer.
-En bas, les données. La base MySQL managée d'un côté, le système de fichiers partagé de l'autre. Les sous-réseaux de ce niveau n'ont aucune route vers Internet.
-Le point important : les instances du milieu ne gardent rien. Le catalogue est dans la base, les images et les sessions sont sur le stockage partagé. C'est ce qui rend la suite possible.</a:t>
+              <a:t>Pour expliquer l'architecture, on va prendre l'image d'une salle de concert. Ça se lit de haut en bas, comme le trajet d'un client.
+En haut, côté rue, il y a UNE seule porte : le répartiteur. C'est l'hôte d'accueil. Il envoie chaque visiteur vers une caisse libre, et il vérifie toutes les quinze secondes que chaque caisse va bien. Si une caisse ne répond plus, il arrête d'y envoyer du monde.
+À côté, l'entrée de service. Elle, elle est réservée à l'équipe : c'est par là qu'on passe pour installer et dépanner. Elle est ouverte à une seule adresse, la nôtre. Aucun client ne passe par là.
+Au milieu, les caisses : ce sont les serveurs qui font tourner la boutique. Elles sont toutes identiques. Et surtout, elles ne sont pas joignables depuis Internet — on ne peut y arriver qu'en passant par la porte d'accueil.
+En bas, les réserves. Le coffre, c'est la base de données : les billets, les paniers, les commandes. Le vestiaire, c'est un disque partagé : les images du site, le thème, et les paniers en cours.
+Et voilà le point important : les caisses ne gardent rien. Tout est dans le coffre et dans le vestiaire. C'est exactement ce qui va nous permettre d'en ajouter ou d'en perdre sans que personne ne s'en aperçoive.</a:t>
             </a:r>
             <a:endParaRPr lang="en-US" dirty="0"/>
           </a:p>
@@ -1067,11 +1067,11 @@
           <a:p>
             <a:r>
               <a:rPr lang="en-US" dirty="0"/>
-              <a:t>Le sujet nous laissait libres de choisir ce qui tourne sur EC2 et ce qu'on confie à un service managé. Voici nos arbitrages, et le raisonnement derrière.
-PrestaShop tourne dans un conteneur Docker sur EC2. Le sujet impose l'image de Docker Hub, et l'instance EC2 configurée par Ansible. Le conteneur nous donne un environnement identique partout, et changer de version de PrestaShop devient une seule ligne de variable.
-La base de données, en revanche, nous ne voulons pas la gérer. RDS nous donne les sauvegardes automatiques, les correctifs de sécurité, et surtout la bascule automatique vers une instance de secours dans une autre zone. Écrire tout ça nous-mêmes, c'est du travail que personne ne veut découvrir le soir de l'ouverture des ventes.
-Pour les fichiers, il fallait un stockage partagé : plusieurs instances doivent servir les mêmes photos de produits et les mêmes sessions PHP. Un disque EBS ne se partage pas entre instances. EFS, si.
-Enfin, les secrets. Le mot de passe de la base est généré par Terraform et ne quitte jamais AWS : chaque instance va le chercher elle-même avec son propre rôle IAM. Dans le dépôt, il n'y a que les identifiants du back-office, et ils sont chiffrés avec Ansible Vault.</a:t>
+              <a:t>Le sujet nous laissait libres : ce qui tourne sur nos serveurs, et ce qu'on confie à AWS. Voilà comment on a tranché.
+La boutique tourne dans un conteneur Docker, sur un serveur EC2. C'est ce que demande le sujet, et ça nous arrange : changer de version de PrestaShop, c'est une seule ligne à modifier.
+La base de données, par contre, on ne veut pas la gérer. AWS s'occupe des sauvegardes, des mises à jour, et garde une machine de secours prête à prendre le relais. Franchement, personne n'a envie de découvrir un problème de base de données le soir de l'ouverture des ventes.
+Pour les fichiers, il nous fallait un disque que plusieurs serveurs voient en même temps. Un disque classique ne se partage pas. EFS, si.
+Et les mots de passe : celui de la base n'est écrit nulle part dans notre code. Terraform le génère, le dépose dans le coffre d'AWS, et chaque serveur va le chercher tout seul avec sa propre autorisation. Dans le dépôt, il n'y a que le mot de passe de l'administration du site, et il est chiffré.</a:t>
             </a:r>
             <a:endParaRPr lang="en-US" dirty="0"/>
           </a:p>
@@ -1159,10 +1159,11 @@
           <a:p>
             <a:r>
               <a:rPr lang="en-US" dirty="0"/>
-              <a:t>Côté Terraform, le module racine ne fait qu'assembler six modules, un par couche. Chacun a ses variables documentées et ses sorties, et peut être relu ou remplacé seul.
-La séparation des environnements tient dans un seul endroit : une table de dimensionnement dans locals.tf. Le même code donne un environnement de développement à une instance et une production à trois instances réparties sur trois zones, avec une base Multi-AZ et quatorze jours de sauvegardes. On change une variable, pas du code.
-L'état est distant : un bucket S3 versionné et chiffré, avec verrouillage, créé par un module d'amorçage qu'on lance une fois par compte. C'est important parce que l'état contient des secrets générés, et parce qu'à trois, on ne peut pas travailler sur un fichier d'état local.
-Enfin, rien n'est écrit en dur. L'AMI Ubuntu, la liste des zones de disponibilité, et même l'adresse IP publique de la machine qui lance Terraform — c'est celle-là, et elle seule, qui a le droit d'ouvrir une session SSH sur le bastion.</a:t>
+              <a:t>Terraform, c'est l'outil qui construit. On lui décrit ce qu'on veut, il se débrouille pour le créer.
+On a découpé en six briques, une par couche : le réseau, les droits, le disque, la base, les serveurs, et l'entrée. Chaque brique se relit toute seule, et si on veut en changer une, on ne casse pas les autres.
+Le truc dont on est contents : les trois environnements. Test, pré-production, production. C'est exactement le même code. On change un mot, et on passe d'un serveur à trois serveurs répartis sur trois zones, avec une base qui a une machine de secours et deux semaines de sauvegardes.
+La description de l'infrastructure est stockée sur AWS, pas sur nos ordinateurs, et elle est verrouillée : à trois, on ne peut pas se marcher dessus.
+Et rien n'est écrit en dur. Terraform va même chercher notre adresse IP du moment, et c'est la seule qui aura le droit de se connecter aux serveurs.</a:t>
             </a:r>
             <a:endParaRPr lang="en-US" dirty="0"/>
           </a:p>
@@ -1250,11 +1251,11 @@
           <a:p>
             <a:r>
               <a:rPr lang="en-US" dirty="0"/>
-              <a:t>C'est le point d'intégration du projet, et celui dont nous sommes le plus contents.
-Terraform sait déjà tout ce qu'Ansible a besoin de savoir : les adresses des machines, le point de terminaison de la base, l'identifiant du système de fichiers. Plutôt que de recopier ces valeurs dans un inventaire, Terraform les publie dans son propre état, avec le provider ansible. Et Ansible relit cet état grâce au plugin d'inventaire dynamique.
-Résultat : il n'y a pas une seule adresse IP écrite à la main dans le projet. On ajoute une instance avec Terraform, elle apparaît toute seule dans l'inventaire.
-Côté organisation, trois rôles à nous, plus un rôle installé depuis Ansible Galaxy pour Docker. Le bastion et les serveurs applicatifs partagent le même rôle de base, avec des variables différentes — c'est ça, un rôle réutilisable.
-Et l'idempotence, qui est le critère le plus concret : la deuxième exécution du playbook ne change rien. Zéro modification. Ce n'est pas un hasard, c'est une contrainte de conception : l'installeur de PrestaShop tourne une fois, dans un conteneur jetable, et le conteneur qui sert réellement la boutique est toujours créé avec l'installeur désactivé.</a:t>
+              <a:t>Ansible, c'est l'outil qui installe. Une fois que Terraform a construit les machines, Ansible les configure.
+Le problème classique, c'est de faire le lien entre les deux : Terraform crée un serveur, et il faut donner son adresse à Ansible. Beaucoup de gens recopient à la main. Nous, non.
+Terraform écrit la liste des serveurs dans sa propre description, et Ansible va la lire directement chez lui. Résultat : il n'y a pas une seule adresse IP écrite à la main dans tout le projet. On crée un serveur avec Terraform, il apparaît tout seul dans la liste d'Ansible.
+On a écrit trois rôles réutilisables. Le serveur d'entrée et les caisses partagent le même rôle de base, juste avec des réglages différents. Et pour Docker, on a pris un rôle public, installé depuis Ansible Galaxy, plutôt que de le réécrire.
+Et le point le plus important, celui du barème : on peut relancer l'installation autant de fois qu'on veut. La deuxième fois, Ansible affiche « changed égale zéro ». Il ne touche à rien, parce que tout est déjà comme demandé. Ce n'est pas de la chance : on a conçu l'installation pour ça.</a:t>
             </a:r>
             <a:endParaRPr lang="en-US" dirty="0"/>
           </a:p>
@@ -1342,10 +1343,10 @@
           <a:p>
             <a:r>
               <a:rPr lang="en-US" dirty="0"/>
-              <a:t>Venons-en à la question qui compte vraiment : l'affluence.
-Notre couche applicative ne garde rien. Une commande part dans la base, une photo de produit sur le stockage partagé, une session PHP aussi. Conséquence directe : ajouter de la capacité, c'est changer un nombre.
-Deux commandes. Terraform crée les instances, les répartit sur les zones et les enregistre auprès du load balancer. Puis le playbook les configure — et seulement elles, parce qu'il est idempotent : il ne touche pas à celles qui servent déjà. Il faut environ trois minutes.
-Et savoir quand le faire n'est pas au doigt mouillé. Trois alarmes CloudWatch sont créées avec le load balancer. La première surveille le temps de réponse : au-delà de deux secondes en moyenne sur trois minutes, la flotte sature. La deuxième compte les instances sorties de la rotation. La troisième compte les erreurs serveur. Elles notifient un sujet SNS, donc une adresse mail d'astreinte.</a:t>
+              <a:t>On arrive à la question qui compte vraiment : le jour où les billets partent en vente.
+Nos serveurs ne gardent rien. Une commande va dans la base, une image sur le disque partagé, un panier aussi. Résultat : ajouter de la capacité, c'est littéralement changer un chiffre.
+Deux commandes. La première crée les serveurs et les répartit sur les zones. La deuxième les installe — et seulement eux, parce qu'Ansible ne touche pas à ceux qui travaillent déjà. Trois minutes, sans couper la boutique.
+Et on ne décide pas au hasard. AWS surveille trois choses pour nous et nous envoie un mail : si le site devient lent, si un serveur ne répond plus, ou si la boutique renvoie des erreurs. C'est ça qui nous dit quand ajouter des machines.</a:t>
             </a:r>
             <a:endParaRPr lang="en-US" dirty="0"/>
           </a:p>
@@ -1433,12 +1434,12 @@
           <a:p>
             <a:r>
               <a:rPr lang="en-US" dirty="0"/>
-              <a:t>Troisième question : que se passe-t-il quand ça casse. Nous avons regardé chaque panne, et mesuré.
-Si un conteneur ou une instance tombe : le load balancer l'interroge toutes les quinze secondes ; après deux échecs, soit une trentaine de secondes, il la sort de la rotation. Les requêtes déjà en cours ont trente secondes pour se terminer. Les clients ne voient rien, ils sont servis par les autres instances.
-Si une zone de disponibilité entière tombe : le load balancer a un nœud par zone, il cesse d'utiliser celui-là. Les instances des autres zones absorbent. C'est automatique.
-Si la base tombe : en production, elle est en Multi-AZ. La bascule vers l'instance de secours prend entre une et deux minutes. Il y a une courte fenêtre d'erreurs — nous ne le cachons pas — puis le service reprend.
-Si le bastion tombe : rien du tout, côté client. Il ne porte aucun trafic de clients, uniquement Ansible.
-Et le point que je veux souligner : les paniers survivent. Les sessions PHP sont sur le stockage partagé, pas sur la machine. Perdre une instance, ce n'est pas perdre le panier d'un client en train de payer ses billets.</a:t>
+              <a:t>Troisième question : quand ça casse. On a regardé chaque panne possible, et on a chronométré.
+Un serveur tombe. Le répartiteur l'interroge toutes les quinze secondes ; au bout de deux échecs, donc trente secondes, il arrête de lui envoyer des clients. Et les achats déjà en cours ont trente secondes de plus pour se terminer. Le client ne voit rien : il est servi par les autres.
+Une zone AWS entière tombe — ça arrive, c'est un bâtiment entier. Les serveurs des autres zones prennent le relais. Automatique.
+La base tombe. En production, AWS garde une machine de secours dans une autre zone. La bascule prend une à deux minutes. Il y a quelques secondes d'erreurs, on ne va pas vous mentir, puis ça repart.
+Notre serveur d'entrée tombe : aucun impact client, aucun client ne passe par là.
+Et le point qu'on veut vraiment que vous reteniez : le panier du client est conservé. Les paniers sont sur le disque partagé, pas sur la machine qui tombe. Pour une billetterie, c'est toute la différence.</a:t>
             </a:r>
             <a:endParaRPr lang="en-US" dirty="0"/>
           </a:p>
@@ -1526,13 +1527,13 @@
           <a:p>
             <a:r>
               <a:rPr lang="en-US" dirty="0"/>
-              <a:t>Nous voulions vous montrer cette diapositive, parce qu'elle raconte la partie honnête du projet.
-Le code était écrit, relu, validé statiquement. Puis nous l'avons déployé sur un vrai compte AWS, et nous avons rencontré quatre problèmes que ni une relecture ni un émulateur n'auraient montrés.
-Le premier : AWS valide les descriptions de groupes de sécurité contre une liste de caractères autorisés, et le chevron n'en fait pas partie. Nous avions écrit une flèche dans une description.
-Le deuxième : le paquet awscli n'existe plus dans les dépôts d'Ubuntu 24.04. Nous aurions pu installer l'outil officiel, soixante mégaoctets par instance, pour un seul appel. Nous sommes passés à la bibliothèque Python boto3, qui est dans les dépôts de base.
-Le troisième est notre préféré : le script de configuration chargeait le fichier d'environnement avec la commande source du shell, et le mot de passe généré contenait une esperluette. Le shell a essayé de l'exécuter. Nous lisons maintenant ce fichier sans jamais l'évaluer, et nous avons restreint les caractères du mot de passe généré.
-Le quatrième : sur NFS, supprimer un fichier encore ouvert laisse une entrée fantôme. Le vidage de cache de PrestaShop échouait donc, et tuait le conteneur juste après une installation réussie. Le cache compilé est de la donnée dérivée : il n'avait rien à faire sur un stockage partagé. Il est passé sur le disque local de chaque instance.
-Les quatre correctifs sont dans le dépôt. Un déploiement depuis zéro ne les rencontre plus.</a:t>
+              <a:t>On tenait à vous montrer cette diapo, parce que c'est la partie honnête du projet.
+Le code était écrit, relu, vérifié. Et puis on l'a déployé pour de vrai sur AWS, et on s'est pris quatre murs qu'aucune relecture n'aurait montrés.
+Le premier : AWS n'accepte que certains caractères dans les descriptions. On avait écrit une petite flèche, avec un chevron. Refusé.
+Le deuxième : l'outil en ligne de commande d'AWS n'existe plus dans les dépôts d'Ubuntu 24.04. On aurait pu installer la version officielle — soixante mégaoctets par serveur, pour un seul appel. On est passés à une bibliothèque Python déjà présente.
+Le troisième, c'est notre préféré. Le mot de passe de la base est généré au hasard, et il contenait une esperluette, le « et commercial ». Notre script chargeait le fichier avec une commande du shell — et le shell a pris le mot de passe pour une commande, et a essayé de l'exécuter. Maintenant on lit le fichier sans jamais l'interpréter, et on a limité les caractères du mot de passe.
+Le quatrième : PrestaShop vide son cache après l'installation. Sur un disque partagé en réseau, supprimer un fichier encore ouvert laisse une trace invisible, donc la suppression échouait — et ça tuait le conteneur juste après une installation réussie. On a compris que ce cache n'avait rien à faire sur le disque partagé : c'est un fichier temporaire, propre à chaque serveur. On l'a remis en local.
+Les quatre sont corrigés dans le dépôt. Un déploiement depuis zéro ne les rencontre plus.</a:t>
             </a:r>
             <a:endParaRPr lang="en-US" dirty="0"/>
           </a:p>
@@ -1963,7 +1964,7 @@
                 <a:ea typeface="Courier New" pitchFamily="34" charset="-122"/>
                 <a:cs typeface="Courier New" pitchFamily="34" charset="-120"/>
               </a:rPr>
-              <a:t>5HASH  ·  SOUTENANCE  ·  INFRASTRUCTURE AS CODE</a:t>
+              <a:t>PROJET 5HASH  ·  INFRASTRUCTURE AS CODE</a:t>
             </a:r>
             <a:endParaRPr lang="en-US" sz="1200" dirty="0"/>
           </a:p>
@@ -2017,19 +2018,22 @@
         <p:spPr>
           <a:xfrm>
             <a:off x="566928" y="2971800"/>
-            <a:ext cx="8778240" cy="457200"/>
-          </a:xfrm>
-          <a:prstGeom prst="rect">
-            <a:avLst/>
-          </a:prstGeom>
-          <a:noFill/>
-          <a:ln/>
-        </p:spPr>
-        <p:txBody>
-          <a:bodyPr wrap="square" lIns="0" tIns="0" rIns="0" bIns="0" rtlCol="0" anchor="ctr"/>
-          <a:lstStyle/>
-          <a:p>
-            <a:pPr indent="0" marL="0">
+            <a:ext cx="8778240" cy="822960"/>
+          </a:xfrm>
+          <a:prstGeom prst="rect">
+            <a:avLst/>
+          </a:prstGeom>
+          <a:noFill/>
+          <a:ln/>
+        </p:spPr>
+        <p:txBody>
+          <a:bodyPr wrap="square" lIns="0" tIns="0" rIns="0" bIns="0" rtlCol="0" anchor="ctr"/>
+          <a:lstStyle/>
+          <a:p>
+            <a:pPr indent="0" marL="0">
+              <a:lnSpc>
+                <a:spcPts val="2800"/>
+              </a:lnSpc>
               <a:buNone/>
             </a:pPr>
             <a:r>
@@ -2041,7 +2045,27 @@
                 <a:ea typeface="Calibri" pitchFamily="34" charset="-122"/>
                 <a:cs typeface="Calibri" pitchFamily="34" charset="-120"/>
               </a:rPr>
-              <a:t>La boutique de billetterie, prête pour l'ouverture des ventes</a:t>
+              <a:t>Une boutique de billets qui tient debout</a:t>
+            </a:r>
+            <a:endParaRPr lang="en-US" sz="2100" dirty="0"/>
+          </a:p>
+          <a:p>
+            <a:pPr indent="0" marL="0">
+              <a:lnSpc>
+                <a:spcPts val="2800"/>
+              </a:lnSpc>
+              <a:buNone/>
+            </a:pPr>
+            <a:r>
+              <a:rPr lang="en-US" sz="2100" dirty="0">
+                <a:solidFill>
+                  <a:srgbClr val="A8B8C8"/>
+                </a:solidFill>
+                <a:latin typeface="Calibri" pitchFamily="34" charset="0"/>
+                <a:ea typeface="Calibri" pitchFamily="34" charset="-122"/>
+                <a:cs typeface="Calibri" pitchFamily="34" charset="-120"/>
+              </a:rPr>
+              <a:t>le jour de l'ouverture des ventes</a:t>
             </a:r>
             <a:endParaRPr lang="en-US" sz="2100" dirty="0"/>
           </a:p>
@@ -2055,7 +2079,7 @@
         </p:nvSpPr>
         <p:spPr>
           <a:xfrm>
-            <a:off x="566928" y="3794760"/>
+            <a:off x="566928" y="4114800"/>
             <a:ext cx="1645920" cy="411480"/>
           </a:xfrm>
           <a:prstGeom prst="roundRect">
@@ -2082,7 +2106,7 @@
         </p:nvSpPr>
         <p:spPr>
           <a:xfrm>
-            <a:off x="566928" y="3794760"/>
+            <a:off x="566928" y="4114800"/>
             <a:ext cx="1645920" cy="411480"/>
           </a:xfrm>
           <a:prstGeom prst="rect">
@@ -2121,7 +2145,7 @@
         </p:nvSpPr>
         <p:spPr>
           <a:xfrm>
-            <a:off x="2395728" y="3794760"/>
+            <a:off x="2395728" y="4114800"/>
             <a:ext cx="1645920" cy="411480"/>
           </a:xfrm>
           <a:prstGeom prst="roundRect">
@@ -2148,7 +2172,7 @@
         </p:nvSpPr>
         <p:spPr>
           <a:xfrm>
-            <a:off x="2395728" y="3794760"/>
+            <a:off x="2395728" y="4114800"/>
             <a:ext cx="1645920" cy="411480"/>
           </a:xfrm>
           <a:prstGeom prst="rect">
@@ -2187,7 +2211,7 @@
         </p:nvSpPr>
         <p:spPr>
           <a:xfrm>
-            <a:off x="4224528" y="3794760"/>
+            <a:off x="4224528" y="4114800"/>
             <a:ext cx="1645920" cy="411480"/>
           </a:xfrm>
           <a:prstGeom prst="roundRect">
@@ -2214,7 +2238,7 @@
         </p:nvSpPr>
         <p:spPr>
           <a:xfrm>
-            <a:off x="4224528" y="3794760"/>
+            <a:off x="4224528" y="4114800"/>
             <a:ext cx="1645920" cy="411480"/>
           </a:xfrm>
           <a:prstGeom prst="rect">
@@ -2253,7 +2277,7 @@
         </p:nvSpPr>
         <p:spPr>
           <a:xfrm>
-            <a:off x="6053328" y="3794760"/>
+            <a:off x="6053328" y="4114800"/>
             <a:ext cx="1645920" cy="411480"/>
           </a:xfrm>
           <a:prstGeom prst="roundRect">
@@ -2280,7 +2304,7 @@
         </p:nvSpPr>
         <p:spPr>
           <a:xfrm>
-            <a:off x="6053328" y="3794760"/>
+            <a:off x="6053328" y="4114800"/>
             <a:ext cx="1645920" cy="411480"/>
           </a:xfrm>
           <a:prstGeom prst="rect">
@@ -2319,32 +2343,71 @@
         </p:nvSpPr>
         <p:spPr>
           <a:xfrm>
-            <a:off x="566928" y="4846320"/>
-            <a:ext cx="11055096" cy="274320"/>
-          </a:xfrm>
-          <a:prstGeom prst="rect">
-            <a:avLst/>
-          </a:prstGeom>
-          <a:noFill/>
-          <a:ln/>
-        </p:spPr>
-        <p:txBody>
-          <a:bodyPr wrap="square" lIns="0" tIns="0" rIns="0" bIns="0" rtlCol="0" anchor="ctr"/>
-          <a:lstStyle/>
-          <a:p>
-            <a:pPr indent="0" marL="0">
-              <a:buNone/>
-            </a:pPr>
-            <a:r>
-              <a:rPr lang="en-US" sz="1300" dirty="0">
-                <a:solidFill>
-                  <a:srgbClr val="7A8C9E"/>
+            <a:off x="566928" y="5029200"/>
+            <a:ext cx="11055096" cy="320040"/>
+          </a:xfrm>
+          <a:prstGeom prst="rect">
+            <a:avLst/>
+          </a:prstGeom>
+          <a:noFill/>
+          <a:ln/>
+        </p:spPr>
+        <p:txBody>
+          <a:bodyPr wrap="square" lIns="0" tIns="0" rIns="0" bIns="0" rtlCol="0" anchor="ctr"/>
+          <a:lstStyle/>
+          <a:p>
+            <a:pPr indent="0" marL="0">
+              <a:buNone/>
+            </a:pPr>
+            <a:r>
+              <a:rPr lang="en-US" sz="1600" dirty="0">
+                <a:solidFill>
+                  <a:srgbClr val="FFFFFF"/>
                 </a:solidFill>
                 <a:latin typeface="Calibri" pitchFamily="34" charset="0"/>
                 <a:ea typeface="Calibri" pitchFamily="34" charset="-122"/>
                 <a:cs typeface="Calibri" pitchFamily="34" charset="-120"/>
               </a:rPr>
-              <a:t>Déployé sur un compte AWS réel · région eu-west-3 · dépôt GitHub 5HASH</a:t>
+              <a:t>Prénom 1  ·  Prénom 2  ·  Prénom 3</a:t>
+            </a:r>
+            <a:endParaRPr lang="en-US" sz="1600" dirty="0"/>
+          </a:p>
+        </p:txBody>
+      </p:sp>
+      <p:sp>
+        <p:nvSpPr>
+          <p:cNvPr id="15" name="Text 13"/>
+          <p:cNvSpPr txBox="1"/>
+          <p:nvPr/>
+        </p:nvSpPr>
+        <p:spPr>
+          <a:xfrm>
+            <a:off x="566928" y="5394960"/>
+            <a:ext cx="11055096" cy="274320"/>
+          </a:xfrm>
+          <a:prstGeom prst="rect">
+            <a:avLst/>
+          </a:prstGeom>
+          <a:noFill/>
+          <a:ln/>
+        </p:spPr>
+        <p:txBody>
+          <a:bodyPr wrap="square" lIns="0" tIns="0" rIns="0" bIns="0" rtlCol="0" anchor="ctr"/>
+          <a:lstStyle/>
+          <a:p>
+            <a:pPr indent="0" marL="0">
+              <a:buNone/>
+            </a:pPr>
+            <a:r>
+              <a:rPr lang="en-US" sz="1300" dirty="0">
+                <a:solidFill>
+                  <a:srgbClr val="7A8C9E"/>
+                </a:solidFill>
+                <a:latin typeface="Calibri" pitchFamily="34" charset="0"/>
+                <a:ea typeface="Calibri" pitchFamily="34" charset="-122"/>
+                <a:cs typeface="Calibri" pitchFamily="34" charset="-120"/>
+              </a:rPr>
+              <a:t>En ligne sur un vrai compte AWS, région Paris</a:t>
             </a:r>
             <a:endParaRPr lang="en-US" sz="1300" dirty="0"/>
           </a:p>
@@ -2408,7 +2471,7 @@
                 <a:ea typeface="Courier New" pitchFamily="34" charset="-122"/>
                 <a:cs typeface="Courier New" pitchFamily="34" charset="-120"/>
               </a:rPr>
-              <a:t>09 — LIMITES ASSUMÉES</a:t>
+              <a:t>09 — CE QU'ON N'A PAS FAIT</a:t>
             </a:r>
             <a:endParaRPr lang="en-US" sz="1100" dirty="0"/>
           </a:p>
@@ -2447,7 +2510,7 @@
                 <a:ea typeface="Arial" pitchFamily="34" charset="-122"/>
                 <a:cs typeface="Arial" pitchFamily="34" charset="-120"/>
               </a:rPr>
-              <a:t>Ce que cette architecture ne fait pas</a:t>
+              <a:t>Nos limites, et comment on les franchirait</a:t>
             </a:r>
             <a:endParaRPr lang="en-US" sz="3000" dirty="0"/>
           </a:p>
@@ -2513,7 +2576,7 @@
                 <a:ea typeface="Arial" pitchFamily="34" charset="-122"/>
                 <a:cs typeface="Arial" pitchFamily="34" charset="-120"/>
               </a:rPr>
-              <a:t>La montée en charge est déclarative, pas automatique</a:t>
+              <a:t>Ajouter des serveurs demande quelqu'un</a:t>
             </a:r>
             <a:endParaRPr lang="en-US" sz="1400" dirty="0"/>
           </a:p>
@@ -2552,7 +2615,7 @@
                 <a:ea typeface="Calibri" pitchFamily="34" charset="-122"/>
                 <a:cs typeface="Calibri" pitchFamily="34" charset="-120"/>
               </a:rPr>
-              <a:t>Un pic soudain demande un opérateur et deux commandes, environ trois minutes. La suite logique : figer le résultat d'Ansible dans une image avec Packer, et placer un groupe d'autoscaling derrière le même groupe de cibles. La sonde de santé et le rôle sont déjà écrits pour ça.</a:t>
+              <a:t>Ce n'est pas automatique : il faut un opérateur et deux commandes, environ 3 minutes. Pour l'automatiser, il faudrait préparer une image toute faite du serveur. Notre installation est déjà écrite pour ça.</a:t>
             </a:r>
             <a:endParaRPr lang="en-US" sz="1150" dirty="0"/>
           </a:p>
@@ -2618,7 +2681,7 @@
                 <a:ea typeface="Arial" pitchFamily="34" charset="-122"/>
                 <a:cs typeface="Arial" pitchFamily="34" charset="-120"/>
               </a:rPr>
-              <a:t>La racine web est sur EFS</a:t>
+              <a:t>Tout le site est sur le disque partagé</a:t>
             </a:r>
             <a:endParaRPr lang="en-US" sz="1400" dirty="0"/>
           </a:p>
@@ -2657,7 +2720,7 @@
                 <a:ea typeface="Calibri" pitchFamily="34" charset="-122"/>
                 <a:cs typeface="Calibri" pitchFamily="34" charset="-120"/>
               </a:rPr>
-              <a:t>Les instances deviennent interchangeables, au prix de la latence NFS sur les inclusions PHP. Au-delà de quelques milliers de requêtes par minute : le code dans l'image, seules les images produits sur EFS, et un CDN devant.</a:t>
+              <a:t>C'est pratique — les serveurs sont interchangeables — mais un disque réseau est plus lent qu'un disque local. Au-delà de quelques milliers de visiteurs par minute, il faudrait mettre le site dans l'image et ne partager que les photos.</a:t>
             </a:r>
             <a:endParaRPr lang="en-US" sz="1150" dirty="0"/>
           </a:p>
@@ -2723,7 +2786,7 @@
                 <a:ea typeface="Arial" pitchFamily="34" charset="-122"/>
                 <a:cs typeface="Arial" pitchFamily="34" charset="-120"/>
               </a:rPr>
-              <a:t>Une seule base en écriture</a:t>
+              <a:t>Une seule base pour écrire</a:t>
             </a:r>
             <a:endParaRPr lang="en-US" sz="1400" dirty="0"/>
           </a:p>
@@ -2762,7 +2825,7 @@
                 <a:ea typeface="Calibri" pitchFamily="34" charset="-122"/>
                 <a:cs typeface="Calibri" pitchFamily="34" charset="-120"/>
               </a:rPr>
-              <a:t>Les lectures peuvent partir sur un réplica, pas les écritures. Une billetterie écrit beaucoup : la taille de l'instance primaire est le vrai plafond.</a:t>
+              <a:t>On peut ajouter des copies pour la lecture, mais pas pour l'écriture. Et une billetterie, ça écrit beaucoup. C'est la taille de cette base qui est notre vrai plafond.</a:t>
             </a:r>
             <a:endParaRPr lang="en-US" sz="1150" dirty="0"/>
           </a:p>
@@ -2867,7 +2930,7 @@
                 <a:ea typeface="Calibri" pitchFamily="34" charset="-122"/>
                 <a:cs typeface="Calibri" pitchFamily="34" charset="-120"/>
               </a:rPr>
-              <a:t>Une panne régionale, c'est une interruption. Le multi-région coûterait plus cher que la panne qu'il évite, à cette échelle. C'est un arbitrage, pas un oubli.</a:t>
+              <a:t>Si toute la région Paris tombe, la boutique tombe. Doubler dans une autre région coûterait plus cher que la panne qu'on évite. C'est un choix, pas un oubli.</a:t>
             </a:r>
             <a:endParaRPr lang="en-US" sz="1150" dirty="0"/>
           </a:p>
@@ -2970,7 +3033,7 @@
                 <a:ea typeface="Arial" pitchFamily="34" charset="-122"/>
                 <a:cs typeface="Arial" pitchFamily="34" charset="-120"/>
               </a:rPr>
-              <a:t>D'un compte vide à une boutique en ligne</a:t>
+              <a:t>D'un compte AWS vide à une boutique en ligne</a:t>
             </a:r>
             <a:endParaRPr lang="en-US" sz="3000" dirty="0"/>
           </a:p>
@@ -2984,12 +3047,12 @@
         </p:nvSpPr>
         <p:spPr>
           <a:xfrm>
-            <a:off x="566928" y="1554480"/>
-            <a:ext cx="6675120" cy="2834640"/>
+            <a:off x="566928" y="1600200"/>
+            <a:ext cx="6675120" cy="2651760"/>
           </a:xfrm>
           <a:prstGeom prst="roundRect">
             <a:avLst>
-              <a:gd name="adj" fmla="val 1290"/>
+              <a:gd name="adj" fmla="val 1379"/>
             </a:avLst>
           </a:prstGeom>
           <a:solidFill>
@@ -3011,8 +3074,8 @@
         </p:nvSpPr>
         <p:spPr>
           <a:xfrm>
-            <a:off x="731520" y="1664208"/>
-            <a:ext cx="6345936" cy="2615184"/>
+            <a:off x="731520" y="1709928"/>
+            <a:ext cx="6345936" cy="2432304"/>
           </a:xfrm>
           <a:prstGeom prst="rect">
             <a:avLst/>
@@ -3039,7 +3102,7 @@
                 <a:ea typeface="Courier New" pitchFamily="34" charset="-122"/>
                 <a:cs typeface="Courier New" pitchFamily="34" charset="-120"/>
               </a:rPr>
-              <a:t># une fois par compte : état versionné, chiffré, verrouillé</a:t>
+              <a:t>./scripts/bootstrap-backend.sh dev     # une seule fois par compte</a:t>
             </a:r>
             <a:endParaRPr lang="en-US" sz="1150" dirty="0"/>
           </a:p>
@@ -3050,6 +3113,15 @@
               </a:lnSpc>
               <a:buNone/>
             </a:pPr>
+            <a:endParaRPr lang="en-US" sz="1150" dirty="0"/>
+          </a:p>
+          <a:p>
+            <a:pPr indent="0" marL="0">
+              <a:lnSpc>
+                <a:spcPts val="1725"/>
+              </a:lnSpc>
+              <a:buNone/>
+            </a:pPr>
             <a:r>
               <a:rPr lang="en-US" sz="1150" dirty="0">
                 <a:solidFill>
@@ -3059,7 +3131,7 @@
                 <a:ea typeface="Courier New" pitchFamily="34" charset="-122"/>
                 <a:cs typeface="Courier New" pitchFamily="34" charset="-120"/>
               </a:rPr>
-              <a:t>./scripts/bootstrap-backend.sh dev</a:t>
+              <a:t>terraform -chdir=terraform init</a:t>
             </a:r>
             <a:endParaRPr lang="en-US" sz="1150" dirty="0"/>
           </a:p>
@@ -3070,6 +3142,17 @@
               </a:lnSpc>
               <a:buNone/>
             </a:pPr>
+            <a:r>
+              <a:rPr lang="en-US" sz="1150" dirty="0">
+                <a:solidFill>
+                  <a:srgbClr val="C9D6E2"/>
+                </a:solidFill>
+                <a:latin typeface="Courier New" pitchFamily="34" charset="0"/>
+                <a:ea typeface="Courier New" pitchFamily="34" charset="-122"/>
+                <a:cs typeface="Courier New" pitchFamily="34" charset="-120"/>
+              </a:rPr>
+              <a:t>terraform -chdir=terraform apply       # ~12 min (la base est lente)</a:t>
+            </a:r>
             <a:endParaRPr lang="en-US" sz="1150" dirty="0"/>
           </a:p>
           <a:p>
@@ -3079,6 +3162,15 @@
               </a:lnSpc>
               <a:buNone/>
             </a:pPr>
+            <a:endParaRPr lang="en-US" sz="1150" dirty="0"/>
+          </a:p>
+          <a:p>
+            <a:pPr indent="0" marL="0">
+              <a:lnSpc>
+                <a:spcPts val="1725"/>
+              </a:lnSpc>
+              <a:buNone/>
+            </a:pPr>
             <a:r>
               <a:rPr lang="en-US" sz="1150" dirty="0">
                 <a:solidFill>
@@ -3088,7 +3180,7 @@
                 <a:ea typeface="Courier New" pitchFamily="34" charset="-122"/>
                 <a:cs typeface="Courier New" pitchFamily="34" charset="-120"/>
               </a:rPr>
-              <a:t>terraform -chdir=terraform init</a:t>
+              <a:t>ansible-galaxy install -r ansible/requirements.yml</a:t>
             </a:r>
             <a:endParaRPr lang="en-US" sz="1150" dirty="0"/>
           </a:p>
@@ -3108,7 +3200,7 @@
                 <a:ea typeface="Courier New" pitchFamily="34" charset="-122"/>
                 <a:cs typeface="Courier New" pitchFamily="34" charset="-120"/>
               </a:rPr>
-              <a:t>terraform -chdir=terraform apply</a:t>
+              <a:t>ansible-inventory -i ansible/inventory.yml --graph</a:t>
             </a:r>
             <a:endParaRPr lang="en-US" sz="1150" dirty="0"/>
           </a:p>
@@ -3119,15 +3211,6 @@
               </a:lnSpc>
               <a:buNone/>
             </a:pPr>
-            <a:endParaRPr lang="en-US" sz="1150" dirty="0"/>
-          </a:p>
-          <a:p>
-            <a:pPr indent="0" marL="0">
-              <a:lnSpc>
-                <a:spcPts val="1725"/>
-              </a:lnSpc>
-              <a:buNone/>
-            </a:pPr>
             <a:r>
               <a:rPr lang="en-US" sz="1150" dirty="0">
                 <a:solidFill>
@@ -3137,46 +3220,6 @@
                 <a:ea typeface="Courier New" pitchFamily="34" charset="-122"/>
                 <a:cs typeface="Courier New" pitchFamily="34" charset="-120"/>
               </a:rPr>
-              <a:t>ansible-galaxy install -r ansible/requirements.yml</a:t>
-            </a:r>
-            <a:endParaRPr lang="en-US" sz="1150" dirty="0"/>
-          </a:p>
-          <a:p>
-            <a:pPr indent="0" marL="0">
-              <a:lnSpc>
-                <a:spcPts val="1725"/>
-              </a:lnSpc>
-              <a:buNone/>
-            </a:pPr>
-            <a:r>
-              <a:rPr lang="en-US" sz="1150" dirty="0">
-                <a:solidFill>
-                  <a:srgbClr val="C9D6E2"/>
-                </a:solidFill>
-                <a:latin typeface="Courier New" pitchFamily="34" charset="0"/>
-                <a:ea typeface="Courier New" pitchFamily="34" charset="-122"/>
-                <a:cs typeface="Courier New" pitchFamily="34" charset="-120"/>
-              </a:rPr>
-              <a:t>ansible-inventory -i ansible/inventory.yml --graph</a:t>
-            </a:r>
-            <a:endParaRPr lang="en-US" sz="1150" dirty="0"/>
-          </a:p>
-          <a:p>
-            <a:pPr indent="0" marL="0">
-              <a:lnSpc>
-                <a:spcPts val="1725"/>
-              </a:lnSpc>
-              <a:buNone/>
-            </a:pPr>
-            <a:r>
-              <a:rPr lang="en-US" sz="1150" dirty="0">
-                <a:solidFill>
-                  <a:srgbClr val="C9D6E2"/>
-                </a:solidFill>
-                <a:latin typeface="Courier New" pitchFamily="34" charset="0"/>
-                <a:ea typeface="Courier New" pitchFamily="34" charset="-122"/>
-                <a:cs typeface="Courier New" pitchFamily="34" charset="-120"/>
-              </a:rPr>
               <a:t>ansible-playbook  -i ansible/inventory.yml ansible/site.yml --ask-vault-pass</a:t>
             </a:r>
             <a:endParaRPr lang="en-US" sz="1150" dirty="0"/>
@@ -3191,7 +3234,7 @@
         </p:nvSpPr>
         <p:spPr>
           <a:xfrm>
-            <a:off x="7498080" y="1600200"/>
+            <a:off x="7498080" y="1691640"/>
             <a:ext cx="310896" cy="310896"/>
           </a:xfrm>
           <a:prstGeom prst="ellipse">
@@ -3216,7 +3259,7 @@
         </p:nvSpPr>
         <p:spPr>
           <a:xfrm>
-            <a:off x="7498080" y="1600200"/>
+            <a:off x="7498080" y="1691640"/>
             <a:ext cx="310896" cy="310896"/>
           </a:xfrm>
           <a:prstGeom prst="rect">
@@ -3255,7 +3298,7 @@
         </p:nvSpPr>
         <p:spPr>
           <a:xfrm>
-            <a:off x="7973568" y="1581912"/>
+            <a:off x="7973568" y="1673352"/>
             <a:ext cx="3749040" cy="411480"/>
           </a:xfrm>
           <a:prstGeom prst="rect">
@@ -3280,7 +3323,7 @@
                 <a:ea typeface="Calibri" pitchFamily="34" charset="-122"/>
                 <a:cs typeface="Calibri" pitchFamily="34" charset="-120"/>
               </a:rPr>
-              <a:t>Ouvrir la boutique et le back-office</a:t>
+              <a:t>La boutique, puis l'administration</a:t>
             </a:r>
             <a:endParaRPr lang="en-US" sz="1350" dirty="0"/>
           </a:p>
@@ -3294,7 +3337,7 @@
         </p:nvSpPr>
         <p:spPr>
           <a:xfrm>
-            <a:off x="7498080" y="2331720"/>
+            <a:off x="7498080" y="2404872"/>
             <a:ext cx="310896" cy="310896"/>
           </a:xfrm>
           <a:prstGeom prst="ellipse">
@@ -3319,7 +3362,7 @@
         </p:nvSpPr>
         <p:spPr>
           <a:xfrm>
-            <a:off x="7498080" y="2331720"/>
+            <a:off x="7498080" y="2404872"/>
             <a:ext cx="310896" cy="310896"/>
           </a:xfrm>
           <a:prstGeom prst="rect">
@@ -3358,7 +3401,7 @@
         </p:nvSpPr>
         <p:spPr>
           <a:xfrm>
-            <a:off x="7973568" y="2313432"/>
+            <a:off x="7973568" y="2386584"/>
             <a:ext cx="3749040" cy="411480"/>
           </a:xfrm>
           <a:prstGeom prst="rect">
@@ -3383,7 +3426,7 @@
                 <a:ea typeface="Calibri" pitchFamily="34" charset="-122"/>
                 <a:cs typeface="Calibri" pitchFamily="34" charset="-120"/>
               </a:rPr>
-              <a:t>Relancer le playbook : changed=0</a:t>
+              <a:t>On relance l'installation : changed=0</a:t>
             </a:r>
             <a:endParaRPr lang="en-US" sz="1350" dirty="0"/>
           </a:p>
@@ -3397,7 +3440,7 @@
         </p:nvSpPr>
         <p:spPr>
           <a:xfrm>
-            <a:off x="7498080" y="3063240"/>
+            <a:off x="7498080" y="3118104"/>
             <a:ext cx="310896" cy="310896"/>
           </a:xfrm>
           <a:prstGeom prst="ellipse">
@@ -3422,7 +3465,7 @@
         </p:nvSpPr>
         <p:spPr>
           <a:xfrm>
-            <a:off x="7498080" y="3063240"/>
+            <a:off x="7498080" y="3118104"/>
             <a:ext cx="310896" cy="310896"/>
           </a:xfrm>
           <a:prstGeom prst="rect">
@@ -3461,7 +3504,7 @@
         </p:nvSpPr>
         <p:spPr>
           <a:xfrm>
-            <a:off x="7973568" y="3044952"/>
+            <a:off x="7973568" y="3099816"/>
             <a:ext cx="3749040" cy="411480"/>
           </a:xfrm>
           <a:prstGeom prst="rect">
@@ -3486,7 +3529,7 @@
                 <a:ea typeface="Calibri" pitchFamily="34" charset="-122"/>
                 <a:cs typeface="Calibri" pitchFamily="34" charset="-120"/>
               </a:rPr>
-              <a:t>Ajouter une instance, la voir entrer en rotation</a:t>
+              <a:t>On ajoute un serveur, il entre tout seul</a:t>
             </a:r>
             <a:endParaRPr lang="en-US" sz="1350" dirty="0"/>
           </a:p>
@@ -3500,7 +3543,7 @@
         </p:nvSpPr>
         <p:spPr>
           <a:xfrm>
-            <a:off x="7498080" y="3794760"/>
+            <a:off x="7498080" y="3831336"/>
             <a:ext cx="310896" cy="310896"/>
           </a:xfrm>
           <a:prstGeom prst="ellipse">
@@ -3525,7 +3568,7 @@
         </p:nvSpPr>
         <p:spPr>
           <a:xfrm>
-            <a:off x="7498080" y="3794760"/>
+            <a:off x="7498080" y="3831336"/>
             <a:ext cx="310896" cy="310896"/>
           </a:xfrm>
           <a:prstGeom prst="rect">
@@ -3564,7 +3607,7 @@
         </p:nvSpPr>
         <p:spPr>
           <a:xfrm>
-            <a:off x="7973568" y="3776472"/>
+            <a:off x="7973568" y="3813048"/>
             <a:ext cx="3749040" cy="411480"/>
           </a:xfrm>
           <a:prstGeom prst="rect">
@@ -3589,7 +3632,7 @@
                 <a:ea typeface="Calibri" pitchFamily="34" charset="-122"/>
                 <a:cs typeface="Calibri" pitchFamily="34" charset="-120"/>
               </a:rPr>
-              <a:t>Arrêter le conteneur : la boutique reste debout</a:t>
+              <a:t>On en coupe un : la boutique tient</a:t>
             </a:r>
             <a:endParaRPr lang="en-US" sz="1350" dirty="0"/>
           </a:p>
@@ -3603,12 +3646,12 @@
         </p:nvSpPr>
         <p:spPr>
           <a:xfrm>
-            <a:off x="566928" y="4617720"/>
-            <a:ext cx="6675120" cy="713232"/>
+            <a:off x="566928" y="4526280"/>
+            <a:ext cx="6675120" cy="777240"/>
           </a:xfrm>
           <a:prstGeom prst="roundRect">
             <a:avLst>
-              <a:gd name="adj" fmla="val 6410"/>
+              <a:gd name="adj" fmla="val 5882"/>
             </a:avLst>
           </a:prstGeom>
           <a:solidFill>
@@ -3630,8 +3673,8 @@
         </p:nvSpPr>
         <p:spPr>
           <a:xfrm>
-            <a:off x="795528" y="4736592"/>
-            <a:ext cx="6217920" cy="502920"/>
+            <a:off x="795528" y="4663440"/>
+            <a:ext cx="6217920" cy="548640"/>
           </a:xfrm>
           <a:prstGeom prst="rect">
             <a:avLst/>
@@ -3655,7 +3698,7 @@
                 <a:ea typeface="Calibri" pitchFamily="34" charset="-122"/>
                 <a:cs typeface="Calibri" pitchFamily="34" charset="-120"/>
               </a:rPr>
-              <a:t>Tout le reste — réseau, base, stockage, sondes, secrets — découle de ces six commandes.</a:t>
+              <a:t>Tout le reste — réseau, base, disque, surveillance, mots de passe — découle de ces six commandes.</a:t>
             </a:r>
             <a:endParaRPr lang="en-US" sz="1250" dirty="0"/>
           </a:p>
@@ -3751,7 +3794,7 @@
                 <a:ea typeface="Courier New" pitchFamily="34" charset="-122"/>
                 <a:cs typeface="Courier New" pitchFamily="34" charset="-120"/>
               </a:rPr>
-              <a:t>QUESTIONS</a:t>
+              <a:t>MERCI — VOS QUESTIONS</a:t>
             </a:r>
             <a:endParaRPr lang="en-US" sz="1200" dirty="0"/>
           </a:p>
@@ -3793,7 +3836,7 @@
                 <a:ea typeface="Arial" pitchFamily="34" charset="-122"/>
                 <a:cs typeface="Arial" pitchFamily="34" charset="-120"/>
               </a:rPr>
-              <a:t>Déployée, documentée,</a:t>
+              <a:t>En ligne, documentée,</a:t>
             </a:r>
             <a:endParaRPr lang="en-US" sz="4200" dirty="0"/>
           </a:p>
@@ -3813,7 +3856,7 @@
                 <a:ea typeface="Arial" pitchFamily="34" charset="-122"/>
                 <a:cs typeface="Arial" pitchFamily="34" charset="-120"/>
               </a:rPr>
-              <a:t>reproductible.</a:t>
+              <a:t>et on sait la refaire.</a:t>
             </a:r>
             <a:endParaRPr lang="en-US" sz="4200" dirty="0"/>
           </a:p>
@@ -3879,7 +3922,7 @@
                 <a:ea typeface="Courier New" pitchFamily="34" charset="-122"/>
                 <a:cs typeface="Courier New" pitchFamily="34" charset="-120"/>
               </a:rPr>
-              <a:t>terraform/</a:t>
+              <a:t>Terraform</a:t>
             </a:r>
             <a:endParaRPr lang="en-US" sz="1300" dirty="0"/>
           </a:p>
@@ -3918,7 +3961,7 @@
                 <a:ea typeface="Calibri" pitchFamily="34" charset="-122"/>
                 <a:cs typeface="Calibri" pitchFamily="34" charset="-120"/>
               </a:rPr>
-              <a:t>6 modules · 3 environnements · état distant</a:t>
+              <a:t>6 briques · 3 environnements</a:t>
             </a:r>
             <a:endParaRPr lang="en-US" sz="1150" dirty="0"/>
           </a:p>
@@ -3984,7 +4027,7 @@
                 <a:ea typeface="Courier New" pitchFamily="34" charset="-122"/>
                 <a:cs typeface="Courier New" pitchFamily="34" charset="-120"/>
               </a:rPr>
-              <a:t>ansible/</a:t>
+              <a:t>Ansible</a:t>
             </a:r>
             <a:endParaRPr lang="en-US" sz="1300" dirty="0"/>
           </a:p>
@@ -4023,7 +4066,7 @@
                 <a:ea typeface="Calibri" pitchFamily="34" charset="-122"/>
                 <a:cs typeface="Calibri" pitchFamily="34" charset="-120"/>
               </a:rPr>
-              <a:t>3 rôles · Galaxy · Vault · changed=0</a:t>
+              <a:t>3 rôles · secrets chiffrés · changed=0</a:t>
             </a:r>
             <a:endParaRPr lang="en-US" sz="1150" dirty="0"/>
           </a:p>
@@ -4089,7 +4132,7 @@
                 <a:ea typeface="Courier New" pitchFamily="34" charset="-122"/>
                 <a:cs typeface="Courier New" pitchFamily="34" charset="-120"/>
               </a:rPr>
-              <a:t>README.md</a:t>
+              <a:t>README</a:t>
             </a:r>
             <a:endParaRPr lang="en-US" sz="1300" dirty="0"/>
           </a:p>
@@ -4128,7 +4171,7 @@
                 <a:ea typeface="Calibri" pitchFamily="34" charset="-122"/>
                 <a:cs typeface="Calibri" pitchFamily="34" charset="-120"/>
               </a:rPr>
-              <a:t>déployer, exploiter, dépanner</a:t>
+              <a:t>installer, exploiter, dépanner</a:t>
             </a:r>
             <a:endParaRPr lang="en-US" sz="1150" dirty="0"/>
           </a:p>
@@ -4167,7 +4210,7 @@
                 <a:ea typeface="Arial" pitchFamily="34" charset="-122"/>
                 <a:cs typeface="Arial" pitchFamily="34" charset="-120"/>
               </a:rPr>
-              <a:t>Merci.  —  5HASH</a:t>
+              <a:t>5HASH  —  merci de votre attention</a:t>
             </a:r>
             <a:endParaRPr lang="en-US" sz="1700" dirty="0"/>
           </a:p>
@@ -4270,7 +4313,7 @@
                 <a:ea typeface="Arial" pitchFamily="34" charset="-122"/>
                 <a:cs typeface="Arial" pitchFamily="34" charset="-120"/>
               </a:rPr>
-              <a:t>Trois questions dictent toute l'architecture</a:t>
+              <a:t>On s'est posé trois questions simples</a:t>
             </a:r>
             <a:endParaRPr lang="en-US" sz="3000" dirty="0"/>
           </a:p>
@@ -4278,57 +4321,18 @@
       </p:sp>
       <p:sp>
         <p:nvSpPr>
-          <p:cNvPr id="4" name="Text 2"/>
-          <p:cNvSpPr txBox="1"/>
-          <p:nvPr/>
-        </p:nvSpPr>
-        <p:spPr>
-          <a:xfrm>
-            <a:off x="566928" y="1463040"/>
-            <a:ext cx="10424160" cy="457200"/>
-          </a:xfrm>
-          <a:prstGeom prst="rect">
-            <a:avLst/>
-          </a:prstGeom>
-          <a:noFill/>
-          <a:ln/>
-        </p:spPr>
-        <p:txBody>
-          <a:bodyPr wrap="square" lIns="0" tIns="0" rIns="0" bIns="0" rtlCol="0" anchor="ctr"/>
-          <a:lstStyle/>
-          <a:p>
-            <a:pPr indent="0" marL="0">
-              <a:buNone/>
-            </a:pPr>
-            <a:r>
-              <a:rPr lang="en-US" sz="1500" dirty="0">
-                <a:solidFill>
-                  <a:srgbClr val="5C6B7A"/>
-                </a:solidFill>
-                <a:latin typeface="Calibri" pitchFamily="34" charset="0"/>
-                <a:ea typeface="Calibri" pitchFamily="34" charset="-122"/>
-                <a:cs typeface="Calibri" pitchFamily="34" charset="-120"/>
-              </a:rPr>
-              <a:t>L'application est fournie. Nous devons la déployer, la configurer et la documenter — et surtout la rendre capable d'encaisser la minute où les billets partent.</a:t>
-            </a:r>
-            <a:endParaRPr lang="en-US" sz="1500" dirty="0"/>
-          </a:p>
-        </p:txBody>
-      </p:sp>
-      <p:sp>
-        <p:nvSpPr>
-          <p:cNvPr id="5" name="Shape 3"/>
+          <p:cNvPr id="4" name="Shape 2"/>
           <p:cNvSpPr/>
           <p:nvPr/>
         </p:nvSpPr>
         <p:spPr>
           <a:xfrm>
-            <a:off x="566928" y="2148840"/>
-            <a:ext cx="3520440" cy="2423160"/>
+            <a:off x="566928" y="1691640"/>
+            <a:ext cx="3520440" cy="2743200"/>
           </a:xfrm>
           <a:prstGeom prst="roundRect">
             <a:avLst>
-              <a:gd name="adj" fmla="val 2264"/>
+              <a:gd name="adj" fmla="val 2000"/>
             </a:avLst>
           </a:prstGeom>
           <a:solidFill>
@@ -4344,13 +4348,13 @@
       </p:sp>
       <p:sp>
         <p:nvSpPr>
-          <p:cNvPr id="6" name="Shape 4"/>
+          <p:cNvPr id="5" name="Shape 3"/>
           <p:cNvSpPr/>
           <p:nvPr/>
         </p:nvSpPr>
         <p:spPr>
           <a:xfrm>
-            <a:off x="841248" y="2395728"/>
+            <a:off x="841248" y="1965960"/>
             <a:ext cx="310896" cy="310896"/>
           </a:xfrm>
           <a:prstGeom prst="ellipse">
@@ -4369,13 +4373,13 @@
       </p:sp>
       <p:sp>
         <p:nvSpPr>
-          <p:cNvPr id="7" name="Text 5"/>
-          <p:cNvSpPr txBox="1"/>
-          <p:nvPr/>
-        </p:nvSpPr>
-        <p:spPr>
-          <a:xfrm>
-            <a:off x="841248" y="2395728"/>
+          <p:cNvPr id="6" name="Text 4"/>
+          <p:cNvSpPr txBox="1"/>
+          <p:nvPr/>
+        </p:nvSpPr>
+        <p:spPr>
+          <a:xfrm>
+            <a:off x="841248" y="1965960"/>
             <a:ext cx="310896" cy="310896"/>
           </a:xfrm>
           <a:prstGeom prst="rect">
@@ -4408,30 +4412,33 @@
       </p:sp>
       <p:sp>
         <p:nvSpPr>
-          <p:cNvPr id="8" name="Text 6"/>
-          <p:cNvSpPr txBox="1"/>
-          <p:nvPr/>
-        </p:nvSpPr>
-        <p:spPr>
-          <a:xfrm>
-            <a:off x="841248" y="2852928"/>
-            <a:ext cx="2971800" cy="822960"/>
-          </a:xfrm>
-          <a:prstGeom prst="rect">
-            <a:avLst/>
-          </a:prstGeom>
-          <a:noFill/>
-          <a:ln/>
-        </p:spPr>
-        <p:txBody>
-          <a:bodyPr wrap="square" lIns="0" tIns="0" rIns="0" bIns="0" rtlCol="0" anchor="ctr"/>
-          <a:lstStyle/>
-          <a:p>
-            <a:pPr indent="0" marL="0">
-              <a:buNone/>
-            </a:pPr>
-            <a:r>
-              <a:rPr lang="en-US" sz="1500" b="1" dirty="0">
+          <p:cNvPr id="7" name="Text 5"/>
+          <p:cNvSpPr txBox="1"/>
+          <p:nvPr/>
+        </p:nvSpPr>
+        <p:spPr>
+          <a:xfrm>
+            <a:off x="841248" y="2450592"/>
+            <a:ext cx="2971800" cy="868680"/>
+          </a:xfrm>
+          <a:prstGeom prst="rect">
+            <a:avLst/>
+          </a:prstGeom>
+          <a:noFill/>
+          <a:ln/>
+        </p:spPr>
+        <p:txBody>
+          <a:bodyPr wrap="square" lIns="0" tIns="0" rIns="0" bIns="0" rtlCol="0" anchor="ctr"/>
+          <a:lstStyle/>
+          <a:p>
+            <a:pPr indent="0" marL="0">
+              <a:lnSpc>
+                <a:spcPts val="2200"/>
+              </a:lnSpc>
+              <a:buNone/>
+            </a:pPr>
+            <a:r>
+              <a:rPr lang="en-US" sz="1600" b="1" dirty="0">
                 <a:solidFill>
                   <a:srgbClr val="17222C"/>
                 </a:solidFill>
@@ -4439,38 +4446,58 @@
                 <a:ea typeface="Arial" pitchFamily="34" charset="-122"/>
                 <a:cs typeface="Arial" pitchFamily="34" charset="-120"/>
               </a:rPr>
-              <a:t>Comment une requête arrive-t-elle jusqu'à la boutique ?</a:t>
-            </a:r>
-            <a:endParaRPr lang="en-US" sz="1500" dirty="0"/>
-          </a:p>
-        </p:txBody>
-      </p:sp>
-      <p:sp>
-        <p:nvSpPr>
-          <p:cNvPr id="9" name="Text 7"/>
-          <p:cNvSpPr txBox="1"/>
-          <p:nvPr/>
-        </p:nvSpPr>
-        <p:spPr>
-          <a:xfrm>
-            <a:off x="841248" y="3703320"/>
-            <a:ext cx="2971800" cy="731520"/>
-          </a:xfrm>
-          <a:prstGeom prst="rect">
-            <a:avLst/>
-          </a:prstGeom>
-          <a:noFill/>
-          <a:ln/>
-        </p:spPr>
-        <p:txBody>
-          <a:bodyPr wrap="square" lIns="0" tIns="0" rIns="0" bIns="0" rtlCol="0" anchor="ctr"/>
-          <a:lstStyle/>
-          <a:p>
-            <a:pPr indent="0" marL="0">
-              <a:buNone/>
-            </a:pPr>
-            <a:r>
-              <a:rPr lang="en-US" sz="1300" dirty="0">
+              <a:t>Comment un client arrive</a:t>
+            </a:r>
+            <a:endParaRPr lang="en-US" sz="1600" dirty="0"/>
+          </a:p>
+          <a:p>
+            <a:pPr indent="0" marL="0">
+              <a:lnSpc>
+                <a:spcPts val="2200"/>
+              </a:lnSpc>
+              <a:buNone/>
+            </a:pPr>
+            <a:r>
+              <a:rPr lang="en-US" sz="1600" b="1" dirty="0">
+                <a:solidFill>
+                  <a:srgbClr val="17222C"/>
+                </a:solidFill>
+                <a:latin typeface="Arial" pitchFamily="34" charset="0"/>
+                <a:ea typeface="Arial" pitchFamily="34" charset="-122"/>
+                <a:cs typeface="Arial" pitchFamily="34" charset="-120"/>
+              </a:rPr>
+              <a:t>jusqu'à la boutique ?</a:t>
+            </a:r>
+            <a:endParaRPr lang="en-US" sz="1600" dirty="0"/>
+          </a:p>
+        </p:txBody>
+      </p:sp>
+      <p:sp>
+        <p:nvSpPr>
+          <p:cNvPr id="8" name="Text 6"/>
+          <p:cNvSpPr txBox="1"/>
+          <p:nvPr/>
+        </p:nvSpPr>
+        <p:spPr>
+          <a:xfrm>
+            <a:off x="841248" y="3401568"/>
+            <a:ext cx="2971800" cy="868680"/>
+          </a:xfrm>
+          <a:prstGeom prst="rect">
+            <a:avLst/>
+          </a:prstGeom>
+          <a:noFill/>
+          <a:ln/>
+        </p:spPr>
+        <p:txBody>
+          <a:bodyPr wrap="square" lIns="0" tIns="0" rIns="0" bIns="0" rtlCol="0" anchor="ctr"/>
+          <a:lstStyle/>
+          <a:p>
+            <a:pPr indent="0" marL="0">
+              <a:buNone/>
+            </a:pPr>
+            <a:r>
+              <a:rPr lang="en-US" sz="1350" dirty="0">
                 <a:solidFill>
                   <a:srgbClr val="5C6B7A"/>
                 </a:solidFill>
@@ -4478,26 +4505,26 @@
                 <a:ea typeface="Calibri" pitchFamily="34" charset="-122"/>
                 <a:cs typeface="Calibri" pitchFamily="34" charset="-120"/>
               </a:rPr>
-              <a:t>Un seul point d'entrée public, trois niveaux privés derrière.</a:t>
-            </a:r>
-            <a:endParaRPr lang="en-US" sz="1300" dirty="0"/>
-          </a:p>
-        </p:txBody>
-      </p:sp>
-      <p:sp>
-        <p:nvSpPr>
-          <p:cNvPr id="10" name="Shape 8"/>
+              <a:t>Une seule porte ouverte sur Internet. Tout le reste est caché derrière.</a:t>
+            </a:r>
+            <a:endParaRPr lang="en-US" sz="1350" dirty="0"/>
+          </a:p>
+        </p:txBody>
+      </p:sp>
+      <p:sp>
+        <p:nvSpPr>
+          <p:cNvPr id="9" name="Shape 7"/>
           <p:cNvSpPr/>
           <p:nvPr/>
         </p:nvSpPr>
         <p:spPr>
           <a:xfrm>
-            <a:off x="4334256" y="2148840"/>
-            <a:ext cx="3520440" cy="2423160"/>
+            <a:off x="4334256" y="1691640"/>
+            <a:ext cx="3520440" cy="2743200"/>
           </a:xfrm>
           <a:prstGeom prst="roundRect">
             <a:avLst>
-              <a:gd name="adj" fmla="val 2264"/>
+              <a:gd name="adj" fmla="val 2000"/>
             </a:avLst>
           </a:prstGeom>
           <a:solidFill>
@@ -4513,13 +4540,13 @@
       </p:sp>
       <p:sp>
         <p:nvSpPr>
-          <p:cNvPr id="11" name="Shape 9"/>
+          <p:cNvPr id="10" name="Shape 8"/>
           <p:cNvSpPr/>
           <p:nvPr/>
         </p:nvSpPr>
         <p:spPr>
           <a:xfrm>
-            <a:off x="4608576" y="2395728"/>
+            <a:off x="4608576" y="1965960"/>
             <a:ext cx="310896" cy="310896"/>
           </a:xfrm>
           <a:prstGeom prst="ellipse">
@@ -4538,13 +4565,13 @@
       </p:sp>
       <p:sp>
         <p:nvSpPr>
-          <p:cNvPr id="12" name="Text 10"/>
-          <p:cNvSpPr txBox="1"/>
-          <p:nvPr/>
-        </p:nvSpPr>
-        <p:spPr>
-          <a:xfrm>
-            <a:off x="4608576" y="2395728"/>
+          <p:cNvPr id="11" name="Text 9"/>
+          <p:cNvSpPr txBox="1"/>
+          <p:nvPr/>
+        </p:nvSpPr>
+        <p:spPr>
+          <a:xfrm>
+            <a:off x="4608576" y="1965960"/>
             <a:ext cx="310896" cy="310896"/>
           </a:xfrm>
           <a:prstGeom prst="rect">
@@ -4577,30 +4604,33 @@
       </p:sp>
       <p:sp>
         <p:nvSpPr>
-          <p:cNvPr id="13" name="Text 11"/>
-          <p:cNvSpPr txBox="1"/>
-          <p:nvPr/>
-        </p:nvSpPr>
-        <p:spPr>
-          <a:xfrm>
-            <a:off x="4608576" y="2852928"/>
-            <a:ext cx="2971800" cy="822960"/>
-          </a:xfrm>
-          <a:prstGeom prst="rect">
-            <a:avLst/>
-          </a:prstGeom>
-          <a:noFill/>
-          <a:ln/>
-        </p:spPr>
-        <p:txBody>
-          <a:bodyPr wrap="square" lIns="0" tIns="0" rIns="0" bIns="0" rtlCol="0" anchor="ctr"/>
-          <a:lstStyle/>
-          <a:p>
-            <a:pPr indent="0" marL="0">
-              <a:buNone/>
-            </a:pPr>
-            <a:r>
-              <a:rPr lang="en-US" sz="1500" b="1" dirty="0">
+          <p:cNvPr id="12" name="Text 10"/>
+          <p:cNvSpPr txBox="1"/>
+          <p:nvPr/>
+        </p:nvSpPr>
+        <p:spPr>
+          <a:xfrm>
+            <a:off x="4608576" y="2450592"/>
+            <a:ext cx="2971800" cy="868680"/>
+          </a:xfrm>
+          <a:prstGeom prst="rect">
+            <a:avLst/>
+          </a:prstGeom>
+          <a:noFill/>
+          <a:ln/>
+        </p:spPr>
+        <p:txBody>
+          <a:bodyPr wrap="square" lIns="0" tIns="0" rIns="0" bIns="0" rtlCol="0" anchor="ctr"/>
+          <a:lstStyle/>
+          <a:p>
+            <a:pPr indent="0" marL="0">
+              <a:lnSpc>
+                <a:spcPts val="2200"/>
+              </a:lnSpc>
+              <a:buNone/>
+            </a:pPr>
+            <a:r>
+              <a:rPr lang="en-US" sz="1600" b="1" dirty="0">
                 <a:solidFill>
                   <a:srgbClr val="17222C"/>
                 </a:solidFill>
@@ -4608,38 +4638,58 @@
                 <a:ea typeface="Arial" pitchFamily="34" charset="-122"/>
                 <a:cs typeface="Arial" pitchFamily="34" charset="-120"/>
               </a:rPr>
-              <a:t>Que se passe-t-il à 10× le trafic ?</a:t>
-            </a:r>
-            <a:endParaRPr lang="en-US" sz="1500" dirty="0"/>
-          </a:p>
-        </p:txBody>
-      </p:sp>
-      <p:sp>
-        <p:nvSpPr>
-          <p:cNvPr id="14" name="Text 12"/>
-          <p:cNvSpPr txBox="1"/>
-          <p:nvPr/>
-        </p:nvSpPr>
-        <p:spPr>
-          <a:xfrm>
-            <a:off x="4608576" y="3703320"/>
-            <a:ext cx="2971800" cy="731520"/>
-          </a:xfrm>
-          <a:prstGeom prst="rect">
-            <a:avLst/>
-          </a:prstGeom>
-          <a:noFill/>
-          <a:ln/>
-        </p:spPr>
-        <p:txBody>
-          <a:bodyPr wrap="square" lIns="0" tIns="0" rIns="0" bIns="0" rtlCol="0" anchor="ctr"/>
-          <a:lstStyle/>
-          <a:p>
-            <a:pPr indent="0" marL="0">
-              <a:buNone/>
-            </a:pPr>
-            <a:r>
-              <a:rPr lang="en-US" sz="1300" dirty="0">
+              <a:t>Et si dix fois plus</a:t>
+            </a:r>
+            <a:endParaRPr lang="en-US" sz="1600" dirty="0"/>
+          </a:p>
+          <a:p>
+            <a:pPr indent="0" marL="0">
+              <a:lnSpc>
+                <a:spcPts val="2200"/>
+              </a:lnSpc>
+              <a:buNone/>
+            </a:pPr>
+            <a:r>
+              <a:rPr lang="en-US" sz="1600" b="1" dirty="0">
+                <a:solidFill>
+                  <a:srgbClr val="17222C"/>
+                </a:solidFill>
+                <a:latin typeface="Arial" pitchFamily="34" charset="0"/>
+                <a:ea typeface="Arial" pitchFamily="34" charset="-122"/>
+                <a:cs typeface="Arial" pitchFamily="34" charset="-120"/>
+              </a:rPr>
+              <a:t>de monde arrive ?</a:t>
+            </a:r>
+            <a:endParaRPr lang="en-US" sz="1600" dirty="0"/>
+          </a:p>
+        </p:txBody>
+      </p:sp>
+      <p:sp>
+        <p:nvSpPr>
+          <p:cNvPr id="13" name="Text 11"/>
+          <p:cNvSpPr txBox="1"/>
+          <p:nvPr/>
+        </p:nvSpPr>
+        <p:spPr>
+          <a:xfrm>
+            <a:off x="4608576" y="3401568"/>
+            <a:ext cx="2971800" cy="868680"/>
+          </a:xfrm>
+          <a:prstGeom prst="rect">
+            <a:avLst/>
+          </a:prstGeom>
+          <a:noFill/>
+          <a:ln/>
+        </p:spPr>
+        <p:txBody>
+          <a:bodyPr wrap="square" lIns="0" tIns="0" rIns="0" bIns="0" rtlCol="0" anchor="ctr"/>
+          <a:lstStyle/>
+          <a:p>
+            <a:pPr indent="0" marL="0">
+              <a:buNone/>
+            </a:pPr>
+            <a:r>
+              <a:rPr lang="en-US" sz="1350" dirty="0">
                 <a:solidFill>
                   <a:srgbClr val="5C6B7A"/>
                 </a:solidFill>
@@ -4647,26 +4697,26 @@
                 <a:ea typeface="Calibri" pitchFamily="34" charset="-122"/>
                 <a:cs typeface="Calibri" pitchFamily="34" charset="-120"/>
               </a:rPr>
-              <a:t>La couche applicative ne garde aucun état : la capacité devient un nombre.</a:t>
-            </a:r>
-            <a:endParaRPr lang="en-US" sz="1300" dirty="0"/>
-          </a:p>
-        </p:txBody>
-      </p:sp>
-      <p:sp>
-        <p:nvSpPr>
-          <p:cNvPr id="15" name="Shape 13"/>
+              <a:t>Nos serveurs ne gardent rien. Donc en ajouter, c'est changer un chiffre.</a:t>
+            </a:r>
+            <a:endParaRPr lang="en-US" sz="1350" dirty="0"/>
+          </a:p>
+        </p:txBody>
+      </p:sp>
+      <p:sp>
+        <p:nvSpPr>
+          <p:cNvPr id="14" name="Shape 12"/>
           <p:cNvSpPr/>
           <p:nvPr/>
         </p:nvSpPr>
         <p:spPr>
           <a:xfrm>
-            <a:off x="8101584" y="2148840"/>
-            <a:ext cx="3520440" cy="2423160"/>
+            <a:off x="8101584" y="1691640"/>
+            <a:ext cx="3520440" cy="2743200"/>
           </a:xfrm>
           <a:prstGeom prst="roundRect">
             <a:avLst>
-              <a:gd name="adj" fmla="val 2264"/>
+              <a:gd name="adj" fmla="val 2000"/>
             </a:avLst>
           </a:prstGeom>
           <a:solidFill>
@@ -4682,13 +4732,13 @@
       </p:sp>
       <p:sp>
         <p:nvSpPr>
-          <p:cNvPr id="16" name="Shape 14"/>
+          <p:cNvPr id="15" name="Shape 13"/>
           <p:cNvSpPr/>
           <p:nvPr/>
         </p:nvSpPr>
         <p:spPr>
           <a:xfrm>
-            <a:off x="8375904" y="2395728"/>
+            <a:off x="8375904" y="1965960"/>
             <a:ext cx="310896" cy="310896"/>
           </a:xfrm>
           <a:prstGeom prst="ellipse">
@@ -4707,13 +4757,13 @@
       </p:sp>
       <p:sp>
         <p:nvSpPr>
-          <p:cNvPr id="17" name="Text 15"/>
-          <p:cNvSpPr txBox="1"/>
-          <p:nvPr/>
-        </p:nvSpPr>
-        <p:spPr>
-          <a:xfrm>
-            <a:off x="8375904" y="2395728"/>
+          <p:cNvPr id="16" name="Text 14"/>
+          <p:cNvSpPr txBox="1"/>
+          <p:nvPr/>
+        </p:nvSpPr>
+        <p:spPr>
+          <a:xfrm>
+            <a:off x="8375904" y="1965960"/>
             <a:ext cx="310896" cy="310896"/>
           </a:xfrm>
           <a:prstGeom prst="rect">
@@ -4746,30 +4796,33 @@
       </p:sp>
       <p:sp>
         <p:nvSpPr>
-          <p:cNvPr id="18" name="Text 16"/>
-          <p:cNvSpPr txBox="1"/>
-          <p:nvPr/>
-        </p:nvSpPr>
-        <p:spPr>
-          <a:xfrm>
-            <a:off x="8375904" y="2852928"/>
-            <a:ext cx="2971800" cy="822960"/>
-          </a:xfrm>
-          <a:prstGeom prst="rect">
-            <a:avLst/>
-          </a:prstGeom>
-          <a:noFill/>
-          <a:ln/>
-        </p:spPr>
-        <p:txBody>
-          <a:bodyPr wrap="square" lIns="0" tIns="0" rIns="0" bIns="0" rtlCol="0" anchor="ctr"/>
-          <a:lstStyle/>
-          <a:p>
-            <a:pPr indent="0" marL="0">
-              <a:buNone/>
-            </a:pPr>
-            <a:r>
-              <a:rPr lang="en-US" sz="1500" b="1" dirty="0">
+          <p:cNvPr id="17" name="Text 15"/>
+          <p:cNvSpPr txBox="1"/>
+          <p:nvPr/>
+        </p:nvSpPr>
+        <p:spPr>
+          <a:xfrm>
+            <a:off x="8375904" y="2450592"/>
+            <a:ext cx="2971800" cy="868680"/>
+          </a:xfrm>
+          <a:prstGeom prst="rect">
+            <a:avLst/>
+          </a:prstGeom>
+          <a:noFill/>
+          <a:ln/>
+        </p:spPr>
+        <p:txBody>
+          <a:bodyPr wrap="square" lIns="0" tIns="0" rIns="0" bIns="0" rtlCol="0" anchor="ctr"/>
+          <a:lstStyle/>
+          <a:p>
+            <a:pPr indent="0" marL="0">
+              <a:lnSpc>
+                <a:spcPts val="2200"/>
+              </a:lnSpc>
+              <a:buNone/>
+            </a:pPr>
+            <a:r>
+              <a:rPr lang="en-US" sz="1600" b="1" dirty="0">
                 <a:solidFill>
                   <a:srgbClr val="17222C"/>
                 </a:solidFill>
@@ -4777,38 +4830,58 @@
                 <a:ea typeface="Arial" pitchFamily="34" charset="-122"/>
                 <a:cs typeface="Arial" pitchFamily="34" charset="-120"/>
               </a:rPr>
-              <a:t>Que se passe-t-il quand quelque chose casse ?</a:t>
-            </a:r>
-            <a:endParaRPr lang="en-US" sz="1500" dirty="0"/>
-          </a:p>
-        </p:txBody>
-      </p:sp>
-      <p:sp>
-        <p:nvSpPr>
-          <p:cNvPr id="19" name="Text 17"/>
-          <p:cNvSpPr txBox="1"/>
-          <p:nvPr/>
-        </p:nvSpPr>
-        <p:spPr>
-          <a:xfrm>
-            <a:off x="8375904" y="3703320"/>
-            <a:ext cx="2971800" cy="731520"/>
-          </a:xfrm>
-          <a:prstGeom prst="rect">
-            <a:avLst/>
-          </a:prstGeom>
-          <a:noFill/>
-          <a:ln/>
-        </p:spPr>
-        <p:txBody>
-          <a:bodyPr wrap="square" lIns="0" tIns="0" rIns="0" bIns="0" rtlCol="0" anchor="ctr"/>
-          <a:lstStyle/>
-          <a:p>
-            <a:pPr indent="0" marL="0">
-              <a:buNone/>
-            </a:pPr>
-            <a:r>
-              <a:rPr lang="en-US" sz="1300" dirty="0">
+              <a:t>Et si une machine</a:t>
+            </a:r>
+            <a:endParaRPr lang="en-US" sz="1600" dirty="0"/>
+          </a:p>
+          <a:p>
+            <a:pPr indent="0" marL="0">
+              <a:lnSpc>
+                <a:spcPts val="2200"/>
+              </a:lnSpc>
+              <a:buNone/>
+            </a:pPr>
+            <a:r>
+              <a:rPr lang="en-US" sz="1600" b="1" dirty="0">
+                <a:solidFill>
+                  <a:srgbClr val="17222C"/>
+                </a:solidFill>
+                <a:latin typeface="Arial" pitchFamily="34" charset="0"/>
+                <a:ea typeface="Arial" pitchFamily="34" charset="-122"/>
+                <a:cs typeface="Arial" pitchFamily="34" charset="-120"/>
+              </a:rPr>
+              <a:t>tombe en panne ?</a:t>
+            </a:r>
+            <a:endParaRPr lang="en-US" sz="1600" dirty="0"/>
+          </a:p>
+        </p:txBody>
+      </p:sp>
+      <p:sp>
+        <p:nvSpPr>
+          <p:cNvPr id="18" name="Text 16"/>
+          <p:cNvSpPr txBox="1"/>
+          <p:nvPr/>
+        </p:nvSpPr>
+        <p:spPr>
+          <a:xfrm>
+            <a:off x="8375904" y="3401568"/>
+            <a:ext cx="2971800" cy="868680"/>
+          </a:xfrm>
+          <a:prstGeom prst="rect">
+            <a:avLst/>
+          </a:prstGeom>
+          <a:noFill/>
+          <a:ln/>
+        </p:spPr>
+        <p:txBody>
+          <a:bodyPr wrap="square" lIns="0" tIns="0" rIns="0" bIns="0" rtlCol="0" anchor="ctr"/>
+          <a:lstStyle/>
+          <a:p>
+            <a:pPr indent="0" marL="0">
+              <a:buNone/>
+            </a:pPr>
+            <a:r>
+              <a:rPr lang="en-US" sz="1350" dirty="0">
                 <a:solidFill>
                   <a:srgbClr val="5C6B7A"/>
                 </a:solidFill>
@@ -4816,38 +4889,38 @@
                 <a:ea typeface="Calibri" pitchFamily="34" charset="-122"/>
                 <a:cs typeface="Calibri" pitchFamily="34" charset="-120"/>
               </a:rPr>
-              <a:t>Sondes de santé, drainage, bascule de base — avec des temps mesurés.</a:t>
-            </a:r>
-            <a:endParaRPr lang="en-US" sz="1300" dirty="0"/>
-          </a:p>
-        </p:txBody>
-      </p:sp>
-      <p:sp>
-        <p:nvSpPr>
-          <p:cNvPr id="20" name="Text 18"/>
-          <p:cNvSpPr txBox="1"/>
-          <p:nvPr/>
-        </p:nvSpPr>
-        <p:spPr>
-          <a:xfrm>
-            <a:off x="566928" y="4892040"/>
-            <a:ext cx="11055096" cy="320040"/>
-          </a:xfrm>
-          <a:prstGeom prst="rect">
-            <a:avLst/>
-          </a:prstGeom>
-          <a:noFill/>
-          <a:ln/>
-        </p:spPr>
-        <p:txBody>
-          <a:bodyPr wrap="square" lIns="0" tIns="0" rIns="0" bIns="0" rtlCol="0" anchor="ctr"/>
-          <a:lstStyle/>
-          <a:p>
-            <a:pPr indent="0" marL="0">
-              <a:buNone/>
-            </a:pPr>
-            <a:r>
-              <a:rPr lang="en-US" sz="1400" i="1" dirty="0">
+              <a:t>On l'a mesuré : le client ne voit rien, et son panier est conservé.</a:t>
+            </a:r>
+            <a:endParaRPr lang="en-US" sz="1350" dirty="0"/>
+          </a:p>
+        </p:txBody>
+      </p:sp>
+      <p:sp>
+        <p:nvSpPr>
+          <p:cNvPr id="19" name="Text 17"/>
+          <p:cNvSpPr txBox="1"/>
+          <p:nvPr/>
+        </p:nvSpPr>
+        <p:spPr>
+          <a:xfrm>
+            <a:off x="566928" y="4800600"/>
+            <a:ext cx="11055096" cy="365760"/>
+          </a:xfrm>
+          <a:prstGeom prst="rect">
+            <a:avLst/>
+          </a:prstGeom>
+          <a:noFill/>
+          <a:ln/>
+        </p:spPr>
+        <p:txBody>
+          <a:bodyPr wrap="square" lIns="0" tIns="0" rIns="0" bIns="0" rtlCol="0" anchor="ctr"/>
+          <a:lstStyle/>
+          <a:p>
+            <a:pPr indent="0" marL="0">
+              <a:buNone/>
+            </a:pPr>
+            <a:r>
+              <a:rPr lang="en-US" sz="1500" i="1" dirty="0">
                 <a:solidFill>
                   <a:srgbClr val="9E5D06"/>
                 </a:solidFill>
@@ -4855,9 +4928,9 @@
                 <a:ea typeface="Calibri" pitchFamily="34" charset="-122"/>
                 <a:cs typeface="Calibri" pitchFamily="34" charset="-120"/>
               </a:rPr>
-              <a:t>Chaque choix technique de cette présentation répond à l'une de ces trois questions.</a:t>
-            </a:r>
-            <a:endParaRPr lang="en-US" sz="1400" dirty="0"/>
+              <a:t>Chaque choix qu'on va vous présenter répond à l'une de ces trois questions.</a:t>
+            </a:r>
+            <a:endParaRPr lang="en-US" sz="1500" dirty="0"/>
           </a:p>
         </p:txBody>
       </p:sp>
@@ -4919,7 +4992,7 @@
                 <a:ea typeface="Courier New" pitchFamily="34" charset="-122"/>
                 <a:cs typeface="Courier New" pitchFamily="34" charset="-120"/>
               </a:rPr>
-              <a:t>02 — ARCHITECTURE</a:t>
+              <a:t>02 — L'ARCHITECTURE</a:t>
             </a:r>
             <a:endParaRPr lang="en-US" sz="1100" dirty="0"/>
           </a:p>
@@ -4958,7 +5031,7 @@
                 <a:ea typeface="Arial" pitchFamily="34" charset="-122"/>
                 <a:cs typeface="Arial" pitchFamily="34" charset="-120"/>
               </a:rPr>
-              <a:t>Trois niveaux, deux zones de disponibilité, une porte</a:t>
+              <a:t>Une entrée, des caisses, un coffre</a:t>
             </a:r>
             <a:endParaRPr lang="en-US" sz="3000" dirty="0"/>
           </a:p>
@@ -4972,7 +5045,7 @@
         </p:nvSpPr>
         <p:spPr>
           <a:xfrm>
-            <a:off x="1417320" y="1865376"/>
+            <a:off x="1417320" y="1956816"/>
             <a:ext cx="10149840" cy="1051560"/>
           </a:xfrm>
           <a:prstGeom prst="roundRect">
@@ -4999,7 +5072,7 @@
         </p:nvSpPr>
         <p:spPr>
           <a:xfrm>
-            <a:off x="521208" y="2116836"/>
+            <a:off x="521208" y="2208276"/>
             <a:ext cx="868680" cy="548640"/>
           </a:xfrm>
           <a:prstGeom prst="rect">
@@ -5024,7 +5097,7 @@
                 <a:ea typeface="Courier New" pitchFamily="34" charset="-122"/>
                 <a:cs typeface="Courier New" pitchFamily="34" charset="-120"/>
               </a:rPr>
-              <a:t>SOUS-RÉSEAUX</a:t>
+              <a:t>CÔTÉ RUE</a:t>
             </a:r>
             <a:endParaRPr lang="en-US" sz="850" dirty="0"/>
           </a:p>
@@ -5041,7 +5114,7 @@
                 <a:ea typeface="Courier New" pitchFamily="34" charset="-122"/>
                 <a:cs typeface="Courier New" pitchFamily="34" charset="-120"/>
               </a:rPr>
-              <a:t>PUBLICS</a:t>
+              <a:t>(public)</a:t>
             </a:r>
             <a:endParaRPr lang="en-US" sz="850" dirty="0"/>
           </a:p>
@@ -5055,7 +5128,7 @@
         </p:nvSpPr>
         <p:spPr>
           <a:xfrm>
-            <a:off x="1417320" y="3264408"/>
+            <a:off x="1417320" y="3355848"/>
             <a:ext cx="10149840" cy="1051560"/>
           </a:xfrm>
           <a:prstGeom prst="roundRect">
@@ -5082,7 +5155,7 @@
         </p:nvSpPr>
         <p:spPr>
           <a:xfrm>
-            <a:off x="521208" y="3515868"/>
+            <a:off x="521208" y="3607308"/>
             <a:ext cx="868680" cy="548640"/>
           </a:xfrm>
           <a:prstGeom prst="rect">
@@ -5107,7 +5180,7 @@
                 <a:ea typeface="Courier New" pitchFamily="34" charset="-122"/>
                 <a:cs typeface="Courier New" pitchFamily="34" charset="-120"/>
               </a:rPr>
-              <a:t>SOUS-RÉSEAUX</a:t>
+              <a:t>LES CAISSES</a:t>
             </a:r>
             <a:endParaRPr lang="en-US" sz="850" dirty="0"/>
           </a:p>
@@ -5124,7 +5197,7 @@
                 <a:ea typeface="Courier New" pitchFamily="34" charset="-122"/>
                 <a:cs typeface="Courier New" pitchFamily="34" charset="-120"/>
               </a:rPr>
-              <a:t>APPLICATIFS</a:t>
+              <a:t>(privé)</a:t>
             </a:r>
             <a:endParaRPr lang="en-US" sz="850" dirty="0"/>
           </a:p>
@@ -5138,7 +5211,7 @@
         </p:nvSpPr>
         <p:spPr>
           <a:xfrm>
-            <a:off x="1417320" y="4636008"/>
+            <a:off x="1417320" y="4727448"/>
             <a:ext cx="10149840" cy="1188720"/>
           </a:xfrm>
           <a:prstGeom prst="roundRect">
@@ -5165,7 +5238,7 @@
         </p:nvSpPr>
         <p:spPr>
           <a:xfrm>
-            <a:off x="521208" y="4956048"/>
+            <a:off x="521208" y="5047488"/>
             <a:ext cx="868680" cy="548640"/>
           </a:xfrm>
           <a:prstGeom prst="rect">
@@ -5190,7 +5263,7 @@
                 <a:ea typeface="Courier New" pitchFamily="34" charset="-122"/>
                 <a:cs typeface="Courier New" pitchFamily="34" charset="-120"/>
               </a:rPr>
-              <a:t>SOUS-RÉSEAUX</a:t>
+              <a:t>LES RÉSERVES</a:t>
             </a:r>
             <a:endParaRPr lang="en-US" sz="850" dirty="0"/>
           </a:p>
@@ -5207,7 +5280,7 @@
                 <a:ea typeface="Courier New" pitchFamily="34" charset="-122"/>
                 <a:cs typeface="Courier New" pitchFamily="34" charset="-120"/>
               </a:rPr>
-              <a:t>DONNÉES</a:t>
+              <a:t>(privé)</a:t>
             </a:r>
             <a:endParaRPr lang="en-US" sz="850" dirty="0"/>
           </a:p>
@@ -5221,7 +5294,7 @@
         </p:nvSpPr>
         <p:spPr>
           <a:xfrm>
-            <a:off x="1691640" y="1463040"/>
+            <a:off x="1691640" y="1554480"/>
             <a:ext cx="1828800" cy="274320"/>
           </a:xfrm>
           <a:prstGeom prst="rect">
@@ -5246,7 +5319,7 @@
                 <a:ea typeface="Courier New" pitchFamily="34" charset="-122"/>
                 <a:cs typeface="Courier New" pitchFamily="34" charset="-120"/>
               </a:rPr>
-              <a:t>INTERNET</a:t>
+              <a:t>LES CLIENTS</a:t>
             </a:r>
             <a:endParaRPr lang="en-US" sz="1000" dirty="0"/>
           </a:p>
@@ -5260,7 +5333,7 @@
         </p:nvSpPr>
         <p:spPr>
           <a:xfrm>
-            <a:off x="2103120" y="1719072"/>
+            <a:off x="2103120" y="1810512"/>
             <a:ext cx="0" cy="146304"/>
           </a:xfrm>
           <a:prstGeom prst="line">
@@ -5283,7 +5356,7 @@
         </p:nvSpPr>
         <p:spPr>
           <a:xfrm>
-            <a:off x="2286000" y="1645920"/>
+            <a:off x="2286000" y="1737360"/>
             <a:ext cx="1097280" cy="228600"/>
           </a:xfrm>
           <a:prstGeom prst="rect">
@@ -5308,7 +5381,7 @@
                 <a:ea typeface="Courier New" pitchFamily="34" charset="-122"/>
                 <a:cs typeface="Courier New" pitchFamily="34" charset="-120"/>
               </a:rPr>
-              <a:t>HTTP(S)</a:t>
+              <a:t>le site</a:t>
             </a:r>
             <a:endParaRPr lang="en-US" sz="850" dirty="0"/>
           </a:p>
@@ -5322,7 +5395,7 @@
         </p:nvSpPr>
         <p:spPr>
           <a:xfrm>
-            <a:off x="9281160" y="1719072"/>
+            <a:off x="9281160" y="1810512"/>
             <a:ext cx="0" cy="146304"/>
           </a:xfrm>
           <a:prstGeom prst="line">
@@ -5345,7 +5418,7 @@
         </p:nvSpPr>
         <p:spPr>
           <a:xfrm>
-            <a:off x="9464040" y="1645920"/>
+            <a:off x="9464040" y="1737360"/>
             <a:ext cx="2194560" cy="228600"/>
           </a:xfrm>
           <a:prstGeom prst="rect">
@@ -5370,7 +5443,7 @@
                 <a:ea typeface="Courier New" pitchFamily="34" charset="-122"/>
                 <a:cs typeface="Courier New" pitchFamily="34" charset="-120"/>
               </a:rPr>
-              <a:t>SSH — IP de l'opérateur</a:t>
+              <a:t>nous, pour installer</a:t>
             </a:r>
             <a:endParaRPr lang="en-US" sz="850" dirty="0"/>
           </a:p>
@@ -5384,7 +5457,7 @@
         </p:nvSpPr>
         <p:spPr>
           <a:xfrm>
-            <a:off x="1673352" y="2011680"/>
+            <a:off x="1673352" y="2103120"/>
             <a:ext cx="4663440" cy="749808"/>
           </a:xfrm>
           <a:prstGeom prst="roundRect">
@@ -5411,7 +5484,7 @@
         </p:nvSpPr>
         <p:spPr>
           <a:xfrm>
-            <a:off x="1828800" y="2103120"/>
+            <a:off x="1828800" y="2194560"/>
             <a:ext cx="4389120" cy="274320"/>
           </a:xfrm>
           <a:prstGeom prst="rect">
@@ -5436,7 +5509,7 @@
                 <a:ea typeface="Arial" pitchFamily="34" charset="-122"/>
                 <a:cs typeface="Arial" pitchFamily="34" charset="-120"/>
               </a:rPr>
-              <a:t>Application Load Balancer</a:t>
+              <a:t>Le répartiteur  (load balancer)</a:t>
             </a:r>
             <a:endParaRPr lang="en-US" sz="1300" dirty="0"/>
           </a:p>
@@ -5450,7 +5523,7 @@
         </p:nvSpPr>
         <p:spPr>
           <a:xfrm>
-            <a:off x="1828800" y="2395728"/>
+            <a:off x="1828800" y="2487168"/>
             <a:ext cx="4389120" cy="274320"/>
           </a:xfrm>
           <a:prstGeom prst="rect">
@@ -5467,7 +5540,7 @@
               <a:buNone/>
             </a:pPr>
             <a:r>
-              <a:rPr lang="en-US" sz="1050" dirty="0">
+              <a:rPr lang="en-US" sz="1100" dirty="0">
                 <a:solidFill>
                   <a:srgbClr val="5C6B7A"/>
                 </a:solidFill>
@@ -5475,9 +5548,9 @@
                 <a:ea typeface="Calibri" pitchFamily="34" charset="-122"/>
                 <a:cs typeface="Calibri" pitchFamily="34" charset="-120"/>
               </a:rPr>
-              <a:t>sonde /health.php toutes les 15 s · cookie de session · drainage</a:t>
-            </a:r>
-            <a:endParaRPr lang="en-US" sz="1050" dirty="0"/>
+              <a:t>il envoie chaque visiteur vers une caisse qui va bien</a:t>
+            </a:r>
+            <a:endParaRPr lang="en-US" sz="1100" dirty="0"/>
           </a:p>
         </p:txBody>
       </p:sp>
@@ -5489,7 +5562,7 @@
         </p:nvSpPr>
         <p:spPr>
           <a:xfrm>
-            <a:off x="8366760" y="2011680"/>
+            <a:off x="8366760" y="2103120"/>
             <a:ext cx="2926080" cy="749808"/>
           </a:xfrm>
           <a:prstGeom prst="roundRect">
@@ -5516,7 +5589,7 @@
         </p:nvSpPr>
         <p:spPr>
           <a:xfrm>
-            <a:off x="8531352" y="2103120"/>
+            <a:off x="8531352" y="2194560"/>
             <a:ext cx="2651760" cy="274320"/>
           </a:xfrm>
           <a:prstGeom prst="rect">
@@ -5541,7 +5614,7 @@
                 <a:ea typeface="Arial" pitchFamily="34" charset="-122"/>
                 <a:cs typeface="Arial" pitchFamily="34" charset="-120"/>
               </a:rPr>
-              <a:t>Bastion</a:t>
+              <a:t>L'entrée de service</a:t>
             </a:r>
             <a:endParaRPr lang="en-US" sz="1300" dirty="0"/>
           </a:p>
@@ -5555,7 +5628,7 @@
         </p:nvSpPr>
         <p:spPr>
           <a:xfrm>
-            <a:off x="8531352" y="2395728"/>
+            <a:off x="8531352" y="2487168"/>
             <a:ext cx="2651760" cy="274320"/>
           </a:xfrm>
           <a:prstGeom prst="rect">
@@ -5572,7 +5645,7 @@
               <a:buNone/>
             </a:pPr>
             <a:r>
-              <a:rPr lang="en-US" sz="1050" dirty="0">
+              <a:rPr lang="en-US" sz="1100" dirty="0">
                 <a:solidFill>
                   <a:srgbClr val="5C6B7A"/>
                 </a:solidFill>
@@ -5580,9 +5653,9 @@
                 <a:ea typeface="Calibri" pitchFamily="34" charset="-122"/>
                 <a:cs typeface="Calibri" pitchFamily="34" charset="-120"/>
               </a:rPr>
-              <a:t>la seule porte d'entrée d'Ansible</a:t>
-            </a:r>
-            <a:endParaRPr lang="en-US" sz="1050" dirty="0"/>
+              <a:t>réservée à l'équipe, jamais aux clients</a:t>
+            </a:r>
+            <a:endParaRPr lang="en-US" sz="1100" dirty="0"/>
           </a:p>
         </p:txBody>
       </p:sp>
@@ -5594,7 +5667,7 @@
         </p:nvSpPr>
         <p:spPr>
           <a:xfrm>
-            <a:off x="3611880" y="2779776"/>
+            <a:off x="3611880" y="2871216"/>
             <a:ext cx="0" cy="457200"/>
           </a:xfrm>
           <a:prstGeom prst="line">
@@ -5612,52 +5685,13 @@
       </p:sp>
       <p:sp>
         <p:nvSpPr>
-          <p:cNvPr id="22" name="Text 20"/>
-          <p:cNvSpPr txBox="1"/>
-          <p:nvPr/>
-        </p:nvSpPr>
-        <p:spPr>
-          <a:xfrm>
-            <a:off x="3749040" y="2871216"/>
-            <a:ext cx="640080" cy="228600"/>
-          </a:xfrm>
-          <a:prstGeom prst="rect">
-            <a:avLst/>
-          </a:prstGeom>
-          <a:noFill/>
-          <a:ln/>
-        </p:spPr>
-        <p:txBody>
-          <a:bodyPr wrap="square" lIns="0" tIns="0" rIns="0" bIns="0" rtlCol="0" anchor="ctr"/>
-          <a:lstStyle/>
-          <a:p>
-            <a:pPr indent="0" marL="0">
-              <a:buNone/>
-            </a:pPr>
-            <a:r>
-              <a:rPr lang="en-US" sz="900" dirty="0">
-                <a:solidFill>
-                  <a:srgbClr val="9E5D06"/>
-                </a:solidFill>
-                <a:latin typeface="Courier New" pitchFamily="34" charset="0"/>
-                <a:ea typeface="Courier New" pitchFamily="34" charset="-122"/>
-                <a:cs typeface="Courier New" pitchFamily="34" charset="-120"/>
-              </a:rPr>
-              <a:t>:80</a:t>
-            </a:r>
-            <a:endParaRPr lang="en-US" sz="900" dirty="0"/>
-          </a:p>
-        </p:txBody>
-      </p:sp>
-      <p:sp>
-        <p:nvSpPr>
-          <p:cNvPr id="23" name="Shape 21"/>
+          <p:cNvPr id="22" name="Shape 20"/>
           <p:cNvSpPr/>
           <p:nvPr/>
         </p:nvSpPr>
         <p:spPr>
           <a:xfrm>
-            <a:off x="9829800" y="2779776"/>
+            <a:off x="9829800" y="2871216"/>
             <a:ext cx="0" cy="457200"/>
           </a:xfrm>
           <a:prstGeom prst="line">
@@ -5675,52 +5709,13 @@
       </p:sp>
       <p:sp>
         <p:nvSpPr>
-          <p:cNvPr id="24" name="Text 22"/>
-          <p:cNvSpPr txBox="1"/>
-          <p:nvPr/>
-        </p:nvSpPr>
-        <p:spPr>
-          <a:xfrm>
-            <a:off x="9966960" y="2871216"/>
-            <a:ext cx="640080" cy="228600"/>
-          </a:xfrm>
-          <a:prstGeom prst="rect">
-            <a:avLst/>
-          </a:prstGeom>
-          <a:noFill/>
-          <a:ln/>
-        </p:spPr>
-        <p:txBody>
-          <a:bodyPr wrap="square" lIns="0" tIns="0" rIns="0" bIns="0" rtlCol="0" anchor="ctr"/>
-          <a:lstStyle/>
-          <a:p>
-            <a:pPr indent="0" marL="0">
-              <a:buNone/>
-            </a:pPr>
-            <a:r>
-              <a:rPr lang="en-US" sz="900" dirty="0">
-                <a:solidFill>
-                  <a:srgbClr val="5C6B7A"/>
-                </a:solidFill>
-                <a:latin typeface="Courier New" pitchFamily="34" charset="0"/>
-                <a:ea typeface="Courier New" pitchFamily="34" charset="-122"/>
-                <a:cs typeface="Courier New" pitchFamily="34" charset="-120"/>
-              </a:rPr>
-              <a:t>:22</a:t>
-            </a:r>
-            <a:endParaRPr lang="en-US" sz="900" dirty="0"/>
-          </a:p>
-        </p:txBody>
-      </p:sp>
-      <p:sp>
-        <p:nvSpPr>
-          <p:cNvPr id="25" name="Shape 23"/>
+          <p:cNvPr id="23" name="Shape 21"/>
           <p:cNvSpPr/>
           <p:nvPr/>
         </p:nvSpPr>
         <p:spPr>
           <a:xfrm>
-            <a:off x="1673352" y="3419856"/>
+            <a:off x="1673352" y="3511296"/>
             <a:ext cx="9601200" cy="749808"/>
           </a:xfrm>
           <a:prstGeom prst="roundRect">
@@ -5741,13 +5736,13 @@
       </p:sp>
       <p:sp>
         <p:nvSpPr>
-          <p:cNvPr id="26" name="Text 24"/>
-          <p:cNvSpPr txBox="1"/>
-          <p:nvPr/>
-        </p:nvSpPr>
-        <p:spPr>
-          <a:xfrm>
-            <a:off x="1828800" y="3493008"/>
+          <p:cNvPr id="24" name="Text 22"/>
+          <p:cNvSpPr txBox="1"/>
+          <p:nvPr/>
+        </p:nvSpPr>
+        <p:spPr>
+          <a:xfrm>
+            <a:off x="1828800" y="3584448"/>
             <a:ext cx="9235440" cy="274320"/>
           </a:xfrm>
           <a:prstGeom prst="rect">
@@ -5772,7 +5767,7 @@
                 <a:ea typeface="Arial" pitchFamily="34" charset="-122"/>
                 <a:cs typeface="Arial" pitchFamily="34" charset="-120"/>
               </a:rPr>
-              <a:t>EC2 × N  —  Docker  —  prestashop/prestashop:8.2.8</a:t>
+              <a:t>Les caisses : des serveurs qui font tourner PrestaShop</a:t>
             </a:r>
             <a:endParaRPr lang="en-US" sz="1300" dirty="0"/>
           </a:p>
@@ -5780,13 +5775,13 @@
       </p:sp>
       <p:sp>
         <p:nvSpPr>
-          <p:cNvPr id="27" name="Text 25"/>
-          <p:cNvSpPr txBox="1"/>
-          <p:nvPr/>
-        </p:nvSpPr>
-        <p:spPr>
-          <a:xfrm>
-            <a:off x="1828800" y="3785616"/>
+          <p:cNvPr id="25" name="Text 23"/>
+          <p:cNvSpPr txBox="1"/>
+          <p:nvPr/>
+        </p:nvSpPr>
+        <p:spPr>
+          <a:xfrm>
+            <a:off x="1828800" y="3877056"/>
             <a:ext cx="9235440" cy="274320"/>
           </a:xfrm>
           <a:prstGeom prst="rect">
@@ -5803,7 +5798,7 @@
               <a:buNone/>
             </a:pPr>
             <a:r>
-              <a:rPr lang="en-US" sz="1050" dirty="0">
+              <a:rPr lang="en-US" sz="1100" dirty="0">
                 <a:solidFill>
                   <a:srgbClr val="5C6B7A"/>
                 </a:solidFill>
@@ -5811,21 +5806,21 @@
                 <a:ea typeface="Calibri" pitchFamily="34" charset="-122"/>
                 <a:cs typeface="Calibri" pitchFamily="34" charset="-120"/>
               </a:rPr>
-              <a:t>sans état · réparties sur les zones · configurées par Ansible · aucune adresse publique</a:t>
-            </a:r>
-            <a:endParaRPr lang="en-US" sz="1050" dirty="0"/>
-          </a:p>
-        </p:txBody>
-      </p:sp>
-      <p:sp>
-        <p:nvSpPr>
-          <p:cNvPr id="28" name="Shape 26"/>
+              <a:t>toutes identiques, interchangeables — et aucune n'est joignable depuis Internet</a:t>
+            </a:r>
+            <a:endParaRPr lang="en-US" sz="1100" dirty="0"/>
+          </a:p>
+        </p:txBody>
+      </p:sp>
+      <p:sp>
+        <p:nvSpPr>
+          <p:cNvPr id="26" name="Shape 24"/>
           <p:cNvSpPr/>
           <p:nvPr/>
         </p:nvSpPr>
         <p:spPr>
           <a:xfrm>
-            <a:off x="3611880" y="4187952"/>
+            <a:off x="3611880" y="4279392"/>
             <a:ext cx="0" cy="420624"/>
           </a:xfrm>
           <a:prstGeom prst="line">
@@ -5843,52 +5838,13 @@
       </p:sp>
       <p:sp>
         <p:nvSpPr>
-          <p:cNvPr id="29" name="Text 27"/>
-          <p:cNvSpPr txBox="1"/>
-          <p:nvPr/>
-        </p:nvSpPr>
-        <p:spPr>
-          <a:xfrm>
-            <a:off x="3749040" y="4261104"/>
-            <a:ext cx="1463040" cy="228600"/>
-          </a:xfrm>
-          <a:prstGeom prst="rect">
-            <a:avLst/>
-          </a:prstGeom>
-          <a:noFill/>
-          <a:ln/>
-        </p:spPr>
-        <p:txBody>
-          <a:bodyPr wrap="square" lIns="0" tIns="0" rIns="0" bIns="0" rtlCol="0" anchor="ctr"/>
-          <a:lstStyle/>
-          <a:p>
-            <a:pPr indent="0" marL="0">
-              <a:buNone/>
-            </a:pPr>
-            <a:r>
-              <a:rPr lang="en-US" sz="900" dirty="0">
-                <a:solidFill>
-                  <a:srgbClr val="0C6A72"/>
-                </a:solidFill>
-                <a:latin typeface="Courier New" pitchFamily="34" charset="0"/>
-                <a:ea typeface="Courier New" pitchFamily="34" charset="-122"/>
-                <a:cs typeface="Courier New" pitchFamily="34" charset="-120"/>
-              </a:rPr>
-              <a:t>MySQL :3306</a:t>
-            </a:r>
-            <a:endParaRPr lang="en-US" sz="900" dirty="0"/>
-          </a:p>
-        </p:txBody>
-      </p:sp>
-      <p:sp>
-        <p:nvSpPr>
-          <p:cNvPr id="30" name="Shape 28"/>
+          <p:cNvPr id="27" name="Shape 25"/>
           <p:cNvSpPr/>
           <p:nvPr/>
         </p:nvSpPr>
         <p:spPr>
           <a:xfrm>
-            <a:off x="8915400" y="4187952"/>
+            <a:off x="8915400" y="4279392"/>
             <a:ext cx="0" cy="420624"/>
           </a:xfrm>
           <a:prstGeom prst="line">
@@ -5906,52 +5862,13 @@
       </p:sp>
       <p:sp>
         <p:nvSpPr>
-          <p:cNvPr id="31" name="Text 29"/>
-          <p:cNvSpPr txBox="1"/>
-          <p:nvPr/>
-        </p:nvSpPr>
-        <p:spPr>
-          <a:xfrm>
-            <a:off x="9052560" y="4261104"/>
-            <a:ext cx="1371600" cy="228600"/>
-          </a:xfrm>
-          <a:prstGeom prst="rect">
-            <a:avLst/>
-          </a:prstGeom>
-          <a:noFill/>
-          <a:ln/>
-        </p:spPr>
-        <p:txBody>
-          <a:bodyPr wrap="square" lIns="0" tIns="0" rIns="0" bIns="0" rtlCol="0" anchor="ctr"/>
-          <a:lstStyle/>
-          <a:p>
-            <a:pPr indent="0" marL="0">
-              <a:buNone/>
-            </a:pPr>
-            <a:r>
-              <a:rPr lang="en-US" sz="900" dirty="0">
-                <a:solidFill>
-                  <a:srgbClr val="0C6A72"/>
-                </a:solidFill>
-                <a:latin typeface="Courier New" pitchFamily="34" charset="0"/>
-                <a:ea typeface="Courier New" pitchFamily="34" charset="-122"/>
-                <a:cs typeface="Courier New" pitchFamily="34" charset="-120"/>
-              </a:rPr>
-              <a:t>NFS :2049</a:t>
-            </a:r>
-            <a:endParaRPr lang="en-US" sz="900" dirty="0"/>
-          </a:p>
-        </p:txBody>
-      </p:sp>
-      <p:sp>
-        <p:nvSpPr>
-          <p:cNvPr id="32" name="Shape 30"/>
+          <p:cNvPr id="28" name="Shape 26"/>
           <p:cNvSpPr/>
           <p:nvPr/>
         </p:nvSpPr>
         <p:spPr>
           <a:xfrm>
-            <a:off x="1673352" y="4791456"/>
+            <a:off x="1673352" y="4882896"/>
             <a:ext cx="4663440" cy="877824"/>
           </a:xfrm>
           <a:prstGeom prst="roundRect">
@@ -5972,13 +5889,13 @@
       </p:sp>
       <p:sp>
         <p:nvSpPr>
-          <p:cNvPr id="33" name="Text 31"/>
-          <p:cNvSpPr txBox="1"/>
-          <p:nvPr/>
-        </p:nvSpPr>
-        <p:spPr>
-          <a:xfrm>
-            <a:off x="1828800" y="4882896"/>
+          <p:cNvPr id="29" name="Text 27"/>
+          <p:cNvSpPr txBox="1"/>
+          <p:nvPr/>
+        </p:nvSpPr>
+        <p:spPr>
+          <a:xfrm>
+            <a:off x="1828800" y="4974336"/>
             <a:ext cx="4389120" cy="274320"/>
           </a:xfrm>
           <a:prstGeom prst="rect">
@@ -6003,7 +5920,7 @@
                 <a:ea typeface="Arial" pitchFamily="34" charset="-122"/>
                 <a:cs typeface="Arial" pitchFamily="34" charset="-120"/>
               </a:rPr>
-              <a:t>RDS MySQL 8.0</a:t>
+              <a:t>Le coffre : la base de données</a:t>
             </a:r>
             <a:endParaRPr lang="en-US" sz="1300" dirty="0"/>
           </a:p>
@@ -6011,30 +5928,30 @@
       </p:sp>
       <p:sp>
         <p:nvSpPr>
-          <p:cNvPr id="34" name="Text 32"/>
-          <p:cNvSpPr txBox="1"/>
-          <p:nvPr/>
-        </p:nvSpPr>
-        <p:spPr>
-          <a:xfrm>
-            <a:off x="1828800" y="5175504"/>
-            <a:ext cx="4389120" cy="365760"/>
-          </a:xfrm>
-          <a:prstGeom prst="rect">
-            <a:avLst/>
-          </a:prstGeom>
-          <a:noFill/>
-          <a:ln/>
-        </p:spPr>
-        <p:txBody>
-          <a:bodyPr wrap="square" lIns="0" tIns="0" rIns="0" bIns="0" rtlCol="0" anchor="ctr"/>
-          <a:lstStyle/>
-          <a:p>
-            <a:pPr indent="0" marL="0">
-              <a:buNone/>
-            </a:pPr>
-            <a:r>
-              <a:rPr lang="en-US" sz="1050" dirty="0">
+          <p:cNvPr id="30" name="Text 28"/>
+          <p:cNvSpPr txBox="1"/>
+          <p:nvPr/>
+        </p:nvSpPr>
+        <p:spPr>
+          <a:xfrm>
+            <a:off x="1828800" y="5285232"/>
+            <a:ext cx="4389120" cy="320040"/>
+          </a:xfrm>
+          <a:prstGeom prst="rect">
+            <a:avLst/>
+          </a:prstGeom>
+          <a:noFill/>
+          <a:ln/>
+        </p:spPr>
+        <p:txBody>
+          <a:bodyPr wrap="square" lIns="0" tIns="0" rIns="0" bIns="0" rtlCol="0" anchor="ctr"/>
+          <a:lstStyle/>
+          <a:p>
+            <a:pPr indent="0" marL="0">
+              <a:buNone/>
+            </a:pPr>
+            <a:r>
+              <a:rPr lang="en-US" sz="1100" dirty="0">
                 <a:solidFill>
                   <a:srgbClr val="5C6B7A"/>
                 </a:solidFill>
@@ -6042,21 +5959,21 @@
                 <a:ea typeface="Calibri" pitchFamily="34" charset="-122"/>
                 <a:cs typeface="Calibri" pitchFamily="34" charset="-120"/>
               </a:rPr>
-              <a:t>catalogue, paniers, commandes · Multi-AZ en production</a:t>
-            </a:r>
-            <a:endParaRPr lang="en-US" sz="1050" dirty="0"/>
-          </a:p>
-        </p:txBody>
-      </p:sp>
-      <p:sp>
-        <p:nvSpPr>
-          <p:cNvPr id="35" name="Shape 33"/>
+              <a:t>les billets, les paniers, les commandes</a:t>
+            </a:r>
+            <a:endParaRPr lang="en-US" sz="1100" dirty="0"/>
+          </a:p>
+        </p:txBody>
+      </p:sp>
+      <p:sp>
+        <p:nvSpPr>
+          <p:cNvPr id="31" name="Shape 29"/>
           <p:cNvSpPr/>
           <p:nvPr/>
         </p:nvSpPr>
         <p:spPr>
           <a:xfrm>
-            <a:off x="6629400" y="4791456"/>
+            <a:off x="6629400" y="4882896"/>
             <a:ext cx="4663440" cy="877824"/>
           </a:xfrm>
           <a:prstGeom prst="roundRect">
@@ -6077,13 +5994,13 @@
       </p:sp>
       <p:sp>
         <p:nvSpPr>
-          <p:cNvPr id="36" name="Text 34"/>
-          <p:cNvSpPr txBox="1"/>
-          <p:nvPr/>
-        </p:nvSpPr>
-        <p:spPr>
-          <a:xfrm>
-            <a:off x="6793992" y="4882896"/>
+          <p:cNvPr id="32" name="Text 30"/>
+          <p:cNvSpPr txBox="1"/>
+          <p:nvPr/>
+        </p:nvSpPr>
+        <p:spPr>
+          <a:xfrm>
+            <a:off x="6793992" y="4974336"/>
             <a:ext cx="4389120" cy="274320"/>
           </a:xfrm>
           <a:prstGeom prst="rect">
@@ -6108,7 +6025,7 @@
                 <a:ea typeface="Arial" pitchFamily="34" charset="-122"/>
                 <a:cs typeface="Arial" pitchFamily="34" charset="-120"/>
               </a:rPr>
-              <a:t>EFS — racine web partagée</a:t>
+              <a:t>Le vestiaire : un disque partagé</a:t>
             </a:r>
             <a:endParaRPr lang="en-US" sz="1300" dirty="0"/>
           </a:p>
@@ -6116,30 +6033,30 @@
       </p:sp>
       <p:sp>
         <p:nvSpPr>
-          <p:cNvPr id="37" name="Text 35"/>
-          <p:cNvSpPr txBox="1"/>
-          <p:nvPr/>
-        </p:nvSpPr>
-        <p:spPr>
-          <a:xfrm>
-            <a:off x="6793992" y="5175504"/>
-            <a:ext cx="4389120" cy="365760"/>
-          </a:xfrm>
-          <a:prstGeom prst="rect">
-            <a:avLst/>
-          </a:prstGeom>
-          <a:noFill/>
-          <a:ln/>
-        </p:spPr>
-        <p:txBody>
-          <a:bodyPr wrap="square" lIns="0" tIns="0" rIns="0" bIns="0" rtlCol="0" anchor="ctr"/>
-          <a:lstStyle/>
-          <a:p>
-            <a:pPr indent="0" marL="0">
-              <a:buNone/>
-            </a:pPr>
-            <a:r>
-              <a:rPr lang="en-US" sz="1050" dirty="0">
+          <p:cNvPr id="33" name="Text 31"/>
+          <p:cNvSpPr txBox="1"/>
+          <p:nvPr/>
+        </p:nvSpPr>
+        <p:spPr>
+          <a:xfrm>
+            <a:off x="6793992" y="5285232"/>
+            <a:ext cx="4389120" cy="320040"/>
+          </a:xfrm>
+          <a:prstGeom prst="rect">
+            <a:avLst/>
+          </a:prstGeom>
+          <a:noFill/>
+          <a:ln/>
+        </p:spPr>
+        <p:txBody>
+          <a:bodyPr wrap="square" lIns="0" tIns="0" rIns="0" bIns="0" rtlCol="0" anchor="ctr"/>
+          <a:lstStyle/>
+          <a:p>
+            <a:pPr indent="0" marL="0">
+              <a:buNone/>
+            </a:pPr>
+            <a:r>
+              <a:rPr lang="en-US" sz="1100" dirty="0">
                 <a:solidFill>
                   <a:srgbClr val="5C6B7A"/>
                 </a:solidFill>
@@ -6147,48 +6064,48 @@
                 <a:ea typeface="Calibri" pitchFamily="34" charset="-122"/>
                 <a:cs typeface="Calibri" pitchFamily="34" charset="-120"/>
               </a:rPr>
-              <a:t>images, thèmes, modules et sessions PHP</a:t>
-            </a:r>
-            <a:endParaRPr lang="en-US" sz="1050" dirty="0"/>
-          </a:p>
-        </p:txBody>
-      </p:sp>
-      <p:sp>
-        <p:nvSpPr>
-          <p:cNvPr id="38" name="Text 36"/>
-          <p:cNvSpPr txBox="1"/>
-          <p:nvPr/>
-        </p:nvSpPr>
-        <p:spPr>
-          <a:xfrm>
-            <a:off x="566928" y="5989320"/>
-            <a:ext cx="11055096" cy="274320"/>
-          </a:xfrm>
-          <a:prstGeom prst="rect">
-            <a:avLst/>
-          </a:prstGeom>
-          <a:noFill/>
-          <a:ln/>
-        </p:spPr>
-        <p:txBody>
-          <a:bodyPr wrap="square" lIns="0" tIns="0" rIns="0" bIns="0" rtlCol="0" anchor="ctr"/>
-          <a:lstStyle/>
-          <a:p>
-            <a:pPr indent="0" marL="0">
-              <a:buNone/>
-            </a:pPr>
-            <a:r>
-              <a:rPr lang="en-US" sz="1200" dirty="0">
-                <a:solidFill>
-                  <a:srgbClr val="5C6B7A"/>
+              <a:t>les images, le thème, et les paniers en cours</a:t>
+            </a:r>
+            <a:endParaRPr lang="en-US" sz="1100" dirty="0"/>
+          </a:p>
+        </p:txBody>
+      </p:sp>
+      <p:sp>
+        <p:nvSpPr>
+          <p:cNvPr id="34" name="Text 32"/>
+          <p:cNvSpPr txBox="1"/>
+          <p:nvPr/>
+        </p:nvSpPr>
+        <p:spPr>
+          <a:xfrm>
+            <a:off x="566928" y="6035040"/>
+            <a:ext cx="11055096" cy="365760"/>
+          </a:xfrm>
+          <a:prstGeom prst="rect">
+            <a:avLst/>
+          </a:prstGeom>
+          <a:noFill/>
+          <a:ln/>
+        </p:spPr>
+        <p:txBody>
+          <a:bodyPr wrap="square" lIns="0" tIns="0" rIns="0" bIns="0" rtlCol="0" anchor="ctr"/>
+          <a:lstStyle/>
+          <a:p>
+            <a:pPr indent="0" marL="0">
+              <a:buNone/>
+            </a:pPr>
+            <a:r>
+              <a:rPr lang="en-US" sz="1500" i="1" dirty="0">
+                <a:solidFill>
+                  <a:srgbClr val="9E5D06"/>
                 </a:solidFill>
                 <a:latin typeface="Calibri" pitchFamily="34" charset="0"/>
                 <a:ea typeface="Calibri" pitchFamily="34" charset="-122"/>
                 <a:cs typeface="Calibri" pitchFamily="34" charset="-120"/>
               </a:rPr>
-              <a:t>Secrets Manager (mot de passe de la base)  ·  alarmes CloudWatch  ·  passerelles NAT  ·  point de terminaison S3</a:t>
-            </a:r>
-            <a:endParaRPr lang="en-US" sz="1200" dirty="0"/>
+              <a:t>Les caisses ne gardent rien : tout est dans le coffre et le vestiaire. C'est ce qui rend tout le reste possible.</a:t>
+            </a:r>
+            <a:endParaRPr lang="en-US" sz="1500" dirty="0"/>
           </a:p>
         </p:txBody>
       </p:sp>
@@ -6250,7 +6167,7 @@
                 <a:ea typeface="Courier New" pitchFamily="34" charset="-122"/>
                 <a:cs typeface="Courier New" pitchFamily="34" charset="-120"/>
               </a:rPr>
-              <a:t>03 — PLACEMENT</a:t>
+              <a:t>03 — NOS CHOIX</a:t>
             </a:r>
             <a:endParaRPr lang="en-US" sz="1100" dirty="0"/>
           </a:p>
@@ -6289,7 +6206,7 @@
                 <a:ea typeface="Arial" pitchFamily="34" charset="-122"/>
                 <a:cs typeface="Arial" pitchFamily="34" charset="-120"/>
               </a:rPr>
-              <a:t>Ce qui tourne sur EC2, ce qu'on laisse gérer à AWS</a:t>
+              <a:t>Ce qu'on gère, ce qu'on laisse à AWS</a:t>
             </a:r>
             <a:endParaRPr lang="en-US" sz="3000" dirty="0"/>
           </a:p>
@@ -6304,7 +6221,7 @@
         <p:spPr>
           <a:xfrm>
             <a:off x="566928" y="1463040"/>
-            <a:ext cx="10515600" cy="365760"/>
+            <a:ext cx="10789920" cy="411480"/>
           </a:xfrm>
           <a:prstGeom prst="rect">
             <a:avLst/>
@@ -6328,7 +6245,7 @@
                 <a:ea typeface="Calibri" pitchFamily="34" charset="-122"/>
                 <a:cs typeface="Calibri" pitchFamily="34" charset="-120"/>
               </a:rPr>
-              <a:t>La règle : on possède ce qui est spécifique à la boutique, on loue ce qui est spécifique à l'exploitation d'une base de données.</a:t>
+              <a:t>La règle qu'on s'est donnée : on garde la main sur ce qui est propre à la boutique, et on laisse à AWS ce que personne n'a envie de réparer un soir d'ouverture.</a:t>
             </a:r>
             <a:endParaRPr lang="en-US" sz="1400" dirty="0"/>
           </a:p>
@@ -6357,9 +6274,9 @@
             <a:tbl>
               <a:tblPr/>
               <a:tblGrid>
-                <a:gridCol w="1920240"/>
-                <a:gridCol w="2286000"/>
-                <a:gridCol w="6848856"/>
+                <a:gridCol w="2011680"/>
+                <a:gridCol w="2468880"/>
+                <a:gridCol w="6574536"/>
               </a:tblGrid>
               <a:tr h="566928">
                 <a:tc>
@@ -6379,7 +6296,7 @@
                           <a:ea typeface="Calibri" pitchFamily="34" charset="-122"/>
                           <a:cs typeface="Calibri" pitchFamily="34" charset="-120"/>
                         </a:rPr>
-                        <a:t>COMPOSANT</a:t>
+                        <a:t>QUOI</a:t>
                       </a:r>
                       <a:endParaRPr lang="en-US" sz="1250" dirty="0">
                         <a:latin typeface="Calibri" charset="0"/>
@@ -6447,7 +6364,7 @@
                           <a:ea typeface="Calibri" pitchFamily="34" charset="-122"/>
                           <a:cs typeface="Calibri" pitchFamily="34" charset="-120"/>
                         </a:rPr>
-                        <a:t>CHOIX</a:t>
+                        <a:t>NOTRE CHOIX</a:t>
                       </a:r>
                       <a:endParaRPr lang="en-US" sz="1250" dirty="0">
                         <a:latin typeface="Calibri" charset="0"/>
@@ -6585,7 +6502,7 @@
                           <a:ea typeface="Calibri" pitchFamily="34" charset="-122"/>
                           <a:cs typeface="Calibri" pitchFamily="34" charset="-120"/>
                         </a:rPr>
-                        <a:t>PrestaShop</a:t>
+                        <a:t>La boutique</a:t>
                       </a:r>
                       <a:endParaRPr lang="en-US" sz="1250" dirty="0">
                         <a:latin typeface="Calibri" charset="0"/>
@@ -6653,7 +6570,7 @@
                           <a:ea typeface="Calibri" pitchFamily="34" charset="-122"/>
                           <a:cs typeface="Calibri" pitchFamily="34" charset="-120"/>
                         </a:rPr>
-                        <a:t>Docker sur EC2</a:t>
+                        <a:t>Docker sur un serveur EC2</a:t>
                       </a:r>
                       <a:endParaRPr lang="en-US" sz="1250" dirty="0">
                         <a:latin typeface="Calibri" charset="0"/>
@@ -6721,7 +6638,7 @@
                           <a:ea typeface="Calibri" pitchFamily="34" charset="-122"/>
                           <a:cs typeface="Calibri" pitchFamily="34" charset="-120"/>
                         </a:rPr>
-                        <a:t>L'instance configurée par Ansible qu'exige le sujet ; un conteneur rend le runtime identique partout.</a:t>
+                        <a:t>Le sujet demande l'image PrestaShop sur EC2. Changer de version, c'est une ligne à modifier.</a:t>
                       </a:r>
                       <a:endParaRPr lang="en-US" sz="1250" dirty="0">
                         <a:latin typeface="Calibri" charset="0"/>
@@ -6791,7 +6708,7 @@
                           <a:ea typeface="Calibri" pitchFamily="34" charset="-122"/>
                           <a:cs typeface="Calibri" pitchFamily="34" charset="-120"/>
                         </a:rPr>
-                        <a:t>Base de données</a:t>
+                        <a:t>La base de données</a:t>
                       </a:r>
                       <a:endParaRPr lang="en-US" sz="1250" dirty="0">
                         <a:latin typeface="Calibri" charset="0"/>
@@ -6859,7 +6776,7 @@
                           <a:ea typeface="Calibri" pitchFamily="34" charset="-122"/>
                           <a:cs typeface="Calibri" pitchFamily="34" charset="-120"/>
                         </a:rPr>
-                        <a:t>RDS MySQL 8.0</a:t>
+                        <a:t>RDS, le service géré d'AWS</a:t>
                       </a:r>
                       <a:endParaRPr lang="en-US" sz="1250" dirty="0">
                         <a:latin typeface="Calibri" charset="0"/>
@@ -6927,7 +6844,7 @@
                           <a:ea typeface="Calibri" pitchFamily="34" charset="-122"/>
                           <a:cs typeface="Calibri" pitchFamily="34" charset="-120"/>
                         </a:rPr>
-                        <a:t>Sauvegardes, correctifs, bascule Multi-AZ : personne ne veut écrire ça soi-même un soir d'ouverture.</a:t>
+                        <a:t>Sauvegardes, mises à jour, machine de secours : AWS le fait mieux que nous, et sans nous réveiller la nuit.</a:t>
                       </a:r>
                       <a:endParaRPr lang="en-US" sz="1250" dirty="0">
                         <a:latin typeface="Calibri" charset="0"/>
@@ -6997,7 +6914,7 @@
                           <a:ea typeface="Calibri" pitchFamily="34" charset="-122"/>
                           <a:cs typeface="Calibri" pitchFamily="34" charset="-120"/>
                         </a:rPr>
-                        <a:t>Fichiers partagés</a:t>
+                        <a:t>Les fichiers</a:t>
                       </a:r>
                       <a:endParaRPr lang="en-US" sz="1250" dirty="0">
                         <a:latin typeface="Calibri" charset="0"/>
@@ -7065,7 +6982,7 @@
                           <a:ea typeface="Calibri" pitchFamily="34" charset="-122"/>
                           <a:cs typeface="Calibri" pitchFamily="34" charset="-120"/>
                         </a:rPr>
-                        <a:t>EFS</a:t>
+                        <a:t>EFS, un disque partagé</a:t>
                       </a:r>
                       <a:endParaRPr lang="en-US" sz="1250" dirty="0">
                         <a:latin typeface="Calibri" charset="0"/>
@@ -7133,7 +7050,7 @@
                           <a:ea typeface="Calibri" pitchFamily="34" charset="-122"/>
                           <a:cs typeface="Calibri" pitchFamily="34" charset="-120"/>
                         </a:rPr>
-                        <a:t>Plusieurs instances doivent servir les mêmes images et les mêmes sessions. EBS ne se partage pas.</a:t>
+                        <a:t>Plusieurs serveurs doivent voir les mêmes images. Un disque normal ne se partage pas.</a:t>
                       </a:r>
                       <a:endParaRPr lang="en-US" sz="1250" dirty="0">
                         <a:latin typeface="Calibri" charset="0"/>
@@ -7203,7 +7120,7 @@
                           <a:ea typeface="Calibri" pitchFamily="34" charset="-122"/>
                           <a:cs typeface="Calibri" pitchFamily="34" charset="-120"/>
                         </a:rPr>
-                        <a:t>Point d'entrée</a:t>
+                        <a:t>L'entrée</a:t>
                       </a:r>
                       <a:endParaRPr lang="en-US" sz="1250" dirty="0">
                         <a:latin typeface="Calibri" charset="0"/>
@@ -7271,7 +7188,7 @@
                           <a:ea typeface="Calibri" pitchFamily="34" charset="-122"/>
                           <a:cs typeface="Calibri" pitchFamily="34" charset="-120"/>
                         </a:rPr>
-                        <a:t>Load balancer</a:t>
+                        <a:t>Un load balancer</a:t>
                       </a:r>
                       <a:endParaRPr lang="en-US" sz="1250" dirty="0">
                         <a:latin typeface="Calibri" charset="0"/>
@@ -7339,7 +7256,7 @@
                           <a:ea typeface="Calibri" pitchFamily="34" charset="-122"/>
                           <a:cs typeface="Calibri" pitchFamily="34" charset="-120"/>
                         </a:rPr>
-                        <a:t>Sondes de santé, drainage des connexions, répartition entre zones.</a:t>
+                        <a:t>Il surveille les serveurs et répartit les visiteurs tout seul.</a:t>
                       </a:r>
                       <a:endParaRPr lang="en-US" sz="1250" dirty="0">
                         <a:latin typeface="Calibri" charset="0"/>
@@ -7409,7 +7326,7 @@
                           <a:ea typeface="Calibri" pitchFamily="34" charset="-122"/>
                           <a:cs typeface="Calibri" pitchFamily="34" charset="-120"/>
                         </a:rPr>
-                        <a:t>Secrets</a:t>
+                        <a:t>Les mots de passe</a:t>
                       </a:r>
                       <a:endParaRPr lang="en-US" sz="1250" dirty="0">
                         <a:latin typeface="Calibri" charset="0"/>
@@ -7477,7 +7394,7 @@
                           <a:ea typeface="Calibri" pitchFamily="34" charset="-122"/>
                           <a:cs typeface="Calibri" pitchFamily="34" charset="-120"/>
                         </a:rPr>
-                        <a:t>Secrets Manager + Vault</a:t>
+                        <a:t>Coffre AWS + Ansible Vault</a:t>
                       </a:r>
                       <a:endParaRPr lang="en-US" sz="1250" dirty="0">
                         <a:latin typeface="Calibri" charset="0"/>
@@ -7545,7 +7462,7 @@
                           <a:ea typeface="Calibri" pitchFamily="34" charset="-122"/>
                           <a:cs typeface="Calibri" pitchFamily="34" charset="-120"/>
                         </a:rPr>
-                        <a:t>Le mot de passe de la base ne quitte jamais AWS ; seuls les identifiants du back-office sont dans le dépôt, chiffrés.</a:t>
+                        <a:t>Le mot de passe de la base n'est écrit nulle part : chaque serveur va le chercher lui-même.</a:t>
                       </a:r>
                       <a:endParaRPr lang="en-US" sz="1250" dirty="0">
                         <a:latin typeface="Calibri" charset="0"/>
@@ -7615,7 +7532,7 @@
                           <a:ea typeface="Calibri" pitchFamily="34" charset="-122"/>
                           <a:cs typeface="Calibri" pitchFamily="34" charset="-120"/>
                         </a:rPr>
-                        <a:t>Accès SSH</a:t>
+                        <a:t>Notre accès</a:t>
                       </a:r>
                       <a:endParaRPr lang="en-US" sz="1250" dirty="0">
                         <a:latin typeface="Calibri" charset="0"/>
@@ -7683,7 +7600,7 @@
                           <a:ea typeface="Calibri" pitchFamily="34" charset="-122"/>
                           <a:cs typeface="Calibri" pitchFamily="34" charset="-120"/>
                         </a:rPr>
-                        <a:t>Bastion</a:t>
+                        <a:t>Un serveur d'entrée dédié</a:t>
                       </a:r>
                       <a:endParaRPr lang="en-US" sz="1250" dirty="0">
                         <a:latin typeface="Calibri" charset="0"/>
@@ -7751,7 +7668,7 @@
                           <a:ea typeface="Calibri" pitchFamily="34" charset="-122"/>
                           <a:cs typeface="Calibri" pitchFamily="34" charset="-120"/>
                         </a:rPr>
-                        <a:t>Aucune IP publique sur les instances. Une seule porte, tracée, ouverte à une seule adresse.</a:t>
+                        <a:t>Une seule porte pour l'équipe, ouverte à une seule adresse IP.</a:t>
                       </a:r>
                       <a:endParaRPr lang="en-US" sz="1250" dirty="0">
                         <a:latin typeface="Calibri" charset="0"/>
@@ -7865,7 +7782,7 @@
                 <a:ea typeface="Courier New" pitchFamily="34" charset="-122"/>
                 <a:cs typeface="Courier New" pitchFamily="34" charset="-120"/>
               </a:rPr>
-              <a:t>04 — PROVISIONNEMENT</a:t>
+              <a:t>04 — TERRAFORM</a:t>
             </a:r>
             <a:endParaRPr lang="en-US" sz="1100" dirty="0"/>
           </a:p>
@@ -7904,7 +7821,7 @@
                 <a:ea typeface="Arial" pitchFamily="34" charset="-122"/>
                 <a:cs typeface="Arial" pitchFamily="34" charset="-120"/>
               </a:rPr>
-              <a:t>Terraform : six modules, un seul fichier par environnement</a:t>
+              <a:t>On décrit ce qu'on veut, Terraform le construit</a:t>
             </a:r>
             <a:endParaRPr lang="en-US" sz="3000" dirty="0"/>
           </a:p>
@@ -7912,13 +7829,52 @@
       </p:sp>
       <p:sp>
         <p:nvSpPr>
-          <p:cNvPr id="4" name="Shape 2"/>
+          <p:cNvPr id="4" name="Text 2"/>
+          <p:cNvSpPr txBox="1"/>
+          <p:nvPr/>
+        </p:nvSpPr>
+        <p:spPr>
+          <a:xfrm>
+            <a:off x="566928" y="1444752"/>
+            <a:ext cx="10789920" cy="411480"/>
+          </a:xfrm>
+          <a:prstGeom prst="rect">
+            <a:avLst/>
+          </a:prstGeom>
+          <a:noFill/>
+          <a:ln/>
+        </p:spPr>
+        <p:txBody>
+          <a:bodyPr wrap="square" lIns="0" tIns="0" rIns="0" bIns="0" rtlCol="0" anchor="ctr"/>
+          <a:lstStyle/>
+          <a:p>
+            <a:pPr indent="0" marL="0">
+              <a:buNone/>
+            </a:pPr>
+            <a:r>
+              <a:rPr lang="en-US" sz="1400" dirty="0">
+                <a:solidFill>
+                  <a:srgbClr val="5C6B7A"/>
+                </a:solidFill>
+                <a:latin typeface="Calibri" pitchFamily="34" charset="0"/>
+                <a:ea typeface="Calibri" pitchFamily="34" charset="-122"/>
+                <a:cs typeface="Calibri" pitchFamily="34" charset="-120"/>
+              </a:rPr>
+              <a:t>Six briques, une par couche. On les assemble, et la même description donne un petit environnement de test ou une vraie production.</a:t>
+            </a:r>
+            <a:endParaRPr lang="en-US" sz="1400" dirty="0"/>
+          </a:p>
+        </p:txBody>
+      </p:sp>
+      <p:sp>
+        <p:nvSpPr>
+          <p:cNvPr id="5" name="Shape 3"/>
           <p:cNvSpPr/>
           <p:nvPr/>
         </p:nvSpPr>
         <p:spPr>
           <a:xfrm>
-            <a:off x="566928" y="1627632"/>
+            <a:off x="566928" y="2066544"/>
             <a:ext cx="91440" cy="256032"/>
           </a:xfrm>
           <a:prstGeom prst="rect">
@@ -7937,14 +7893,14 @@
       </p:sp>
       <p:sp>
         <p:nvSpPr>
-          <p:cNvPr id="5" name="Text 3"/>
-          <p:cNvSpPr txBox="1"/>
-          <p:nvPr/>
-        </p:nvSpPr>
-        <p:spPr>
-          <a:xfrm>
-            <a:off x="768096" y="1572768"/>
-            <a:ext cx="1600200" cy="365760"/>
+          <p:cNvPr id="6" name="Text 4"/>
+          <p:cNvSpPr txBox="1"/>
+          <p:nvPr/>
+        </p:nvSpPr>
+        <p:spPr>
+          <a:xfrm>
+            <a:off x="768096" y="2011680"/>
+            <a:ext cx="1645920" cy="365760"/>
           </a:xfrm>
           <a:prstGeom prst="rect">
             <a:avLst/>
@@ -7976,30 +7932,30 @@
       </p:sp>
       <p:sp>
         <p:nvSpPr>
-          <p:cNvPr id="6" name="Text 4"/>
-          <p:cNvSpPr txBox="1"/>
-          <p:nvPr/>
-        </p:nvSpPr>
-        <p:spPr>
-          <a:xfrm>
-            <a:off x="2350008" y="1572768"/>
-            <a:ext cx="4206240" cy="365760"/>
-          </a:xfrm>
-          <a:prstGeom prst="rect">
-            <a:avLst/>
-          </a:prstGeom>
-          <a:noFill/>
-          <a:ln/>
-        </p:spPr>
-        <p:txBody>
-          <a:bodyPr wrap="square" lIns="0" tIns="0" rIns="0" bIns="0" rtlCol="0" anchor="ctr"/>
-          <a:lstStyle/>
-          <a:p>
-            <a:pPr indent="0" marL="0">
-              <a:buNone/>
-            </a:pPr>
-            <a:r>
-              <a:rPr lang="en-US" sz="1200" dirty="0">
+          <p:cNvPr id="7" name="Text 5"/>
+          <p:cNvSpPr txBox="1"/>
+          <p:nvPr/>
+        </p:nvSpPr>
+        <p:spPr>
+          <a:xfrm>
+            <a:off x="2395728" y="2011680"/>
+            <a:ext cx="3931920" cy="365760"/>
+          </a:xfrm>
+          <a:prstGeom prst="rect">
+            <a:avLst/>
+          </a:prstGeom>
+          <a:noFill/>
+          <a:ln/>
+        </p:spPr>
+        <p:txBody>
+          <a:bodyPr wrap="square" lIns="0" tIns="0" rIns="0" bIns="0" rtlCol="0" anchor="ctr"/>
+          <a:lstStyle/>
+          <a:p>
+            <a:pPr indent="0" marL="0">
+              <a:buNone/>
+            </a:pPr>
+            <a:r>
+              <a:rPr lang="en-US" sz="1250" dirty="0">
                 <a:solidFill>
                   <a:srgbClr val="5C6B7A"/>
                 </a:solidFill>
@@ -8007,21 +7963,21 @@
                 <a:ea typeface="Calibri" pitchFamily="34" charset="-122"/>
                 <a:cs typeface="Calibri" pitchFamily="34" charset="-120"/>
               </a:rPr>
-              <a:t>VPC, trois niveaux de sous-réseaux, NAT, journaux de flux</a:t>
-            </a:r>
-            <a:endParaRPr lang="en-US" sz="1200" dirty="0"/>
-          </a:p>
-        </p:txBody>
-      </p:sp>
-      <p:sp>
-        <p:nvSpPr>
-          <p:cNvPr id="7" name="Shape 5"/>
+              <a:t>le réseau et ses trois niveaux</a:t>
+            </a:r>
+            <a:endParaRPr lang="en-US" sz="1250" dirty="0"/>
+          </a:p>
+        </p:txBody>
+      </p:sp>
+      <p:sp>
+        <p:nvSpPr>
+          <p:cNvPr id="8" name="Shape 6"/>
           <p:cNvSpPr/>
           <p:nvPr/>
         </p:nvSpPr>
         <p:spPr>
           <a:xfrm>
-            <a:off x="566928" y="2103120"/>
+            <a:off x="566928" y="2542032"/>
             <a:ext cx="91440" cy="256032"/>
           </a:xfrm>
           <a:prstGeom prst="rect">
@@ -8040,14 +7996,14 @@
       </p:sp>
       <p:sp>
         <p:nvSpPr>
-          <p:cNvPr id="8" name="Text 6"/>
-          <p:cNvSpPr txBox="1"/>
-          <p:nvPr/>
-        </p:nvSpPr>
-        <p:spPr>
-          <a:xfrm>
-            <a:off x="768096" y="2048256"/>
-            <a:ext cx="1600200" cy="365760"/>
+          <p:cNvPr id="9" name="Text 7"/>
+          <p:cNvSpPr txBox="1"/>
+          <p:nvPr/>
+        </p:nvSpPr>
+        <p:spPr>
+          <a:xfrm>
+            <a:off x="768096" y="2487168"/>
+            <a:ext cx="1645920" cy="365760"/>
           </a:xfrm>
           <a:prstGeom prst="rect">
             <a:avLst/>
@@ -8079,30 +8035,30 @@
       </p:sp>
       <p:sp>
         <p:nvSpPr>
-          <p:cNvPr id="9" name="Text 7"/>
-          <p:cNvSpPr txBox="1"/>
-          <p:nvPr/>
-        </p:nvSpPr>
-        <p:spPr>
-          <a:xfrm>
-            <a:off x="2350008" y="2048256"/>
-            <a:ext cx="4206240" cy="365760"/>
-          </a:xfrm>
-          <a:prstGeom prst="rect">
-            <a:avLst/>
-          </a:prstGeom>
-          <a:noFill/>
-          <a:ln/>
-        </p:spPr>
-        <p:txBody>
-          <a:bodyPr wrap="square" lIns="0" tIns="0" rIns="0" bIns="0" rtlCol="0" anchor="ctr"/>
-          <a:lstStyle/>
-          <a:p>
-            <a:pPr indent="0" marL="0">
-              <a:buNone/>
-            </a:pPr>
-            <a:r>
-              <a:rPr lang="en-US" sz="1200" dirty="0">
+          <p:cNvPr id="10" name="Text 8"/>
+          <p:cNvSpPr txBox="1"/>
+          <p:nvPr/>
+        </p:nvSpPr>
+        <p:spPr>
+          <a:xfrm>
+            <a:off x="2395728" y="2487168"/>
+            <a:ext cx="3931920" cy="365760"/>
+          </a:xfrm>
+          <a:prstGeom prst="rect">
+            <a:avLst/>
+          </a:prstGeom>
+          <a:noFill/>
+          <a:ln/>
+        </p:spPr>
+        <p:txBody>
+          <a:bodyPr wrap="square" lIns="0" tIns="0" rIns="0" bIns="0" rtlCol="0" anchor="ctr"/>
+          <a:lstStyle/>
+          <a:p>
+            <a:pPr indent="0" marL="0">
+              <a:buNone/>
+            </a:pPr>
+            <a:r>
+              <a:rPr lang="en-US" sz="1250" dirty="0">
                 <a:solidFill>
                   <a:srgbClr val="5C6B7A"/>
                 </a:solidFill>
@@ -8110,21 +8066,21 @@
                 <a:ea typeface="Calibri" pitchFamily="34" charset="-122"/>
                 <a:cs typeface="Calibri" pitchFamily="34" charset="-120"/>
               </a:rPr>
-              <a:t>groupes de sécurité, une règle par ressource</a:t>
-            </a:r>
-            <a:endParaRPr lang="en-US" sz="1200" dirty="0"/>
-          </a:p>
-        </p:txBody>
-      </p:sp>
-      <p:sp>
-        <p:nvSpPr>
-          <p:cNvPr id="10" name="Shape 8"/>
+              <a:t>qui a le droit de parler à qui</a:t>
+            </a:r>
+            <a:endParaRPr lang="en-US" sz="1250" dirty="0"/>
+          </a:p>
+        </p:txBody>
+      </p:sp>
+      <p:sp>
+        <p:nvSpPr>
+          <p:cNvPr id="11" name="Shape 9"/>
           <p:cNvSpPr/>
           <p:nvPr/>
         </p:nvSpPr>
         <p:spPr>
           <a:xfrm>
-            <a:off x="566928" y="2578608"/>
+            <a:off x="566928" y="3017520"/>
             <a:ext cx="91440" cy="256032"/>
           </a:xfrm>
           <a:prstGeom prst="rect">
@@ -8143,14 +8099,14 @@
       </p:sp>
       <p:sp>
         <p:nvSpPr>
-          <p:cNvPr id="11" name="Text 9"/>
-          <p:cNvSpPr txBox="1"/>
-          <p:nvPr/>
-        </p:nvSpPr>
-        <p:spPr>
-          <a:xfrm>
-            <a:off x="768096" y="2523744"/>
-            <a:ext cx="1600200" cy="365760"/>
+          <p:cNvPr id="12" name="Text 10"/>
+          <p:cNvSpPr txBox="1"/>
+          <p:nvPr/>
+        </p:nvSpPr>
+        <p:spPr>
+          <a:xfrm>
+            <a:off x="768096" y="2962656"/>
+            <a:ext cx="1645920" cy="365760"/>
           </a:xfrm>
           <a:prstGeom prst="rect">
             <a:avLst/>
@@ -8182,30 +8138,30 @@
       </p:sp>
       <p:sp>
         <p:nvSpPr>
-          <p:cNvPr id="12" name="Text 10"/>
-          <p:cNvSpPr txBox="1"/>
-          <p:nvPr/>
-        </p:nvSpPr>
-        <p:spPr>
-          <a:xfrm>
-            <a:off x="2350008" y="2523744"/>
-            <a:ext cx="4206240" cy="365760"/>
-          </a:xfrm>
-          <a:prstGeom prst="rect">
-            <a:avLst/>
-          </a:prstGeom>
-          <a:noFill/>
-          <a:ln/>
-        </p:spPr>
-        <p:txBody>
-          <a:bodyPr wrap="square" lIns="0" tIns="0" rIns="0" bIns="0" rtlCol="0" anchor="ctr"/>
-          <a:lstStyle/>
-          <a:p>
-            <a:pPr indent="0" marL="0">
-              <a:buNone/>
-            </a:pPr>
-            <a:r>
-              <a:rPr lang="en-US" sz="1200" dirty="0">
+          <p:cNvPr id="13" name="Text 11"/>
+          <p:cNvSpPr txBox="1"/>
+          <p:nvPr/>
+        </p:nvSpPr>
+        <p:spPr>
+          <a:xfrm>
+            <a:off x="2395728" y="2962656"/>
+            <a:ext cx="3931920" cy="365760"/>
+          </a:xfrm>
+          <a:prstGeom prst="rect">
+            <a:avLst/>
+          </a:prstGeom>
+          <a:noFill/>
+          <a:ln/>
+        </p:spPr>
+        <p:txBody>
+          <a:bodyPr wrap="square" lIns="0" tIns="0" rIns="0" bIns="0" rtlCol="0" anchor="ctr"/>
+          <a:lstStyle/>
+          <a:p>
+            <a:pPr indent="0" marL="0">
+              <a:buNone/>
+            </a:pPr>
+            <a:r>
+              <a:rPr lang="en-US" sz="1250" dirty="0">
                 <a:solidFill>
                   <a:srgbClr val="5C6B7A"/>
                 </a:solidFill>
@@ -8213,21 +8169,21 @@
                 <a:ea typeface="Calibri" pitchFamily="34" charset="-122"/>
                 <a:cs typeface="Calibri" pitchFamily="34" charset="-120"/>
               </a:rPr>
-              <a:t>EFS et une cible de montage par zone</a:t>
-            </a:r>
-            <a:endParaRPr lang="en-US" sz="1200" dirty="0"/>
-          </a:p>
-        </p:txBody>
-      </p:sp>
-      <p:sp>
-        <p:nvSpPr>
-          <p:cNvPr id="13" name="Shape 11"/>
+              <a:t>le disque partagé</a:t>
+            </a:r>
+            <a:endParaRPr lang="en-US" sz="1250" dirty="0"/>
+          </a:p>
+        </p:txBody>
+      </p:sp>
+      <p:sp>
+        <p:nvSpPr>
+          <p:cNvPr id="14" name="Shape 12"/>
           <p:cNvSpPr/>
           <p:nvPr/>
         </p:nvSpPr>
         <p:spPr>
           <a:xfrm>
-            <a:off x="566928" y="3054096"/>
+            <a:off x="566928" y="3493008"/>
             <a:ext cx="91440" cy="256032"/>
           </a:xfrm>
           <a:prstGeom prst="rect">
@@ -8246,14 +8202,14 @@
       </p:sp>
       <p:sp>
         <p:nvSpPr>
-          <p:cNvPr id="14" name="Text 12"/>
-          <p:cNvSpPr txBox="1"/>
-          <p:nvPr/>
-        </p:nvSpPr>
-        <p:spPr>
-          <a:xfrm>
-            <a:off x="768096" y="2999232"/>
-            <a:ext cx="1600200" cy="365760"/>
+          <p:cNvPr id="15" name="Text 13"/>
+          <p:cNvSpPr txBox="1"/>
+          <p:nvPr/>
+        </p:nvSpPr>
+        <p:spPr>
+          <a:xfrm>
+            <a:off x="768096" y="3438144"/>
+            <a:ext cx="1645920" cy="365760"/>
           </a:xfrm>
           <a:prstGeom prst="rect">
             <a:avLst/>
@@ -8285,30 +8241,30 @@
       </p:sp>
       <p:sp>
         <p:nvSpPr>
-          <p:cNvPr id="15" name="Text 13"/>
-          <p:cNvSpPr txBox="1"/>
-          <p:nvPr/>
-        </p:nvSpPr>
-        <p:spPr>
-          <a:xfrm>
-            <a:off x="2350008" y="2999232"/>
-            <a:ext cx="4206240" cy="365760"/>
-          </a:xfrm>
-          <a:prstGeom prst="rect">
-            <a:avLst/>
-          </a:prstGeom>
-          <a:noFill/>
-          <a:ln/>
-        </p:spPr>
-        <p:txBody>
-          <a:bodyPr wrap="square" lIns="0" tIns="0" rIns="0" bIns="0" rtlCol="0" anchor="ctr"/>
-          <a:lstStyle/>
-          <a:p>
-            <a:pPr indent="0" marL="0">
-              <a:buNone/>
-            </a:pPr>
-            <a:r>
-              <a:rPr lang="en-US" sz="1200" dirty="0">
+          <p:cNvPr id="16" name="Text 14"/>
+          <p:cNvSpPr txBox="1"/>
+          <p:nvPr/>
+        </p:nvSpPr>
+        <p:spPr>
+          <a:xfrm>
+            <a:off x="2395728" y="3438144"/>
+            <a:ext cx="3931920" cy="365760"/>
+          </a:xfrm>
+          <a:prstGeom prst="rect">
+            <a:avLst/>
+          </a:prstGeom>
+          <a:noFill/>
+          <a:ln/>
+        </p:spPr>
+        <p:txBody>
+          <a:bodyPr wrap="square" lIns="0" tIns="0" rIns="0" bIns="0" rtlCol="0" anchor="ctr"/>
+          <a:lstStyle/>
+          <a:p>
+            <a:pPr indent="0" marL="0">
+              <a:buNone/>
+            </a:pPr>
+            <a:r>
+              <a:rPr lang="en-US" sz="1250" dirty="0">
                 <a:solidFill>
                   <a:srgbClr val="5C6B7A"/>
                 </a:solidFill>
@@ -8316,21 +8272,21 @@
                 <a:ea typeface="Calibri" pitchFamily="34" charset="-122"/>
                 <a:cs typeface="Calibri" pitchFamily="34" charset="-120"/>
               </a:rPr>
-              <a:t>RDS, mot de passe généré, Secrets Manager</a:t>
-            </a:r>
-            <a:endParaRPr lang="en-US" sz="1200" dirty="0"/>
-          </a:p>
-        </p:txBody>
-      </p:sp>
-      <p:sp>
-        <p:nvSpPr>
-          <p:cNvPr id="16" name="Shape 14"/>
+              <a:t>la base de données</a:t>
+            </a:r>
+            <a:endParaRPr lang="en-US" sz="1250" dirty="0"/>
+          </a:p>
+        </p:txBody>
+      </p:sp>
+      <p:sp>
+        <p:nvSpPr>
+          <p:cNvPr id="17" name="Shape 15"/>
           <p:cNvSpPr/>
           <p:nvPr/>
         </p:nvSpPr>
         <p:spPr>
           <a:xfrm>
-            <a:off x="566928" y="3529584"/>
+            <a:off x="566928" y="3968496"/>
             <a:ext cx="91440" cy="256032"/>
           </a:xfrm>
           <a:prstGeom prst="rect">
@@ -8349,14 +8305,14 @@
       </p:sp>
       <p:sp>
         <p:nvSpPr>
-          <p:cNvPr id="17" name="Text 15"/>
-          <p:cNvSpPr txBox="1"/>
-          <p:nvPr/>
-        </p:nvSpPr>
-        <p:spPr>
-          <a:xfrm>
-            <a:off x="768096" y="3474720"/>
-            <a:ext cx="1600200" cy="365760"/>
+          <p:cNvPr id="18" name="Text 16"/>
+          <p:cNvSpPr txBox="1"/>
+          <p:nvPr/>
+        </p:nvSpPr>
+        <p:spPr>
+          <a:xfrm>
+            <a:off x="768096" y="3913632"/>
+            <a:ext cx="1645920" cy="365760"/>
           </a:xfrm>
           <a:prstGeom prst="rect">
             <a:avLst/>
@@ -8388,30 +8344,30 @@
       </p:sp>
       <p:sp>
         <p:nvSpPr>
-          <p:cNvPr id="18" name="Text 16"/>
-          <p:cNvSpPr txBox="1"/>
-          <p:nvPr/>
-        </p:nvSpPr>
-        <p:spPr>
-          <a:xfrm>
-            <a:off x="2350008" y="3474720"/>
-            <a:ext cx="4206240" cy="365760"/>
-          </a:xfrm>
-          <a:prstGeom prst="rect">
-            <a:avLst/>
-          </a:prstGeom>
-          <a:noFill/>
-          <a:ln/>
-        </p:spPr>
-        <p:txBody>
-          <a:bodyPr wrap="square" lIns="0" tIns="0" rIns="0" bIns="0" rtlCol="0" anchor="ctr"/>
-          <a:lstStyle/>
-          <a:p>
-            <a:pPr indent="0" marL="0">
-              <a:buNone/>
-            </a:pPr>
-            <a:r>
-              <a:rPr lang="en-US" sz="1200" dirty="0">
+          <p:cNvPr id="19" name="Text 17"/>
+          <p:cNvSpPr txBox="1"/>
+          <p:nvPr/>
+        </p:nvSpPr>
+        <p:spPr>
+          <a:xfrm>
+            <a:off x="2395728" y="3913632"/>
+            <a:ext cx="3931920" cy="365760"/>
+          </a:xfrm>
+          <a:prstGeom prst="rect">
+            <a:avLst/>
+          </a:prstGeom>
+          <a:noFill/>
+          <a:ln/>
+        </p:spPr>
+        <p:txBody>
+          <a:bodyPr wrap="square" lIns="0" tIns="0" rIns="0" bIns="0" rtlCol="0" anchor="ctr"/>
+          <a:lstStyle/>
+          <a:p>
+            <a:pPr indent="0" marL="0">
+              <a:buNone/>
+            </a:pPr>
+            <a:r>
+              <a:rPr lang="en-US" sz="1250" dirty="0">
                 <a:solidFill>
                   <a:srgbClr val="5C6B7A"/>
                 </a:solidFill>
@@ -8419,21 +8375,21 @@
                 <a:ea typeface="Calibri" pitchFamily="34" charset="-122"/>
                 <a:cs typeface="Calibri" pitchFamily="34" charset="-120"/>
               </a:rPr>
-              <a:t>flotte applicative, bastion, rôle IAM d'instance</a:t>
-            </a:r>
-            <a:endParaRPr lang="en-US" sz="1200" dirty="0"/>
-          </a:p>
-        </p:txBody>
-      </p:sp>
-      <p:sp>
-        <p:nvSpPr>
-          <p:cNvPr id="19" name="Shape 17"/>
+              <a:t>les serveurs</a:t>
+            </a:r>
+            <a:endParaRPr lang="en-US" sz="1250" dirty="0"/>
+          </a:p>
+        </p:txBody>
+      </p:sp>
+      <p:sp>
+        <p:nvSpPr>
+          <p:cNvPr id="20" name="Shape 18"/>
           <p:cNvSpPr/>
           <p:nvPr/>
         </p:nvSpPr>
         <p:spPr>
           <a:xfrm>
-            <a:off x="566928" y="4005072"/>
+            <a:off x="566928" y="4443984"/>
             <a:ext cx="91440" cy="256032"/>
           </a:xfrm>
           <a:prstGeom prst="rect">
@@ -8452,14 +8408,14 @@
       </p:sp>
       <p:sp>
         <p:nvSpPr>
-          <p:cNvPr id="20" name="Text 18"/>
-          <p:cNvSpPr txBox="1"/>
-          <p:nvPr/>
-        </p:nvSpPr>
-        <p:spPr>
-          <a:xfrm>
-            <a:off x="768096" y="3950208"/>
-            <a:ext cx="1600200" cy="365760"/>
+          <p:cNvPr id="21" name="Text 19"/>
+          <p:cNvSpPr txBox="1"/>
+          <p:nvPr/>
+        </p:nvSpPr>
+        <p:spPr>
+          <a:xfrm>
+            <a:off x="768096" y="4389120"/>
+            <a:ext cx="1645920" cy="365760"/>
           </a:xfrm>
           <a:prstGeom prst="rect">
             <a:avLst/>
@@ -8491,30 +8447,30 @@
       </p:sp>
       <p:sp>
         <p:nvSpPr>
-          <p:cNvPr id="21" name="Text 19"/>
-          <p:cNvSpPr txBox="1"/>
-          <p:nvPr/>
-        </p:nvSpPr>
-        <p:spPr>
-          <a:xfrm>
-            <a:off x="2350008" y="3950208"/>
-            <a:ext cx="4206240" cy="365760"/>
-          </a:xfrm>
-          <a:prstGeom prst="rect">
-            <a:avLst/>
-          </a:prstGeom>
-          <a:noFill/>
-          <a:ln/>
-        </p:spPr>
-        <p:txBody>
-          <a:bodyPr wrap="square" lIns="0" tIns="0" rIns="0" bIns="0" rtlCol="0" anchor="ctr"/>
-          <a:lstStyle/>
-          <a:p>
-            <a:pPr indent="0" marL="0">
-              <a:buNone/>
-            </a:pPr>
-            <a:r>
-              <a:rPr lang="en-US" sz="1200" dirty="0">
+          <p:cNvPr id="22" name="Text 20"/>
+          <p:cNvSpPr txBox="1"/>
+          <p:nvPr/>
+        </p:nvSpPr>
+        <p:spPr>
+          <a:xfrm>
+            <a:off x="2395728" y="4389120"/>
+            <a:ext cx="3931920" cy="365760"/>
+          </a:xfrm>
+          <a:prstGeom prst="rect">
+            <a:avLst/>
+          </a:prstGeom>
+          <a:noFill/>
+          <a:ln/>
+        </p:spPr>
+        <p:txBody>
+          <a:bodyPr wrap="square" lIns="0" tIns="0" rIns="0" bIns="0" rtlCol="0" anchor="ctr"/>
+          <a:lstStyle/>
+          <a:p>
+            <a:pPr indent="0" marL="0">
+              <a:buNone/>
+            </a:pPr>
+            <a:r>
+              <a:rPr lang="en-US" sz="1250" dirty="0">
                 <a:solidFill>
                   <a:srgbClr val="5C6B7A"/>
                 </a:solidFill>
@@ -8522,21 +8478,21 @@
                 <a:ea typeface="Calibri" pitchFamily="34" charset="-122"/>
                 <a:cs typeface="Calibri" pitchFamily="34" charset="-120"/>
               </a:rPr>
-              <a:t>ALB, groupe de cibles, alarmes CloudWatch</a:t>
-            </a:r>
-            <a:endParaRPr lang="en-US" sz="1200" dirty="0"/>
-          </a:p>
-        </p:txBody>
-      </p:sp>
-      <p:sp>
-        <p:nvSpPr>
-          <p:cNvPr id="22" name="Shape 20"/>
+              <a:t>l'entrée et la surveillance</a:t>
+            </a:r>
+            <a:endParaRPr lang="en-US" sz="1250" dirty="0"/>
+          </a:p>
+        </p:txBody>
+      </p:sp>
+      <p:sp>
+        <p:nvSpPr>
+          <p:cNvPr id="23" name="Shape 21"/>
           <p:cNvSpPr/>
           <p:nvPr/>
         </p:nvSpPr>
         <p:spPr>
           <a:xfrm>
-            <a:off x="6446520" y="1572768"/>
+            <a:off x="6446520" y="2011680"/>
             <a:ext cx="5175504" cy="1097280"/>
           </a:xfrm>
           <a:prstGeom prst="roundRect">
@@ -8557,13 +8513,13 @@
       </p:sp>
       <p:sp>
         <p:nvSpPr>
-          <p:cNvPr id="23" name="Text 21"/>
-          <p:cNvSpPr txBox="1"/>
-          <p:nvPr/>
-        </p:nvSpPr>
-        <p:spPr>
-          <a:xfrm>
-            <a:off x="6629400" y="1682496"/>
+          <p:cNvPr id="24" name="Text 22"/>
+          <p:cNvSpPr txBox="1"/>
+          <p:nvPr/>
+        </p:nvSpPr>
+        <p:spPr>
+          <a:xfrm>
+            <a:off x="6629400" y="2121408"/>
             <a:ext cx="4846320" cy="274320"/>
           </a:xfrm>
           <a:prstGeom prst="rect">
@@ -8588,7 +8544,7 @@
                 <a:ea typeface="Arial" pitchFamily="34" charset="-122"/>
                 <a:cs typeface="Arial" pitchFamily="34" charset="-120"/>
               </a:rPr>
-              <a:t>Séparation des environnements</a:t>
+              <a:t>Trois environnements, un seul code</a:t>
             </a:r>
             <a:endParaRPr lang="en-US" sz="1300" dirty="0"/>
           </a:p>
@@ -8596,14 +8552,14 @@
       </p:sp>
       <p:sp>
         <p:nvSpPr>
-          <p:cNvPr id="24" name="Text 22"/>
-          <p:cNvSpPr txBox="1"/>
-          <p:nvPr/>
-        </p:nvSpPr>
-        <p:spPr>
-          <a:xfrm>
-            <a:off x="6629400" y="1975104"/>
-            <a:ext cx="4846320" cy="640080"/>
+          <p:cNvPr id="25" name="Text 23"/>
+          <p:cNvSpPr txBox="1"/>
+          <p:nvPr/>
+        </p:nvSpPr>
+        <p:spPr>
+          <a:xfrm>
+            <a:off x="6629400" y="2414016"/>
+            <a:ext cx="4846320" cy="658368"/>
           </a:xfrm>
           <a:prstGeom prst="rect">
             <a:avLst/>
@@ -8627,7 +8583,7 @@
                 <a:ea typeface="Calibri" pitchFamily="34" charset="-122"/>
                 <a:cs typeface="Calibri" pitchFamily="34" charset="-120"/>
               </a:rPr>
-              <a:t>env_defaults dimensionne dev, staging et prod ; chacun a son fichier de variables et sa propre clé d'état.</a:t>
+              <a:t>Test, pré-production, production : on change un mot, pas le code. Le test a 1 serveur, la production en a 3 répartis sur 3 zones.</a:t>
             </a:r>
             <a:endParaRPr lang="en-US" sz="1150" dirty="0"/>
           </a:p>
@@ -8635,13 +8591,13 @@
       </p:sp>
       <p:sp>
         <p:nvSpPr>
-          <p:cNvPr id="25" name="Shape 23"/>
+          <p:cNvPr id="26" name="Shape 24"/>
           <p:cNvSpPr/>
           <p:nvPr/>
         </p:nvSpPr>
         <p:spPr>
           <a:xfrm>
-            <a:off x="6446520" y="2788920"/>
+            <a:off x="6446520" y="3227832"/>
             <a:ext cx="5175504" cy="1097280"/>
           </a:xfrm>
           <a:prstGeom prst="roundRect">
@@ -8662,13 +8618,13 @@
       </p:sp>
       <p:sp>
         <p:nvSpPr>
-          <p:cNvPr id="26" name="Text 24"/>
-          <p:cNvSpPr txBox="1"/>
-          <p:nvPr/>
-        </p:nvSpPr>
-        <p:spPr>
-          <a:xfrm>
-            <a:off x="6629400" y="2898648"/>
+          <p:cNvPr id="27" name="Text 25"/>
+          <p:cNvSpPr txBox="1"/>
+          <p:nvPr/>
+        </p:nvSpPr>
+        <p:spPr>
+          <a:xfrm>
+            <a:off x="6629400" y="3337560"/>
             <a:ext cx="4846320" cy="274320"/>
           </a:xfrm>
           <a:prstGeom prst="rect">
@@ -8693,7 +8649,7 @@
                 <a:ea typeface="Arial" pitchFamily="34" charset="-122"/>
                 <a:cs typeface="Arial" pitchFamily="34" charset="-120"/>
               </a:rPr>
-              <a:t>État distant et verrouillage</a:t>
+              <a:t>Le travail à trois est protégé</a:t>
             </a:r>
             <a:endParaRPr lang="en-US" sz="1300" dirty="0"/>
           </a:p>
@@ -8701,14 +8657,14 @@
       </p:sp>
       <p:sp>
         <p:nvSpPr>
-          <p:cNvPr id="27" name="Text 25"/>
-          <p:cNvSpPr txBox="1"/>
-          <p:nvPr/>
-        </p:nvSpPr>
-        <p:spPr>
-          <a:xfrm>
-            <a:off x="6629400" y="3191256"/>
-            <a:ext cx="4846320" cy="640080"/>
+          <p:cNvPr id="28" name="Text 26"/>
+          <p:cNvSpPr txBox="1"/>
+          <p:nvPr/>
+        </p:nvSpPr>
+        <p:spPr>
+          <a:xfrm>
+            <a:off x="6629400" y="3630168"/>
+            <a:ext cx="4846320" cy="658368"/>
           </a:xfrm>
           <a:prstGeom prst="rect">
             <a:avLst/>
@@ -8732,7 +8688,7 @@
                 <a:ea typeface="Calibri" pitchFamily="34" charset="-122"/>
                 <a:cs typeface="Calibri" pitchFamily="34" charset="-120"/>
               </a:rPr>
-              <a:t>Bucket S3 versionné et chiffré, créé par un module d'amorçage avant le premier init.</a:t>
+              <a:t>La description de l'infrastructure est stockée sur AWS, verrouillée : deux personnes ne peuvent pas la modifier en même temps.</a:t>
             </a:r>
             <a:endParaRPr lang="en-US" sz="1150" dirty="0"/>
           </a:p>
@@ -8740,13 +8696,13 @@
       </p:sp>
       <p:sp>
         <p:nvSpPr>
-          <p:cNvPr id="28" name="Shape 26"/>
+          <p:cNvPr id="29" name="Shape 27"/>
           <p:cNvSpPr/>
           <p:nvPr/>
         </p:nvSpPr>
         <p:spPr>
           <a:xfrm>
-            <a:off x="6446520" y="4005072"/>
+            <a:off x="6446520" y="4443984"/>
             <a:ext cx="5175504" cy="1097280"/>
           </a:xfrm>
           <a:prstGeom prst="roundRect">
@@ -8767,13 +8723,13 @@
       </p:sp>
       <p:sp>
         <p:nvSpPr>
-          <p:cNvPr id="29" name="Text 27"/>
-          <p:cNvSpPr txBox="1"/>
-          <p:nvPr/>
-        </p:nvSpPr>
-        <p:spPr>
-          <a:xfrm>
-            <a:off x="6629400" y="4114800"/>
+          <p:cNvPr id="30" name="Text 28"/>
+          <p:cNvSpPr txBox="1"/>
+          <p:nvPr/>
+        </p:nvSpPr>
+        <p:spPr>
+          <a:xfrm>
+            <a:off x="6629400" y="4553712"/>
             <a:ext cx="4846320" cy="274320"/>
           </a:xfrm>
           <a:prstGeom prst="rect">
@@ -8798,7 +8754,7 @@
                 <a:ea typeface="Arial" pitchFamily="34" charset="-122"/>
                 <a:cs typeface="Arial" pitchFamily="34" charset="-120"/>
               </a:rPr>
-              <a:t>Rien en dur</a:t>
+              <a:t>Rien n'est écrit en dur</a:t>
             </a:r>
             <a:endParaRPr lang="en-US" sz="1300" dirty="0"/>
           </a:p>
@@ -8806,14 +8762,14 @@
       </p:sp>
       <p:sp>
         <p:nvSpPr>
-          <p:cNvPr id="30" name="Text 28"/>
-          <p:cNvSpPr txBox="1"/>
-          <p:nvPr/>
-        </p:nvSpPr>
-        <p:spPr>
-          <a:xfrm>
-            <a:off x="6629400" y="4407408"/>
-            <a:ext cx="4846320" cy="640080"/>
+          <p:cNvPr id="31" name="Text 29"/>
+          <p:cNvSpPr txBox="1"/>
+          <p:nvPr/>
+        </p:nvSpPr>
+        <p:spPr>
+          <a:xfrm>
+            <a:off x="6629400" y="4846320"/>
+            <a:ext cx="4846320" cy="658368"/>
           </a:xfrm>
           <a:prstGeom prst="rect">
             <a:avLst/>
@@ -8837,46 +8793,7 @@
                 <a:ea typeface="Calibri" pitchFamily="34" charset="-122"/>
                 <a:cs typeface="Calibri" pitchFamily="34" charset="-120"/>
               </a:rPr>
-              <a:t>Des sources de données résolvent l'AMI Ubuntu, les zones, et l'IP publique de l'opérateur — celle à laquelle le bastion est verrouillé.</a:t>
-            </a:r>
-            <a:endParaRPr lang="en-US" sz="1150" dirty="0"/>
-          </a:p>
-        </p:txBody>
-      </p:sp>
-      <p:sp>
-        <p:nvSpPr>
-          <p:cNvPr id="31" name="Text 29"/>
-          <p:cNvSpPr txBox="1"/>
-          <p:nvPr/>
-        </p:nvSpPr>
-        <p:spPr>
-          <a:xfrm>
-            <a:off x="566928" y="5440680"/>
-            <a:ext cx="11055096" cy="320040"/>
-          </a:xfrm>
-          <a:prstGeom prst="rect">
-            <a:avLst/>
-          </a:prstGeom>
-          <a:noFill/>
-          <a:ln/>
-        </p:spPr>
-        <p:txBody>
-          <a:bodyPr wrap="square" lIns="0" tIns="0" rIns="0" bIns="0" rtlCol="0" anchor="ctr"/>
-          <a:lstStyle/>
-          <a:p>
-            <a:pPr indent="0" marL="0">
-              <a:buNone/>
-            </a:pPr>
-            <a:r>
-              <a:rPr lang="en-US" sz="1150" dirty="0">
-                <a:solidFill>
-                  <a:srgbClr val="9E5D06"/>
-                </a:solidFill>
-                <a:latin typeface="Courier New" pitchFamily="34" charset="0"/>
-                <a:ea typeface="Courier New" pitchFamily="34" charset="-122"/>
-                <a:cs typeface="Courier New" pitchFamily="34" charset="-120"/>
-              </a:rPr>
-              <a:t>dev : 1 instance, 1 NAT, base mono-zone        prod : 3 instances, 3 zones, base Multi-AZ, 14 jours de sauvegardes</a:t>
+              <a:t>Terraform va chercher lui-même l'image système, les zones disponibles, et même notre adresse IP — celle qui aura le droit de se connecter.</a:t>
             </a:r>
             <a:endParaRPr lang="en-US" sz="1150" dirty="0"/>
           </a:p>
@@ -8940,7 +8857,7 @@
                 <a:ea typeface="Courier New" pitchFamily="34" charset="-122"/>
                 <a:cs typeface="Courier New" pitchFamily="34" charset="-120"/>
               </a:rPr>
-              <a:t>05 — CONFIGURATION</a:t>
+              <a:t>05 — ANSIBLE</a:t>
             </a:r>
             <a:endParaRPr lang="en-US" sz="1100" dirty="0"/>
           </a:p>
@@ -8979,7 +8896,7 @@
                 <a:ea typeface="Arial" pitchFamily="34" charset="-122"/>
                 <a:cs typeface="Arial" pitchFamily="34" charset="-120"/>
               </a:rPr>
-              <a:t>Ansible : l'inventaire, c'est l'état Terraform</a:t>
+              <a:t>Ansible lit les adresses chez Terraform</a:t>
             </a:r>
             <a:endParaRPr lang="en-US" sz="3000" dirty="0"/>
           </a:p>
@@ -8987,18 +8904,57 @@
       </p:sp>
       <p:sp>
         <p:nvSpPr>
-          <p:cNvPr id="4" name="Shape 2"/>
+          <p:cNvPr id="4" name="Text 2"/>
+          <p:cNvSpPr txBox="1"/>
+          <p:nvPr/>
+        </p:nvSpPr>
+        <p:spPr>
+          <a:xfrm>
+            <a:off x="566928" y="1444752"/>
+            <a:ext cx="10789920" cy="365760"/>
+          </a:xfrm>
+          <a:prstGeom prst="rect">
+            <a:avLst/>
+          </a:prstGeom>
+          <a:noFill/>
+          <a:ln/>
+        </p:spPr>
+        <p:txBody>
+          <a:bodyPr wrap="square" lIns="0" tIns="0" rIns="0" bIns="0" rtlCol="0" anchor="ctr"/>
+          <a:lstStyle/>
+          <a:p>
+            <a:pPr indent="0" marL="0">
+              <a:buNone/>
+            </a:pPr>
+            <a:r>
+              <a:rPr lang="en-US" sz="1400" dirty="0">
+                <a:solidFill>
+                  <a:srgbClr val="5C6B7A"/>
+                </a:solidFill>
+                <a:latin typeface="Calibri" pitchFamily="34" charset="0"/>
+                <a:ea typeface="Calibri" pitchFamily="34" charset="-122"/>
+                <a:cs typeface="Calibri" pitchFamily="34" charset="-120"/>
+              </a:rPr>
+              <a:t>Terraform connaît déjà les adresses des serveurs. Plutôt que de les recopier à la main, Ansible va les lire chez lui.</a:t>
+            </a:r>
+            <a:endParaRPr lang="en-US" sz="1400" dirty="0"/>
+          </a:p>
+        </p:txBody>
+      </p:sp>
+      <p:sp>
+        <p:nvSpPr>
+          <p:cNvPr id="5" name="Shape 3"/>
           <p:cNvSpPr/>
           <p:nvPr/>
         </p:nvSpPr>
         <p:spPr>
           <a:xfrm>
-            <a:off x="566928" y="1536192"/>
-            <a:ext cx="6537960" cy="2606040"/>
+            <a:off x="566928" y="1938528"/>
+            <a:ext cx="6537960" cy="2286000"/>
           </a:xfrm>
           <a:prstGeom prst="roundRect">
             <a:avLst>
-              <a:gd name="adj" fmla="val 1404"/>
+              <a:gd name="adj" fmla="val 1600"/>
             </a:avLst>
           </a:prstGeom>
           <a:solidFill>
@@ -9014,14 +8970,14 @@
       </p:sp>
       <p:sp>
         <p:nvSpPr>
-          <p:cNvPr id="5" name="Text 3"/>
-          <p:cNvSpPr txBox="1"/>
-          <p:nvPr/>
-        </p:nvSpPr>
-        <p:spPr>
-          <a:xfrm>
-            <a:off x="731520" y="1645920"/>
-            <a:ext cx="6208776" cy="2386584"/>
+          <p:cNvPr id="6" name="Text 4"/>
+          <p:cNvSpPr txBox="1"/>
+          <p:nvPr/>
+        </p:nvSpPr>
+        <p:spPr>
+          <a:xfrm>
+            <a:off x="731520" y="2048256"/>
+            <a:ext cx="6208776" cy="2066544"/>
           </a:xfrm>
           <a:prstGeom prst="rect">
             <a:avLst/>
@@ -9035,12 +8991,12 @@
           <a:p>
             <a:pPr indent="0" marL="0">
               <a:lnSpc>
-                <a:spcPts val="1650"/>
+                <a:spcPts val="1725"/>
               </a:lnSpc>
               <a:buNone/>
             </a:pPr>
             <a:r>
-              <a:rPr lang="en-US" sz="1100" dirty="0">
+              <a:rPr lang="en-US" sz="1150" dirty="0">
                 <a:solidFill>
                   <a:srgbClr val="17222C"/>
                 </a:solidFill>
@@ -9048,19 +9004,19 @@
                 <a:ea typeface="Courier New" pitchFamily="34" charset="-122"/>
                 <a:cs typeface="Courier New" pitchFamily="34" charset="-120"/>
               </a:rPr>
-              <a:t># terraform/ansible.tf — Terraform publie les hôtes et les faits</a:t>
-            </a:r>
-            <a:endParaRPr lang="en-US" sz="1100" dirty="0"/>
+              <a:t># Terraform écrit la liste des serveurs…</a:t>
+            </a:r>
+            <a:endParaRPr lang="en-US" sz="1150" dirty="0"/>
           </a:p>
           <a:p>
             <a:pPr indent="0" marL="0">
               <a:lnSpc>
-                <a:spcPts val="1650"/>
+                <a:spcPts val="1725"/>
               </a:lnSpc>
               <a:buNone/>
             </a:pPr>
             <a:r>
-              <a:rPr lang="en-US" sz="1100" dirty="0">
+              <a:rPr lang="en-US" sz="1150" dirty="0">
                 <a:solidFill>
                   <a:srgbClr val="17222C"/>
                 </a:solidFill>
@@ -9070,17 +9026,17 @@
               </a:rPr>
               <a:t>resource "ansible_host" "app" {</a:t>
             </a:r>
-            <a:endParaRPr lang="en-US" sz="1100" dirty="0"/>
+            <a:endParaRPr lang="en-US" sz="1150" dirty="0"/>
           </a:p>
           <a:p>
             <a:pPr indent="0" marL="0">
               <a:lnSpc>
-                <a:spcPts val="1650"/>
+                <a:spcPts val="1725"/>
               </a:lnSpc>
               <a:buNone/>
             </a:pPr>
             <a:r>
-              <a:rPr lang="en-US" sz="1100" dirty="0">
+              <a:rPr lang="en-US" sz="1150" dirty="0">
                 <a:solidFill>
                   <a:srgbClr val="17222C"/>
                 </a:solidFill>
@@ -9088,19 +9044,19 @@
                 <a:ea typeface="Courier New" pitchFamily="34" charset="-122"/>
                 <a:cs typeface="Courier New" pitchFamily="34" charset="-120"/>
               </a:rPr>
-              <a:t>  count     = local.app_instance_count</a:t>
-            </a:r>
-            <a:endParaRPr lang="en-US" sz="1100" dirty="0"/>
+              <a:t>  name      = "taylorshift-dev-app-1"</a:t>
+            </a:r>
+            <a:endParaRPr lang="en-US" sz="1150" dirty="0"/>
           </a:p>
           <a:p>
             <a:pPr indent="0" marL="0">
               <a:lnSpc>
-                <a:spcPts val="1650"/>
+                <a:spcPts val="1725"/>
               </a:lnSpc>
               <a:buNone/>
             </a:pPr>
             <a:r>
-              <a:rPr lang="en-US" sz="1100" dirty="0">
+              <a:rPr lang="en-US" sz="1150" dirty="0">
                 <a:solidFill>
                   <a:srgbClr val="17222C"/>
                 </a:solidFill>
@@ -9108,19 +9064,19 @@
                 <a:ea typeface="Courier New" pitchFamily="34" charset="-122"/>
                 <a:cs typeface="Courier New" pitchFamily="34" charset="-120"/>
               </a:rPr>
-              <a:t>  name      = "${local.name_prefix}-app-${count.index + 1}"</a:t>
-            </a:r>
-            <a:endParaRPr lang="en-US" sz="1100" dirty="0"/>
+              <a:t>  groups    = ["prestashop"]</a:t>
+            </a:r>
+            <a:endParaRPr lang="en-US" sz="1150" dirty="0"/>
           </a:p>
           <a:p>
             <a:pPr indent="0" marL="0">
               <a:lnSpc>
-                <a:spcPts val="1650"/>
+                <a:spcPts val="1725"/>
               </a:lnSpc>
               <a:buNone/>
             </a:pPr>
             <a:r>
-              <a:rPr lang="en-US" sz="1100" dirty="0">
+              <a:rPr lang="en-US" sz="1150" dirty="0">
                 <a:solidFill>
                   <a:srgbClr val="17222C"/>
                 </a:solidFill>
@@ -9128,19 +9084,19 @@
                 <a:ea typeface="Courier New" pitchFamily="34" charset="-122"/>
                 <a:cs typeface="Courier New" pitchFamily="34" charset="-120"/>
               </a:rPr>
-              <a:t>  groups    = ["prestashop"]</a:t>
-            </a:r>
-            <a:endParaRPr lang="en-US" sz="1100" dirty="0"/>
+              <a:t>  variables = { ansible_host = ..., db_host = ... }</a:t>
+            </a:r>
+            <a:endParaRPr lang="en-US" sz="1150" dirty="0"/>
           </a:p>
           <a:p>
             <a:pPr indent="0" marL="0">
               <a:lnSpc>
-                <a:spcPts val="1650"/>
+                <a:spcPts val="1725"/>
               </a:lnSpc>
               <a:buNone/>
             </a:pPr>
             <a:r>
-              <a:rPr lang="en-US" sz="1100" dirty="0">
+              <a:rPr lang="en-US" sz="1150" dirty="0">
                 <a:solidFill>
                   <a:srgbClr val="17222C"/>
                 </a:solidFill>
@@ -9148,19 +9104,28 @@
                 <a:ea typeface="Courier New" pitchFamily="34" charset="-122"/>
                 <a:cs typeface="Courier New" pitchFamily="34" charset="-120"/>
               </a:rPr>
-              <a:t>  variables = { ansible_host = ..., db_host = ..., efs_dns_name = ... }</a:t>
-            </a:r>
-            <a:endParaRPr lang="en-US" sz="1100" dirty="0"/>
+              <a:t>}</a:t>
+            </a:r>
+            <a:endParaRPr lang="en-US" sz="1150" dirty="0"/>
           </a:p>
           <a:p>
             <a:pPr indent="0" marL="0">
               <a:lnSpc>
-                <a:spcPts val="1650"/>
+                <a:spcPts val="1725"/>
               </a:lnSpc>
               <a:buNone/>
             </a:pPr>
-            <a:r>
-              <a:rPr lang="en-US" sz="1100" dirty="0">
+            <a:endParaRPr lang="en-US" sz="1150" dirty="0"/>
+          </a:p>
+          <a:p>
+            <a:pPr indent="0" marL="0">
+              <a:lnSpc>
+                <a:spcPts val="1725"/>
+              </a:lnSpc>
+              <a:buNone/>
+            </a:pPr>
+            <a:r>
+              <a:rPr lang="en-US" sz="1150" dirty="0">
                 <a:solidFill>
                   <a:srgbClr val="17222C"/>
                 </a:solidFill>
@@ -9168,28 +9133,19 @@
                 <a:ea typeface="Courier New" pitchFamily="34" charset="-122"/>
                 <a:cs typeface="Courier New" pitchFamily="34" charset="-120"/>
               </a:rPr>
-              <a:t>}</a:t>
-            </a:r>
-            <a:endParaRPr lang="en-US" sz="1100" dirty="0"/>
+              <a:t># …et Ansible la relit. C'est tout.</a:t>
+            </a:r>
+            <a:endParaRPr lang="en-US" sz="1150" dirty="0"/>
           </a:p>
           <a:p>
             <a:pPr indent="0" marL="0">
               <a:lnSpc>
-                <a:spcPts val="1650"/>
+                <a:spcPts val="1725"/>
               </a:lnSpc>
               <a:buNone/>
             </a:pPr>
-            <a:endParaRPr lang="en-US" sz="1100" dirty="0"/>
-          </a:p>
-          <a:p>
-            <a:pPr indent="0" marL="0">
-              <a:lnSpc>
-                <a:spcPts val="1650"/>
-              </a:lnSpc>
-              <a:buNone/>
-            </a:pPr>
-            <a:r>
-              <a:rPr lang="en-US" sz="1100" dirty="0">
+            <a:r>
+              <a:rPr lang="en-US" sz="1150" dirty="0">
                 <a:solidFill>
                   <a:srgbClr val="17222C"/>
                 </a:solidFill>
@@ -9197,66 +9153,26 @@
                 <a:ea typeface="Courier New" pitchFamily="34" charset="-122"/>
                 <a:cs typeface="Courier New" pitchFamily="34" charset="-120"/>
               </a:rPr>
-              <a:t># ansible/inventory.yml — Ansible les relit</a:t>
-            </a:r>
-            <a:endParaRPr lang="en-US" sz="1100" dirty="0"/>
-          </a:p>
-          <a:p>
-            <a:pPr indent="0" marL="0">
-              <a:lnSpc>
-                <a:spcPts val="1650"/>
-              </a:lnSpc>
-              <a:buNone/>
-            </a:pPr>
-            <a:r>
-              <a:rPr lang="en-US" sz="1100" dirty="0">
-                <a:solidFill>
-                  <a:srgbClr val="17222C"/>
-                </a:solidFill>
-                <a:latin typeface="Courier New" pitchFamily="34" charset="0"/>
-                <a:ea typeface="Courier New" pitchFamily="34" charset="-122"/>
-                <a:cs typeface="Courier New" pitchFamily="34" charset="-120"/>
-              </a:rPr>
               <a:t>plugin: cloud.terraform.terraform_provider</a:t>
             </a:r>
-            <a:endParaRPr lang="en-US" sz="1100" dirty="0"/>
-          </a:p>
-          <a:p>
-            <a:pPr indent="0" marL="0">
-              <a:lnSpc>
-                <a:spcPts val="1650"/>
-              </a:lnSpc>
-              <a:buNone/>
-            </a:pPr>
-            <a:r>
-              <a:rPr lang="en-US" sz="1100" dirty="0">
-                <a:solidFill>
-                  <a:srgbClr val="17222C"/>
-                </a:solidFill>
-                <a:latin typeface="Courier New" pitchFamily="34" charset="0"/>
-                <a:ea typeface="Courier New" pitchFamily="34" charset="-122"/>
-                <a:cs typeface="Courier New" pitchFamily="34" charset="-120"/>
-              </a:rPr>
-              <a:t>project_path: ./terraform</a:t>
-            </a:r>
-            <a:endParaRPr lang="en-US" sz="1100" dirty="0"/>
-          </a:p>
-        </p:txBody>
-      </p:sp>
-      <p:sp>
-        <p:nvSpPr>
-          <p:cNvPr id="6" name="Shape 4"/>
+            <a:endParaRPr lang="en-US" sz="1150" dirty="0"/>
+          </a:p>
+        </p:txBody>
+      </p:sp>
+      <p:sp>
+        <p:nvSpPr>
+          <p:cNvPr id="7" name="Shape 5"/>
           <p:cNvSpPr/>
           <p:nvPr/>
         </p:nvSpPr>
         <p:spPr>
           <a:xfrm>
-            <a:off x="7360920" y="1536192"/>
-            <a:ext cx="4261104" cy="1325880"/>
+            <a:off x="7360920" y="1938528"/>
+            <a:ext cx="4261104" cy="1234440"/>
           </a:xfrm>
           <a:prstGeom prst="roundRect">
             <a:avLst>
-              <a:gd name="adj" fmla="val 4138"/>
+              <a:gd name="adj" fmla="val 4444"/>
             </a:avLst>
           </a:prstGeom>
           <a:solidFill>
@@ -9272,13 +9188,13 @@
       </p:sp>
       <p:sp>
         <p:nvSpPr>
-          <p:cNvPr id="7" name="Text 5"/>
-          <p:cNvSpPr txBox="1"/>
-          <p:nvPr/>
-        </p:nvSpPr>
-        <p:spPr>
-          <a:xfrm>
-            <a:off x="7543800" y="1655064"/>
+          <p:cNvPr id="8" name="Text 6"/>
+          <p:cNvSpPr txBox="1"/>
+          <p:nvPr/>
+        </p:nvSpPr>
+        <p:spPr>
+          <a:xfrm>
+            <a:off x="7543800" y="2057400"/>
             <a:ext cx="3931920" cy="274320"/>
           </a:xfrm>
           <a:prstGeom prst="rect">
@@ -9303,7 +9219,7 @@
                 <a:ea typeface="Arial" pitchFamily="34" charset="-122"/>
                 <a:cs typeface="Arial" pitchFamily="34" charset="-120"/>
               </a:rPr>
-              <a:t>Rôles réutilisables</a:t>
+              <a:t>Des rôles qu'on réutilise</a:t>
             </a:r>
             <a:endParaRPr lang="en-US" sz="1300" dirty="0"/>
           </a:p>
@@ -9311,14 +9227,14 @@
       </p:sp>
       <p:sp>
         <p:nvSpPr>
-          <p:cNvPr id="8" name="Text 6"/>
-          <p:cNvSpPr txBox="1"/>
-          <p:nvPr/>
-        </p:nvSpPr>
-        <p:spPr>
-          <a:xfrm>
-            <a:off x="7543800" y="1956816"/>
-            <a:ext cx="3931920" cy="841248"/>
+          <p:cNvPr id="9" name="Text 7"/>
+          <p:cNvSpPr txBox="1"/>
+          <p:nvPr/>
+        </p:nvSpPr>
+        <p:spPr>
+          <a:xfrm>
+            <a:off x="7543800" y="2359152"/>
+            <a:ext cx="3931920" cy="777240"/>
           </a:xfrm>
           <a:prstGeom prst="rect">
             <a:avLst/>
@@ -9342,7 +9258,7 @@
                 <a:ea typeface="Calibri" pitchFamily="34" charset="-122"/>
                 <a:cs typeface="Calibri" pitchFamily="34" charset="-120"/>
               </a:rPr>
-              <a:t>common, efs, prestashop, plus geerlingguy.docker depuis Galaxy. Le bastion et la boutique partagent le même rôle common, avec d'autres variables.</a:t>
+              <a:t>Le serveur d'entrée et les caisses partagent le même rôle de base, avec des réglages différents. Docker vient d'un rôle public, installé depuis Galaxy.</a:t>
             </a:r>
             <a:endParaRPr lang="en-US" sz="1100" dirty="0"/>
           </a:p>
@@ -9350,18 +9266,18 @@
       </p:sp>
       <p:sp>
         <p:nvSpPr>
-          <p:cNvPr id="9" name="Shape 7"/>
+          <p:cNvPr id="10" name="Shape 8"/>
           <p:cNvSpPr/>
           <p:nvPr/>
         </p:nvSpPr>
         <p:spPr>
           <a:xfrm>
-            <a:off x="7360920" y="3017520"/>
-            <a:ext cx="4261104" cy="1325880"/>
+            <a:off x="7360920" y="3310128"/>
+            <a:ext cx="4261104" cy="1234440"/>
           </a:xfrm>
           <a:prstGeom prst="roundRect">
             <a:avLst>
-              <a:gd name="adj" fmla="val 4138"/>
+              <a:gd name="adj" fmla="val 4444"/>
             </a:avLst>
           </a:prstGeom>
           <a:solidFill>
@@ -9377,13 +9293,13 @@
       </p:sp>
       <p:sp>
         <p:nvSpPr>
-          <p:cNvPr id="10" name="Text 8"/>
-          <p:cNvSpPr txBox="1"/>
-          <p:nvPr/>
-        </p:nvSpPr>
-        <p:spPr>
-          <a:xfrm>
-            <a:off x="7543800" y="3136392"/>
+          <p:cNvPr id="11" name="Text 9"/>
+          <p:cNvSpPr txBox="1"/>
+          <p:nvPr/>
+        </p:nvSpPr>
+        <p:spPr>
+          <a:xfrm>
+            <a:off x="7543800" y="3429000"/>
             <a:ext cx="3931920" cy="274320"/>
           </a:xfrm>
           <a:prstGeom prst="rect">
@@ -9408,7 +9324,7 @@
                 <a:ea typeface="Arial" pitchFamily="34" charset="-122"/>
                 <a:cs typeface="Arial" pitchFamily="34" charset="-120"/>
               </a:rPr>
-              <a:t>Secrets</a:t>
+              <a:t>Les secrets sont chiffrés</a:t>
             </a:r>
             <a:endParaRPr lang="en-US" sz="1300" dirty="0"/>
           </a:p>
@@ -9416,14 +9332,14 @@
       </p:sp>
       <p:sp>
         <p:nvSpPr>
-          <p:cNvPr id="11" name="Text 9"/>
-          <p:cNvSpPr txBox="1"/>
-          <p:nvPr/>
-        </p:nvSpPr>
-        <p:spPr>
-          <a:xfrm>
-            <a:off x="7543800" y="3438144"/>
-            <a:ext cx="3931920" cy="841248"/>
+          <p:cNvPr id="12" name="Text 10"/>
+          <p:cNvSpPr txBox="1"/>
+          <p:nvPr/>
+        </p:nvSpPr>
+        <p:spPr>
+          <a:xfrm>
+            <a:off x="7543800" y="3730752"/>
+            <a:ext cx="3931920" cy="777240"/>
           </a:xfrm>
           <a:prstGeom prst="rect">
             <a:avLst/>
@@ -9447,7 +9363,7 @@
                 <a:ea typeface="Calibri" pitchFamily="34" charset="-122"/>
                 <a:cs typeface="Calibri" pitchFamily="34" charset="-120"/>
               </a:rPr>
-              <a:t>Le back-office est chiffré par Vault. Le mot de passe de la base n'est même pas dans le dépôt : chaque instance le lit dans Secrets Manager avec son rôle IAM.</a:t>
+              <a:t>Le mot de passe de l'administration est chiffré dans le dépôt. Celui de la base n'y est même pas.</a:t>
             </a:r>
             <a:endParaRPr lang="en-US" sz="1100" dirty="0"/>
           </a:p>
@@ -9455,18 +9371,18 @@
       </p:sp>
       <p:sp>
         <p:nvSpPr>
-          <p:cNvPr id="12" name="Shape 10"/>
+          <p:cNvPr id="13" name="Shape 11"/>
           <p:cNvSpPr/>
           <p:nvPr/>
         </p:nvSpPr>
         <p:spPr>
           <a:xfrm>
-            <a:off x="7360920" y="4498848"/>
-            <a:ext cx="4261104" cy="1325880"/>
+            <a:off x="7360920" y="4681728"/>
+            <a:ext cx="4261104" cy="1234440"/>
           </a:xfrm>
           <a:prstGeom prst="roundRect">
             <a:avLst>
-              <a:gd name="adj" fmla="val 4138"/>
+              <a:gd name="adj" fmla="val 4444"/>
             </a:avLst>
           </a:prstGeom>
           <a:solidFill>
@@ -9482,13 +9398,13 @@
       </p:sp>
       <p:sp>
         <p:nvSpPr>
-          <p:cNvPr id="13" name="Text 11"/>
-          <p:cNvSpPr txBox="1"/>
-          <p:nvPr/>
-        </p:nvSpPr>
-        <p:spPr>
-          <a:xfrm>
-            <a:off x="7543800" y="4617720"/>
+          <p:cNvPr id="14" name="Text 12"/>
+          <p:cNvSpPr txBox="1"/>
+          <p:nvPr/>
+        </p:nvSpPr>
+        <p:spPr>
+          <a:xfrm>
+            <a:off x="7543800" y="4800600"/>
             <a:ext cx="3931920" cy="274320"/>
           </a:xfrm>
           <a:prstGeom prst="rect">
@@ -9513,7 +9429,7 @@
                 <a:ea typeface="Arial" pitchFamily="34" charset="-122"/>
                 <a:cs typeface="Arial" pitchFamily="34" charset="-120"/>
               </a:rPr>
-              <a:t>Idempotence</a:t>
+              <a:t>On peut le relancer sans risque</a:t>
             </a:r>
             <a:endParaRPr lang="en-US" sz="1300" dirty="0"/>
           </a:p>
@@ -9521,14 +9437,14 @@
       </p:sp>
       <p:sp>
         <p:nvSpPr>
-          <p:cNvPr id="14" name="Text 12"/>
-          <p:cNvSpPr txBox="1"/>
-          <p:nvPr/>
-        </p:nvSpPr>
-        <p:spPr>
-          <a:xfrm>
-            <a:off x="7543800" y="4919472"/>
-            <a:ext cx="3931920" cy="841248"/>
+          <p:cNvPr id="15" name="Text 13"/>
+          <p:cNvSpPr txBox="1"/>
+          <p:nvPr/>
+        </p:nvSpPr>
+        <p:spPr>
+          <a:xfrm>
+            <a:off x="7543800" y="5102352"/>
+            <a:ext cx="3931920" cy="777240"/>
           </a:xfrm>
           <a:prstGeom prst="rect">
             <a:avLst/>
@@ -9552,7 +9468,7 @@
                 <a:ea typeface="Calibri" pitchFamily="34" charset="-122"/>
                 <a:cs typeface="Calibri" pitchFamily="34" charset="-120"/>
               </a:rPr>
-              <a:t>L'installeur tourne une seule fois, dans un conteneur jetable. Le conteneur qui sert la boutique est toujours créé installeur désactivé.</a:t>
+              <a:t>Ansible décrit l'état voulu, pas des étapes. Si tout est déjà en place, il ne touche à rien.</a:t>
             </a:r>
             <a:endParaRPr lang="en-US" sz="1100" dirty="0"/>
           </a:p>
@@ -9560,18 +9476,18 @@
       </p:sp>
       <p:sp>
         <p:nvSpPr>
-          <p:cNvPr id="15" name="Shape 13"/>
+          <p:cNvPr id="16" name="Shape 14"/>
           <p:cNvSpPr/>
           <p:nvPr/>
         </p:nvSpPr>
         <p:spPr>
           <a:xfrm>
-            <a:off x="566928" y="4343400"/>
-            <a:ext cx="6537960" cy="868680"/>
+            <a:off x="566928" y="4434840"/>
+            <a:ext cx="6537960" cy="914400"/>
           </a:xfrm>
           <a:prstGeom prst="roundRect">
             <a:avLst>
-              <a:gd name="adj" fmla="val 5263"/>
+              <a:gd name="adj" fmla="val 5000"/>
             </a:avLst>
           </a:prstGeom>
           <a:solidFill>
@@ -9587,13 +9503,13 @@
       </p:sp>
       <p:sp>
         <p:nvSpPr>
-          <p:cNvPr id="16" name="Text 14"/>
-          <p:cNvSpPr txBox="1"/>
-          <p:nvPr/>
-        </p:nvSpPr>
-        <p:spPr>
-          <a:xfrm>
-            <a:off x="795528" y="4462272"/>
+          <p:cNvPr id="17" name="Text 15"/>
+          <p:cNvSpPr txBox="1"/>
+          <p:nvPr/>
+        </p:nvSpPr>
+        <p:spPr>
+          <a:xfrm>
+            <a:off x="795528" y="4553712"/>
             <a:ext cx="6126480" cy="320040"/>
           </a:xfrm>
           <a:prstGeom prst="rect">
@@ -9610,7 +9526,7 @@
               <a:buNone/>
             </a:pPr>
             <a:r>
-              <a:rPr lang="en-US" sz="1500" b="1" dirty="0">
+              <a:rPr lang="en-US" sz="1600" b="1" dirty="0">
                 <a:solidFill>
                   <a:srgbClr val="2E7D4F"/>
                 </a:solidFill>
@@ -9618,21 +9534,21 @@
                 <a:ea typeface="Arial" pitchFamily="34" charset="-122"/>
                 <a:cs typeface="Arial" pitchFamily="34" charset="-120"/>
               </a:rPr>
-              <a:t>Deuxième exécution du playbook  :  changed=0</a:t>
-            </a:r>
-            <a:endParaRPr lang="en-US" sz="1500" dirty="0"/>
-          </a:p>
-        </p:txBody>
-      </p:sp>
-      <p:sp>
-        <p:nvSpPr>
-          <p:cNvPr id="17" name="Text 15"/>
-          <p:cNvSpPr txBox="1"/>
-          <p:nvPr/>
-        </p:nvSpPr>
-        <p:spPr>
-          <a:xfrm>
-            <a:off x="795528" y="4791456"/>
+              <a:t>On relance : « changed=0 »</a:t>
+            </a:r>
+            <a:endParaRPr lang="en-US" sz="1600" dirty="0"/>
+          </a:p>
+        </p:txBody>
+      </p:sp>
+      <p:sp>
+        <p:nvSpPr>
+          <p:cNvPr id="18" name="Text 16"/>
+          <p:cNvSpPr txBox="1"/>
+          <p:nvPr/>
+        </p:nvSpPr>
+        <p:spPr>
+          <a:xfrm>
+            <a:off x="795528" y="4901184"/>
             <a:ext cx="6126480" cy="320040"/>
           </a:xfrm>
           <a:prstGeom prst="rect">
@@ -9649,7 +9565,7 @@
               <a:buNone/>
             </a:pPr>
             <a:r>
-              <a:rPr lang="en-US" sz="1150" dirty="0">
+              <a:rPr lang="en-US" sz="1250" dirty="0">
                 <a:solidFill>
                   <a:srgbClr val="5C6B7A"/>
                 </a:solidFill>
@@ -9657,9 +9573,9 @@
                 <a:ea typeface="Calibri" pitchFamily="34" charset="-122"/>
                 <a:cs typeface="Calibri" pitchFamily="34" charset="-120"/>
               </a:rPr>
-              <a:t>Aucune adresse, aucun point de terminaison n'est recopié à la main entre les deux outils.</a:t>
-            </a:r>
-            <a:endParaRPr lang="en-US" sz="1150" dirty="0"/>
+              <a:t>Zéro modification. La machine était déjà dans l'état demandé.</a:t>
+            </a:r>
+            <a:endParaRPr lang="en-US" sz="1250" dirty="0"/>
           </a:p>
         </p:txBody>
       </p:sp>
@@ -9721,7 +9637,7 @@
                 <a:ea typeface="Courier New" pitchFamily="34" charset="-122"/>
                 <a:cs typeface="Courier New" pitchFamily="34" charset="-120"/>
               </a:rPr>
-              <a:t>06 — GÉRER L'AFFLUENCE</a:t>
+              <a:t>06 — LE JOUR DE L'OUVERTURE</a:t>
             </a:r>
             <a:endParaRPr lang="en-US" sz="1100" dirty="0"/>
           </a:p>
@@ -9760,7 +9676,7 @@
                 <a:ea typeface="Arial" pitchFamily="34" charset="-122"/>
                 <a:cs typeface="Arial" pitchFamily="34" charset="-120"/>
               </a:rPr>
-              <a:t>La capacité est un nombre, parce que rien n'est stocké sur les instances</a:t>
+              <a:t>Plus de monde ? On change un chiffre</a:t>
             </a:r>
             <a:endParaRPr lang="en-US" sz="3000" dirty="0"/>
           </a:p>
@@ -9775,7 +9691,7 @@
         <p:spPr>
           <a:xfrm>
             <a:off x="566928" y="1463040"/>
-            <a:ext cx="10607040" cy="502920"/>
+            <a:ext cx="10789920" cy="457200"/>
           </a:xfrm>
           <a:prstGeom prst="rect">
             <a:avLst/>
@@ -9799,7 +9715,7 @@
                 <a:ea typeface="Calibri" pitchFamily="34" charset="-122"/>
                 <a:cs typeface="Calibri" pitchFamily="34" charset="-120"/>
               </a:rPr>
-              <a:t>Aucune commande, aucune image, aucune session ne vit sur une instance : le catalogue est dans RDS, le reste sur EFS. Ajouter de la capacité n'interrompt jamais les instances qui servent déjà.</a:t>
+              <a:t>Aucune commande, aucune image, aucun panier ne vit sur un serveur : tout est dans la base et sur le disque partagé. Du coup, ajouter un serveur ne dérange pas ceux qui travaillent déjà.</a:t>
             </a:r>
             <a:endParaRPr lang="en-US" sz="1400" dirty="0"/>
           </a:p>
@@ -9813,12 +9729,12 @@
         </p:nvSpPr>
         <p:spPr>
           <a:xfrm>
-            <a:off x="566928" y="2103120"/>
-            <a:ext cx="11055096" cy="1417320"/>
+            <a:off x="566928" y="2148840"/>
+            <a:ext cx="11055096" cy="1234440"/>
           </a:xfrm>
           <a:prstGeom prst="roundRect">
             <a:avLst>
-              <a:gd name="adj" fmla="val 2581"/>
+              <a:gd name="adj" fmla="val 2963"/>
             </a:avLst>
           </a:prstGeom>
           <a:solidFill>
@@ -9840,8 +9756,8 @@
         </p:nvSpPr>
         <p:spPr>
           <a:xfrm>
-            <a:off x="731520" y="2212848"/>
-            <a:ext cx="10725912" cy="1197864"/>
+            <a:off x="731520" y="2258568"/>
+            <a:ext cx="10725912" cy="1014984"/>
           </a:xfrm>
           <a:prstGeom prst="rect">
             <a:avLst/>
@@ -9855,12 +9771,12 @@
           <a:p>
             <a:pPr indent="0" marL="0">
               <a:lnSpc>
-                <a:spcPts val="1800"/>
+                <a:spcPts val="1875"/>
               </a:lnSpc>
               <a:buNone/>
             </a:pPr>
             <a:r>
-              <a:rPr lang="en-US" sz="1200" dirty="0">
+              <a:rPr lang="en-US" sz="1250" dirty="0">
                 <a:solidFill>
                   <a:srgbClr val="C9D6E2"/>
                 </a:solidFill>
@@ -9868,19 +9784,19 @@
                 <a:ea typeface="Courier New" pitchFamily="34" charset="-122"/>
                 <a:cs typeface="Courier New" pitchFamily="34" charset="-120"/>
               </a:rPr>
-              <a:t>terraform -chdir=terraform apply -var app_instance_count=6</a:t>
-            </a:r>
-            <a:endParaRPr lang="en-US" sz="1200" dirty="0"/>
+              <a:t>terraform apply -var app_instance_count=6      # on passe de 1 à 6 serveurs</a:t>
+            </a:r>
+            <a:endParaRPr lang="en-US" sz="1250" dirty="0"/>
           </a:p>
           <a:p>
             <a:pPr indent="0" marL="0">
               <a:lnSpc>
-                <a:spcPts val="1800"/>
+                <a:spcPts val="1875"/>
               </a:lnSpc>
               <a:buNone/>
             </a:pPr>
             <a:r>
-              <a:rPr lang="en-US" sz="1200" dirty="0">
+              <a:rPr lang="en-US" sz="1250" dirty="0">
                 <a:solidFill>
                   <a:srgbClr val="C9D6E2"/>
                 </a:solidFill>
@@ -9888,28 +9804,28 @@
                 <a:ea typeface="Courier New" pitchFamily="34" charset="-122"/>
                 <a:cs typeface="Courier New" pitchFamily="34" charset="-120"/>
               </a:rPr>
-              <a:t>ansible-playbook -i ansible/inventory.yml ansible/site.yml --ask-vault-pass</a:t>
-            </a:r>
-            <a:endParaRPr lang="en-US" sz="1200" dirty="0"/>
+              <a:t>ansible-playbook ... site.yml                  # on les installe</a:t>
+            </a:r>
+            <a:endParaRPr lang="en-US" sz="1250" dirty="0"/>
           </a:p>
           <a:p>
             <a:pPr indent="0" marL="0">
               <a:lnSpc>
-                <a:spcPts val="1800"/>
+                <a:spcPts val="1875"/>
               </a:lnSpc>
               <a:buNone/>
             </a:pPr>
-            <a:endParaRPr lang="en-US" sz="1200" dirty="0"/>
+            <a:endParaRPr lang="en-US" sz="1250" dirty="0"/>
           </a:p>
           <a:p>
             <a:pPr indent="0" marL="0">
               <a:lnSpc>
-                <a:spcPts val="1800"/>
+                <a:spcPts val="1875"/>
               </a:lnSpc>
               <a:buNone/>
             </a:pPr>
             <a:r>
-              <a:rPr lang="en-US" sz="1200" dirty="0">
+              <a:rPr lang="en-US" sz="1250" dirty="0">
                 <a:solidFill>
                   <a:srgbClr val="C9D6E2"/>
                 </a:solidFill>
@@ -9917,29 +9833,9 @@
                 <a:ea typeface="Courier New" pitchFamily="34" charset="-122"/>
                 <a:cs typeface="Courier New" pitchFamily="34" charset="-120"/>
               </a:rPr>
-              <a:t># les nouvelles instances sont réparties sur les zones, enregistrées dans le</a:t>
-            </a:r>
-            <a:endParaRPr lang="en-US" sz="1200" dirty="0"/>
-          </a:p>
-          <a:p>
-            <a:pPr indent="0" marL="0">
-              <a:lnSpc>
-                <a:spcPts val="1800"/>
-              </a:lnSpc>
-              <a:buNone/>
-            </a:pPr>
-            <a:r>
-              <a:rPr lang="en-US" sz="1200" dirty="0">
-                <a:solidFill>
-                  <a:srgbClr val="C9D6E2"/>
-                </a:solidFill>
-                <a:latin typeface="Courier New" pitchFamily="34" charset="0"/>
-                <a:ea typeface="Courier New" pitchFamily="34" charset="-122"/>
-                <a:cs typeface="Courier New" pitchFamily="34" charset="-120"/>
-              </a:rPr>
-              <a:t># groupe de cibles, reprises par l'inventaire, et configurées en ~3 minutes</a:t>
-            </a:r>
-            <a:endParaRPr lang="en-US" sz="1200" dirty="0"/>
+              <a:t># environ 3 minutes, sans couper la boutique</a:t>
+            </a:r>
+            <a:endParaRPr lang="en-US" sz="1250" dirty="0"/>
           </a:p>
         </p:txBody>
       </p:sp>
@@ -9951,12 +9847,12 @@
         </p:nvSpPr>
         <p:spPr>
           <a:xfrm>
-            <a:off x="566928" y="3794760"/>
-            <a:ext cx="3520440" cy="1554480"/>
+            <a:off x="566928" y="3657600"/>
+            <a:ext cx="3520440" cy="1691640"/>
           </a:xfrm>
           <a:prstGeom prst="roundRect">
             <a:avLst>
-              <a:gd name="adj" fmla="val 3529"/>
+              <a:gd name="adj" fmla="val 3243"/>
             </a:avLst>
           </a:prstGeom>
           <a:solidFill>
@@ -9978,7 +9874,7 @@
         </p:nvSpPr>
         <p:spPr>
           <a:xfrm>
-            <a:off x="795528" y="3931920"/>
+            <a:off x="795528" y="3794760"/>
             <a:ext cx="3108960" cy="228600"/>
           </a:xfrm>
           <a:prstGeom prst="rect">
@@ -10003,7 +9899,7 @@
                 <a:ea typeface="Courier New" pitchFamily="34" charset="-122"/>
                 <a:cs typeface="Courier New" pitchFamily="34" charset="-120"/>
               </a:rPr>
-              <a:t>ALARME CLOUDWATCH</a:t>
+              <a:t>AWS NOUS PRÉVIENT SI…</a:t>
             </a:r>
             <a:endParaRPr lang="en-US" sz="900" dirty="0"/>
           </a:p>
@@ -10017,7 +9913,7 @@
         </p:nvSpPr>
         <p:spPr>
           <a:xfrm>
-            <a:off x="795528" y="4187952"/>
+            <a:off x="795528" y="4069080"/>
             <a:ext cx="3108960" cy="320040"/>
           </a:xfrm>
           <a:prstGeom prst="rect">
@@ -10034,7 +9930,7 @@
               <a:buNone/>
             </a:pPr>
             <a:r>
-              <a:rPr lang="en-US" sz="1350" b="1" dirty="0">
+              <a:rPr lang="en-US" sz="1400" b="1" dirty="0">
                 <a:solidFill>
                   <a:srgbClr val="17222C"/>
                 </a:solidFill>
@@ -10042,9 +9938,9 @@
                 <a:ea typeface="Arial" pitchFamily="34" charset="-122"/>
                 <a:cs typeface="Arial" pitchFamily="34" charset="-120"/>
               </a:rPr>
-              <a:t>Temps de réponse &gt; 2 s</a:t>
-            </a:r>
-            <a:endParaRPr lang="en-US" sz="1350" dirty="0"/>
+              <a:t>Le site devient lent</a:t>
+            </a:r>
+            <a:endParaRPr lang="en-US" sz="1400" dirty="0"/>
           </a:p>
         </p:txBody>
       </p:sp>
@@ -10056,8 +9952,8 @@
         </p:nvSpPr>
         <p:spPr>
           <a:xfrm>
-            <a:off x="795528" y="4553712"/>
-            <a:ext cx="3108960" cy="685800"/>
+            <a:off x="795528" y="4462272"/>
+            <a:ext cx="3108960" cy="777240"/>
           </a:xfrm>
           <a:prstGeom prst="rect">
             <a:avLst/>
@@ -10081,7 +9977,7 @@
                 <a:ea typeface="Calibri" pitchFamily="34" charset="-122"/>
                 <a:cs typeface="Calibri" pitchFamily="34" charset="-120"/>
               </a:rPr>
-              <a:t>moyenne sur 3 minutes : la flotte sature, il faut ajouter des instances</a:t>
+              <a:t>Plus de 2 secondes de réponse pendant 3 minutes : la flotte sature, il faut ajouter des serveurs.</a:t>
             </a:r>
             <a:endParaRPr lang="en-US" sz="1150" dirty="0"/>
           </a:p>
@@ -10095,12 +9991,12 @@
         </p:nvSpPr>
         <p:spPr>
           <a:xfrm>
-            <a:off x="4334256" y="3794760"/>
-            <a:ext cx="3520440" cy="1554480"/>
+            <a:off x="4334256" y="3657600"/>
+            <a:ext cx="3520440" cy="1691640"/>
           </a:xfrm>
           <a:prstGeom prst="roundRect">
             <a:avLst>
-              <a:gd name="adj" fmla="val 3529"/>
+              <a:gd name="adj" fmla="val 3243"/>
             </a:avLst>
           </a:prstGeom>
           <a:solidFill>
@@ -10122,7 +10018,7 @@
         </p:nvSpPr>
         <p:spPr>
           <a:xfrm>
-            <a:off x="4562856" y="3931920"/>
+            <a:off x="4562856" y="3794760"/>
             <a:ext cx="3108960" cy="228600"/>
           </a:xfrm>
           <a:prstGeom prst="rect">
@@ -10147,7 +10043,7 @@
                 <a:ea typeface="Courier New" pitchFamily="34" charset="-122"/>
                 <a:cs typeface="Courier New" pitchFamily="34" charset="-120"/>
               </a:rPr>
-              <a:t>ALARME CLOUDWATCH</a:t>
+              <a:t>AWS NOUS PRÉVIENT SI…</a:t>
             </a:r>
             <a:endParaRPr lang="en-US" sz="900" dirty="0"/>
           </a:p>
@@ -10161,7 +10057,7 @@
         </p:nvSpPr>
         <p:spPr>
           <a:xfrm>
-            <a:off x="4562856" y="4187952"/>
+            <a:off x="4562856" y="4069080"/>
             <a:ext cx="3108960" cy="320040"/>
           </a:xfrm>
           <a:prstGeom prst="rect">
@@ -10178,7 +10074,7 @@
               <a:buNone/>
             </a:pPr>
             <a:r>
-              <a:rPr lang="en-US" sz="1350" b="1" dirty="0">
+              <a:rPr lang="en-US" sz="1400" b="1" dirty="0">
                 <a:solidFill>
                   <a:srgbClr val="17222C"/>
                 </a:solidFill>
@@ -10186,9 +10082,9 @@
                 <a:ea typeface="Arial" pitchFamily="34" charset="-122"/>
                 <a:cs typeface="Arial" pitchFamily="34" charset="-120"/>
               </a:rPr>
-              <a:t>Instances hors rotation</a:t>
-            </a:r>
-            <a:endParaRPr lang="en-US" sz="1350" dirty="0"/>
+              <a:t>Un serveur ne répond plus</a:t>
+            </a:r>
+            <a:endParaRPr lang="en-US" sz="1400" dirty="0"/>
           </a:p>
         </p:txBody>
       </p:sp>
@@ -10200,8 +10096,8 @@
         </p:nvSpPr>
         <p:spPr>
           <a:xfrm>
-            <a:off x="4562856" y="4553712"/>
-            <a:ext cx="3108960" cy="685800"/>
+            <a:off x="4562856" y="4462272"/>
+            <a:ext cx="3108960" cy="777240"/>
           </a:xfrm>
           <a:prstGeom prst="rect">
             <a:avLst/>
@@ -10225,7 +10121,7 @@
                 <a:ea typeface="Calibri" pitchFamily="34" charset="-122"/>
                 <a:cs typeface="Calibri" pitchFamily="34" charset="-120"/>
               </a:rPr>
-              <a:t>une machine a quitté le service — comprendre pourquoi avant qu'il y en ait deux</a:t>
+              <a:t>Il est sorti tout seul de la rotation. On va voir pourquoi avant qu'il y en ait deux.</a:t>
             </a:r>
             <a:endParaRPr lang="en-US" sz="1150" dirty="0"/>
           </a:p>
@@ -10239,12 +10135,12 @@
         </p:nvSpPr>
         <p:spPr>
           <a:xfrm>
-            <a:off x="8101584" y="3794760"/>
-            <a:ext cx="3520440" cy="1554480"/>
+            <a:off x="8101584" y="3657600"/>
+            <a:ext cx="3520440" cy="1691640"/>
           </a:xfrm>
           <a:prstGeom prst="roundRect">
             <a:avLst>
-              <a:gd name="adj" fmla="val 3529"/>
+              <a:gd name="adj" fmla="val 3243"/>
             </a:avLst>
           </a:prstGeom>
           <a:solidFill>
@@ -10266,7 +10162,7 @@
         </p:nvSpPr>
         <p:spPr>
           <a:xfrm>
-            <a:off x="8330184" y="3931920"/>
+            <a:off x="8330184" y="3794760"/>
             <a:ext cx="3108960" cy="228600"/>
           </a:xfrm>
           <a:prstGeom prst="rect">
@@ -10291,7 +10187,7 @@
                 <a:ea typeface="Courier New" pitchFamily="34" charset="-122"/>
                 <a:cs typeface="Courier New" pitchFamily="34" charset="-120"/>
               </a:rPr>
-              <a:t>ALARME CLOUDWATCH</a:t>
+              <a:t>AWS NOUS PRÉVIENT SI…</a:t>
             </a:r>
             <a:endParaRPr lang="en-US" sz="900" dirty="0"/>
           </a:p>
@@ -10305,7 +10201,7 @@
         </p:nvSpPr>
         <p:spPr>
           <a:xfrm>
-            <a:off x="8330184" y="4187952"/>
+            <a:off x="8330184" y="4069080"/>
             <a:ext cx="3108960" cy="320040"/>
           </a:xfrm>
           <a:prstGeom prst="rect">
@@ -10322,7 +10218,7 @@
               <a:buNone/>
             </a:pPr>
             <a:r>
-              <a:rPr lang="en-US" sz="1350" b="1" dirty="0">
+              <a:rPr lang="en-US" sz="1400" b="1" dirty="0">
                 <a:solidFill>
                   <a:srgbClr val="17222C"/>
                 </a:solidFill>
@@ -10330,9 +10226,9 @@
                 <a:ea typeface="Arial" pitchFamily="34" charset="-122"/>
                 <a:cs typeface="Arial" pitchFamily="34" charset="-120"/>
               </a:rPr>
-              <a:t>Erreurs 5xx &gt; 10 / min</a:t>
-            </a:r>
-            <a:endParaRPr lang="en-US" sz="1350" dirty="0"/>
+              <a:t>Le site renvoie des erreurs</a:t>
+            </a:r>
+            <a:endParaRPr lang="en-US" sz="1400" dirty="0"/>
           </a:p>
         </p:txBody>
       </p:sp>
@@ -10344,8 +10240,8 @@
         </p:nvSpPr>
         <p:spPr>
           <a:xfrm>
-            <a:off x="8330184" y="4553712"/>
-            <a:ext cx="3108960" cy="685800"/>
+            <a:off x="8330184" y="4462272"/>
+            <a:ext cx="3108960" cy="777240"/>
           </a:xfrm>
           <a:prstGeom prst="rect">
             <a:avLst/>
@@ -10369,7 +10265,7 @@
                 <a:ea typeface="Calibri" pitchFamily="34" charset="-122"/>
                 <a:cs typeface="Calibri" pitchFamily="34" charset="-120"/>
               </a:rPr>
-              <a:t>la boutique répond, mais mal</a:t>
+              <a:t>Plus de 10 erreurs par minute : la boutique répond, mais mal.</a:t>
             </a:r>
             <a:endParaRPr lang="en-US" sz="1150" dirty="0"/>
           </a:p>
@@ -10472,7 +10368,7 @@
                 <a:ea typeface="Arial" pitchFamily="34" charset="-122"/>
                 <a:cs typeface="Arial" pitchFamily="34" charset="-120"/>
               </a:rPr>
-              <a:t>Des temps mesurés, pas des espoirs</a:t>
+              <a:t>On a chronométré chaque panne</a:t>
             </a:r>
             <a:endParaRPr lang="en-US" sz="3000" dirty="0"/>
           </a:p>
@@ -10501,12 +10397,12 @@
             <a:tbl>
               <a:tblPr/>
               <a:tblGrid>
-                <a:gridCol w="2286000"/>
-                <a:gridCol w="5568696"/>
-                <a:gridCol w="1828800"/>
-                <a:gridCol w="1371600"/>
+                <a:gridCol w="2194560"/>
+                <a:gridCol w="5660136"/>
+                <a:gridCol w="1737360"/>
+                <a:gridCol w="1463040"/>
               </a:tblGrid>
-              <a:tr h="658368">
+              <a:tr h="713232">
                 <a:tc>
                   <a:txBody>
                     <a:bodyPr/>
@@ -10524,7 +10420,7 @@
                           <a:ea typeface="Calibri" pitchFamily="34" charset="-122"/>
                           <a:cs typeface="Calibri" pitchFamily="34" charset="-120"/>
                         </a:rPr>
-                        <a:t>PANNE</a:t>
+                        <a:t>CE QUI TOMBE</a:t>
                       </a:r>
                       <a:endParaRPr lang="en-US" sz="1250" dirty="0">
                         <a:latin typeface="Calibri" charset="0"/>
@@ -10592,7 +10488,7 @@
                           <a:ea typeface="Calibri" pitchFamily="34" charset="-122"/>
                           <a:cs typeface="Calibri" pitchFamily="34" charset="-120"/>
                         </a:rPr>
-                        <a:t>CE QUE VOIENT LES CLIENTS</a:t>
+                        <a:t>CE QUE VOIT LE CLIENT</a:t>
                       </a:r>
                       <a:endParaRPr lang="en-US" sz="1250" dirty="0">
                         <a:latin typeface="Calibri" charset="0"/>
@@ -10660,7 +10556,7 @@
                           <a:ea typeface="Calibri" pitchFamily="34" charset="-122"/>
                           <a:cs typeface="Calibri" pitchFamily="34" charset="-120"/>
                         </a:rPr>
-                        <a:t>REPRISE</a:t>
+                        <a:t>TEMPS</a:t>
                       </a:r>
                       <a:endParaRPr lang="en-US" sz="1250" dirty="0">
                         <a:latin typeface="Calibri" charset="0"/>
@@ -10728,7 +10624,7 @@
                           <a:ea typeface="Calibri" pitchFamily="34" charset="-122"/>
                           <a:cs typeface="Calibri" pitchFamily="34" charset="-120"/>
                         </a:rPr>
-                        <a:t>HUMAIN</a:t>
+                        <a:t>ON INTERVIENT ?</a:t>
                       </a:r>
                       <a:endParaRPr lang="en-US" sz="1250" dirty="0">
                         <a:latin typeface="Calibri" charset="0"/>
@@ -10780,7 +10676,7 @@
                   </a:tcPr>
                 </a:tc>
               </a:tr>
-              <a:tr h="658368">
+              <a:tr h="713232">
                 <a:tc>
                   <a:txBody>
                     <a:bodyPr/>
@@ -10798,7 +10694,7 @@
                           <a:ea typeface="Calibri" pitchFamily="34" charset="-122"/>
                           <a:cs typeface="Calibri" pitchFamily="34" charset="-120"/>
                         </a:rPr>
-                        <a:t>Conteneur ou instance</a:t>
+                        <a:t>Un serveur</a:t>
                       </a:r>
                       <a:endParaRPr lang="en-US" sz="1250" dirty="0">
                         <a:latin typeface="Calibri" charset="0"/>
@@ -10866,7 +10762,7 @@
                           <a:ea typeface="Calibri" pitchFamily="34" charset="-122"/>
                           <a:cs typeface="Calibri" pitchFamily="34" charset="-120"/>
                         </a:rPr>
-                        <a:t>Rien — sortie de rotation après 2 sondes échouées, puis 30 s de drainage des requêtes en cours</a:t>
+                        <a:t>Rien. Il est sorti de la rotation en 30 secondes, et les achats en cours ont le temps de se terminer.</a:t>
                       </a:r>
                       <a:endParaRPr lang="en-US" sz="1250" dirty="0">
                         <a:latin typeface="Calibri" charset="0"/>
@@ -11002,7 +10898,7 @@
                           <a:ea typeface="Calibri" pitchFamily="34" charset="-122"/>
                           <a:cs typeface="Calibri" pitchFamily="34" charset="-120"/>
                         </a:rPr>
-                        <a:t>aucun</a:t>
+                        <a:t>non</a:t>
                       </a:r>
                       <a:endParaRPr lang="en-US" sz="1250" dirty="0">
                         <a:latin typeface="Calibri" charset="0"/>
@@ -11054,7 +10950,7 @@
                   </a:tcPr>
                 </a:tc>
               </a:tr>
-              <a:tr h="658368">
+              <a:tr h="713232">
                 <a:tc>
                   <a:txBody>
                     <a:bodyPr/>
@@ -11072,7 +10968,7 @@
                           <a:ea typeface="Calibri" pitchFamily="34" charset="-122"/>
                           <a:cs typeface="Calibri" pitchFamily="34" charset="-120"/>
                         </a:rPr>
-                        <a:t>Une zone entière</a:t>
+                        <a:t>Une zone AWS entière</a:t>
                       </a:r>
                       <a:endParaRPr lang="en-US" sz="1250" dirty="0">
                         <a:latin typeface="Calibri" charset="0"/>
@@ -11140,7 +11036,7 @@
                           <a:ea typeface="Calibri" pitchFamily="34" charset="-122"/>
                           <a:cs typeface="Calibri" pitchFamily="34" charset="-120"/>
                         </a:rPr>
-                        <a:t>Rien — le load balancer cesse d'utiliser ce nœud, les autres zones absorbent</a:t>
+                        <a:t>Rien. Les serveurs des autres zones prennent le relais.</a:t>
                       </a:r>
                       <a:endParaRPr lang="en-US" sz="1250" dirty="0">
                         <a:latin typeface="Calibri" charset="0"/>
@@ -11276,7 +11172,7 @@
                           <a:ea typeface="Calibri" pitchFamily="34" charset="-122"/>
                           <a:cs typeface="Calibri" pitchFamily="34" charset="-120"/>
                         </a:rPr>
-                        <a:t>aucun</a:t>
+                        <a:t>non</a:t>
                       </a:r>
                       <a:endParaRPr lang="en-US" sz="1250" dirty="0">
                         <a:latin typeface="Calibri" charset="0"/>
@@ -11328,7 +11224,7 @@
                   </a:tcPr>
                 </a:tc>
               </a:tr>
-              <a:tr h="658368">
+              <a:tr h="713232">
                 <a:tc>
                   <a:txBody>
                     <a:bodyPr/>
@@ -11346,7 +11242,7 @@
                           <a:ea typeface="Calibri" pitchFamily="34" charset="-122"/>
                           <a:cs typeface="Calibri" pitchFamily="34" charset="-120"/>
                         </a:rPr>
-                        <a:t>Base de données</a:t>
+                        <a:t>La base de données</a:t>
                       </a:r>
                       <a:endParaRPr lang="en-US" sz="1250" dirty="0">
                         <a:latin typeface="Calibri" charset="0"/>
@@ -11414,7 +11310,7 @@
                           <a:ea typeface="Calibri" pitchFamily="34" charset="-122"/>
                           <a:cs typeface="Calibri" pitchFamily="34" charset="-120"/>
                         </a:rPr>
-                        <a:t>Une courte fenêtre d'erreurs, puis le service reprend sur l'instance de secours</a:t>
+                        <a:t>Quelques secondes d'erreur, puis ça repart sur la machine de secours.</a:t>
                       </a:r>
                       <a:endParaRPr lang="en-US" sz="1250" dirty="0">
                         <a:latin typeface="Calibri" charset="0"/>
@@ -11482,7 +11378,7 @@
                           <a:ea typeface="Calibri" pitchFamily="34" charset="-122"/>
                           <a:cs typeface="Calibri" pitchFamily="34" charset="-120"/>
                         </a:rPr>
-                        <a:t>60 à 120 s</a:t>
+                        <a:t>1 à 2 min</a:t>
                       </a:r>
                       <a:endParaRPr lang="en-US" sz="1250" dirty="0">
                         <a:latin typeface="Calibri" charset="0"/>
@@ -11550,7 +11446,7 @@
                           <a:ea typeface="Calibri" pitchFamily="34" charset="-122"/>
                           <a:cs typeface="Calibri" pitchFamily="34" charset="-120"/>
                         </a:rPr>
-                        <a:t>aucun (prod)</a:t>
+                        <a:t>non (en prod)</a:t>
                       </a:r>
                       <a:endParaRPr lang="en-US" sz="1250" dirty="0">
                         <a:latin typeface="Calibri" charset="0"/>
@@ -11602,7 +11498,7 @@
                   </a:tcPr>
                 </a:tc>
               </a:tr>
-              <a:tr h="658368">
+              <a:tr h="713232">
                 <a:tc>
                   <a:txBody>
                     <a:bodyPr/>
@@ -11620,7 +11516,7 @@
                           <a:ea typeface="Calibri" pitchFamily="34" charset="-122"/>
                           <a:cs typeface="Calibri" pitchFamily="34" charset="-120"/>
                         </a:rPr>
-                        <a:t>Bastion</a:t>
+                        <a:t>Notre serveur d'entrée</a:t>
                       </a:r>
                       <a:endParaRPr lang="en-US" sz="1250" dirty="0">
                         <a:latin typeface="Calibri" charset="0"/>
@@ -11688,7 +11584,7 @@
                           <a:ea typeface="Calibri" pitchFamily="34" charset="-122"/>
                           <a:cs typeface="Calibri" pitchFamily="34" charset="-120"/>
                         </a:rPr>
-                        <a:t>Rien — il ne porte qu'Ansible, jamais de client</a:t>
+                        <a:t>Rien du tout : aucun client ne passe par là.</a:t>
                       </a:r>
                       <a:endParaRPr lang="en-US" sz="1250" dirty="0">
                         <a:latin typeface="Calibri" charset="0"/>
@@ -11824,7 +11720,7 @@
                           <a:ea typeface="Calibri" pitchFamily="34" charset="-122"/>
                           <a:cs typeface="Calibri" pitchFamily="34" charset="-120"/>
                         </a:rPr>
-                        <a:t>recréer</a:t>
+                        <a:t>on le recrée</a:t>
                       </a:r>
                       <a:endParaRPr lang="en-US" sz="1250" dirty="0">
                         <a:latin typeface="Calibri" charset="0"/>
@@ -11888,12 +11784,12 @@
         </p:nvSpPr>
         <p:spPr>
           <a:xfrm>
-            <a:off x="566928" y="5029200"/>
-            <a:ext cx="11055096" cy="777240"/>
+            <a:off x="566928" y="4892040"/>
+            <a:ext cx="11055096" cy="868680"/>
           </a:xfrm>
           <a:prstGeom prst="roundRect">
             <a:avLst>
-              <a:gd name="adj" fmla="val 5882"/>
+              <a:gd name="adj" fmla="val 5263"/>
             </a:avLst>
           </a:prstGeom>
           <a:solidFill>
@@ -11915,24 +11811,24 @@
         </p:nvSpPr>
         <p:spPr>
           <a:xfrm>
-            <a:off x="822960" y="5138928"/>
-            <a:ext cx="10543032" cy="548640"/>
-          </a:xfrm>
-          <a:prstGeom prst="rect">
-            <a:avLst/>
-          </a:prstGeom>
-          <a:noFill/>
-          <a:ln/>
-        </p:spPr>
-        <p:txBody>
-          <a:bodyPr wrap="square" lIns="0" tIns="0" rIns="0" bIns="0" rtlCol="0" anchor="ctr"/>
-          <a:lstStyle/>
-          <a:p>
-            <a:pPr indent="0" marL="0">
-              <a:buNone/>
-            </a:pPr>
-            <a:r>
-              <a:rPr lang="en-US" sz="1300" dirty="0">
+            <a:off x="822960" y="5029200"/>
+            <a:ext cx="10543032" cy="640080"/>
+          </a:xfrm>
+          <a:prstGeom prst="rect">
+            <a:avLst/>
+          </a:prstGeom>
+          <a:noFill/>
+          <a:ln/>
+        </p:spPr>
+        <p:txBody>
+          <a:bodyPr wrap="square" lIns="0" tIns="0" rIns="0" bIns="0" rtlCol="0" anchor="ctr"/>
+          <a:lstStyle/>
+          <a:p>
+            <a:pPr indent="0" marL="0">
+              <a:buNone/>
+            </a:pPr>
+            <a:r>
+              <a:rPr lang="en-US" sz="1350" dirty="0">
                 <a:solidFill>
                   <a:srgbClr val="17222C"/>
                 </a:solidFill>
@@ -11940,9 +11836,9 @@
                 <a:ea typeface="Calibri" pitchFamily="34" charset="-122"/>
                 <a:cs typeface="Calibri" pitchFamily="34" charset="-120"/>
               </a:rPr>
-              <a:t>Les paniers et les sessions survivent à la perte d'une instance : les sessions PHP sont sur le stockage partagé, pas sur la machine. C'est la différence entre « un serveur est tombé » et « mon panier est vide ».</a:t>
-            </a:r>
-            <a:endParaRPr lang="en-US" sz="1300" dirty="0"/>
+              <a:t>Et surtout : le panier du client est conservé. Les paniers sont sur le disque partagé, pas sur le serveur qui tombe. C'est la différence entre « un serveur est tombé » et « mon panier est vide ».</a:t>
+            </a:r>
+            <a:endParaRPr lang="en-US" sz="1350" dirty="0"/>
           </a:p>
         </p:txBody>
       </p:sp>
@@ -12004,7 +11900,7 @@
                 <a:ea typeface="Courier New" pitchFamily="34" charset="-122"/>
                 <a:cs typeface="Courier New" pitchFamily="34" charset="-120"/>
               </a:rPr>
-              <a:t>08 — CE QUE LE DÉPLOIEMENT RÉEL A APPRIS</a:t>
+              <a:t>08 — CE QU'ON A APPRIS</a:t>
             </a:r>
             <a:endParaRPr lang="en-US" sz="1100" dirty="0"/>
           </a:p>
@@ -12043,7 +11939,7 @@
                 <a:ea typeface="Arial" pitchFamily="34" charset="-122"/>
                 <a:cs typeface="Arial" pitchFamily="34" charset="-120"/>
               </a:rPr>
-              <a:t>Quatre bugs que seul un vrai compte AWS révèle</a:t>
+              <a:t>Quatre problèmes vus seulement en vrai</a:t>
             </a:r>
             <a:endParaRPr lang="en-US" sz="3000" dirty="0"/>
           </a:p>
@@ -12057,12 +11953,12 @@
         </p:nvSpPr>
         <p:spPr>
           <a:xfrm>
-            <a:off x="566928" y="1600200"/>
-            <a:ext cx="5394960" cy="1783080"/>
+            <a:off x="566928" y="1627632"/>
+            <a:ext cx="5394960" cy="1737360"/>
           </a:xfrm>
           <a:prstGeom prst="roundRect">
             <a:avLst>
-              <a:gd name="adj" fmla="val 3077"/>
+              <a:gd name="adj" fmla="val 3158"/>
             </a:avLst>
           </a:prstGeom>
           <a:solidFill>
@@ -12084,7 +11980,7 @@
         </p:nvSpPr>
         <p:spPr>
           <a:xfrm>
-            <a:off x="822960" y="1837944"/>
+            <a:off x="822960" y="1865376"/>
             <a:ext cx="310896" cy="310896"/>
           </a:xfrm>
           <a:prstGeom prst="ellipse">
@@ -12109,7 +12005,7 @@
         </p:nvSpPr>
         <p:spPr>
           <a:xfrm>
-            <a:off x="822960" y="1837944"/>
+            <a:off x="822960" y="1865376"/>
             <a:ext cx="310896" cy="310896"/>
           </a:xfrm>
           <a:prstGeom prst="rect">
@@ -12148,7 +12044,7 @@
         </p:nvSpPr>
         <p:spPr>
           <a:xfrm>
-            <a:off x="1280160" y="1819656"/>
+            <a:off x="1280160" y="1847088"/>
             <a:ext cx="4480560" cy="347472"/>
           </a:xfrm>
           <a:prstGeom prst="rect">
@@ -12165,7 +12061,7 @@
               <a:buNone/>
             </a:pPr>
             <a:r>
-              <a:rPr lang="en-US" sz="1400" b="1" dirty="0">
+              <a:rPr lang="en-US" sz="1500" b="1" dirty="0">
                 <a:solidFill>
                   <a:srgbClr val="17222C"/>
                 </a:solidFill>
@@ -12173,9 +12069,9 @@
                 <a:ea typeface="Arial" pitchFamily="34" charset="-122"/>
                 <a:cs typeface="Arial" pitchFamily="34" charset="-120"/>
               </a:rPr>
-              <a:t>Description de security group</a:t>
-            </a:r>
-            <a:endParaRPr lang="en-US" sz="1400" dirty="0"/>
+              <a:t>Un caractère interdit</a:t>
+            </a:r>
+            <a:endParaRPr lang="en-US" sz="1500" dirty="0"/>
           </a:p>
         </p:txBody>
       </p:sp>
@@ -12187,24 +12083,24 @@
         </p:nvSpPr>
         <p:spPr>
           <a:xfrm>
-            <a:off x="822960" y="2313432"/>
-            <a:ext cx="4892040" cy="960120"/>
-          </a:xfrm>
-          <a:prstGeom prst="rect">
-            <a:avLst/>
-          </a:prstGeom>
-          <a:noFill/>
-          <a:ln/>
-        </p:spPr>
-        <p:txBody>
-          <a:bodyPr wrap="square" lIns="0" tIns="0" rIns="0" bIns="0" rtlCol="0" anchor="ctr"/>
-          <a:lstStyle/>
-          <a:p>
-            <a:pPr indent="0" marL="0">
-              <a:buNone/>
-            </a:pPr>
-            <a:r>
-              <a:rPr lang="en-US" sz="1200" dirty="0">
+            <a:off x="822960" y="2340864"/>
+            <a:ext cx="4892040" cy="914400"/>
+          </a:xfrm>
+          <a:prstGeom prst="rect">
+            <a:avLst/>
+          </a:prstGeom>
+          <a:noFill/>
+          <a:ln/>
+        </p:spPr>
+        <p:txBody>
+          <a:bodyPr wrap="square" lIns="0" tIns="0" rIns="0" bIns="0" rtlCol="0" anchor="ctr"/>
+          <a:lstStyle/>
+          <a:p>
+            <a:pPr indent="0" marL="0">
+              <a:buNone/>
+            </a:pPr>
+            <a:r>
+              <a:rPr lang="en-US" sz="1250" dirty="0">
                 <a:solidFill>
                   <a:srgbClr val="5C6B7A"/>
                 </a:solidFill>
@@ -12212,9 +12108,9 @@
                 <a:ea typeface="Calibri" pitchFamily="34" charset="-122"/>
                 <a:cs typeface="Calibri" pitchFamily="34" charset="-120"/>
               </a:rPr>
-              <a:t>AWS valide les descriptions contre un jeu de caractères fixe, sans le caractère « &gt; ». Notre flèche « internet -&gt; ALB » faisait échouer la création du groupe.</a:t>
-            </a:r>
-            <a:endParaRPr lang="en-US" sz="1200" dirty="0"/>
+              <a:t>AWS refuse certains caractères dans les descriptions. On avait écrit une flèche « -&gt; ». Création refusée.</a:t>
+            </a:r>
+            <a:endParaRPr lang="en-US" sz="1250" dirty="0"/>
           </a:p>
         </p:txBody>
       </p:sp>
@@ -12226,12 +12122,12 @@
         </p:nvSpPr>
         <p:spPr>
           <a:xfrm>
-            <a:off x="6190488" y="1600200"/>
-            <a:ext cx="5394960" cy="1783080"/>
+            <a:off x="6190488" y="1627632"/>
+            <a:ext cx="5394960" cy="1737360"/>
           </a:xfrm>
           <a:prstGeom prst="roundRect">
             <a:avLst>
-              <a:gd name="adj" fmla="val 3077"/>
+              <a:gd name="adj" fmla="val 3158"/>
             </a:avLst>
           </a:prstGeom>
           <a:solidFill>
@@ -12253,7 +12149,7 @@
         </p:nvSpPr>
         <p:spPr>
           <a:xfrm>
-            <a:off x="6446520" y="1837944"/>
+            <a:off x="6446520" y="1865376"/>
             <a:ext cx="310896" cy="310896"/>
           </a:xfrm>
           <a:prstGeom prst="ellipse">
@@ -12278,7 +12174,7 @@
         </p:nvSpPr>
         <p:spPr>
           <a:xfrm>
-            <a:off x="6446520" y="1837944"/>
+            <a:off x="6446520" y="1865376"/>
             <a:ext cx="310896" cy="310896"/>
           </a:xfrm>
           <a:prstGeom prst="rect">
@@ -12317,7 +12213,7 @@
         </p:nvSpPr>
         <p:spPr>
           <a:xfrm>
-            <a:off x="6903720" y="1819656"/>
+            <a:off x="6903720" y="1847088"/>
             <a:ext cx="4480560" cy="347472"/>
           </a:xfrm>
           <a:prstGeom prst="rect">
@@ -12334,7 +12230,7 @@
               <a:buNone/>
             </a:pPr>
             <a:r>
-              <a:rPr lang="en-US" sz="1400" b="1" dirty="0">
+              <a:rPr lang="en-US" sz="1500" b="1" dirty="0">
                 <a:solidFill>
                   <a:srgbClr val="17222C"/>
                 </a:solidFill>
@@ -12342,9 +12238,9 @@
                 <a:ea typeface="Arial" pitchFamily="34" charset="-122"/>
                 <a:cs typeface="Arial" pitchFamily="34" charset="-120"/>
               </a:rPr>
-              <a:t>awscli absent d'Ubuntu 24.04</a:t>
-            </a:r>
-            <a:endParaRPr lang="en-US" sz="1400" dirty="0"/>
+              <a:t>Un outil qui n'existe plus</a:t>
+            </a:r>
+            <a:endParaRPr lang="en-US" sz="1500" dirty="0"/>
           </a:p>
         </p:txBody>
       </p:sp>
@@ -12356,24 +12252,24 @@
         </p:nvSpPr>
         <p:spPr>
           <a:xfrm>
-            <a:off x="6446520" y="2313432"/>
-            <a:ext cx="4892040" cy="960120"/>
-          </a:xfrm>
-          <a:prstGeom prst="rect">
-            <a:avLst/>
-          </a:prstGeom>
-          <a:noFill/>
-          <a:ln/>
-        </p:spPr>
-        <p:txBody>
-          <a:bodyPr wrap="square" lIns="0" tIns="0" rIns="0" bIns="0" rtlCol="0" anchor="ctr"/>
-          <a:lstStyle/>
-          <a:p>
-            <a:pPr indent="0" marL="0">
-              <a:buNone/>
-            </a:pPr>
-            <a:r>
-              <a:rPr lang="en-US" sz="1200" dirty="0">
+            <a:off x="6446520" y="2340864"/>
+            <a:ext cx="4892040" cy="914400"/>
+          </a:xfrm>
+          <a:prstGeom prst="rect">
+            <a:avLst/>
+          </a:prstGeom>
+          <a:noFill/>
+          <a:ln/>
+        </p:spPr>
+        <p:txBody>
+          <a:bodyPr wrap="square" lIns="0" tIns="0" rIns="0" bIns="0" rtlCol="0" anchor="ctr"/>
+          <a:lstStyle/>
+          <a:p>
+            <a:pPr indent="0" marL="0">
+              <a:buNone/>
+            </a:pPr>
+            <a:r>
+              <a:rPr lang="en-US" sz="1250" dirty="0">
                 <a:solidFill>
                   <a:srgbClr val="5C6B7A"/>
                 </a:solidFill>
@@ -12381,9 +12277,9 @@
                 <a:ea typeface="Calibri" pitchFamily="34" charset="-122"/>
                 <a:cs typeface="Calibri" pitchFamily="34" charset="-120"/>
               </a:rPr>
-              <a:t>Le paquet a disparu de l'archive. Nous sommes passés à python3-boto3, qui est dans main — et 60 Mo de téléchargement en moins par instance.</a:t>
-            </a:r>
-            <a:endParaRPr lang="en-US" sz="1200" dirty="0"/>
+              <a:t>Le paquet awscli a disparu d'Ubuntu 24.04. On est passés à une bibliothèque Python : 60 Mo de moins par serveur.</a:t>
+            </a:r>
+            <a:endParaRPr lang="en-US" sz="1250" dirty="0"/>
           </a:p>
         </p:txBody>
       </p:sp>
@@ -12395,12 +12291,12 @@
         </p:nvSpPr>
         <p:spPr>
           <a:xfrm>
-            <a:off x="566928" y="3566160"/>
-            <a:ext cx="5394960" cy="1783080"/>
+            <a:off x="566928" y="3547872"/>
+            <a:ext cx="5394960" cy="1737360"/>
           </a:xfrm>
           <a:prstGeom prst="roundRect">
             <a:avLst>
-              <a:gd name="adj" fmla="val 3077"/>
+              <a:gd name="adj" fmla="val 3158"/>
             </a:avLst>
           </a:prstGeom>
           <a:solidFill>
@@ -12422,7 +12318,7 @@
         </p:nvSpPr>
         <p:spPr>
           <a:xfrm>
-            <a:off x="822960" y="3803904"/>
+            <a:off x="822960" y="3785616"/>
             <a:ext cx="310896" cy="310896"/>
           </a:xfrm>
           <a:prstGeom prst="ellipse">
@@ -12447,7 +12343,7 @@
         </p:nvSpPr>
         <p:spPr>
           <a:xfrm>
-            <a:off x="822960" y="3803904"/>
+            <a:off x="822960" y="3785616"/>
             <a:ext cx="310896" cy="310896"/>
           </a:xfrm>
           <a:prstGeom prst="rect">
@@ -12486,7 +12382,7 @@
         </p:nvSpPr>
         <p:spPr>
           <a:xfrm>
-            <a:off x="1280160" y="3785616"/>
+            <a:off x="1280160" y="3767328"/>
             <a:ext cx="4480560" cy="347472"/>
           </a:xfrm>
           <a:prstGeom prst="rect">
@@ -12503,7 +12399,7 @@
               <a:buNone/>
             </a:pPr>
             <a:r>
-              <a:rPr lang="en-US" sz="1400" b="1" dirty="0">
+              <a:rPr lang="en-US" sz="1500" b="1" dirty="0">
                 <a:solidFill>
                   <a:srgbClr val="17222C"/>
                 </a:solidFill>
@@ -12511,9 +12407,9 @@
                 <a:ea typeface="Arial" pitchFamily="34" charset="-122"/>
                 <a:cs typeface="Arial" pitchFamily="34" charset="-120"/>
               </a:rPr>
-              <a:t>Mot de passe interprété par le shell</a:t>
-            </a:r>
-            <a:endParaRPr lang="en-US" sz="1400" dirty="0"/>
+              <a:t>Un mot de passe exécuté</a:t>
+            </a:r>
+            <a:endParaRPr lang="en-US" sz="1500" dirty="0"/>
           </a:p>
         </p:txBody>
       </p:sp>
@@ -12525,24 +12421,24 @@
         </p:nvSpPr>
         <p:spPr>
           <a:xfrm>
-            <a:off x="822960" y="4279392"/>
-            <a:ext cx="4892040" cy="960120"/>
-          </a:xfrm>
-          <a:prstGeom prst="rect">
-            <a:avLst/>
-          </a:prstGeom>
-          <a:noFill/>
-          <a:ln/>
-        </p:spPr>
-        <p:txBody>
-          <a:bodyPr wrap="square" lIns="0" tIns="0" rIns="0" bIns="0" rtlCol="0" anchor="ctr"/>
-          <a:lstStyle/>
-          <a:p>
-            <a:pPr indent="0" marL="0">
-              <a:buNone/>
-            </a:pPr>
-            <a:r>
-              <a:rPr lang="en-US" sz="1200" dirty="0">
+            <a:off x="822960" y="4261104"/>
+            <a:ext cx="4892040" cy="914400"/>
+          </a:xfrm>
+          <a:prstGeom prst="rect">
+            <a:avLst/>
+          </a:prstGeom>
+          <a:noFill/>
+          <a:ln/>
+        </p:spPr>
+        <p:txBody>
+          <a:bodyPr wrap="square" lIns="0" tIns="0" rIns="0" bIns="0" rtlCol="0" anchor="ctr"/>
+          <a:lstStyle/>
+          <a:p>
+            <a:pPr indent="0" marL="0">
+              <a:buNone/>
+            </a:pPr>
+            <a:r>
+              <a:rPr lang="en-US" sz="1250" dirty="0">
                 <a:solidFill>
                   <a:srgbClr val="5C6B7A"/>
                 </a:solidFill>
@@ -12550,9 +12446,9 @@
                 <a:ea typeface="Calibri" pitchFamily="34" charset="-122"/>
                 <a:cs typeface="Calibri" pitchFamily="34" charset="-120"/>
               </a:rPr>
-              <a:t>Le script sourçait le fichier d'environnement ; le mot de passe généré contenait un « &amp; ». Nous le lisons maintenant sans jamais l'évaluer.</a:t>
-            </a:r>
-            <a:endParaRPr lang="en-US" sz="1200" dirty="0"/>
+              <a:t>Le mot de passe généré contenait un « &amp; ». Le shell a cru que c'était une commande et a essayé de l'exécuter.</a:t>
+            </a:r>
+            <a:endParaRPr lang="en-US" sz="1250" dirty="0"/>
           </a:p>
         </p:txBody>
       </p:sp>
@@ -12564,12 +12460,12 @@
         </p:nvSpPr>
         <p:spPr>
           <a:xfrm>
-            <a:off x="6190488" y="3566160"/>
-            <a:ext cx="5394960" cy="1783080"/>
+            <a:off x="6190488" y="3547872"/>
+            <a:ext cx="5394960" cy="1737360"/>
           </a:xfrm>
           <a:prstGeom prst="roundRect">
             <a:avLst>
-              <a:gd name="adj" fmla="val 3077"/>
+              <a:gd name="adj" fmla="val 3158"/>
             </a:avLst>
           </a:prstGeom>
           <a:solidFill>
@@ -12591,7 +12487,7 @@
         </p:nvSpPr>
         <p:spPr>
           <a:xfrm>
-            <a:off x="6446520" y="3803904"/>
+            <a:off x="6446520" y="3785616"/>
             <a:ext cx="310896" cy="310896"/>
           </a:xfrm>
           <a:prstGeom prst="ellipse">
@@ -12616,7 +12512,7 @@
         </p:nvSpPr>
         <p:spPr>
           <a:xfrm>
-            <a:off x="6446520" y="3803904"/>
+            <a:off x="6446520" y="3785616"/>
             <a:ext cx="310896" cy="310896"/>
           </a:xfrm>
           <a:prstGeom prst="rect">
@@ -12655,7 +12551,7 @@
         </p:nvSpPr>
         <p:spPr>
           <a:xfrm>
-            <a:off x="6903720" y="3785616"/>
+            <a:off x="6903720" y="3767328"/>
             <a:ext cx="4480560" cy="347472"/>
           </a:xfrm>
           <a:prstGeom prst="rect">
@@ -12672,7 +12568,7 @@
               <a:buNone/>
             </a:pPr>
             <a:r>
-              <a:rPr lang="en-US" sz="1400" b="1" dirty="0">
+              <a:rPr lang="en-US" sz="1500" b="1" dirty="0">
                 <a:solidFill>
                   <a:srgbClr val="17222C"/>
                 </a:solidFill>
@@ -12680,9 +12576,9 @@
                 <a:ea typeface="Arial" pitchFamily="34" charset="-122"/>
                 <a:cs typeface="Arial" pitchFamily="34" charset="-120"/>
               </a:rPr>
-              <a:t>Cache Symfony sur NFS</a:t>
-            </a:r>
-            <a:endParaRPr lang="en-US" sz="1400" dirty="0"/>
+              <a:t>Un cache incompatible</a:t>
+            </a:r>
+            <a:endParaRPr lang="en-US" sz="1500" dirty="0"/>
           </a:p>
         </p:txBody>
       </p:sp>
@@ -12694,24 +12590,24 @@
         </p:nvSpPr>
         <p:spPr>
           <a:xfrm>
-            <a:off x="6446520" y="4279392"/>
-            <a:ext cx="4892040" cy="960120"/>
-          </a:xfrm>
-          <a:prstGeom prst="rect">
-            <a:avLst/>
-          </a:prstGeom>
-          <a:noFill/>
-          <a:ln/>
-        </p:spPr>
-        <p:txBody>
-          <a:bodyPr wrap="square" lIns="0" tIns="0" rIns="0" bIns="0" rtlCol="0" anchor="ctr"/>
-          <a:lstStyle/>
-          <a:p>
-            <a:pPr indent="0" marL="0">
-              <a:buNone/>
-            </a:pPr>
-            <a:r>
-              <a:rPr lang="en-US" sz="1200" dirty="0">
+            <a:off x="6446520" y="4261104"/>
+            <a:ext cx="4892040" cy="914400"/>
+          </a:xfrm>
+          <a:prstGeom prst="rect">
+            <a:avLst/>
+          </a:prstGeom>
+          <a:noFill/>
+          <a:ln/>
+        </p:spPr>
+        <p:txBody>
+          <a:bodyPr wrap="square" lIns="0" tIns="0" rIns="0" bIns="0" rtlCol="0" anchor="ctr"/>
+          <a:lstStyle/>
+          <a:p>
+            <a:pPr indent="0" marL="0">
+              <a:buNone/>
+            </a:pPr>
+            <a:r>
+              <a:rPr lang="en-US" sz="1250" dirty="0">
                 <a:solidFill>
                   <a:srgbClr val="5C6B7A"/>
                 </a:solidFill>
@@ -12719,9 +12615,9 @@
                 <a:ea typeface="Calibri" pitchFamily="34" charset="-122"/>
                 <a:cs typeface="Calibri" pitchFamily="34" charset="-120"/>
               </a:rPr>
-              <a:t>Supprimer un fichier encore ouvert sur NFS laisse une entrée cachée : le vidage de cache de PrestaShop échouait. Le cache est passé sur le disque local.</a:t>
-            </a:r>
-            <a:endParaRPr lang="en-US" sz="1200" dirty="0"/>
+              <a:t>Sur un disque partagé, PrestaShop n'arrivait pas à vider son cache. On l'a remis sur le disque local du serveur.</a:t>
+            </a:r>
+            <a:endParaRPr lang="en-US" sz="1250" dirty="0"/>
           </a:p>
         </p:txBody>
       </p:sp>
@@ -12734,23 +12630,23 @@
         <p:spPr>
           <a:xfrm>
             <a:off x="566928" y="5623560"/>
-            <a:ext cx="11055096" cy="320040"/>
-          </a:xfrm>
-          <a:prstGeom prst="rect">
-            <a:avLst/>
-          </a:prstGeom>
-          <a:noFill/>
-          <a:ln/>
-        </p:spPr>
-        <p:txBody>
-          <a:bodyPr wrap="square" lIns="0" tIns="0" rIns="0" bIns="0" rtlCol="0" anchor="ctr"/>
-          <a:lstStyle/>
-          <a:p>
-            <a:pPr indent="0" marL="0">
-              <a:buNone/>
-            </a:pPr>
-            <a:r>
-              <a:rPr lang="en-US" sz="1300" i="1" dirty="0">
+            <a:ext cx="11055096" cy="365760"/>
+          </a:xfrm>
+          <a:prstGeom prst="rect">
+            <a:avLst/>
+          </a:prstGeom>
+          <a:noFill/>
+          <a:ln/>
+        </p:spPr>
+        <p:txBody>
+          <a:bodyPr wrap="square" lIns="0" tIns="0" rIns="0" bIns="0" rtlCol="0" anchor="ctr"/>
+          <a:lstStyle/>
+          <a:p>
+            <a:pPr indent="0" marL="0">
+              <a:buNone/>
+            </a:pPr>
+            <a:r>
+              <a:rPr lang="en-US" sz="1500" i="1" dirty="0">
                 <a:solidFill>
                   <a:srgbClr val="9E5D06"/>
                 </a:solidFill>
@@ -12758,9 +12654,9 @@
                 <a:ea typeface="Calibri" pitchFamily="34" charset="-122"/>
                 <a:cs typeface="Calibri" pitchFamily="34" charset="-120"/>
               </a:rPr>
-              <a:t>Les quatre correctifs sont dans le dépôt : le prochain déploiement, depuis zéro, ne les rencontre plus.</a:t>
-            </a:r>
-            <a:endParaRPr lang="en-US" sz="1300" dirty="0"/>
+              <a:t>Les quatre sont corrigés dans le dépôt : un déploiement depuis zéro ne les rencontre plus.</a:t>
+            </a:r>
+            <a:endParaRPr lang="en-US" sz="1500" dirty="0"/>
           </a:p>
         </p:txBody>
       </p:sp>

--- a/docs/soutenance-5hash.pptx
+++ b/docs/soutenance-5hash.pptx
@@ -513,9 +513,9 @@
           <a:p>
             <a:r>
               <a:rPr lang="en-US" dirty="0"/>
-              <a:t>Bonjour à tous. On est l'agence 5HASH, et Taylor Shift nous a confié sa boutique de billets.
-Le site, il existe déjà : c'est PrestaShop. Nous, on ne touche pas au site. Notre travail, c'est de lui construire une maison — et surtout une maison qui tient debout le jour où des milliers de fans se connectent en même temps.
-Tout est écrit en code : Terraform pour construire, Ansible pour installer. Et ce n'est pas une maquette : ça tourne en ce moment sur un vrai compte AWS. On vous le montrera à la fin.</a:t>
+              <a:t>Bonjour. Nous sommes l'agence 5HASH. Taylor Shift nous a confié l'infrastructure de sa boutique de billets.
+L'application existe déjà : c'est PrestaShop, l'image publiée sur Docker Hub. Nous ne touchons pas au code du site. Notre travail, c'est de l'héberger, de le configurer, et de faire en sorte qu'il tienne le jour de l'ouverture des ventes.
+Nous avons utilisé deux outils : Terraform pour créer l'infrastructure, Ansible pour configurer les serveurs. Tout est déployé sur un compte AWS réel, en région Paris. Nous ferons une démonstration à la fin.</a:t>
             </a:r>
             <a:endParaRPr lang="en-US" dirty="0"/>
           </a:p>
@@ -603,11 +603,11 @@
           <a:p>
             <a:r>
               <a:rPr lang="en-US" dirty="0"/>
-              <a:t>Une infrastructure dont on ne connaît pas les limites, c'est une infrastructure qu'on n'a pas comprise. Voilà les nôtres, en toute transparence.
-La première, la plus importante : ajouter des serveurs, ça demande quelqu'un. Ce n'est pas automatique. Un pic soudain, il faut un opérateur et deux commandes — trois minutes. Pour l'automatiser vraiment, il faudrait préparer à l'avance une image toute faite du serveur, avec tout déjà installé. Et bonne nouvelle : notre installation est déjà écrite pour ça, c'est une évolution, pas une réécriture.
-La deuxième : on a mis tout le site sur le disque partagé. C'est ce qui rend les serveurs interchangeables, mais un disque réseau est plus lent qu'un disque local. Au-delà de quelques milliers de visiteurs par minute, il faudrait mettre le site dans l'image et ne garder que les photos sur le disque partagé.
-La troisième : une seule base pour écrire. On peut ajouter des copies pour la lecture, mais une billetterie, ça écrit surtout.
-Et la quatrième : une seule région. Si toute la région Paris tombe, on tombe. Doubler ailleurs coûterait plus cher que la panne qu'on évite. C'est assumé.</a:t>
+              <a:t>Voici les limites de notre solution.
+Première limite, la principale : la montée en charge n'est pas automatique. Elle demande un opérateur et deux commandes, environ trois minutes. Pour l'automatiser, il faudrait construire à l'avance une image serveur préconfigurée, avec Packer, puis utiliser un groupe d'autoscaling derrière le même load balancer. Notre rôle Ansible et notre page de santé sont déjà compatibles avec cette évolution.
+Deuxième limite : le site entier est sur le disque partagé. Cela rend les serveurs interchangeables, mais un disque réseau est plus lent qu'un disque local pour lire des fichiers PHP. Au-delà de quelques milliers de requêtes par minute, il faudrait mettre le code dans l'image Docker et ne partager que les images produits.
+Troisième limite : une seule base en écriture. On peut répartir les lectures sur des réplicas, pas les écritures. Une billetterie écrit beaucoup, donc la taille de l'instance principale est notre plafond.
+Quatrième limite : une seule région. Une panne régionale interrompt le service. À cette échelle, le multi-région coûterait plus cher que la panne qu'il évite. C'est un choix, pas un oubli.</a:t>
             </a:r>
             <a:endParaRPr lang="en-US" dirty="0"/>
           </a:p>
@@ -695,11 +695,11 @@
           <a:p>
             <a:r>
               <a:rPr lang="en-US" dirty="0"/>
-              <a:t>Voilà tout ce qu'il y a à taper. Six commandes.
-La première, on ne la lance qu'une fois par compte : elle prépare l'endroit où Terraform range sa description de l'infrastructure.
-Ensuite Terraform construit. Une douzaine de minutes, et c'est la base de données qui prend tout le temps.
-Puis Ansible installe. Regardez bien la commande du milieu : c'est celle qui affiche la liste des serveurs. Aucune adresse n'y est écrite, elle est lue chez Terraform.
-On va vous montrer quatre choses : la boutique et son administration ; l'installation relancée qui ne change rien ; un serveur ajouté qui entre tout seul en service ; et enfin on en coupe un, en direct, pour vous montrer que la boutique tient.</a:t>
+              <a:t>Voici l'ensemble des commandes nécessaires.
+La première ne se lance qu'une fois par compte AWS : elle crée le bucket S3 qui stocke l'état Terraform.
+Ensuite, Terraform : init puis apply. L'opération prend une douzaine de minutes, dont la majorité pour la création de la base de données.
+Puis Ansible : on installe les dépendances depuis Galaxy, on vérifie l'inventaire, et on lance le playbook. La commande du milieu affiche la liste des serveurs : aucune adresse n'y est écrite, elle vient de l'état Terraform.
+Nous allons vous montrer quatre choses : la boutique et son back-office, le playbook relancé qui n'affiche aucune modification, l'ajout d'un serveur, et enfin l'arrêt d'un serveur pour montrer que le site continue de répondre.</a:t>
             </a:r>
             <a:endParaRPr lang="en-US" dirty="0"/>
           </a:p>
@@ -787,14 +787,14 @@
           <a:p>
             <a:r>
               <a:rPr lang="en-US" dirty="0"/>
-              <a:t>Pour conclure. La boutique est en ligne sur un vrai compte AWS. Elle est documentée : le README explique comment l'installer, la faire grandir, la dépanner et la supprimer. Et on sait la refaire : on l'a détruite et redéployée pour en être sûrs.
-Merci de votre attention, on est prêts pour vos questions.
-[Réponses courtes à avoir en tête :
-— Pourquoi pas d'ajout automatique de serveurs ? Parce qu'on installe les serveurs avec Ansible après leur création. Pour automatiser, il faudrait une image toute prête. On a préféré livrer quelque chose qui marche et dont on connaît la limite.
-— Pourquoi EFS et pas S3 ? Parce que PrestaShop écrit sur un disque, tout simplement. S3 demanderait un module en plus.
-— Où est le mot de passe de la base ? Nulle part chez nous. AWS le garde, et chaque serveur va le chercher avec sa propre autorisation.
-— Combien ça coûte ? Deux à trois dollars par jour pour l'environnement de test.
-— Comment vous changez de version de PrestaShop ? Une ligne dans un fichier Ansible, on relance, et on prend une sauvegarde de la base avant.]</a:t>
+              <a:t>Pour conclure. La boutique est déployée sur un compte AWS réel. Elle est documentée : le README explique comment la déployer, l'exploiter, la mettre à l'échelle, la dépanner et la supprimer. Et elle est reproductible : nous l'avons détruite et redéployée pour le vérifier.
+Merci de votre attention, nous répondons à vos questions.
+[Réponses préparées :
+— Pourquoi pas d'autoscaling ? Parce que nos serveurs sont configurés par Ansible après leur création. Un groupe d'autoscaling lancerait des machines non configurées. Il faudrait d'abord construire une image préconfigurée avec Packer.
+— Pourquoi EFS et pas S3 ? Parce que PrestaShop écrit sur un système de fichiers. Utiliser S3 demanderait un module PrestaShop supplémentaire.
+— Où est le mot de passe de la base ? Dans AWS Secrets Manager. Terraform le génère, chaque serveur le lit avec son rôle IAM. Il n'est ni dans le dépôt, ni dans l'inventaire Ansible.
+— Combien ça coûte ? Environ deux à trois dollars par jour pour l'environnement dev. Les postes principaux sont la passerelle NAT et le load balancer.
+— Comment changer de version de PrestaShop ? C'est une variable dans les group_vars Ansible. On modifie le tag de l'image et on relance le playbook, après une sauvegarde de la base.]</a:t>
             </a:r>
             <a:endParaRPr lang="en-US" dirty="0"/>
           </a:p>
@@ -882,11 +882,11 @@
           <a:p>
             <a:r>
               <a:rPr lang="en-US" dirty="0"/>
-              <a:t>Avant de choisir la moindre technologie, on s'est posé trois questions toutes bêtes.
-Un : comment un client arrive jusqu'à la boutique ? Autrement dit, par où ça rentre, et qu'est-ce qu'on laisse ouvert.
-Deux : et si dix fois plus de monde arrive d'un coup ? Parce qu'une ouverture de billetterie, ce n'est pas un trafic régulier. C'est un mur.
-Trois : et si une machine tombe ? Parce qu'une machine finit toujours par tomber.
-Tout ce qu'on va vous montrer répond à l'une de ces trois questions.</a:t>
+              <a:t>Avant de choisir les technologies, nous avons posé trois questions.
+Première question : par où passent les requêtes ? C'est la question du réseau et de la sécurité. Notre réponse : un seul point d'entrée public, et tout le reste dans des réseaux privés.
+Deuxième question : comment absorber un pic de trafic ? Une ouverture de billetterie, c'est un pic, pas une charge régulière. Notre réponse : les serveurs ne stockent aucune donnée, donc on peut en ajouter à la demande.
+Troisième question : que se passe-t-il en cas de panne ? Notre réponse : le load balancer retire automatiquement le serveur en panne, et les autres continuent.
+Chaque choix que nous présentons ensuite répond à l'une de ces trois questions.</a:t>
             </a:r>
             <a:endParaRPr lang="en-US" dirty="0"/>
           </a:p>
@@ -974,12 +974,11 @@
           <a:p>
             <a:r>
               <a:rPr lang="en-US" dirty="0"/>
-              <a:t>Pour expliquer l'architecture, on va prendre l'image d'une salle de concert. Ça se lit de haut en bas, comme le trajet d'un client.
-En haut, côté rue, il y a UNE seule porte : le répartiteur. C'est l'hôte d'accueil. Il envoie chaque visiteur vers une caisse libre, et il vérifie toutes les quinze secondes que chaque caisse va bien. Si une caisse ne répond plus, il arrête d'y envoyer du monde.
-À côté, l'entrée de service. Elle, elle est réservée à l'équipe : c'est par là qu'on passe pour installer et dépanner. Elle est ouverte à une seule adresse, la nôtre. Aucun client ne passe par là.
-Au milieu, les caisses : ce sont les serveurs qui font tourner la boutique. Elles sont toutes identiques. Et surtout, elles ne sont pas joignables depuis Internet — on ne peut y arriver qu'en passant par la porte d'accueil.
-En bas, les réserves. Le coffre, c'est la base de données : les billets, les paniers, les commandes. Le vestiaire, c'est un disque partagé : les images du site, le thème, et les paniers en cours.
-Et voilà le point important : les caisses ne gardent rien. Tout est dans le coffre et dans le vestiaire. C'est exactement ce qui va nous permettre d'en ajouter ou d'en perdre sans que personne ne s'en aperçoive.</a:t>
+              <a:t>Voici l'architecture. Elle se lit de haut en bas, dans le sens d'une requête.
+Premier niveau, le réseau public. Il contient deux choses. Le load balancer, qui est le seul point d'entrée des clients : il répartit les requêtes entre les serveurs et vérifie leur état toutes les quinze secondes. Et le bastion, qui sert uniquement à notre accès SSH : il est ouvert à une seule adresse IP, la nôtre. Aucun client ne passe par le bastion.
+Deuxième niveau, le réseau privé applicatif. Il contient les serveurs EC2, avec le conteneur PrestaShop. Ils sont identiques entre eux, répartis sur les deux zones de disponibilité, et ils n'ont aucune adresse IP publique : on ne peut les joindre qu'à travers le load balancer.
+Troisième niveau, le réseau privé des données. La base MySQL d'un côté, le disque partagé de l'autre. Ce niveau n'a aucune route vers Internet.
+Le point à retenir : les serveurs ne stockent aucune donnée. Le catalogue et les commandes sont dans la base, les images et les sessions sur le disque partagé. C'est ce qui permet d'ajouter ou de perdre un serveur sans conséquence.</a:t>
             </a:r>
             <a:endParaRPr lang="en-US" dirty="0"/>
           </a:p>
@@ -1067,11 +1066,13 @@
           <a:p>
             <a:r>
               <a:rPr lang="en-US" dirty="0"/>
-              <a:t>Le sujet nous laissait libres : ce qui tourne sur nos serveurs, et ce qu'on confie à AWS. Voilà comment on a tranché.
-La boutique tourne dans un conteneur Docker, sur un serveur EC2. C'est ce que demande le sujet, et ça nous arrange : changer de version de PrestaShop, c'est une seule ligne à modifier.
-La base de données, par contre, on ne veut pas la gérer. AWS s'occupe des sauvegardes, des mises à jour, et garde une machine de secours prête à prendre le relais. Franchement, personne n'a envie de découvrir un problème de base de données le soir de l'ouverture des ventes.
-Pour les fichiers, il nous fallait un disque que plusieurs serveurs voient en même temps. Un disque classique ne se partage pas. EFS, si.
-Et les mots de passe : celui de la base n'est écrit nulle part dans notre code. Terraform le génère, le dépose dans le coffre d'AWS, et chaque serveur va le chercher tout seul avec sa propre autorisation. Dans le dépôt, il n'y a que le mot de passe de l'administration du site, et il est chiffré.</a:t>
+              <a:t>Le sujet nous laissait libres de choisir ce qui tourne sur EC2 et ce qu'on confie à un service managé. Voici nos choix.
+L'application tourne dans un conteneur Docker sur une instance EC2. C'est ce que demande le sujet. Le conteneur donne un environnement identique partout, et changer de version de PrestaShop revient à modifier une ligne.
+La base de données est managée, c'est RDS. AWS gère les sauvegardes automatiques, les mises à jour de sécurité, et le basculement vers une instance de secours. Nous n'avons pas voulu réécrire ça nous-mêmes.
+Pour les fichiers, il fallait un stockage que plusieurs serveurs lisent et écrivent en même temps. Un disque EBS ne se partage pas entre instances, EFS si.
+Pour le point d'entrée, le load balancer surveille les serveurs et répartit les requêtes entre les deux zones.
+Pour les secrets, le mot de passe de la base est généré par Terraform et déposé dans Secrets Manager. Il n'est pas dans le dépôt. Chaque serveur va le chercher avec son propre rôle IAM. Seuls les identifiants du back-office sont dans le dépôt, et ils sont chiffrés avec Ansible Vault.
+Enfin, les serveurs n'ont pas d'adresse publique. L'accès administration passe par un bastion, ouvert à notre seule adresse IP.</a:t>
             </a:r>
             <a:endParaRPr lang="en-US" dirty="0"/>
           </a:p>
@@ -1159,11 +1160,11 @@
           <a:p>
             <a:r>
               <a:rPr lang="en-US" dirty="0"/>
-              <a:t>Terraform, c'est l'outil qui construit. On lui décrit ce qu'on veut, il se débrouille pour le créer.
-On a découpé en six briques, une par couche : le réseau, les droits, le disque, la base, les serveurs, et l'entrée. Chaque brique se relit toute seule, et si on veut en changer une, on ne casse pas les autres.
-Le truc dont on est contents : les trois environnements. Test, pré-production, production. C'est exactement le même code. On change un mot, et on passe d'un serveur à trois serveurs répartis sur trois zones, avec une base qui a une machine de secours et deux semaines de sauvegardes.
-La description de l'infrastructure est stockée sur AWS, pas sur nos ordinateurs, et elle est verrouillée : à trois, on ne peut pas se marcher dessus.
-Et rien n'est écrit en dur. Terraform va même chercher notre adresse IP du moment, et c'est la seule qui aura le droit de se connecter aux serveurs.</a:t>
+              <a:t>Terraform crée l'infrastructure. On décrit les ressources voulues, Terraform les crée et retient ce qu'il a créé.
+Nous avons découpé le code en six modules, un par couche : le réseau, les groupes de sécurité, le stockage, la base, les instances et le load balancer. Chaque module a ses variables documentées et ses sorties. On peut en relire un sans lire les autres.
+Pour les environnements, nous avons dev, staging et prod. C'est le même code. Une table de variables définit les tailles : en dev, un serveur et une base simple ; en prod, trois serveurs sur trois zones, une base avec instance de secours, et quatorze jours de sauvegardes. On change une variable, pas le code.
+L'état Terraform, c'est-à-dire la liste de ce qui a été créé, est stocké dans un bucket S3 versionné et chiffré, avec un verrou. C'est nécessaire à trois : sans ça, deux personnes peuvent modifier l'infrastructure en même temps.
+Enfin, trois valeurs sont lues automatiquement à l'exécution : l'identifiant de l'image Ubuntu, la liste des zones disponibles, et notre adresse IP publique. Cette dernière sert à autoriser l'accès SSH au bastion.</a:t>
             </a:r>
             <a:endParaRPr lang="en-US" dirty="0"/>
           </a:p>
@@ -1251,11 +1252,12 @@
           <a:p>
             <a:r>
               <a:rPr lang="en-US" dirty="0"/>
-              <a:t>Ansible, c'est l'outil qui installe. Une fois que Terraform a construit les machines, Ansible les configure.
-Le problème classique, c'est de faire le lien entre les deux : Terraform crée un serveur, et il faut donner son adresse à Ansible. Beaucoup de gens recopient à la main. Nous, non.
-Terraform écrit la liste des serveurs dans sa propre description, et Ansible va la lire directement chez lui. Résultat : il n'y a pas une seule adresse IP écrite à la main dans tout le projet. On crée un serveur avec Terraform, il apparaît tout seul dans la liste d'Ansible.
-On a écrit trois rôles réutilisables. Le serveur d'entrée et les caisses partagent le même rôle de base, juste avec des réglages différents. Et pour Docker, on a pris un rôle public, installé depuis Ansible Galaxy, plutôt que de le réécrire.
-Et le point le plus important, celui du barème : on peut relancer l'installation autant de fois qu'on veut. La deuxième fois, Ansible affiche « changed égale zéro ». Il ne touche à rien, parce que tout est déjà comme demandé. Ce n'est pas de la chance : on a conçu l'installation pour ça.</a:t>
+              <a:t>Ansible configure les serveurs créés par Terraform : il installe Docker, monte le disque partagé, récupère le mot de passe de la base et démarre le conteneur PrestaShop.
+Le point d'intégration entre les deux outils est ici. Terraform connaît les adresses des serveurs. Plutôt que de les recopier dans un fichier d'inventaire, Terraform les déclare dans son état, et Ansible les lit depuis cet état avec un plugin d'inventaire dynamique.
+Conséquence : il n'y a aucune adresse IP écrite à la main dans le projet. Quand on ajoute un serveur avec Terraform, il apparaît automatiquement dans l'inventaire Ansible.
+Nous avons écrit trois rôles réutilisables : common, efs et prestashop. Le bastion et les serveurs applicatifs utilisent le même rôle common, avec des variables différentes. Pour Docker, nous avons utilisé un rôle existant d'Ansible Galaxy plutôt que de le réécrire.
+Les identifiants du back-office sont chiffrés avec Ansible Vault. Le mot de passe de la base n'est pas dans le dépôt du tout.
+Enfin, le playbook est idempotent : il décrit l'état voulu, pas une suite d'étapes. À la deuxième exécution, il affiche changed égale zéro : il ne modifie rien, parce que tout est déjà en place.</a:t>
             </a:r>
             <a:endParaRPr lang="en-US" dirty="0"/>
           </a:p>
@@ -1343,10 +1345,10 @@
           <a:p>
             <a:r>
               <a:rPr lang="en-US" dirty="0"/>
-              <a:t>On arrive à la question qui compte vraiment : le jour où les billets partent en vente.
-Nos serveurs ne gardent rien. Une commande va dans la base, une image sur le disque partagé, un panier aussi. Résultat : ajouter de la capacité, c'est littéralement changer un chiffre.
-Deux commandes. La première crée les serveurs et les répartit sur les zones. La deuxième les installe — et seulement eux, parce qu'Ansible ne touche pas à ceux qui travaillent déjà. Trois minutes, sans couper la boutique.
-Et on ne décide pas au hasard. AWS surveille trois choses pour nous et nous envoie un mail : si le site devient lent, si un serveur ne répond plus, ou si la boutique renvoie des erreurs. C'est ça qui nous dit quand ajouter des machines.</a:t>
+              <a:t>Voici comment nous répondons à un pic de trafic.
+Les serveurs ne stockent aucune donnée : les commandes sont dans la base, les images et les sessions sur le disque partagé. Ajouter de la capacité revient donc à modifier une variable.
+Deux commandes. La première, Terraform, crée les serveurs, les répartit sur les zones et les enregistre auprès du load balancer. La deuxième, Ansible, les configure. Comme le playbook est idempotent, il ne touche pas aux serveurs déjà en service. L'opération prend environ trois minutes, sans interruption.
+Pour savoir quand le faire, trois alarmes CloudWatch sont créées avec le load balancer. La première surveille le temps de réponse : au-delà de deux secondes en moyenne sur trois minutes, les serveurs saturent. La deuxième compte les serveurs retirés de la rotation. La troisième compte les erreurs serveur. Les trois notifient une adresse mail.</a:t>
             </a:r>
             <a:endParaRPr lang="en-US" dirty="0"/>
           </a:p>
@@ -1434,12 +1436,12 @@
           <a:p>
             <a:r>
               <a:rPr lang="en-US" dirty="0"/>
-              <a:t>Troisième question : quand ça casse. On a regardé chaque panne possible, et on a chronométré.
-Un serveur tombe. Le répartiteur l'interroge toutes les quinze secondes ; au bout de deux échecs, donc trente secondes, il arrête de lui envoyer des clients. Et les achats déjà en cours ont trente secondes de plus pour se terminer. Le client ne voit rien : il est servi par les autres.
-Une zone AWS entière tombe — ça arrive, c'est un bâtiment entier. Les serveurs des autres zones prennent le relais. Automatique.
-La base tombe. En production, AWS garde une machine de secours dans une autre zone. La bascule prend une à deux minutes. Il y a quelques secondes d'erreurs, on ne va pas vous mentir, puis ça repart.
-Notre serveur d'entrée tombe : aucun impact client, aucun client ne passe par là.
-Et le point qu'on veut vraiment que vous reteniez : le panier du client est conservé. Les paniers sont sur le disque partagé, pas sur la machine qui tombe. Pour une billetterie, c'est toute la différence.</a:t>
+              <a:t>Troisième question : le comportement en cas de panne. Nous avons mesuré chaque cas.
+Un serveur tombe. Le load balancer le vérifie toutes les quinze secondes. Après deux échecs, soit environ trente secondes, il le retire de la rotation. Les requêtes déjà en cours ont trente secondes supplémentaires pour se terminer. Le client ne voit rien : il est servi par les autres serveurs.
+Une zone de disponibilité tombe. Le load balancer a un nœud par zone, il cesse d'utiliser celui de la zone en panne. Les serveurs des autres zones prennent le relais. Aucune action de notre part.
+La base de données tombe. En production, elle a une instance de secours dans une autre zone. Le basculement prend entre une et deux minutes. Il y a des erreurs pendant ce temps, nous ne le cachons pas, puis le service revient.
+Le bastion tombe. Aucune conséquence pour les clients : il ne sert qu'à l'administration. Il faut le recréer, ce qui prend deux minutes.
+Un point important : le panier du client est conservé. Les sessions PHP sont stockées sur le disque partagé, pas sur le serveur. Si un serveur tombe, le client continue son achat sur un autre.</a:t>
             </a:r>
             <a:endParaRPr lang="en-US" dirty="0"/>
           </a:p>
@@ -1527,13 +1529,13 @@
           <a:p>
             <a:r>
               <a:rPr lang="en-US" dirty="0"/>
-              <a:t>On tenait à vous montrer cette diapo, parce que c'est la partie honnête du projet.
-Le code était écrit, relu, vérifié. Et puis on l'a déployé pour de vrai sur AWS, et on s'est pris quatre murs qu'aucune relecture n'aurait montrés.
-Le premier : AWS n'accepte que certains caractères dans les descriptions. On avait écrit une petite flèche, avec un chevron. Refusé.
-Le deuxième : l'outil en ligne de commande d'AWS n'existe plus dans les dépôts d'Ubuntu 24.04. On aurait pu installer la version officielle — soixante mégaoctets par serveur, pour un seul appel. On est passés à une bibliothèque Python déjà présente.
-Le troisième, c'est notre préféré. Le mot de passe de la base est généré au hasard, et il contenait une esperluette, le « et commercial ». Notre script chargeait le fichier avec une commande du shell — et le shell a pris le mot de passe pour une commande, et a essayé de l'exécuter. Maintenant on lit le fichier sans jamais l'interpréter, et on a limité les caractères du mot de passe.
-Le quatrième : PrestaShop vide son cache après l'installation. Sur un disque partagé en réseau, supprimer un fichier encore ouvert laisse une trace invisible, donc la suppression échouait — et ça tuait le conteneur juste après une installation réussie. On a compris que ce cache n'avait rien à faire sur le disque partagé : c'est un fichier temporaire, propre à chaque serveur. On l'a remis en local.
-Les quatre sont corrigés dans le dépôt. Un déploiement depuis zéro ne les rencontre plus.</a:t>
+              <a:t>Nous présentons cette diapositive parce qu'elle montre ce que le déploiement réel apporte.
+Le code était écrit, relu et vérifié. En le déployant sur un compte AWS, nous avons rencontré quatre erreurs qu'une relecture n'aurait pas montrées.
+Première erreur : AWS n'accepte qu'un jeu de caractères limité dans les descriptions de groupes de sécurité. Nous avions écrit une flèche avec un chevron. La création du groupe a échoué.
+Deuxième erreur : le paquet awscli n'existe plus dans les dépôts d'Ubuntu 24.04. Installer la version officielle représentait soixante mégaoctets par serveur pour un seul appel. Nous l'avons remplacé par la bibliothèque Python boto3, déjà disponible.
+Troisième erreur : notre script chargeait le fichier de configuration avec la commande source du shell. Le mot de passe de la base, généré aléatoirement, contenait une esperluette. Le shell l'a interprétée comme un séparateur de commande. Nous lisons maintenant ce fichier sans l'interpréter, et nous avons restreint les caractères du mot de passe généré.
+Quatrième erreur : sur un disque réseau, supprimer un fichier encore ouvert laisse une entrée temporaire. Le vidage de cache de PrestaShop échouait donc après l'installation, et arrêtait le conteneur. Nous avons déplacé ce cache sur le disque local de chaque serveur, puisqu'il est propre à chaque serveur et régénérable.
+Les quatre corrections sont dans le dépôt.</a:t>
             </a:r>
             <a:endParaRPr lang="en-US" dirty="0"/>
           </a:p>
@@ -2017,27 +2019,24 @@
         </p:nvSpPr>
         <p:spPr>
           <a:xfrm>
-            <a:off x="566928" y="2971800"/>
-            <a:ext cx="8778240" cy="822960"/>
-          </a:xfrm>
-          <a:prstGeom prst="rect">
-            <a:avLst/>
-          </a:prstGeom>
-          <a:noFill/>
-          <a:ln/>
-        </p:spPr>
-        <p:txBody>
-          <a:bodyPr wrap="square" lIns="0" tIns="0" rIns="0" bIns="0" rtlCol="0" anchor="ctr"/>
-          <a:lstStyle/>
-          <a:p>
-            <a:pPr indent="0" marL="0">
-              <a:lnSpc>
-                <a:spcPts val="2800"/>
-              </a:lnSpc>
-              <a:buNone/>
-            </a:pPr>
-            <a:r>
-              <a:rPr lang="en-US" sz="2100" dirty="0">
+            <a:off x="566928" y="3017520"/>
+            <a:ext cx="8778240" cy="457200"/>
+          </a:xfrm>
+          <a:prstGeom prst="rect">
+            <a:avLst/>
+          </a:prstGeom>
+          <a:noFill/>
+          <a:ln/>
+        </p:spPr>
+        <p:txBody>
+          <a:bodyPr wrap="square" lIns="0" tIns="0" rIns="0" bIns="0" rtlCol="0" anchor="ctr"/>
+          <a:lstStyle/>
+          <a:p>
+            <a:pPr indent="0" marL="0">
+              <a:buNone/>
+            </a:pPr>
+            <a:r>
+              <a:rPr lang="en-US" sz="2200" dirty="0">
                 <a:solidFill>
                   <a:srgbClr val="A8B8C8"/>
                 </a:solidFill>
@@ -2045,29 +2044,9 @@
                 <a:ea typeface="Calibri" pitchFamily="34" charset="-122"/>
                 <a:cs typeface="Calibri" pitchFamily="34" charset="-120"/>
               </a:rPr>
-              <a:t>Une boutique de billets qui tient debout</a:t>
-            </a:r>
-            <a:endParaRPr lang="en-US" sz="2100" dirty="0"/>
-          </a:p>
-          <a:p>
-            <a:pPr indent="0" marL="0">
-              <a:lnSpc>
-                <a:spcPts val="2800"/>
-              </a:lnSpc>
-              <a:buNone/>
-            </a:pPr>
-            <a:r>
-              <a:rPr lang="en-US" sz="2100" dirty="0">
-                <a:solidFill>
-                  <a:srgbClr val="A8B8C8"/>
-                </a:solidFill>
-                <a:latin typeface="Calibri" pitchFamily="34" charset="0"/>
-                <a:ea typeface="Calibri" pitchFamily="34" charset="-122"/>
-                <a:cs typeface="Calibri" pitchFamily="34" charset="-120"/>
-              </a:rPr>
-              <a:t>le jour de l'ouverture des ventes</a:t>
-            </a:r>
-            <a:endParaRPr lang="en-US" sz="2100" dirty="0"/>
+              <a:t>Infrastructure de la boutique de billets</a:t>
+            </a:r>
+            <a:endParaRPr lang="en-US" sz="2200" dirty="0"/>
           </a:p>
         </p:txBody>
       </p:sp>
@@ -2079,7 +2058,7 @@
         </p:nvSpPr>
         <p:spPr>
           <a:xfrm>
-            <a:off x="566928" y="4114800"/>
+            <a:off x="566928" y="3840480"/>
             <a:ext cx="1645920" cy="411480"/>
           </a:xfrm>
           <a:prstGeom prst="roundRect">
@@ -2106,7 +2085,7 @@
         </p:nvSpPr>
         <p:spPr>
           <a:xfrm>
-            <a:off x="566928" y="4114800"/>
+            <a:off x="566928" y="3840480"/>
             <a:ext cx="1645920" cy="411480"/>
           </a:xfrm>
           <a:prstGeom prst="rect">
@@ -2145,7 +2124,7 @@
         </p:nvSpPr>
         <p:spPr>
           <a:xfrm>
-            <a:off x="2395728" y="4114800"/>
+            <a:off x="2395728" y="3840480"/>
             <a:ext cx="1645920" cy="411480"/>
           </a:xfrm>
           <a:prstGeom prst="roundRect">
@@ -2172,7 +2151,7 @@
         </p:nvSpPr>
         <p:spPr>
           <a:xfrm>
-            <a:off x="2395728" y="4114800"/>
+            <a:off x="2395728" y="3840480"/>
             <a:ext cx="1645920" cy="411480"/>
           </a:xfrm>
           <a:prstGeom prst="rect">
@@ -2211,7 +2190,7 @@
         </p:nvSpPr>
         <p:spPr>
           <a:xfrm>
-            <a:off x="4224528" y="4114800"/>
+            <a:off x="4224528" y="3840480"/>
             <a:ext cx="1645920" cy="411480"/>
           </a:xfrm>
           <a:prstGeom prst="roundRect">
@@ -2238,7 +2217,7 @@
         </p:nvSpPr>
         <p:spPr>
           <a:xfrm>
-            <a:off x="4224528" y="4114800"/>
+            <a:off x="4224528" y="3840480"/>
             <a:ext cx="1645920" cy="411480"/>
           </a:xfrm>
           <a:prstGeom prst="rect">
@@ -2277,7 +2256,7 @@
         </p:nvSpPr>
         <p:spPr>
           <a:xfrm>
-            <a:off x="6053328" y="4114800"/>
+            <a:off x="6053328" y="3840480"/>
             <a:ext cx="1645920" cy="411480"/>
           </a:xfrm>
           <a:prstGeom prst="roundRect">
@@ -2304,7 +2283,7 @@
         </p:nvSpPr>
         <p:spPr>
           <a:xfrm>
-            <a:off x="6053328" y="4114800"/>
+            <a:off x="6053328" y="3840480"/>
             <a:ext cx="1645920" cy="411480"/>
           </a:xfrm>
           <a:prstGeom prst="rect">
@@ -2343,7 +2322,7 @@
         </p:nvSpPr>
         <p:spPr>
           <a:xfrm>
-            <a:off x="566928" y="5029200"/>
+            <a:off x="566928" y="4800600"/>
             <a:ext cx="11055096" cy="320040"/>
           </a:xfrm>
           <a:prstGeom prst="rect">
@@ -2382,7 +2361,7 @@
         </p:nvSpPr>
         <p:spPr>
           <a:xfrm>
-            <a:off x="566928" y="5394960"/>
+            <a:off x="566928" y="5193792"/>
             <a:ext cx="11055096" cy="274320"/>
           </a:xfrm>
           <a:prstGeom prst="rect">
@@ -2407,7 +2386,7 @@
                 <a:ea typeface="Calibri" pitchFamily="34" charset="-122"/>
                 <a:cs typeface="Calibri" pitchFamily="34" charset="-120"/>
               </a:rPr>
-              <a:t>En ligne sur un vrai compte AWS, région Paris</a:t>
+              <a:t>Déployé sur un compte AWS, région eu-west-3 (Paris)</a:t>
             </a:r>
             <a:endParaRPr lang="en-US" sz="1300" dirty="0"/>
           </a:p>
@@ -2471,7 +2450,7 @@
                 <a:ea typeface="Courier New" pitchFamily="34" charset="-122"/>
                 <a:cs typeface="Courier New" pitchFamily="34" charset="-120"/>
               </a:rPr>
-              <a:t>09 — CE QU'ON N'A PAS FAIT</a:t>
+              <a:t>09 — LIMITES</a:t>
             </a:r>
             <a:endParaRPr lang="en-US" sz="1100" dirty="0"/>
           </a:p>
@@ -2510,7 +2489,7 @@
                 <a:ea typeface="Arial" pitchFamily="34" charset="-122"/>
                 <a:cs typeface="Arial" pitchFamily="34" charset="-120"/>
               </a:rPr>
-              <a:t>Nos limites, et comment on les franchirait</a:t>
+              <a:t>Limites de la solution</a:t>
             </a:r>
             <a:endParaRPr lang="en-US" sz="3000" dirty="0"/>
           </a:p>
@@ -2576,7 +2555,7 @@
                 <a:ea typeface="Arial" pitchFamily="34" charset="-122"/>
                 <a:cs typeface="Arial" pitchFamily="34" charset="-120"/>
               </a:rPr>
-              <a:t>Ajouter des serveurs demande quelqu'un</a:t>
+              <a:t>La montée en charge n'est pas automatique</a:t>
             </a:r>
             <a:endParaRPr lang="en-US" sz="1400" dirty="0"/>
           </a:p>
@@ -2615,7 +2594,7 @@
                 <a:ea typeface="Calibri" pitchFamily="34" charset="-122"/>
                 <a:cs typeface="Calibri" pitchFamily="34" charset="-120"/>
               </a:rPr>
-              <a:t>Ce n'est pas automatique : il faut un opérateur et deux commandes, environ 3 minutes. Pour l'automatiser, il faudrait préparer une image toute faite du serveur. Notre installation est déjà écrite pour ça.</a:t>
+              <a:t>Elle demande un opérateur et deux commandes, environ 3 minutes. Pour l'automatiser, il faudrait construire une image serveur préconfigurée avec Packer et utiliser un groupe d'autoscaling.</a:t>
             </a:r>
             <a:endParaRPr lang="en-US" sz="1150" dirty="0"/>
           </a:p>
@@ -2681,7 +2660,7 @@
                 <a:ea typeface="Arial" pitchFamily="34" charset="-122"/>
                 <a:cs typeface="Arial" pitchFamily="34" charset="-120"/>
               </a:rPr>
-              <a:t>Tout le site est sur le disque partagé</a:t>
+              <a:t>Le site entier est sur le disque partagé</a:t>
             </a:r>
             <a:endParaRPr lang="en-US" sz="1400" dirty="0"/>
           </a:p>
@@ -2720,7 +2699,7 @@
                 <a:ea typeface="Calibri" pitchFamily="34" charset="-122"/>
                 <a:cs typeface="Calibri" pitchFamily="34" charset="-120"/>
               </a:rPr>
-              <a:t>C'est pratique — les serveurs sont interchangeables — mais un disque réseau est plus lent qu'un disque local. Au-delà de quelques milliers de visiteurs par minute, il faudrait mettre le site dans l'image et ne partager que les photos.</a:t>
+              <a:t>Cela rend les serveurs interchangeables, mais un disque réseau est plus lent qu'un disque local. Au-delà de quelques milliers de requêtes par minute, il faudrait mettre le code dans l'image et ne partager que les images produits.</a:t>
             </a:r>
             <a:endParaRPr lang="en-US" sz="1150" dirty="0"/>
           </a:p>
@@ -2786,7 +2765,7 @@
                 <a:ea typeface="Arial" pitchFamily="34" charset="-122"/>
                 <a:cs typeface="Arial" pitchFamily="34" charset="-120"/>
               </a:rPr>
-              <a:t>Une seule base pour écrire</a:t>
+              <a:t>Une seule base en écriture</a:t>
             </a:r>
             <a:endParaRPr lang="en-US" sz="1400" dirty="0"/>
           </a:p>
@@ -2825,7 +2804,7 @@
                 <a:ea typeface="Calibri" pitchFamily="34" charset="-122"/>
                 <a:cs typeface="Calibri" pitchFamily="34" charset="-120"/>
               </a:rPr>
-              <a:t>On peut ajouter des copies pour la lecture, mais pas pour l'écriture. Et une billetterie, ça écrit beaucoup. C'est la taille de cette base qui est notre vrai plafond.</a:t>
+              <a:t>Les lectures peuvent être réparties sur des réplicas, pas les écritures. Une billetterie écrit beaucoup : la taille de l'instance principale est la limite.</a:t>
             </a:r>
             <a:endParaRPr lang="en-US" sz="1150" dirty="0"/>
           </a:p>
@@ -2930,7 +2909,7 @@
                 <a:ea typeface="Calibri" pitchFamily="34" charset="-122"/>
                 <a:cs typeface="Calibri" pitchFamily="34" charset="-120"/>
               </a:rPr>
-              <a:t>Si toute la région Paris tombe, la boutique tombe. Doubler dans une autre région coûterait plus cher que la panne qu'on évite. C'est un choix, pas un oubli.</a:t>
+              <a:t>Une panne régionale interrompt le service. Le multi-région coûterait plus que la panne qu'il évite à cette échelle.</a:t>
             </a:r>
             <a:endParaRPr lang="en-US" sz="1150" dirty="0"/>
           </a:p>
@@ -3033,7 +3012,7 @@
                 <a:ea typeface="Arial" pitchFamily="34" charset="-122"/>
                 <a:cs typeface="Arial" pitchFamily="34" charset="-120"/>
               </a:rPr>
-              <a:t>D'un compte AWS vide à une boutique en ligne</a:t>
+              <a:t>Déploiement complet en six commandes</a:t>
             </a:r>
             <a:endParaRPr lang="en-US" sz="3000" dirty="0"/>
           </a:p>
@@ -3102,7 +3081,7 @@
                 <a:ea typeface="Courier New" pitchFamily="34" charset="-122"/>
                 <a:cs typeface="Courier New" pitchFamily="34" charset="-120"/>
               </a:rPr>
-              <a:t>./scripts/bootstrap-backend.sh dev     # une seule fois par compte</a:t>
+              <a:t>./scripts/bootstrap-backend.sh dev     # une fois par compte AWS</a:t>
             </a:r>
             <a:endParaRPr lang="en-US" sz="1150" dirty="0"/>
           </a:p>
@@ -3151,7 +3130,7 @@
                 <a:ea typeface="Courier New" pitchFamily="34" charset="-122"/>
                 <a:cs typeface="Courier New" pitchFamily="34" charset="-120"/>
               </a:rPr>
-              <a:t>terraform -chdir=terraform apply       # ~12 min (la base est lente)</a:t>
+              <a:t>terraform -chdir=terraform apply       # ~12 min (création RDS)</a:t>
             </a:r>
             <a:endParaRPr lang="en-US" sz="1150" dirty="0"/>
           </a:p>
@@ -3323,7 +3302,7 @@
                 <a:ea typeface="Calibri" pitchFamily="34" charset="-122"/>
                 <a:cs typeface="Calibri" pitchFamily="34" charset="-120"/>
               </a:rPr>
-              <a:t>La boutique, puis l'administration</a:t>
+              <a:t>La boutique et le back-office</a:t>
             </a:r>
             <a:endParaRPr lang="en-US" sz="1350" dirty="0"/>
           </a:p>
@@ -3426,7 +3405,7 @@
                 <a:ea typeface="Calibri" pitchFamily="34" charset="-122"/>
                 <a:cs typeface="Calibri" pitchFamily="34" charset="-120"/>
               </a:rPr>
-              <a:t>On relance l'installation : changed=0</a:t>
+              <a:t>Playbook relancé : changed=0</a:t>
             </a:r>
             <a:endParaRPr lang="en-US" sz="1350" dirty="0"/>
           </a:p>
@@ -3529,7 +3508,7 @@
                 <a:ea typeface="Calibri" pitchFamily="34" charset="-122"/>
                 <a:cs typeface="Calibri" pitchFamily="34" charset="-120"/>
               </a:rPr>
-              <a:t>On ajoute un serveur, il entre tout seul</a:t>
+              <a:t>Ajout d'un serveur</a:t>
             </a:r>
             <a:endParaRPr lang="en-US" sz="1350" dirty="0"/>
           </a:p>
@@ -3632,7 +3611,7 @@
                 <a:ea typeface="Calibri" pitchFamily="34" charset="-122"/>
                 <a:cs typeface="Calibri" pitchFamily="34" charset="-120"/>
               </a:rPr>
-              <a:t>On en coupe un : la boutique tient</a:t>
+              <a:t>Arrêt d'un serveur : le site répond</a:t>
             </a:r>
             <a:endParaRPr lang="en-US" sz="1350" dirty="0"/>
           </a:p>
@@ -3673,8 +3652,8 @@
         </p:nvSpPr>
         <p:spPr>
           <a:xfrm>
-            <a:off x="795528" y="4663440"/>
-            <a:ext cx="6217920" cy="548640"/>
+            <a:off x="795528" y="4709160"/>
+            <a:ext cx="6217920" cy="457200"/>
           </a:xfrm>
           <a:prstGeom prst="rect">
             <a:avLst/>
@@ -3698,7 +3677,7 @@
                 <a:ea typeface="Calibri" pitchFamily="34" charset="-122"/>
                 <a:cs typeface="Calibri" pitchFamily="34" charset="-120"/>
               </a:rPr>
-              <a:t>Tout le reste — réseau, base, disque, surveillance, mots de passe — découle de ces six commandes.</a:t>
+              <a:t>Réseau, base, stockage, surveillance et secrets sont créés par ces commandes.</a:t>
             </a:r>
             <a:endParaRPr lang="en-US" sz="1250" dirty="0"/>
           </a:p>
@@ -3794,7 +3773,7 @@
                 <a:ea typeface="Courier New" pitchFamily="34" charset="-122"/>
                 <a:cs typeface="Courier New" pitchFamily="34" charset="-120"/>
               </a:rPr>
-              <a:t>MERCI — VOS QUESTIONS</a:t>
+              <a:t>CONCLUSION</a:t>
             </a:r>
             <a:endParaRPr lang="en-US" sz="1200" dirty="0"/>
           </a:p>
@@ -3836,7 +3815,7 @@
                 <a:ea typeface="Arial" pitchFamily="34" charset="-122"/>
                 <a:cs typeface="Arial" pitchFamily="34" charset="-120"/>
               </a:rPr>
-              <a:t>En ligne, documentée,</a:t>
+              <a:t>Déployée, documentée,</a:t>
             </a:r>
             <a:endParaRPr lang="en-US" sz="4200" dirty="0"/>
           </a:p>
@@ -3856,7 +3835,7 @@
                 <a:ea typeface="Arial" pitchFamily="34" charset="-122"/>
                 <a:cs typeface="Arial" pitchFamily="34" charset="-120"/>
               </a:rPr>
-              <a:t>et on sait la refaire.</a:t>
+              <a:t>reproductible.</a:t>
             </a:r>
             <a:endParaRPr lang="en-US" sz="4200" dirty="0"/>
           </a:p>
@@ -3961,7 +3940,7 @@
                 <a:ea typeface="Calibri" pitchFamily="34" charset="-122"/>
                 <a:cs typeface="Calibri" pitchFamily="34" charset="-120"/>
               </a:rPr>
-              <a:t>6 briques · 3 environnements</a:t>
+              <a:t>6 modules · 3 environnements · état distant</a:t>
             </a:r>
             <a:endParaRPr lang="en-US" sz="1150" dirty="0"/>
           </a:p>
@@ -4066,7 +4045,7 @@
                 <a:ea typeface="Calibri" pitchFamily="34" charset="-122"/>
                 <a:cs typeface="Calibri" pitchFamily="34" charset="-120"/>
               </a:rPr>
-              <a:t>3 rôles · secrets chiffrés · changed=0</a:t>
+              <a:t>3 rôles · Galaxy · Vault · changed=0</a:t>
             </a:r>
             <a:endParaRPr lang="en-US" sz="1150" dirty="0"/>
           </a:p>
@@ -4171,7 +4150,7 @@
                 <a:ea typeface="Calibri" pitchFamily="34" charset="-122"/>
                 <a:cs typeface="Calibri" pitchFamily="34" charset="-120"/>
               </a:rPr>
-              <a:t>installer, exploiter, dépanner</a:t>
+              <a:t>déployer, exploiter, dépanner</a:t>
             </a:r>
             <a:endParaRPr lang="en-US" sz="1150" dirty="0"/>
           </a:p>
@@ -4210,7 +4189,7 @@
                 <a:ea typeface="Arial" pitchFamily="34" charset="-122"/>
                 <a:cs typeface="Arial" pitchFamily="34" charset="-120"/>
               </a:rPr>
-              <a:t>5HASH  —  merci de votre attention</a:t>
+              <a:t>Merci de votre attention. Nous répondons à vos questions.</a:t>
             </a:r>
             <a:endParaRPr lang="en-US" sz="1700" dirty="0"/>
           </a:p>
@@ -4313,7 +4292,7 @@
                 <a:ea typeface="Arial" pitchFamily="34" charset="-122"/>
                 <a:cs typeface="Arial" pitchFamily="34" charset="-120"/>
               </a:rPr>
-              <a:t>On s'est posé trois questions simples</a:t>
+              <a:t>Trois questions au départ</a:t>
             </a:r>
             <a:endParaRPr lang="en-US" sz="3000" dirty="0"/>
           </a:p>
@@ -4446,7 +4425,7 @@
                 <a:ea typeface="Arial" pitchFamily="34" charset="-122"/>
                 <a:cs typeface="Arial" pitchFamily="34" charset="-120"/>
               </a:rPr>
-              <a:t>Comment un client arrive</a:t>
+              <a:t>Par où passent</a:t>
             </a:r>
             <a:endParaRPr lang="en-US" sz="1600" dirty="0"/>
           </a:p>
@@ -4466,7 +4445,7 @@
                 <a:ea typeface="Arial" pitchFamily="34" charset="-122"/>
                 <a:cs typeface="Arial" pitchFamily="34" charset="-120"/>
               </a:rPr>
-              <a:t>jusqu'à la boutique ?</a:t>
+              <a:t>les requêtes ?</a:t>
             </a:r>
             <a:endParaRPr lang="en-US" sz="1600" dirty="0"/>
           </a:p>
@@ -4505,7 +4484,7 @@
                 <a:ea typeface="Calibri" pitchFamily="34" charset="-122"/>
                 <a:cs typeface="Calibri" pitchFamily="34" charset="-120"/>
               </a:rPr>
-              <a:t>Une seule porte ouverte sur Internet. Tout le reste est caché derrière.</a:t>
+              <a:t>Un seul point d'entrée public. Les serveurs et la base sont dans des réseaux privés.</a:t>
             </a:r>
             <a:endParaRPr lang="en-US" sz="1350" dirty="0"/>
           </a:p>
@@ -4638,7 +4617,7 @@
                 <a:ea typeface="Arial" pitchFamily="34" charset="-122"/>
                 <a:cs typeface="Arial" pitchFamily="34" charset="-120"/>
               </a:rPr>
-              <a:t>Et si dix fois plus</a:t>
+              <a:t>Comment absorber</a:t>
             </a:r>
             <a:endParaRPr lang="en-US" sz="1600" dirty="0"/>
           </a:p>
@@ -4658,7 +4637,7 @@
                 <a:ea typeface="Arial" pitchFamily="34" charset="-122"/>
                 <a:cs typeface="Arial" pitchFamily="34" charset="-120"/>
               </a:rPr>
-              <a:t>de monde arrive ?</a:t>
+              <a:t>un pic de trafic ?</a:t>
             </a:r>
             <a:endParaRPr lang="en-US" sz="1600" dirty="0"/>
           </a:p>
@@ -4697,7 +4676,7 @@
                 <a:ea typeface="Calibri" pitchFamily="34" charset="-122"/>
                 <a:cs typeface="Calibri" pitchFamily="34" charset="-120"/>
               </a:rPr>
-              <a:t>Nos serveurs ne gardent rien. Donc en ajouter, c'est changer un chiffre.</a:t>
+              <a:t>Les serveurs ne stockent aucune donnée. On peut donc en ajouter à la demande.</a:t>
             </a:r>
             <a:endParaRPr lang="en-US" sz="1350" dirty="0"/>
           </a:p>
@@ -4830,7 +4809,7 @@
                 <a:ea typeface="Arial" pitchFamily="34" charset="-122"/>
                 <a:cs typeface="Arial" pitchFamily="34" charset="-120"/>
               </a:rPr>
-              <a:t>Et si une machine</a:t>
+              <a:t>Que se passe-t-il</a:t>
             </a:r>
             <a:endParaRPr lang="en-US" sz="1600" dirty="0"/>
           </a:p>
@@ -4850,7 +4829,7 @@
                 <a:ea typeface="Arial" pitchFamily="34" charset="-122"/>
                 <a:cs typeface="Arial" pitchFamily="34" charset="-120"/>
               </a:rPr>
-              <a:t>tombe en panne ?</a:t>
+              <a:t>en cas de panne ?</a:t>
             </a:r>
             <a:endParaRPr lang="en-US" sz="1600" dirty="0"/>
           </a:p>
@@ -4889,7 +4868,7 @@
                 <a:ea typeface="Calibri" pitchFamily="34" charset="-122"/>
                 <a:cs typeface="Calibri" pitchFamily="34" charset="-120"/>
               </a:rPr>
-              <a:t>On l'a mesuré : le client ne voit rien, et son panier est conservé.</a:t>
+              <a:t>Le load balancer retire le serveur en panne. Les autres continuent de répondre.</a:t>
             </a:r>
             <a:endParaRPr lang="en-US" sz="1350" dirty="0"/>
           </a:p>
@@ -4920,7 +4899,7 @@
               <a:buNone/>
             </a:pPr>
             <a:r>
-              <a:rPr lang="en-US" sz="1500" i="1" dirty="0">
+              <a:rPr lang="en-US" sz="1500" b="1" dirty="0">
                 <a:solidFill>
                   <a:srgbClr val="9E5D06"/>
                 </a:solidFill>
@@ -4928,7 +4907,7 @@
                 <a:ea typeface="Calibri" pitchFamily="34" charset="-122"/>
                 <a:cs typeface="Calibri" pitchFamily="34" charset="-120"/>
               </a:rPr>
-              <a:t>Chaque choix qu'on va vous présenter répond à l'une de ces trois questions.</a:t>
+              <a:t>Chaque choix présenté ensuite répond à l'une de ces trois questions.</a:t>
             </a:r>
             <a:endParaRPr lang="en-US" sz="1500" dirty="0"/>
           </a:p>
@@ -4992,7 +4971,7 @@
                 <a:ea typeface="Courier New" pitchFamily="34" charset="-122"/>
                 <a:cs typeface="Courier New" pitchFamily="34" charset="-120"/>
               </a:rPr>
-              <a:t>02 — L'ARCHITECTURE</a:t>
+              <a:t>02 — ARCHITECTURE</a:t>
             </a:r>
             <a:endParaRPr lang="en-US" sz="1100" dirty="0"/>
           </a:p>
@@ -5031,7 +5010,7 @@
                 <a:ea typeface="Arial" pitchFamily="34" charset="-122"/>
                 <a:cs typeface="Arial" pitchFamily="34" charset="-120"/>
               </a:rPr>
-              <a:t>Une entrée, des caisses, un coffre</a:t>
+              <a:t>Trois niveaux de réseau, deux zones de disponibilité</a:t>
             </a:r>
             <a:endParaRPr lang="en-US" sz="3000" dirty="0"/>
           </a:p>
@@ -5045,8 +5024,8 @@
         </p:nvSpPr>
         <p:spPr>
           <a:xfrm>
-            <a:off x="1417320" y="1956816"/>
-            <a:ext cx="10149840" cy="1051560"/>
+            <a:off x="1600200" y="1956816"/>
+            <a:ext cx="9966960" cy="1051560"/>
           </a:xfrm>
           <a:prstGeom prst="roundRect">
             <a:avLst>
@@ -5073,7 +5052,7 @@
         <p:spPr>
           <a:xfrm>
             <a:off x="521208" y="2208276"/>
-            <a:ext cx="868680" cy="548640"/>
+            <a:ext cx="1051560" cy="548640"/>
           </a:xfrm>
           <a:prstGeom prst="rect">
             <a:avLst/>
@@ -5097,7 +5076,7 @@
                 <a:ea typeface="Courier New" pitchFamily="34" charset="-122"/>
                 <a:cs typeface="Courier New" pitchFamily="34" charset="-120"/>
               </a:rPr>
-              <a:t>CÔTÉ RUE</a:t>
+              <a:t>RÉSEAU</a:t>
             </a:r>
             <a:endParaRPr lang="en-US" sz="850" dirty="0"/>
           </a:p>
@@ -5114,7 +5093,7 @@
                 <a:ea typeface="Courier New" pitchFamily="34" charset="-122"/>
                 <a:cs typeface="Courier New" pitchFamily="34" charset="-120"/>
               </a:rPr>
-              <a:t>(public)</a:t>
+              <a:t>PUBLIC</a:t>
             </a:r>
             <a:endParaRPr lang="en-US" sz="850" dirty="0"/>
           </a:p>
@@ -5128,8 +5107,8 @@
         </p:nvSpPr>
         <p:spPr>
           <a:xfrm>
-            <a:off x="1417320" y="3355848"/>
-            <a:ext cx="10149840" cy="1051560"/>
+            <a:off x="1600200" y="3355848"/>
+            <a:ext cx="9966960" cy="1051560"/>
           </a:xfrm>
           <a:prstGeom prst="roundRect">
             <a:avLst>
@@ -5156,7 +5135,7 @@
         <p:spPr>
           <a:xfrm>
             <a:off x="521208" y="3607308"/>
-            <a:ext cx="868680" cy="548640"/>
+            <a:ext cx="1051560" cy="548640"/>
           </a:xfrm>
           <a:prstGeom prst="rect">
             <a:avLst/>
@@ -5180,7 +5159,7 @@
                 <a:ea typeface="Courier New" pitchFamily="34" charset="-122"/>
                 <a:cs typeface="Courier New" pitchFamily="34" charset="-120"/>
               </a:rPr>
-              <a:t>LES CAISSES</a:t>
+              <a:t>RÉSEAU PRIVÉ</a:t>
             </a:r>
             <a:endParaRPr lang="en-US" sz="850" dirty="0"/>
           </a:p>
@@ -5197,7 +5176,7 @@
                 <a:ea typeface="Courier New" pitchFamily="34" charset="-122"/>
                 <a:cs typeface="Courier New" pitchFamily="34" charset="-120"/>
               </a:rPr>
-              <a:t>(privé)</a:t>
+              <a:t>APPLICATION</a:t>
             </a:r>
             <a:endParaRPr lang="en-US" sz="850" dirty="0"/>
           </a:p>
@@ -5211,8 +5190,8 @@
         </p:nvSpPr>
         <p:spPr>
           <a:xfrm>
-            <a:off x="1417320" y="4727448"/>
-            <a:ext cx="10149840" cy="1188720"/>
+            <a:off x="1600200" y="4727448"/>
+            <a:ext cx="9966960" cy="1188720"/>
           </a:xfrm>
           <a:prstGeom prst="roundRect">
             <a:avLst>
@@ -5239,7 +5218,7 @@
         <p:spPr>
           <a:xfrm>
             <a:off x="521208" y="5047488"/>
-            <a:ext cx="868680" cy="548640"/>
+            <a:ext cx="1051560" cy="548640"/>
           </a:xfrm>
           <a:prstGeom prst="rect">
             <a:avLst/>
@@ -5263,7 +5242,7 @@
                 <a:ea typeface="Courier New" pitchFamily="34" charset="-122"/>
                 <a:cs typeface="Courier New" pitchFamily="34" charset="-120"/>
               </a:rPr>
-              <a:t>LES RÉSERVES</a:t>
+              <a:t>RÉSEAU PRIVÉ</a:t>
             </a:r>
             <a:endParaRPr lang="en-US" sz="850" dirty="0"/>
           </a:p>
@@ -5280,7 +5259,7 @@
                 <a:ea typeface="Courier New" pitchFamily="34" charset="-122"/>
                 <a:cs typeface="Courier New" pitchFamily="34" charset="-120"/>
               </a:rPr>
-              <a:t>(privé)</a:t>
+              <a:t>DONNÉES</a:t>
             </a:r>
             <a:endParaRPr lang="en-US" sz="850" dirty="0"/>
           </a:p>
@@ -5294,7 +5273,7 @@
         </p:nvSpPr>
         <p:spPr>
           <a:xfrm>
-            <a:off x="1691640" y="1554480"/>
+            <a:off x="1874520" y="1554480"/>
             <a:ext cx="1828800" cy="274320"/>
           </a:xfrm>
           <a:prstGeom prst="rect">
@@ -5319,7 +5298,7 @@
                 <a:ea typeface="Courier New" pitchFamily="34" charset="-122"/>
                 <a:cs typeface="Courier New" pitchFamily="34" charset="-120"/>
               </a:rPr>
-              <a:t>LES CLIENTS</a:t>
+              <a:t>INTERNET</a:t>
             </a:r>
             <a:endParaRPr lang="en-US" sz="1000" dirty="0"/>
           </a:p>
@@ -5333,7 +5312,7 @@
         </p:nvSpPr>
         <p:spPr>
           <a:xfrm>
-            <a:off x="2103120" y="1810512"/>
+            <a:off x="2286000" y="1810512"/>
             <a:ext cx="0" cy="146304"/>
           </a:xfrm>
           <a:prstGeom prst="line">
@@ -5356,8 +5335,8 @@
         </p:nvSpPr>
         <p:spPr>
           <a:xfrm>
-            <a:off x="2286000" y="1737360"/>
-            <a:ext cx="1097280" cy="228600"/>
+            <a:off x="2468880" y="1737360"/>
+            <a:ext cx="1463040" cy="228600"/>
           </a:xfrm>
           <a:prstGeom prst="rect">
             <a:avLst/>
@@ -5381,7 +5360,7 @@
                 <a:ea typeface="Courier New" pitchFamily="34" charset="-122"/>
                 <a:cs typeface="Courier New" pitchFamily="34" charset="-120"/>
               </a:rPr>
-              <a:t>le site</a:t>
+              <a:t>clients · HTTP</a:t>
             </a:r>
             <a:endParaRPr lang="en-US" sz="850" dirty="0"/>
           </a:p>
@@ -5419,7 +5398,7 @@
         <p:spPr>
           <a:xfrm>
             <a:off x="9464040" y="1737360"/>
-            <a:ext cx="2194560" cy="228600"/>
+            <a:ext cx="2377440" cy="228600"/>
           </a:xfrm>
           <a:prstGeom prst="rect">
             <a:avLst/>
@@ -5443,7 +5422,7 @@
                 <a:ea typeface="Courier New" pitchFamily="34" charset="-122"/>
                 <a:cs typeface="Courier New" pitchFamily="34" charset="-120"/>
               </a:rPr>
-              <a:t>nous, pour installer</a:t>
+              <a:t>administration · SSH, notre IP</a:t>
             </a:r>
             <a:endParaRPr lang="en-US" sz="850" dirty="0"/>
           </a:p>
@@ -5457,8 +5436,8 @@
         </p:nvSpPr>
         <p:spPr>
           <a:xfrm>
-            <a:off x="1673352" y="2103120"/>
-            <a:ext cx="4663440" cy="749808"/>
+            <a:off x="1856232" y="2103120"/>
+            <a:ext cx="4572000" cy="749808"/>
           </a:xfrm>
           <a:prstGeom prst="roundRect">
             <a:avLst>
@@ -5484,24 +5463,24 @@
         </p:nvSpPr>
         <p:spPr>
           <a:xfrm>
-            <a:off x="1828800" y="2194560"/>
-            <a:ext cx="4389120" cy="274320"/>
-          </a:xfrm>
-          <a:prstGeom prst="rect">
-            <a:avLst/>
-          </a:prstGeom>
-          <a:noFill/>
-          <a:ln/>
-        </p:spPr>
-        <p:txBody>
-          <a:bodyPr wrap="square" lIns="0" tIns="0" rIns="0" bIns="0" rtlCol="0" anchor="ctr"/>
-          <a:lstStyle/>
-          <a:p>
-            <a:pPr indent="0" marL="0">
-              <a:buNone/>
-            </a:pPr>
-            <a:r>
-              <a:rPr lang="en-US" sz="1300" b="1" dirty="0">
+            <a:off x="2011680" y="2194560"/>
+            <a:ext cx="4297680" cy="274320"/>
+          </a:xfrm>
+          <a:prstGeom prst="rect">
+            <a:avLst/>
+          </a:prstGeom>
+          <a:noFill/>
+          <a:ln/>
+        </p:spPr>
+        <p:txBody>
+          <a:bodyPr wrap="square" lIns="0" tIns="0" rIns="0" bIns="0" rtlCol="0" anchor="ctr"/>
+          <a:lstStyle/>
+          <a:p>
+            <a:pPr indent="0" marL="0">
+              <a:buNone/>
+            </a:pPr>
+            <a:r>
+              <a:rPr lang="en-US" sz="1350" b="1" dirty="0">
                 <a:solidFill>
                   <a:srgbClr val="17222C"/>
                 </a:solidFill>
@@ -5509,9 +5488,9 @@
                 <a:ea typeface="Arial" pitchFamily="34" charset="-122"/>
                 <a:cs typeface="Arial" pitchFamily="34" charset="-120"/>
               </a:rPr>
-              <a:t>Le répartiteur  (load balancer)</a:t>
-            </a:r>
-            <a:endParaRPr lang="en-US" sz="1300" dirty="0"/>
+              <a:t>Load balancer</a:t>
+            </a:r>
+            <a:endParaRPr lang="en-US" sz="1350" dirty="0"/>
           </a:p>
         </p:txBody>
       </p:sp>
@@ -5523,8 +5502,8 @@
         </p:nvSpPr>
         <p:spPr>
           <a:xfrm>
-            <a:off x="1828800" y="2487168"/>
-            <a:ext cx="4389120" cy="274320"/>
+            <a:off x="2011680" y="2487168"/>
+            <a:ext cx="4297680" cy="274320"/>
           </a:xfrm>
           <a:prstGeom prst="rect">
             <a:avLst/>
@@ -5548,7 +5527,7 @@
                 <a:ea typeface="Calibri" pitchFamily="34" charset="-122"/>
                 <a:cs typeface="Calibri" pitchFamily="34" charset="-120"/>
               </a:rPr>
-              <a:t>il envoie chaque visiteur vers une caisse qui va bien</a:t>
+              <a:t>répartit les requêtes · vérifie chaque serveur toutes les 15 s</a:t>
             </a:r>
             <a:endParaRPr lang="en-US" sz="1100" dirty="0"/>
           </a:p>
@@ -5606,7 +5585,7 @@
               <a:buNone/>
             </a:pPr>
             <a:r>
-              <a:rPr lang="en-US" sz="1300" b="1" dirty="0">
+              <a:rPr lang="en-US" sz="1350" b="1" dirty="0">
                 <a:solidFill>
                   <a:srgbClr val="17222C"/>
                 </a:solidFill>
@@ -5614,9 +5593,9 @@
                 <a:ea typeface="Arial" pitchFamily="34" charset="-122"/>
                 <a:cs typeface="Arial" pitchFamily="34" charset="-120"/>
               </a:rPr>
-              <a:t>L'entrée de service</a:t>
-            </a:r>
-            <a:endParaRPr lang="en-US" sz="1300" dirty="0"/>
+              <a:t>Bastion</a:t>
+            </a:r>
+            <a:endParaRPr lang="en-US" sz="1350" dirty="0"/>
           </a:p>
         </p:txBody>
       </p:sp>
@@ -5653,7 +5632,7 @@
                 <a:ea typeface="Calibri" pitchFamily="34" charset="-122"/>
                 <a:cs typeface="Calibri" pitchFamily="34" charset="-120"/>
               </a:rPr>
-              <a:t>réservée à l'équipe, jamais aux clients</a:t>
+              <a:t>accès SSH pour Ansible uniquement</a:t>
             </a:r>
             <a:endParaRPr lang="en-US" sz="1100" dirty="0"/>
           </a:p>
@@ -5667,7 +5646,7 @@
         </p:nvSpPr>
         <p:spPr>
           <a:xfrm>
-            <a:off x="3611880" y="2871216"/>
+            <a:off x="3794760" y="2871216"/>
             <a:ext cx="0" cy="457200"/>
           </a:xfrm>
           <a:prstGeom prst="line">
@@ -5685,7 +5664,46 @@
       </p:sp>
       <p:sp>
         <p:nvSpPr>
-          <p:cNvPr id="22" name="Shape 20"/>
+          <p:cNvPr id="22" name="Text 20"/>
+          <p:cNvSpPr txBox="1"/>
+          <p:nvPr/>
+        </p:nvSpPr>
+        <p:spPr>
+          <a:xfrm>
+            <a:off x="3931920" y="2944368"/>
+            <a:ext cx="1005840" cy="228600"/>
+          </a:xfrm>
+          <a:prstGeom prst="rect">
+            <a:avLst/>
+          </a:prstGeom>
+          <a:noFill/>
+          <a:ln/>
+        </p:spPr>
+        <p:txBody>
+          <a:bodyPr wrap="square" lIns="0" tIns="0" rIns="0" bIns="0" rtlCol="0" anchor="ctr"/>
+          <a:lstStyle/>
+          <a:p>
+            <a:pPr indent="0" marL="0">
+              <a:buNone/>
+            </a:pPr>
+            <a:r>
+              <a:rPr lang="en-US" sz="900" dirty="0">
+                <a:solidFill>
+                  <a:srgbClr val="9E5D06"/>
+                </a:solidFill>
+                <a:latin typeface="Courier New" pitchFamily="34" charset="0"/>
+                <a:ea typeface="Courier New" pitchFamily="34" charset="-122"/>
+                <a:cs typeface="Courier New" pitchFamily="34" charset="-120"/>
+              </a:rPr>
+              <a:t>port 80</a:t>
+            </a:r>
+            <a:endParaRPr lang="en-US" sz="900" dirty="0"/>
+          </a:p>
+        </p:txBody>
+      </p:sp>
+      <p:sp>
+        <p:nvSpPr>
+          <p:cNvPr id="23" name="Shape 21"/>
           <p:cNvSpPr/>
           <p:nvPr/>
         </p:nvSpPr>
@@ -5709,14 +5727,53 @@
       </p:sp>
       <p:sp>
         <p:nvSpPr>
-          <p:cNvPr id="23" name="Shape 21"/>
+          <p:cNvPr id="24" name="Text 22"/>
+          <p:cNvSpPr txBox="1"/>
+          <p:nvPr/>
+        </p:nvSpPr>
+        <p:spPr>
+          <a:xfrm>
+            <a:off x="9966960" y="2944368"/>
+            <a:ext cx="1005840" cy="228600"/>
+          </a:xfrm>
+          <a:prstGeom prst="rect">
+            <a:avLst/>
+          </a:prstGeom>
+          <a:noFill/>
+          <a:ln/>
+        </p:spPr>
+        <p:txBody>
+          <a:bodyPr wrap="square" lIns="0" tIns="0" rIns="0" bIns="0" rtlCol="0" anchor="ctr"/>
+          <a:lstStyle/>
+          <a:p>
+            <a:pPr indent="0" marL="0">
+              <a:buNone/>
+            </a:pPr>
+            <a:r>
+              <a:rPr lang="en-US" sz="900" dirty="0">
+                <a:solidFill>
+                  <a:srgbClr val="5C6B7A"/>
+                </a:solidFill>
+                <a:latin typeface="Courier New" pitchFamily="34" charset="0"/>
+                <a:ea typeface="Courier New" pitchFamily="34" charset="-122"/>
+                <a:cs typeface="Courier New" pitchFamily="34" charset="-120"/>
+              </a:rPr>
+              <a:t>port 22</a:t>
+            </a:r>
+            <a:endParaRPr lang="en-US" sz="900" dirty="0"/>
+          </a:p>
+        </p:txBody>
+      </p:sp>
+      <p:sp>
+        <p:nvSpPr>
+          <p:cNvPr id="25" name="Shape 23"/>
           <p:cNvSpPr/>
           <p:nvPr/>
         </p:nvSpPr>
         <p:spPr>
           <a:xfrm>
-            <a:off x="1673352" y="3511296"/>
-            <a:ext cx="9601200" cy="749808"/>
+            <a:off x="1856232" y="3511296"/>
+            <a:ext cx="9418320" cy="749808"/>
           </a:xfrm>
           <a:prstGeom prst="roundRect">
             <a:avLst>
@@ -5736,30 +5793,30 @@
       </p:sp>
       <p:sp>
         <p:nvSpPr>
-          <p:cNvPr id="24" name="Text 22"/>
-          <p:cNvSpPr txBox="1"/>
-          <p:nvPr/>
-        </p:nvSpPr>
-        <p:spPr>
-          <a:xfrm>
-            <a:off x="1828800" y="3584448"/>
-            <a:ext cx="9235440" cy="274320"/>
-          </a:xfrm>
-          <a:prstGeom prst="rect">
-            <a:avLst/>
-          </a:prstGeom>
-          <a:noFill/>
-          <a:ln/>
-        </p:spPr>
-        <p:txBody>
-          <a:bodyPr wrap="square" lIns="0" tIns="0" rIns="0" bIns="0" rtlCol="0" anchor="ctr"/>
-          <a:lstStyle/>
-          <a:p>
-            <a:pPr indent="0" marL="0">
-              <a:buNone/>
-            </a:pPr>
-            <a:r>
-              <a:rPr lang="en-US" sz="1300" b="1" dirty="0">
+          <p:cNvPr id="26" name="Text 24"/>
+          <p:cNvSpPr txBox="1"/>
+          <p:nvPr/>
+        </p:nvSpPr>
+        <p:spPr>
+          <a:xfrm>
+            <a:off x="2011680" y="3584448"/>
+            <a:ext cx="9052560" cy="274320"/>
+          </a:xfrm>
+          <a:prstGeom prst="rect">
+            <a:avLst/>
+          </a:prstGeom>
+          <a:noFill/>
+          <a:ln/>
+        </p:spPr>
+        <p:txBody>
+          <a:bodyPr wrap="square" lIns="0" tIns="0" rIns="0" bIns="0" rtlCol="0" anchor="ctr"/>
+          <a:lstStyle/>
+          <a:p>
+            <a:pPr indent="0" marL="0">
+              <a:buNone/>
+            </a:pPr>
+            <a:r>
+              <a:rPr lang="en-US" sz="1350" b="1" dirty="0">
                 <a:solidFill>
                   <a:srgbClr val="17222C"/>
                 </a:solidFill>
@@ -5767,22 +5824,22 @@
                 <a:ea typeface="Arial" pitchFamily="34" charset="-122"/>
                 <a:cs typeface="Arial" pitchFamily="34" charset="-120"/>
               </a:rPr>
-              <a:t>Les caisses : des serveurs qui font tourner PrestaShop</a:t>
-            </a:r>
-            <a:endParaRPr lang="en-US" sz="1300" dirty="0"/>
-          </a:p>
-        </p:txBody>
-      </p:sp>
-      <p:sp>
-        <p:nvSpPr>
-          <p:cNvPr id="25" name="Text 23"/>
-          <p:cNvSpPr txBox="1"/>
-          <p:nvPr/>
-        </p:nvSpPr>
-        <p:spPr>
-          <a:xfrm>
-            <a:off x="1828800" y="3877056"/>
-            <a:ext cx="9235440" cy="274320"/>
+              <a:t>Serveurs EC2  —  conteneur Docker PrestaShop</a:t>
+            </a:r>
+            <a:endParaRPr lang="en-US" sz="1350" dirty="0"/>
+          </a:p>
+        </p:txBody>
+      </p:sp>
+      <p:sp>
+        <p:nvSpPr>
+          <p:cNvPr id="27" name="Text 25"/>
+          <p:cNvSpPr txBox="1"/>
+          <p:nvPr/>
+        </p:nvSpPr>
+        <p:spPr>
+          <a:xfrm>
+            <a:off x="2011680" y="3877056"/>
+            <a:ext cx="9052560" cy="274320"/>
           </a:xfrm>
           <a:prstGeom prst="rect">
             <a:avLst/>
@@ -5806,7 +5863,7 @@
                 <a:ea typeface="Calibri" pitchFamily="34" charset="-122"/>
                 <a:cs typeface="Calibri" pitchFamily="34" charset="-120"/>
               </a:rPr>
-              <a:t>toutes identiques, interchangeables — et aucune n'est joignable depuis Internet</a:t>
+              <a:t>identiques · répartis sur les zones · aucune adresse IP publique</a:t>
             </a:r>
             <a:endParaRPr lang="en-US" sz="1100" dirty="0"/>
           </a:p>
@@ -5814,13 +5871,13 @@
       </p:sp>
       <p:sp>
         <p:nvSpPr>
-          <p:cNvPr id="26" name="Shape 24"/>
+          <p:cNvPr id="28" name="Shape 26"/>
           <p:cNvSpPr/>
           <p:nvPr/>
         </p:nvSpPr>
         <p:spPr>
           <a:xfrm>
-            <a:off x="3611880" y="4279392"/>
+            <a:off x="3794760" y="4279392"/>
             <a:ext cx="0" cy="420624"/>
           </a:xfrm>
           <a:prstGeom prst="line">
@@ -5838,7 +5895,46 @@
       </p:sp>
       <p:sp>
         <p:nvSpPr>
-          <p:cNvPr id="27" name="Shape 25"/>
+          <p:cNvPr id="29" name="Text 27"/>
+          <p:cNvSpPr txBox="1"/>
+          <p:nvPr/>
+        </p:nvSpPr>
+        <p:spPr>
+          <a:xfrm>
+            <a:off x="3931920" y="4334256"/>
+            <a:ext cx="1188720" cy="228600"/>
+          </a:xfrm>
+          <a:prstGeom prst="rect">
+            <a:avLst/>
+          </a:prstGeom>
+          <a:noFill/>
+          <a:ln/>
+        </p:spPr>
+        <p:txBody>
+          <a:bodyPr wrap="square" lIns="0" tIns="0" rIns="0" bIns="0" rtlCol="0" anchor="ctr"/>
+          <a:lstStyle/>
+          <a:p>
+            <a:pPr indent="0" marL="0">
+              <a:buNone/>
+            </a:pPr>
+            <a:r>
+              <a:rPr lang="en-US" sz="900" dirty="0">
+                <a:solidFill>
+                  <a:srgbClr val="0C6A72"/>
+                </a:solidFill>
+                <a:latin typeface="Courier New" pitchFamily="34" charset="0"/>
+                <a:ea typeface="Courier New" pitchFamily="34" charset="-122"/>
+                <a:cs typeface="Courier New" pitchFamily="34" charset="-120"/>
+              </a:rPr>
+              <a:t>port 3306</a:t>
+            </a:r>
+            <a:endParaRPr lang="en-US" sz="900" dirty="0"/>
+          </a:p>
+        </p:txBody>
+      </p:sp>
+      <p:sp>
+        <p:nvSpPr>
+          <p:cNvPr id="30" name="Shape 28"/>
           <p:cNvSpPr/>
           <p:nvPr/>
         </p:nvSpPr>
@@ -5862,14 +5958,53 @@
       </p:sp>
       <p:sp>
         <p:nvSpPr>
-          <p:cNvPr id="28" name="Shape 26"/>
+          <p:cNvPr id="31" name="Text 29"/>
+          <p:cNvSpPr txBox="1"/>
+          <p:nvPr/>
+        </p:nvSpPr>
+        <p:spPr>
+          <a:xfrm>
+            <a:off x="9052560" y="4334256"/>
+            <a:ext cx="1188720" cy="228600"/>
+          </a:xfrm>
+          <a:prstGeom prst="rect">
+            <a:avLst/>
+          </a:prstGeom>
+          <a:noFill/>
+          <a:ln/>
+        </p:spPr>
+        <p:txBody>
+          <a:bodyPr wrap="square" lIns="0" tIns="0" rIns="0" bIns="0" rtlCol="0" anchor="ctr"/>
+          <a:lstStyle/>
+          <a:p>
+            <a:pPr indent="0" marL="0">
+              <a:buNone/>
+            </a:pPr>
+            <a:r>
+              <a:rPr lang="en-US" sz="900" dirty="0">
+                <a:solidFill>
+                  <a:srgbClr val="0C6A72"/>
+                </a:solidFill>
+                <a:latin typeface="Courier New" pitchFamily="34" charset="0"/>
+                <a:ea typeface="Courier New" pitchFamily="34" charset="-122"/>
+                <a:cs typeface="Courier New" pitchFamily="34" charset="-120"/>
+              </a:rPr>
+              <a:t>port 2049</a:t>
+            </a:r>
+            <a:endParaRPr lang="en-US" sz="900" dirty="0"/>
+          </a:p>
+        </p:txBody>
+      </p:sp>
+      <p:sp>
+        <p:nvSpPr>
+          <p:cNvPr id="32" name="Shape 30"/>
           <p:cNvSpPr/>
           <p:nvPr/>
         </p:nvSpPr>
         <p:spPr>
           <a:xfrm>
-            <a:off x="1673352" y="4882896"/>
-            <a:ext cx="4663440" cy="877824"/>
+            <a:off x="1856232" y="4882896"/>
+            <a:ext cx="4572000" cy="877824"/>
           </a:xfrm>
           <a:prstGeom prst="roundRect">
             <a:avLst>
@@ -5889,30 +6024,30 @@
       </p:sp>
       <p:sp>
         <p:nvSpPr>
-          <p:cNvPr id="29" name="Text 27"/>
-          <p:cNvSpPr txBox="1"/>
-          <p:nvPr/>
-        </p:nvSpPr>
-        <p:spPr>
-          <a:xfrm>
-            <a:off x="1828800" y="4974336"/>
-            <a:ext cx="4389120" cy="274320"/>
-          </a:xfrm>
-          <a:prstGeom prst="rect">
-            <a:avLst/>
-          </a:prstGeom>
-          <a:noFill/>
-          <a:ln/>
-        </p:spPr>
-        <p:txBody>
-          <a:bodyPr wrap="square" lIns="0" tIns="0" rIns="0" bIns="0" rtlCol="0" anchor="ctr"/>
-          <a:lstStyle/>
-          <a:p>
-            <a:pPr indent="0" marL="0">
-              <a:buNone/>
-            </a:pPr>
-            <a:r>
-              <a:rPr lang="en-US" sz="1300" b="1" dirty="0">
+          <p:cNvPr id="33" name="Text 31"/>
+          <p:cNvSpPr txBox="1"/>
+          <p:nvPr/>
+        </p:nvSpPr>
+        <p:spPr>
+          <a:xfrm>
+            <a:off x="2011680" y="4974336"/>
+            <a:ext cx="4297680" cy="274320"/>
+          </a:xfrm>
+          <a:prstGeom prst="rect">
+            <a:avLst/>
+          </a:prstGeom>
+          <a:noFill/>
+          <a:ln/>
+        </p:spPr>
+        <p:txBody>
+          <a:bodyPr wrap="square" lIns="0" tIns="0" rIns="0" bIns="0" rtlCol="0" anchor="ctr"/>
+          <a:lstStyle/>
+          <a:p>
+            <a:pPr indent="0" marL="0">
+              <a:buNone/>
+            </a:pPr>
+            <a:r>
+              <a:rPr lang="en-US" sz="1350" b="1" dirty="0">
                 <a:solidFill>
                   <a:srgbClr val="17222C"/>
                 </a:solidFill>
@@ -5920,22 +6055,22 @@
                 <a:ea typeface="Arial" pitchFamily="34" charset="-122"/>
                 <a:cs typeface="Arial" pitchFamily="34" charset="-120"/>
               </a:rPr>
-              <a:t>Le coffre : la base de données</a:t>
-            </a:r>
-            <a:endParaRPr lang="en-US" sz="1300" dirty="0"/>
-          </a:p>
-        </p:txBody>
-      </p:sp>
-      <p:sp>
-        <p:nvSpPr>
-          <p:cNvPr id="30" name="Text 28"/>
-          <p:cNvSpPr txBox="1"/>
-          <p:nvPr/>
-        </p:nvSpPr>
-        <p:spPr>
-          <a:xfrm>
-            <a:off x="1828800" y="5285232"/>
-            <a:ext cx="4389120" cy="320040"/>
+              <a:t>Base de données RDS MySQL</a:t>
+            </a:r>
+            <a:endParaRPr lang="en-US" sz="1350" dirty="0"/>
+          </a:p>
+        </p:txBody>
+      </p:sp>
+      <p:sp>
+        <p:nvSpPr>
+          <p:cNvPr id="34" name="Text 32"/>
+          <p:cNvSpPr txBox="1"/>
+          <p:nvPr/>
+        </p:nvSpPr>
+        <p:spPr>
+          <a:xfrm>
+            <a:off x="2011680" y="5285232"/>
+            <a:ext cx="4297680" cy="320040"/>
           </a:xfrm>
           <a:prstGeom prst="rect">
             <a:avLst/>
@@ -5959,7 +6094,7 @@
                 <a:ea typeface="Calibri" pitchFamily="34" charset="-122"/>
                 <a:cs typeface="Calibri" pitchFamily="34" charset="-120"/>
               </a:rPr>
-              <a:t>les billets, les paniers, les commandes</a:t>
+              <a:t>catalogue, paniers, commandes</a:t>
             </a:r>
             <a:endParaRPr lang="en-US" sz="1100" dirty="0"/>
           </a:p>
@@ -5967,14 +6102,14 @@
       </p:sp>
       <p:sp>
         <p:nvSpPr>
-          <p:cNvPr id="31" name="Shape 29"/>
+          <p:cNvPr id="35" name="Shape 33"/>
           <p:cNvSpPr/>
           <p:nvPr/>
         </p:nvSpPr>
         <p:spPr>
           <a:xfrm>
-            <a:off x="6629400" y="4882896"/>
-            <a:ext cx="4663440" cy="877824"/>
+            <a:off x="6720840" y="4882896"/>
+            <a:ext cx="4572000" cy="877824"/>
           </a:xfrm>
           <a:prstGeom prst="roundRect">
             <a:avLst>
@@ -5994,30 +6129,30 @@
       </p:sp>
       <p:sp>
         <p:nvSpPr>
-          <p:cNvPr id="32" name="Text 30"/>
-          <p:cNvSpPr txBox="1"/>
-          <p:nvPr/>
-        </p:nvSpPr>
-        <p:spPr>
-          <a:xfrm>
-            <a:off x="6793992" y="4974336"/>
-            <a:ext cx="4389120" cy="274320"/>
-          </a:xfrm>
-          <a:prstGeom prst="rect">
-            <a:avLst/>
-          </a:prstGeom>
-          <a:noFill/>
-          <a:ln/>
-        </p:spPr>
-        <p:txBody>
-          <a:bodyPr wrap="square" lIns="0" tIns="0" rIns="0" bIns="0" rtlCol="0" anchor="ctr"/>
-          <a:lstStyle/>
-          <a:p>
-            <a:pPr indent="0" marL="0">
-              <a:buNone/>
-            </a:pPr>
-            <a:r>
-              <a:rPr lang="en-US" sz="1300" b="1" dirty="0">
+          <p:cNvPr id="36" name="Text 34"/>
+          <p:cNvSpPr txBox="1"/>
+          <p:nvPr/>
+        </p:nvSpPr>
+        <p:spPr>
+          <a:xfrm>
+            <a:off x="6885432" y="4974336"/>
+            <a:ext cx="4297680" cy="274320"/>
+          </a:xfrm>
+          <a:prstGeom prst="rect">
+            <a:avLst/>
+          </a:prstGeom>
+          <a:noFill/>
+          <a:ln/>
+        </p:spPr>
+        <p:txBody>
+          <a:bodyPr wrap="square" lIns="0" tIns="0" rIns="0" bIns="0" rtlCol="0" anchor="ctr"/>
+          <a:lstStyle/>
+          <a:p>
+            <a:pPr indent="0" marL="0">
+              <a:buNone/>
+            </a:pPr>
+            <a:r>
+              <a:rPr lang="en-US" sz="1350" b="1" dirty="0">
                 <a:solidFill>
                   <a:srgbClr val="17222C"/>
                 </a:solidFill>
@@ -6025,22 +6160,22 @@
                 <a:ea typeface="Arial" pitchFamily="34" charset="-122"/>
                 <a:cs typeface="Arial" pitchFamily="34" charset="-120"/>
               </a:rPr>
-              <a:t>Le vestiaire : un disque partagé</a:t>
-            </a:r>
-            <a:endParaRPr lang="en-US" sz="1300" dirty="0"/>
-          </a:p>
-        </p:txBody>
-      </p:sp>
-      <p:sp>
-        <p:nvSpPr>
-          <p:cNvPr id="33" name="Text 31"/>
-          <p:cNvSpPr txBox="1"/>
-          <p:nvPr/>
-        </p:nvSpPr>
-        <p:spPr>
-          <a:xfrm>
-            <a:off x="6793992" y="5285232"/>
-            <a:ext cx="4389120" cy="320040"/>
+              <a:t>Disque partagé EFS</a:t>
+            </a:r>
+            <a:endParaRPr lang="en-US" sz="1350" dirty="0"/>
+          </a:p>
+        </p:txBody>
+      </p:sp>
+      <p:sp>
+        <p:nvSpPr>
+          <p:cNvPr id="37" name="Text 35"/>
+          <p:cNvSpPr txBox="1"/>
+          <p:nvPr/>
+        </p:nvSpPr>
+        <p:spPr>
+          <a:xfrm>
+            <a:off x="6885432" y="5285232"/>
+            <a:ext cx="4297680" cy="320040"/>
           </a:xfrm>
           <a:prstGeom prst="rect">
             <a:avLst/>
@@ -6064,7 +6199,7 @@
                 <a:ea typeface="Calibri" pitchFamily="34" charset="-122"/>
                 <a:cs typeface="Calibri" pitchFamily="34" charset="-120"/>
               </a:rPr>
-              <a:t>les images, le thème, et les paniers en cours</a:t>
+              <a:t>images, thème, sessions PHP</a:t>
             </a:r>
             <a:endParaRPr lang="en-US" sz="1100" dirty="0"/>
           </a:p>
@@ -6072,7 +6207,7 @@
       </p:sp>
       <p:sp>
         <p:nvSpPr>
-          <p:cNvPr id="34" name="Text 32"/>
+          <p:cNvPr id="38" name="Text 36"/>
           <p:cNvSpPr txBox="1"/>
           <p:nvPr/>
         </p:nvSpPr>
@@ -6095,7 +6230,7 @@
               <a:buNone/>
             </a:pPr>
             <a:r>
-              <a:rPr lang="en-US" sz="1500" i="1" dirty="0">
+              <a:rPr lang="en-US" sz="1500" b="1" dirty="0">
                 <a:solidFill>
                   <a:srgbClr val="9E5D06"/>
                 </a:solidFill>
@@ -6103,7 +6238,7 @@
                 <a:ea typeface="Calibri" pitchFamily="34" charset="-122"/>
                 <a:cs typeface="Calibri" pitchFamily="34" charset="-120"/>
               </a:rPr>
-              <a:t>Les caisses ne gardent rien : tout est dans le coffre et le vestiaire. C'est ce qui rend tout le reste possible.</a:t>
+              <a:t>Les serveurs ne stockent aucune donnée : tout est dans la base ou sur le disque partagé.</a:t>
             </a:r>
             <a:endParaRPr lang="en-US" sz="1500" dirty="0"/>
           </a:p>
@@ -6245,7 +6380,7 @@
                 <a:ea typeface="Calibri" pitchFamily="34" charset="-122"/>
                 <a:cs typeface="Calibri" pitchFamily="34" charset="-120"/>
               </a:rPr>
-              <a:t>La règle qu'on s'est donnée : on garde la main sur ce qui est propre à la boutique, et on laisse à AWS ce que personne n'a envie de réparer un soir d'ouverture.</a:t>
+              <a:t>Le sujet nous laissait libres de répartir. Nous avons gardé ce qui est propre à la boutique, et confié à AWS ce qui est standard.</a:t>
             </a:r>
             <a:endParaRPr lang="en-US" sz="1400" dirty="0"/>
           </a:p>
@@ -6274,9 +6409,9 @@
             <a:tbl>
               <a:tblPr/>
               <a:tblGrid>
-                <a:gridCol w="2011680"/>
+                <a:gridCol w="2103120"/>
                 <a:gridCol w="2468880"/>
-                <a:gridCol w="6574536"/>
+                <a:gridCol w="6483096"/>
               </a:tblGrid>
               <a:tr h="566928">
                 <a:tc>
@@ -6296,7 +6431,7 @@
                           <a:ea typeface="Calibri" pitchFamily="34" charset="-122"/>
                           <a:cs typeface="Calibri" pitchFamily="34" charset="-120"/>
                         </a:rPr>
-                        <a:t>QUOI</a:t>
+                        <a:t>COMPOSANT</a:t>
                       </a:r>
                       <a:endParaRPr lang="en-US" sz="1250" dirty="0">
                         <a:latin typeface="Calibri" charset="0"/>
@@ -6364,7 +6499,7 @@
                           <a:ea typeface="Calibri" pitchFamily="34" charset="-122"/>
                           <a:cs typeface="Calibri" pitchFamily="34" charset="-120"/>
                         </a:rPr>
-                        <a:t>NOTRE CHOIX</a:t>
+                        <a:t>CHOIX</a:t>
                       </a:r>
                       <a:endParaRPr lang="en-US" sz="1250" dirty="0">
                         <a:latin typeface="Calibri" charset="0"/>
@@ -6432,7 +6567,7 @@
                           <a:ea typeface="Calibri" pitchFamily="34" charset="-122"/>
                           <a:cs typeface="Calibri" pitchFamily="34" charset="-120"/>
                         </a:rPr>
-                        <a:t>POURQUOI</a:t>
+                        <a:t>RAISON</a:t>
                       </a:r>
                       <a:endParaRPr lang="en-US" sz="1250" dirty="0">
                         <a:latin typeface="Calibri" charset="0"/>
@@ -6502,7 +6637,7 @@
                           <a:ea typeface="Calibri" pitchFamily="34" charset="-122"/>
                           <a:cs typeface="Calibri" pitchFamily="34" charset="-120"/>
                         </a:rPr>
-                        <a:t>La boutique</a:t>
+                        <a:t>Application</a:t>
                       </a:r>
                       <a:endParaRPr lang="en-US" sz="1250" dirty="0">
                         <a:latin typeface="Calibri" charset="0"/>
@@ -6570,7 +6705,7 @@
                           <a:ea typeface="Calibri" pitchFamily="34" charset="-122"/>
                           <a:cs typeface="Calibri" pitchFamily="34" charset="-120"/>
                         </a:rPr>
-                        <a:t>Docker sur un serveur EC2</a:t>
+                        <a:t>Docker sur EC2</a:t>
                       </a:r>
                       <a:endParaRPr lang="en-US" sz="1250" dirty="0">
                         <a:latin typeface="Calibri" charset="0"/>
@@ -6638,7 +6773,7 @@
                           <a:ea typeface="Calibri" pitchFamily="34" charset="-122"/>
                           <a:cs typeface="Calibri" pitchFamily="34" charset="-120"/>
                         </a:rPr>
-                        <a:t>Le sujet demande l'image PrestaShop sur EC2. Changer de version, c'est une ligne à modifier.</a:t>
+                        <a:t>Le sujet impose l'image PrestaShop sur une instance EC2 configurée par Ansible. Changer de version se fait en une ligne.</a:t>
                       </a:r>
                       <a:endParaRPr lang="en-US" sz="1250" dirty="0">
                         <a:latin typeface="Calibri" charset="0"/>
@@ -6708,7 +6843,7 @@
                           <a:ea typeface="Calibri" pitchFamily="34" charset="-122"/>
                           <a:cs typeface="Calibri" pitchFamily="34" charset="-120"/>
                         </a:rPr>
-                        <a:t>La base de données</a:t>
+                        <a:t>Base de données</a:t>
                       </a:r>
                       <a:endParaRPr lang="en-US" sz="1250" dirty="0">
                         <a:latin typeface="Calibri" charset="0"/>
@@ -6776,7 +6911,7 @@
                           <a:ea typeface="Calibri" pitchFamily="34" charset="-122"/>
                           <a:cs typeface="Calibri" pitchFamily="34" charset="-120"/>
                         </a:rPr>
-                        <a:t>RDS, le service géré d'AWS</a:t>
+                        <a:t>RDS MySQL (managé)</a:t>
                       </a:r>
                       <a:endParaRPr lang="en-US" sz="1250" dirty="0">
                         <a:latin typeface="Calibri" charset="0"/>
@@ -6844,7 +6979,7 @@
                           <a:ea typeface="Calibri" pitchFamily="34" charset="-122"/>
                           <a:cs typeface="Calibri" pitchFamily="34" charset="-120"/>
                         </a:rPr>
-                        <a:t>Sauvegardes, mises à jour, machine de secours : AWS le fait mieux que nous, et sans nous réveiller la nuit.</a:t>
+                        <a:t>AWS gère les sauvegardes, les mises à jour et le basculement automatique vers une instance de secours.</a:t>
                       </a:r>
                       <a:endParaRPr lang="en-US" sz="1250" dirty="0">
                         <a:latin typeface="Calibri" charset="0"/>
@@ -6914,7 +7049,7 @@
                           <a:ea typeface="Calibri" pitchFamily="34" charset="-122"/>
                           <a:cs typeface="Calibri" pitchFamily="34" charset="-120"/>
                         </a:rPr>
-                        <a:t>Les fichiers</a:t>
+                        <a:t>Fichiers</a:t>
                       </a:r>
                       <a:endParaRPr lang="en-US" sz="1250" dirty="0">
                         <a:latin typeface="Calibri" charset="0"/>
@@ -6982,7 +7117,7 @@
                           <a:ea typeface="Calibri" pitchFamily="34" charset="-122"/>
                           <a:cs typeface="Calibri" pitchFamily="34" charset="-120"/>
                         </a:rPr>
-                        <a:t>EFS, un disque partagé</a:t>
+                        <a:t>EFS (disque partagé)</a:t>
                       </a:r>
                       <a:endParaRPr lang="en-US" sz="1250" dirty="0">
                         <a:latin typeface="Calibri" charset="0"/>
@@ -7050,7 +7185,7 @@
                           <a:ea typeface="Calibri" pitchFamily="34" charset="-122"/>
                           <a:cs typeface="Calibri" pitchFamily="34" charset="-120"/>
                         </a:rPr>
-                        <a:t>Plusieurs serveurs doivent voir les mêmes images. Un disque normal ne se partage pas.</a:t>
+                        <a:t>Plusieurs serveurs doivent lire et écrire les mêmes fichiers. Un disque EBS ne se partage pas.</a:t>
                       </a:r>
                       <a:endParaRPr lang="en-US" sz="1250" dirty="0">
                         <a:latin typeface="Calibri" charset="0"/>
@@ -7120,7 +7255,7 @@
                           <a:ea typeface="Calibri" pitchFamily="34" charset="-122"/>
                           <a:cs typeface="Calibri" pitchFamily="34" charset="-120"/>
                         </a:rPr>
-                        <a:t>L'entrée</a:t>
+                        <a:t>Point d'entrée</a:t>
                       </a:r>
                       <a:endParaRPr lang="en-US" sz="1250" dirty="0">
                         <a:latin typeface="Calibri" charset="0"/>
@@ -7188,7 +7323,7 @@
                           <a:ea typeface="Calibri" pitchFamily="34" charset="-122"/>
                           <a:cs typeface="Calibri" pitchFamily="34" charset="-120"/>
                         </a:rPr>
-                        <a:t>Un load balancer</a:t>
+                        <a:t>Load balancer (ALB)</a:t>
                       </a:r>
                       <a:endParaRPr lang="en-US" sz="1250" dirty="0">
                         <a:latin typeface="Calibri" charset="0"/>
@@ -7256,7 +7391,7 @@
                           <a:ea typeface="Calibri" pitchFamily="34" charset="-122"/>
                           <a:cs typeface="Calibri" pitchFamily="34" charset="-120"/>
                         </a:rPr>
-                        <a:t>Il surveille les serveurs et répartit les visiteurs tout seul.</a:t>
+                        <a:t>Il surveille l'état des serveurs et répartit les requêtes entre les zones.</a:t>
                       </a:r>
                       <a:endParaRPr lang="en-US" sz="1250" dirty="0">
                         <a:latin typeface="Calibri" charset="0"/>
@@ -7326,7 +7461,7 @@
                           <a:ea typeface="Calibri" pitchFamily="34" charset="-122"/>
                           <a:cs typeface="Calibri" pitchFamily="34" charset="-120"/>
                         </a:rPr>
-                        <a:t>Les mots de passe</a:t>
+                        <a:t>Secrets</a:t>
                       </a:r>
                       <a:endParaRPr lang="en-US" sz="1250" dirty="0">
                         <a:latin typeface="Calibri" charset="0"/>
@@ -7394,7 +7529,7 @@
                           <a:ea typeface="Calibri" pitchFamily="34" charset="-122"/>
                           <a:cs typeface="Calibri" pitchFamily="34" charset="-120"/>
                         </a:rPr>
-                        <a:t>Coffre AWS + Ansible Vault</a:t>
+                        <a:t>Secrets Manager + Vault</a:t>
                       </a:r>
                       <a:endParaRPr lang="en-US" sz="1250" dirty="0">
                         <a:latin typeface="Calibri" charset="0"/>
@@ -7462,7 +7597,7 @@
                           <a:ea typeface="Calibri" pitchFamily="34" charset="-122"/>
                           <a:cs typeface="Calibri" pitchFamily="34" charset="-120"/>
                         </a:rPr>
-                        <a:t>Le mot de passe de la base n'est écrit nulle part : chaque serveur va le chercher lui-même.</a:t>
+                        <a:t>Le mot de passe de la base n'est pas dans le dépôt. Chaque serveur le lit avec son rôle IAM.</a:t>
                       </a:r>
                       <a:endParaRPr lang="en-US" sz="1250" dirty="0">
                         <a:latin typeface="Calibri" charset="0"/>
@@ -7532,7 +7667,7 @@
                           <a:ea typeface="Calibri" pitchFamily="34" charset="-122"/>
                           <a:cs typeface="Calibri" pitchFamily="34" charset="-120"/>
                         </a:rPr>
-                        <a:t>Notre accès</a:t>
+                        <a:t>Accès administration</a:t>
                       </a:r>
                       <a:endParaRPr lang="en-US" sz="1250" dirty="0">
                         <a:latin typeface="Calibri" charset="0"/>
@@ -7600,7 +7735,7 @@
                           <a:ea typeface="Calibri" pitchFamily="34" charset="-122"/>
                           <a:cs typeface="Calibri" pitchFamily="34" charset="-120"/>
                         </a:rPr>
-                        <a:t>Un serveur d'entrée dédié</a:t>
+                        <a:t>Bastion SSH</a:t>
                       </a:r>
                       <a:endParaRPr lang="en-US" sz="1250" dirty="0">
                         <a:latin typeface="Calibri" charset="0"/>
@@ -7668,7 +7803,7 @@
                           <a:ea typeface="Calibri" pitchFamily="34" charset="-122"/>
                           <a:cs typeface="Calibri" pitchFamily="34" charset="-120"/>
                         </a:rPr>
-                        <a:t>Une seule porte pour l'équipe, ouverte à une seule adresse IP.</a:t>
+                        <a:t>Les serveurs n'ont pas d'adresse publique. Un seul point d'accès, limité à notre IP.</a:t>
                       </a:r>
                       <a:endParaRPr lang="en-US" sz="1250" dirty="0">
                         <a:latin typeface="Calibri" charset="0"/>
@@ -7821,7 +7956,7 @@
                 <a:ea typeface="Arial" pitchFamily="34" charset="-122"/>
                 <a:cs typeface="Arial" pitchFamily="34" charset="-120"/>
               </a:rPr>
-              <a:t>On décrit ce qu'on veut, Terraform le construit</a:t>
+              <a:t>Terraform crée l'infrastructure</a:t>
             </a:r>
             <a:endParaRPr lang="en-US" sz="3000" dirty="0"/>
           </a:p>
@@ -7860,7 +7995,7 @@
                 <a:ea typeface="Calibri" pitchFamily="34" charset="-122"/>
                 <a:cs typeface="Calibri" pitchFamily="34" charset="-120"/>
               </a:rPr>
-              <a:t>Six briques, une par couche. On les assemble, et la même description donne un petit environnement de test ou une vraie production.</a:t>
+              <a:t>Le code est découpé en six modules, un par couche. Chaque module a ses variables et ses sorties, et peut être relu séparément.</a:t>
             </a:r>
             <a:endParaRPr lang="en-US" sz="1400" dirty="0"/>
           </a:p>
@@ -7963,7 +8098,7 @@
                 <a:ea typeface="Calibri" pitchFamily="34" charset="-122"/>
                 <a:cs typeface="Calibri" pitchFamily="34" charset="-120"/>
               </a:rPr>
-              <a:t>le réseau et ses trois niveaux</a:t>
+              <a:t>VPC, sous-réseaux, NAT, routes</a:t>
             </a:r>
             <a:endParaRPr lang="en-US" sz="1250" dirty="0"/>
           </a:p>
@@ -8066,7 +8201,7 @@
                 <a:ea typeface="Calibri" pitchFamily="34" charset="-122"/>
                 <a:cs typeface="Calibri" pitchFamily="34" charset="-120"/>
               </a:rPr>
-              <a:t>qui a le droit de parler à qui</a:t>
+              <a:t>groupes de sécurité</a:t>
             </a:r>
             <a:endParaRPr lang="en-US" sz="1250" dirty="0"/>
           </a:p>
@@ -8169,7 +8304,7 @@
                 <a:ea typeface="Calibri" pitchFamily="34" charset="-122"/>
                 <a:cs typeface="Calibri" pitchFamily="34" charset="-120"/>
               </a:rPr>
-              <a:t>le disque partagé</a:t>
+              <a:t>disque partagé EFS</a:t>
             </a:r>
             <a:endParaRPr lang="en-US" sz="1250" dirty="0"/>
           </a:p>
@@ -8272,7 +8407,7 @@
                 <a:ea typeface="Calibri" pitchFamily="34" charset="-122"/>
                 <a:cs typeface="Calibri" pitchFamily="34" charset="-120"/>
               </a:rPr>
-              <a:t>la base de données</a:t>
+              <a:t>RDS MySQL, Secrets Manager</a:t>
             </a:r>
             <a:endParaRPr lang="en-US" sz="1250" dirty="0"/>
           </a:p>
@@ -8375,7 +8510,7 @@
                 <a:ea typeface="Calibri" pitchFamily="34" charset="-122"/>
                 <a:cs typeface="Calibri" pitchFamily="34" charset="-120"/>
               </a:rPr>
-              <a:t>les serveurs</a:t>
+              <a:t>instances EC2, bastion, rôle IAM</a:t>
             </a:r>
             <a:endParaRPr lang="en-US" sz="1250" dirty="0"/>
           </a:p>
@@ -8478,7 +8613,7 @@
                 <a:ea typeface="Calibri" pitchFamily="34" charset="-122"/>
                 <a:cs typeface="Calibri" pitchFamily="34" charset="-120"/>
               </a:rPr>
-              <a:t>l'entrée et la surveillance</a:t>
+              <a:t>ALB, alarmes CloudWatch</a:t>
             </a:r>
             <a:endParaRPr lang="en-US" sz="1250" dirty="0"/>
           </a:p>
@@ -8583,7 +8718,7 @@
                 <a:ea typeface="Calibri" pitchFamily="34" charset="-122"/>
                 <a:cs typeface="Calibri" pitchFamily="34" charset="-120"/>
               </a:rPr>
-              <a:t>Test, pré-production, production : on change un mot, pas le code. Le test a 1 serveur, la production en a 3 répartis sur 3 zones.</a:t>
+              <a:t>dev, staging et prod utilisent le même code. Une table de variables définit les tailles : 1 serveur en dev, 3 serveurs sur 3 zones en prod.</a:t>
             </a:r>
             <a:endParaRPr lang="en-US" sz="1150" dirty="0"/>
           </a:p>
@@ -8649,7 +8784,7 @@
                 <a:ea typeface="Arial" pitchFamily="34" charset="-122"/>
                 <a:cs typeface="Arial" pitchFamily="34" charset="-120"/>
               </a:rPr>
-              <a:t>Le travail à trois est protégé</a:t>
+              <a:t>État distant et verrouillage</a:t>
             </a:r>
             <a:endParaRPr lang="en-US" sz="1300" dirty="0"/>
           </a:p>
@@ -8688,7 +8823,7 @@
                 <a:ea typeface="Calibri" pitchFamily="34" charset="-122"/>
                 <a:cs typeface="Calibri" pitchFamily="34" charset="-120"/>
               </a:rPr>
-              <a:t>La description de l'infrastructure est stockée sur AWS, verrouillée : deux personnes ne peuvent pas la modifier en même temps.</a:t>
+              <a:t>L'état Terraform est dans un bucket S3 versionné et chiffré, avec un verrou. Deux personnes ne peuvent pas modifier en même temps.</a:t>
             </a:r>
             <a:endParaRPr lang="en-US" sz="1150" dirty="0"/>
           </a:p>
@@ -8754,7 +8889,7 @@
                 <a:ea typeface="Arial" pitchFamily="34" charset="-122"/>
                 <a:cs typeface="Arial" pitchFamily="34" charset="-120"/>
               </a:rPr>
-              <a:t>Rien n'est écrit en dur</a:t>
+              <a:t>Valeurs résolues automatiquement</a:t>
             </a:r>
             <a:endParaRPr lang="en-US" sz="1300" dirty="0"/>
           </a:p>
@@ -8793,7 +8928,7 @@
                 <a:ea typeface="Calibri" pitchFamily="34" charset="-122"/>
                 <a:cs typeface="Calibri" pitchFamily="34" charset="-120"/>
               </a:rPr>
-              <a:t>Terraform va chercher lui-même l'image système, les zones disponibles, et même notre adresse IP — celle qui aura le droit de se connecter.</a:t>
+              <a:t>L'AMI Ubuntu, la liste des zones et notre adresse IP publique sont lues à l'exécution, pas écrites en dur dans le code.</a:t>
             </a:r>
             <a:endParaRPr lang="en-US" sz="1150" dirty="0"/>
           </a:p>
@@ -8896,7 +9031,7 @@
                 <a:ea typeface="Arial" pitchFamily="34" charset="-122"/>
                 <a:cs typeface="Arial" pitchFamily="34" charset="-120"/>
               </a:rPr>
-              <a:t>Ansible lit les adresses chez Terraform</a:t>
+              <a:t>Ansible configure les serveurs</a:t>
             </a:r>
             <a:endParaRPr lang="en-US" sz="3000" dirty="0"/>
           </a:p>
@@ -8935,7 +9070,7 @@
                 <a:ea typeface="Calibri" pitchFamily="34" charset="-122"/>
                 <a:cs typeface="Calibri" pitchFamily="34" charset="-120"/>
               </a:rPr>
-              <a:t>Terraform connaît déjà les adresses des serveurs. Plutôt que de les recopier à la main, Ansible va les lire chez lui.</a:t>
+              <a:t>Terraform connaît les adresses des serveurs. Ansible les lit directement dans l'état Terraform, au lieu qu'on les recopie.</a:t>
             </a:r>
             <a:endParaRPr lang="en-US" sz="1400" dirty="0"/>
           </a:p>
@@ -8949,7 +9084,7 @@
         </p:nvSpPr>
         <p:spPr>
           <a:xfrm>
-            <a:off x="566928" y="1938528"/>
+            <a:off x="566928" y="1920240"/>
             <a:ext cx="6537960" cy="2286000"/>
           </a:xfrm>
           <a:prstGeom prst="roundRect">
@@ -8976,7 +9111,7 @@
         </p:nvSpPr>
         <p:spPr>
           <a:xfrm>
-            <a:off x="731520" y="2048256"/>
+            <a:off x="731520" y="2029968"/>
             <a:ext cx="6208776" cy="2066544"/>
           </a:xfrm>
           <a:prstGeom prst="rect">
@@ -9004,7 +9139,7 @@
                 <a:ea typeface="Courier New" pitchFamily="34" charset="-122"/>
                 <a:cs typeface="Courier New" pitchFamily="34" charset="-120"/>
               </a:rPr>
-              <a:t># Terraform écrit la liste des serveurs…</a:t>
+              <a:t># Terraform déclare les serveurs et leurs informations</a:t>
             </a:r>
             <a:endParaRPr lang="en-US" sz="1150" dirty="0"/>
           </a:p>
@@ -9133,7 +9268,7 @@
                 <a:ea typeface="Courier New" pitchFamily="34" charset="-122"/>
                 <a:cs typeface="Courier New" pitchFamily="34" charset="-120"/>
               </a:rPr>
-              <a:t># …et Ansible la relit. C'est tout.</a:t>
+              <a:t># Ansible les lit depuis l'état Terraform</a:t>
             </a:r>
             <a:endParaRPr lang="en-US" sz="1150" dirty="0"/>
           </a:p>
@@ -9167,7 +9302,7 @@
         </p:nvSpPr>
         <p:spPr>
           <a:xfrm>
-            <a:off x="7360920" y="1938528"/>
+            <a:off x="7360920" y="1920240"/>
             <a:ext cx="4261104" cy="1234440"/>
           </a:xfrm>
           <a:prstGeom prst="roundRect">
@@ -9194,7 +9329,7 @@
         </p:nvSpPr>
         <p:spPr>
           <a:xfrm>
-            <a:off x="7543800" y="2057400"/>
+            <a:off x="7543800" y="2039112"/>
             <a:ext cx="3931920" cy="274320"/>
           </a:xfrm>
           <a:prstGeom prst="rect">
@@ -9219,7 +9354,7 @@
                 <a:ea typeface="Arial" pitchFamily="34" charset="-122"/>
                 <a:cs typeface="Arial" pitchFamily="34" charset="-120"/>
               </a:rPr>
-              <a:t>Des rôles qu'on réutilise</a:t>
+              <a:t>Trois rôles réutilisables</a:t>
             </a:r>
             <a:endParaRPr lang="en-US" sz="1300" dirty="0"/>
           </a:p>
@@ -9233,7 +9368,7 @@
         </p:nvSpPr>
         <p:spPr>
           <a:xfrm>
-            <a:off x="7543800" y="2359152"/>
+            <a:off x="7543800" y="2340864"/>
             <a:ext cx="3931920" cy="777240"/>
           </a:xfrm>
           <a:prstGeom prst="rect">
@@ -9258,7 +9393,7 @@
                 <a:ea typeface="Calibri" pitchFamily="34" charset="-122"/>
                 <a:cs typeface="Calibri" pitchFamily="34" charset="-120"/>
               </a:rPr>
-              <a:t>Le serveur d'entrée et les caisses partagent le même rôle de base, avec des réglages différents. Docker vient d'un rôle public, installé depuis Galaxy.</a:t>
+              <a:t>common, efs et prestashop. Le bastion et les serveurs applicatifs utilisent le même rôle common avec des variables différentes. Docker vient d'un rôle Ansible Galaxy.</a:t>
             </a:r>
             <a:endParaRPr lang="en-US" sz="1100" dirty="0"/>
           </a:p>
@@ -9272,7 +9407,7 @@
         </p:nvSpPr>
         <p:spPr>
           <a:xfrm>
-            <a:off x="7360920" y="3310128"/>
+            <a:off x="7360920" y="3291840"/>
             <a:ext cx="4261104" cy="1234440"/>
           </a:xfrm>
           <a:prstGeom prst="roundRect">
@@ -9299,7 +9434,7 @@
         </p:nvSpPr>
         <p:spPr>
           <a:xfrm>
-            <a:off x="7543800" y="3429000"/>
+            <a:off x="7543800" y="3410712"/>
             <a:ext cx="3931920" cy="274320"/>
           </a:xfrm>
           <a:prstGeom prst="rect">
@@ -9324,7 +9459,7 @@
                 <a:ea typeface="Arial" pitchFamily="34" charset="-122"/>
                 <a:cs typeface="Arial" pitchFamily="34" charset="-120"/>
               </a:rPr>
-              <a:t>Les secrets sont chiffrés</a:t>
+              <a:t>Secrets protégés</a:t>
             </a:r>
             <a:endParaRPr lang="en-US" sz="1300" dirty="0"/>
           </a:p>
@@ -9338,7 +9473,7 @@
         </p:nvSpPr>
         <p:spPr>
           <a:xfrm>
-            <a:off x="7543800" y="3730752"/>
+            <a:off x="7543800" y="3712464"/>
             <a:ext cx="3931920" cy="777240"/>
           </a:xfrm>
           <a:prstGeom prst="rect">
@@ -9363,7 +9498,7 @@
                 <a:ea typeface="Calibri" pitchFamily="34" charset="-122"/>
                 <a:cs typeface="Calibri" pitchFamily="34" charset="-120"/>
               </a:rPr>
-              <a:t>Le mot de passe de l'administration est chiffré dans le dépôt. Celui de la base n'y est même pas.</a:t>
+              <a:t>Les identifiants du back-office sont chiffrés avec Ansible Vault. Le mot de passe de la base n'est pas dans le dépôt.</a:t>
             </a:r>
             <a:endParaRPr lang="en-US" sz="1100" dirty="0"/>
           </a:p>
@@ -9377,7 +9512,7 @@
         </p:nvSpPr>
         <p:spPr>
           <a:xfrm>
-            <a:off x="7360920" y="4681728"/>
+            <a:off x="7360920" y="4663440"/>
             <a:ext cx="4261104" cy="1234440"/>
           </a:xfrm>
           <a:prstGeom prst="roundRect">
@@ -9404,7 +9539,7 @@
         </p:nvSpPr>
         <p:spPr>
           <a:xfrm>
-            <a:off x="7543800" y="4800600"/>
+            <a:off x="7543800" y="4782312"/>
             <a:ext cx="3931920" cy="274320"/>
           </a:xfrm>
           <a:prstGeom prst="rect">
@@ -9429,7 +9564,7 @@
                 <a:ea typeface="Arial" pitchFamily="34" charset="-122"/>
                 <a:cs typeface="Arial" pitchFamily="34" charset="-120"/>
               </a:rPr>
-              <a:t>On peut le relancer sans risque</a:t>
+              <a:t>Playbook idempotent</a:t>
             </a:r>
             <a:endParaRPr lang="en-US" sz="1300" dirty="0"/>
           </a:p>
@@ -9443,7 +9578,7 @@
         </p:nvSpPr>
         <p:spPr>
           <a:xfrm>
-            <a:off x="7543800" y="5102352"/>
+            <a:off x="7543800" y="5084064"/>
             <a:ext cx="3931920" cy="777240"/>
           </a:xfrm>
           <a:prstGeom prst="rect">
@@ -9468,7 +9603,7 @@
                 <a:ea typeface="Calibri" pitchFamily="34" charset="-122"/>
                 <a:cs typeface="Calibri" pitchFamily="34" charset="-120"/>
               </a:rPr>
-              <a:t>Ansible décrit l'état voulu, pas des étapes. Si tout est déjà en place, il ne touche à rien.</a:t>
+              <a:t>Le playbook décrit l'état voulu. Si l'état est déjà atteint, il ne modifie rien.</a:t>
             </a:r>
             <a:endParaRPr lang="en-US" sz="1100" dirty="0"/>
           </a:p>
@@ -9534,7 +9669,7 @@
                 <a:ea typeface="Arial" pitchFamily="34" charset="-122"/>
                 <a:cs typeface="Arial" pitchFamily="34" charset="-120"/>
               </a:rPr>
-              <a:t>On relance : « changed=0 »</a:t>
+              <a:t>Deuxième exécution : changed=0</a:t>
             </a:r>
             <a:endParaRPr lang="en-US" sz="1600" dirty="0"/>
           </a:p>
@@ -9573,7 +9708,7 @@
                 <a:ea typeface="Calibri" pitchFamily="34" charset="-122"/>
                 <a:cs typeface="Calibri" pitchFamily="34" charset="-120"/>
               </a:rPr>
-              <a:t>Zéro modification. La machine était déjà dans l'état demandé.</a:t>
+              <a:t>Aucune modification. Les serveurs sont déjà dans l'état décrit.</a:t>
             </a:r>
             <a:endParaRPr lang="en-US" sz="1250" dirty="0"/>
           </a:p>
@@ -9637,7 +9772,7 @@
                 <a:ea typeface="Courier New" pitchFamily="34" charset="-122"/>
                 <a:cs typeface="Courier New" pitchFamily="34" charset="-120"/>
               </a:rPr>
-              <a:t>06 — LE JOUR DE L'OUVERTURE</a:t>
+              <a:t>06 — MONTÉE EN CHARGE</a:t>
             </a:r>
             <a:endParaRPr lang="en-US" sz="1100" dirty="0"/>
           </a:p>
@@ -9676,7 +9811,7 @@
                 <a:ea typeface="Arial" pitchFamily="34" charset="-122"/>
                 <a:cs typeface="Arial" pitchFamily="34" charset="-120"/>
               </a:rPr>
-              <a:t>Plus de monde ? On change un chiffre</a:t>
+              <a:t>Ajouter des serveurs = modifier une variable</a:t>
             </a:r>
             <a:endParaRPr lang="en-US" sz="3000" dirty="0"/>
           </a:p>
@@ -9691,7 +9826,7 @@
         <p:spPr>
           <a:xfrm>
             <a:off x="566928" y="1463040"/>
-            <a:ext cx="10789920" cy="457200"/>
+            <a:ext cx="10789920" cy="365760"/>
           </a:xfrm>
           <a:prstGeom prst="rect">
             <a:avLst/>
@@ -9715,7 +9850,7 @@
                 <a:ea typeface="Calibri" pitchFamily="34" charset="-122"/>
                 <a:cs typeface="Calibri" pitchFamily="34" charset="-120"/>
               </a:rPr>
-              <a:t>Aucune commande, aucune image, aucun panier ne vit sur un serveur : tout est dans la base et sur le disque partagé. Du coup, ajouter un serveur ne dérange pas ceux qui travaillent déjà.</a:t>
+              <a:t>Les serveurs ne stockent aucune donnée. On peut donc en ajouter sans interrompre ceux qui répondent déjà.</a:t>
             </a:r>
             <a:endParaRPr lang="en-US" sz="1400" dirty="0"/>
           </a:p>
@@ -9729,7 +9864,7 @@
         </p:nvSpPr>
         <p:spPr>
           <a:xfrm>
-            <a:off x="566928" y="2148840"/>
+            <a:off x="566928" y="2103120"/>
             <a:ext cx="11055096" cy="1234440"/>
           </a:xfrm>
           <a:prstGeom prst="roundRect">
@@ -9756,7 +9891,7 @@
         </p:nvSpPr>
         <p:spPr>
           <a:xfrm>
-            <a:off x="731520" y="2258568"/>
+            <a:off x="731520" y="2212848"/>
             <a:ext cx="10725912" cy="1014984"/>
           </a:xfrm>
           <a:prstGeom prst="rect">
@@ -9784,7 +9919,7 @@
                 <a:ea typeface="Courier New" pitchFamily="34" charset="-122"/>
                 <a:cs typeface="Courier New" pitchFamily="34" charset="-120"/>
               </a:rPr>
-              <a:t>terraform apply -var app_instance_count=6      # on passe de 1 à 6 serveurs</a:t>
+              <a:t>terraform apply -var app_instance_count=6     # crée les serveurs</a:t>
             </a:r>
             <a:endParaRPr lang="en-US" sz="1250" dirty="0"/>
           </a:p>
@@ -9804,7 +9939,7 @@
                 <a:ea typeface="Courier New" pitchFamily="34" charset="-122"/>
                 <a:cs typeface="Courier New" pitchFamily="34" charset="-120"/>
               </a:rPr>
-              <a:t>ansible-playbook ... site.yml                  # on les installe</a:t>
+              <a:t>ansible-playbook ... site.yml                 # les configure</a:t>
             </a:r>
             <a:endParaRPr lang="en-US" sz="1250" dirty="0"/>
           </a:p>
@@ -9833,7 +9968,7 @@
                 <a:ea typeface="Courier New" pitchFamily="34" charset="-122"/>
                 <a:cs typeface="Courier New" pitchFamily="34" charset="-120"/>
               </a:rPr>
-              <a:t># environ 3 minutes, sans couper la boutique</a:t>
+              <a:t># environ 3 minutes, sans interruption de service</a:t>
             </a:r>
             <a:endParaRPr lang="en-US" sz="1250" dirty="0"/>
           </a:p>
@@ -9899,7 +10034,7 @@
                 <a:ea typeface="Courier New" pitchFamily="34" charset="-122"/>
                 <a:cs typeface="Courier New" pitchFamily="34" charset="-120"/>
               </a:rPr>
-              <a:t>AWS NOUS PRÉVIENT SI…</a:t>
+              <a:t>ALARME CLOUDWATCH</a:t>
             </a:r>
             <a:endParaRPr lang="en-US" sz="900" dirty="0"/>
           </a:p>
@@ -9938,7 +10073,7 @@
                 <a:ea typeface="Arial" pitchFamily="34" charset="-122"/>
                 <a:cs typeface="Arial" pitchFamily="34" charset="-120"/>
               </a:rPr>
-              <a:t>Le site devient lent</a:t>
+              <a:t>Temps de réponse &gt; 2 s</a:t>
             </a:r>
             <a:endParaRPr lang="en-US" sz="1400" dirty="0"/>
           </a:p>
@@ -9977,7 +10112,7 @@
                 <a:ea typeface="Calibri" pitchFamily="34" charset="-122"/>
                 <a:cs typeface="Calibri" pitchFamily="34" charset="-120"/>
               </a:rPr>
-              <a:t>Plus de 2 secondes de réponse pendant 3 minutes : la flotte sature, il faut ajouter des serveurs.</a:t>
+              <a:t>Moyenne sur 3 minutes. Signifie que les serveurs saturent : il faut en ajouter.</a:t>
             </a:r>
             <a:endParaRPr lang="en-US" sz="1150" dirty="0"/>
           </a:p>
@@ -10043,7 +10178,7 @@
                 <a:ea typeface="Courier New" pitchFamily="34" charset="-122"/>
                 <a:cs typeface="Courier New" pitchFamily="34" charset="-120"/>
               </a:rPr>
-              <a:t>AWS NOUS PRÉVIENT SI…</a:t>
+              <a:t>ALARME CLOUDWATCH</a:t>
             </a:r>
             <a:endParaRPr lang="en-US" sz="900" dirty="0"/>
           </a:p>
@@ -10082,7 +10217,7 @@
                 <a:ea typeface="Arial" pitchFamily="34" charset="-122"/>
                 <a:cs typeface="Arial" pitchFamily="34" charset="-120"/>
               </a:rPr>
-              <a:t>Un serveur ne répond plus</a:t>
+              <a:t>Serveur hors rotation</a:t>
             </a:r>
             <a:endParaRPr lang="en-US" sz="1400" dirty="0"/>
           </a:p>
@@ -10121,7 +10256,7 @@
                 <a:ea typeface="Calibri" pitchFamily="34" charset="-122"/>
                 <a:cs typeface="Calibri" pitchFamily="34" charset="-120"/>
               </a:rPr>
-              <a:t>Il est sorti tout seul de la rotation. On va voir pourquoi avant qu'il y en ait deux.</a:t>
+              <a:t>Le load balancer a retiré un serveur. Il faut comprendre pourquoi.</a:t>
             </a:r>
             <a:endParaRPr lang="en-US" sz="1150" dirty="0"/>
           </a:p>
@@ -10187,7 +10322,7 @@
                 <a:ea typeface="Courier New" pitchFamily="34" charset="-122"/>
                 <a:cs typeface="Courier New" pitchFamily="34" charset="-120"/>
               </a:rPr>
-              <a:t>AWS NOUS PRÉVIENT SI…</a:t>
+              <a:t>ALARME CLOUDWATCH</a:t>
             </a:r>
             <a:endParaRPr lang="en-US" sz="900" dirty="0"/>
           </a:p>
@@ -10226,7 +10361,7 @@
                 <a:ea typeface="Arial" pitchFamily="34" charset="-122"/>
                 <a:cs typeface="Arial" pitchFamily="34" charset="-120"/>
               </a:rPr>
-              <a:t>Le site renvoie des erreurs</a:t>
+              <a:t>Plus de 10 erreurs 5xx / min</a:t>
             </a:r>
             <a:endParaRPr lang="en-US" sz="1400" dirty="0"/>
           </a:p>
@@ -10265,7 +10400,7 @@
                 <a:ea typeface="Calibri" pitchFamily="34" charset="-122"/>
                 <a:cs typeface="Calibri" pitchFamily="34" charset="-120"/>
               </a:rPr>
-              <a:t>Plus de 10 erreurs par minute : la boutique répond, mais mal.</a:t>
+              <a:t>Les serveurs répondent, mais renvoient des erreurs.</a:t>
             </a:r>
             <a:endParaRPr lang="en-US" sz="1150" dirty="0"/>
           </a:p>
@@ -10329,7 +10464,7 @@
                 <a:ea typeface="Courier New" pitchFamily="34" charset="-122"/>
                 <a:cs typeface="Courier New" pitchFamily="34" charset="-120"/>
               </a:rPr>
-              <a:t>07 — QUAND ÇA CASSE</a:t>
+              <a:t>07 — PANNES</a:t>
             </a:r>
             <a:endParaRPr lang="en-US" sz="1100" dirty="0"/>
           </a:p>
@@ -10368,7 +10503,7 @@
                 <a:ea typeface="Arial" pitchFamily="34" charset="-122"/>
                 <a:cs typeface="Arial" pitchFamily="34" charset="-120"/>
               </a:rPr>
-              <a:t>On a chronométré chaque panne</a:t>
+              <a:t>Comportement mesuré en cas de panne</a:t>
             </a:r>
             <a:endParaRPr lang="en-US" sz="3000" dirty="0"/>
           </a:p>
@@ -10397,8 +10532,8 @@
             <a:tbl>
               <a:tblPr/>
               <a:tblGrid>
-                <a:gridCol w="2194560"/>
-                <a:gridCol w="5660136"/>
+                <a:gridCol w="2377440"/>
+                <a:gridCol w="5477256"/>
                 <a:gridCol w="1737360"/>
                 <a:gridCol w="1463040"/>
               </a:tblGrid>
@@ -10420,7 +10555,7 @@
                           <a:ea typeface="Calibri" pitchFamily="34" charset="-122"/>
                           <a:cs typeface="Calibri" pitchFamily="34" charset="-120"/>
                         </a:rPr>
-                        <a:t>CE QUI TOMBE</a:t>
+                        <a:t>PANNE</a:t>
                       </a:r>
                       <a:endParaRPr lang="en-US" sz="1250" dirty="0">
                         <a:latin typeface="Calibri" charset="0"/>
@@ -10488,7 +10623,7 @@
                           <a:ea typeface="Calibri" pitchFamily="34" charset="-122"/>
                           <a:cs typeface="Calibri" pitchFamily="34" charset="-120"/>
                         </a:rPr>
-                        <a:t>CE QUE VOIT LE CLIENT</a:t>
+                        <a:t>CONSÉQUENCE POUR LE CLIENT</a:t>
                       </a:r>
                       <a:endParaRPr lang="en-US" sz="1250" dirty="0">
                         <a:latin typeface="Calibri" charset="0"/>
@@ -10556,7 +10691,7 @@
                           <a:ea typeface="Calibri" pitchFamily="34" charset="-122"/>
                           <a:cs typeface="Calibri" pitchFamily="34" charset="-120"/>
                         </a:rPr>
-                        <a:t>TEMPS</a:t>
+                        <a:t>DURÉE</a:t>
                       </a:r>
                       <a:endParaRPr lang="en-US" sz="1250" dirty="0">
                         <a:latin typeface="Calibri" charset="0"/>
@@ -10624,7 +10759,7 @@
                           <a:ea typeface="Calibri" pitchFamily="34" charset="-122"/>
                           <a:cs typeface="Calibri" pitchFamily="34" charset="-120"/>
                         </a:rPr>
-                        <a:t>ON INTERVIENT ?</a:t>
+                        <a:t>ACTION</a:t>
                       </a:r>
                       <a:endParaRPr lang="en-US" sz="1250" dirty="0">
                         <a:latin typeface="Calibri" charset="0"/>
@@ -10762,7 +10897,7 @@
                           <a:ea typeface="Calibri" pitchFamily="34" charset="-122"/>
                           <a:cs typeface="Calibri" pitchFamily="34" charset="-120"/>
                         </a:rPr>
-                        <a:t>Rien. Il est sorti de la rotation en 30 secondes, et les achats en cours ont le temps de se terminer.</a:t>
+                        <a:t>Aucune. Retiré de la rotation après 2 vérifications échouées, les requêtes en cours ont 30 s pour finir.</a:t>
                       </a:r>
                       <a:endParaRPr lang="en-US" sz="1250" dirty="0">
                         <a:latin typeface="Calibri" charset="0"/>
@@ -10898,7 +11033,7 @@
                           <a:ea typeface="Calibri" pitchFamily="34" charset="-122"/>
                           <a:cs typeface="Calibri" pitchFamily="34" charset="-120"/>
                         </a:rPr>
-                        <a:t>non</a:t>
+                        <a:t>aucune</a:t>
                       </a:r>
                       <a:endParaRPr lang="en-US" sz="1250" dirty="0">
                         <a:latin typeface="Calibri" charset="0"/>
@@ -10968,7 +11103,7 @@
                           <a:ea typeface="Calibri" pitchFamily="34" charset="-122"/>
                           <a:cs typeface="Calibri" pitchFamily="34" charset="-120"/>
                         </a:rPr>
-                        <a:t>Une zone AWS entière</a:t>
+                        <a:t>Une zone de disponibilité</a:t>
                       </a:r>
                       <a:endParaRPr lang="en-US" sz="1250" dirty="0">
                         <a:latin typeface="Calibri" charset="0"/>
@@ -11036,7 +11171,7 @@
                           <a:ea typeface="Calibri" pitchFamily="34" charset="-122"/>
                           <a:cs typeface="Calibri" pitchFamily="34" charset="-120"/>
                         </a:rPr>
-                        <a:t>Rien. Les serveurs des autres zones prennent le relais.</a:t>
+                        <a:t>Aucune. Les serveurs des autres zones prennent le relais.</a:t>
                       </a:r>
                       <a:endParaRPr lang="en-US" sz="1250" dirty="0">
                         <a:latin typeface="Calibri" charset="0"/>
@@ -11172,7 +11307,7 @@
                           <a:ea typeface="Calibri" pitchFamily="34" charset="-122"/>
                           <a:cs typeface="Calibri" pitchFamily="34" charset="-120"/>
                         </a:rPr>
-                        <a:t>non</a:t>
+                        <a:t>aucune</a:t>
                       </a:r>
                       <a:endParaRPr lang="en-US" sz="1250" dirty="0">
                         <a:latin typeface="Calibri" charset="0"/>
@@ -11310,7 +11445,7 @@
                           <a:ea typeface="Calibri" pitchFamily="34" charset="-122"/>
                           <a:cs typeface="Calibri" pitchFamily="34" charset="-120"/>
                         </a:rPr>
-                        <a:t>Quelques secondes d'erreur, puis ça repart sur la machine de secours.</a:t>
+                        <a:t>Erreurs pendant le basculement, puis retour à la normale sur l'instance de secours.</a:t>
                       </a:r>
                       <a:endParaRPr lang="en-US" sz="1250" dirty="0">
                         <a:latin typeface="Calibri" charset="0"/>
@@ -11378,7 +11513,7 @@
                           <a:ea typeface="Calibri" pitchFamily="34" charset="-122"/>
                           <a:cs typeface="Calibri" pitchFamily="34" charset="-120"/>
                         </a:rPr>
-                        <a:t>1 à 2 min</a:t>
+                        <a:t>60 à 120 s</a:t>
                       </a:r>
                       <a:endParaRPr lang="en-US" sz="1250" dirty="0">
                         <a:latin typeface="Calibri" charset="0"/>
@@ -11446,7 +11581,7 @@
                           <a:ea typeface="Calibri" pitchFamily="34" charset="-122"/>
                           <a:cs typeface="Calibri" pitchFamily="34" charset="-120"/>
                         </a:rPr>
-                        <a:t>non (en prod)</a:t>
+                        <a:t>aucune (prod)</a:t>
                       </a:r>
                       <a:endParaRPr lang="en-US" sz="1250" dirty="0">
                         <a:latin typeface="Calibri" charset="0"/>
@@ -11516,7 +11651,7 @@
                           <a:ea typeface="Calibri" pitchFamily="34" charset="-122"/>
                           <a:cs typeface="Calibri" pitchFamily="34" charset="-120"/>
                         </a:rPr>
-                        <a:t>Notre serveur d'entrée</a:t>
+                        <a:t>Le bastion</a:t>
                       </a:r>
                       <a:endParaRPr lang="en-US" sz="1250" dirty="0">
                         <a:latin typeface="Calibri" charset="0"/>
@@ -11584,7 +11719,7 @@
                           <a:ea typeface="Calibri" pitchFamily="34" charset="-122"/>
                           <a:cs typeface="Calibri" pitchFamily="34" charset="-120"/>
                         </a:rPr>
-                        <a:t>Rien du tout : aucun client ne passe par là.</a:t>
+                        <a:t>Aucune. Il ne sert qu'à l'administration.</a:t>
                       </a:r>
                       <a:endParaRPr lang="en-US" sz="1250" dirty="0">
                         <a:latin typeface="Calibri" charset="0"/>
@@ -11720,7 +11855,7 @@
                           <a:ea typeface="Calibri" pitchFamily="34" charset="-122"/>
                           <a:cs typeface="Calibri" pitchFamily="34" charset="-120"/>
                         </a:rPr>
-                        <a:t>on le recrée</a:t>
+                        <a:t>le recréer</a:t>
                       </a:r>
                       <a:endParaRPr lang="en-US" sz="1250" dirty="0">
                         <a:latin typeface="Calibri" charset="0"/>
@@ -11785,11 +11920,11 @@
         <p:spPr>
           <a:xfrm>
             <a:off x="566928" y="4892040"/>
-            <a:ext cx="11055096" cy="868680"/>
+            <a:ext cx="11055096" cy="822960"/>
           </a:xfrm>
           <a:prstGeom prst="roundRect">
             <a:avLst>
-              <a:gd name="adj" fmla="val 5263"/>
+              <a:gd name="adj" fmla="val 5556"/>
             </a:avLst>
           </a:prstGeom>
           <a:solidFill>
@@ -11811,24 +11946,24 @@
         </p:nvSpPr>
         <p:spPr>
           <a:xfrm>
-            <a:off x="822960" y="5029200"/>
-            <a:ext cx="10543032" cy="640080"/>
-          </a:xfrm>
-          <a:prstGeom prst="rect">
-            <a:avLst/>
-          </a:prstGeom>
-          <a:noFill/>
-          <a:ln/>
-        </p:spPr>
-        <p:txBody>
-          <a:bodyPr wrap="square" lIns="0" tIns="0" rIns="0" bIns="0" rtlCol="0" anchor="ctr"/>
-          <a:lstStyle/>
-          <a:p>
-            <a:pPr indent="0" marL="0">
-              <a:buNone/>
-            </a:pPr>
-            <a:r>
-              <a:rPr lang="en-US" sz="1350" dirty="0">
+            <a:off x="822960" y="5047488"/>
+            <a:ext cx="10543032" cy="548640"/>
+          </a:xfrm>
+          <a:prstGeom prst="rect">
+            <a:avLst/>
+          </a:prstGeom>
+          <a:noFill/>
+          <a:ln/>
+        </p:spPr>
+        <p:txBody>
+          <a:bodyPr wrap="square" lIns="0" tIns="0" rIns="0" bIns="0" rtlCol="0" anchor="ctr"/>
+          <a:lstStyle/>
+          <a:p>
+            <a:pPr indent="0" marL="0">
+              <a:buNone/>
+            </a:pPr>
+            <a:r>
+              <a:rPr lang="en-US" sz="1400" b="1" dirty="0">
                 <a:solidFill>
                   <a:srgbClr val="17222C"/>
                 </a:solidFill>
@@ -11836,9 +11971,9 @@
                 <a:ea typeface="Calibri" pitchFamily="34" charset="-122"/>
                 <a:cs typeface="Calibri" pitchFamily="34" charset="-120"/>
               </a:rPr>
-              <a:t>Et surtout : le panier du client est conservé. Les paniers sont sur le disque partagé, pas sur le serveur qui tombe. C'est la différence entre « un serveur est tombé » et « mon panier est vide ».</a:t>
-            </a:r>
-            <a:endParaRPr lang="en-US" sz="1350" dirty="0"/>
+              <a:t>Le panier du client est conservé : les sessions PHP sont sur le disque partagé, pas sur le serveur en panne.</a:t>
+            </a:r>
+            <a:endParaRPr lang="en-US" sz="1400" dirty="0"/>
           </a:p>
         </p:txBody>
       </p:sp>
@@ -11900,7 +12035,7 @@
                 <a:ea typeface="Courier New" pitchFamily="34" charset="-122"/>
                 <a:cs typeface="Courier New" pitchFamily="34" charset="-120"/>
               </a:rPr>
-              <a:t>08 — CE QU'ON A APPRIS</a:t>
+              <a:t>08 — PROBLÈMES RENCONTRÉS</a:t>
             </a:r>
             <a:endParaRPr lang="en-US" sz="1100" dirty="0"/>
           </a:p>
@@ -11939,7 +12074,7 @@
                 <a:ea typeface="Arial" pitchFamily="34" charset="-122"/>
                 <a:cs typeface="Arial" pitchFamily="34" charset="-120"/>
               </a:rPr>
-              <a:t>Quatre problèmes vus seulement en vrai</a:t>
+              <a:t>Quatre erreurs apparues au déploiement réel</a:t>
             </a:r>
             <a:endParaRPr lang="en-US" sz="3000" dirty="0"/>
           </a:p>
@@ -12069,7 +12204,7 @@
                 <a:ea typeface="Arial" pitchFamily="34" charset="-122"/>
                 <a:cs typeface="Arial" pitchFamily="34" charset="-120"/>
               </a:rPr>
-              <a:t>Un caractère interdit</a:t>
+              <a:t>Caractère refusé par AWS</a:t>
             </a:r>
             <a:endParaRPr lang="en-US" sz="1500" dirty="0"/>
           </a:p>
@@ -12100,7 +12235,7 @@
               <a:buNone/>
             </a:pPr>
             <a:r>
-              <a:rPr lang="en-US" sz="1250" dirty="0">
+              <a:rPr lang="en-US" sz="1200" dirty="0">
                 <a:solidFill>
                   <a:srgbClr val="5C6B7A"/>
                 </a:solidFill>
@@ -12108,9 +12243,9 @@
                 <a:ea typeface="Calibri" pitchFamily="34" charset="-122"/>
                 <a:cs typeface="Calibri" pitchFamily="34" charset="-120"/>
               </a:rPr>
-              <a:t>AWS refuse certains caractères dans les descriptions. On avait écrit une flèche « -&gt; ». Création refusée.</a:t>
-            </a:r>
-            <a:endParaRPr lang="en-US" sz="1250" dirty="0"/>
+              <a:t>AWS n'accepte qu'un jeu de caractères limité dans les descriptions de groupes de sécurité. Le caractère « &gt; » que nous avions utilisé faisait échouer la création.</a:t>
+            </a:r>
+            <a:endParaRPr lang="en-US" sz="1200" dirty="0"/>
           </a:p>
         </p:txBody>
       </p:sp>
@@ -12238,7 +12373,7 @@
                 <a:ea typeface="Arial" pitchFamily="34" charset="-122"/>
                 <a:cs typeface="Arial" pitchFamily="34" charset="-120"/>
               </a:rPr>
-              <a:t>Un outil qui n'existe plus</a:t>
+              <a:t>Paquet awscli inexistant</a:t>
             </a:r>
             <a:endParaRPr lang="en-US" sz="1500" dirty="0"/>
           </a:p>
@@ -12269,7 +12404,7 @@
               <a:buNone/>
             </a:pPr>
             <a:r>
-              <a:rPr lang="en-US" sz="1250" dirty="0">
+              <a:rPr lang="en-US" sz="1200" dirty="0">
                 <a:solidFill>
                   <a:srgbClr val="5C6B7A"/>
                 </a:solidFill>
@@ -12277,9 +12412,9 @@
                 <a:ea typeface="Calibri" pitchFamily="34" charset="-122"/>
                 <a:cs typeface="Calibri" pitchFamily="34" charset="-120"/>
               </a:rPr>
-              <a:t>Le paquet awscli a disparu d'Ubuntu 24.04. On est passés à une bibliothèque Python : 60 Mo de moins par serveur.</a:t>
-            </a:r>
-            <a:endParaRPr lang="en-US" sz="1250" dirty="0"/>
+              <a:t>Le paquet a été retiré des dépôts d'Ubuntu 24.04. Nous l'avons remplacé par la bibliothèque Python boto3, déjà disponible dans les dépôts de base.</a:t>
+            </a:r>
+            <a:endParaRPr lang="en-US" sz="1200" dirty="0"/>
           </a:p>
         </p:txBody>
       </p:sp>
@@ -12407,7 +12542,7 @@
                 <a:ea typeface="Arial" pitchFamily="34" charset="-122"/>
                 <a:cs typeface="Arial" pitchFamily="34" charset="-120"/>
               </a:rPr>
-              <a:t>Un mot de passe exécuté</a:t>
+              <a:t>Mot de passe interprété</a:t>
             </a:r>
             <a:endParaRPr lang="en-US" sz="1500" dirty="0"/>
           </a:p>
@@ -12438,7 +12573,7 @@
               <a:buNone/>
             </a:pPr>
             <a:r>
-              <a:rPr lang="en-US" sz="1250" dirty="0">
+              <a:rPr lang="en-US" sz="1200" dirty="0">
                 <a:solidFill>
                   <a:srgbClr val="5C6B7A"/>
                 </a:solidFill>
@@ -12446,9 +12581,9 @@
                 <a:ea typeface="Calibri" pitchFamily="34" charset="-122"/>
                 <a:cs typeface="Calibri" pitchFamily="34" charset="-120"/>
               </a:rPr>
-              <a:t>Le mot de passe généré contenait un « &amp; ». Le shell a cru que c'était une commande et a essayé de l'exécuter.</a:t>
-            </a:r>
-            <a:endParaRPr lang="en-US" sz="1250" dirty="0"/>
+              <a:t>Le script chargeait le fichier d'environnement avec « source ». Le mot de passe généré contenait un « &amp; », que le shell a interprété comme une commande.</a:t>
+            </a:r>
+            <a:endParaRPr lang="en-US" sz="1200" dirty="0"/>
           </a:p>
         </p:txBody>
       </p:sp>
@@ -12576,7 +12711,7 @@
                 <a:ea typeface="Arial" pitchFamily="34" charset="-122"/>
                 <a:cs typeface="Arial" pitchFamily="34" charset="-120"/>
               </a:rPr>
-              <a:t>Un cache incompatible</a:t>
+              <a:t>Cache incompatible avec NFS</a:t>
             </a:r>
             <a:endParaRPr lang="en-US" sz="1500" dirty="0"/>
           </a:p>
@@ -12607,7 +12742,7 @@
               <a:buNone/>
             </a:pPr>
             <a:r>
-              <a:rPr lang="en-US" sz="1250" dirty="0">
+              <a:rPr lang="en-US" sz="1200" dirty="0">
                 <a:solidFill>
                   <a:srgbClr val="5C6B7A"/>
                 </a:solidFill>
@@ -12615,9 +12750,9 @@
                 <a:ea typeface="Calibri" pitchFamily="34" charset="-122"/>
                 <a:cs typeface="Calibri" pitchFamily="34" charset="-120"/>
               </a:rPr>
-              <a:t>Sur un disque partagé, PrestaShop n'arrivait pas à vider son cache. On l'a remis sur le disque local du serveur.</a:t>
-            </a:r>
-            <a:endParaRPr lang="en-US" sz="1250" dirty="0"/>
+              <a:t>Sur un disque réseau, supprimer un fichier ouvert laisse une trace. Le vidage de cache de PrestaShop échouait. Le cache est passé sur le disque local.</a:t>
+            </a:r>
+            <a:endParaRPr lang="en-US" sz="1200" dirty="0"/>
           </a:p>
         </p:txBody>
       </p:sp>
@@ -12646,7 +12781,7 @@
               <a:buNone/>
             </a:pPr>
             <a:r>
-              <a:rPr lang="en-US" sz="1500" i="1" dirty="0">
+              <a:rPr lang="en-US" sz="1500" b="1" dirty="0">
                 <a:solidFill>
                   <a:srgbClr val="9E5D06"/>
                 </a:solidFill>
@@ -12654,7 +12789,7 @@
                 <a:ea typeface="Calibri" pitchFamily="34" charset="-122"/>
                 <a:cs typeface="Calibri" pitchFamily="34" charset="-120"/>
               </a:rPr>
-              <a:t>Les quatre sont corrigés dans le dépôt : un déploiement depuis zéro ne les rencontre plus.</a:t>
+              <a:t>Les quatre corrections sont dans le dépôt. Un déploiement depuis zéro ne les rencontre plus.</a:t>
             </a:r>
             <a:endParaRPr lang="en-US" sz="1500" dirty="0"/>
           </a:p>

--- a/docs/soutenance-5hash.pptx
+++ b/docs/soutenance-5hash.pptx
@@ -1337,7 +1337,7 @@
     <p:bg>
       <p:bgPr>
         <a:solidFill>
-          <a:srgbClr val="0F1720"/>
+          <a:srgbClr val="FFFFFF"/>
         </a:solidFill>
       </p:bgPr>
     </p:bg>
@@ -1407,7 +1407,7 @@
             <a:r>
               <a:rPr lang="en-US" sz="1200" spc="200" kern="0" dirty="0">
                 <a:solidFill>
-                  <a:srgbClr val="E08B1F"/>
+                  <a:srgbClr val="9E5D06"/>
                 </a:solidFill>
                 <a:latin typeface="Courier New" pitchFamily="34" charset="0"/>
                 <a:ea typeface="Courier New" pitchFamily="34" charset="-122"/>
@@ -1446,7 +1446,7 @@
             <a:r>
               <a:rPr lang="en-US" sz="5600" b="1" dirty="0">
                 <a:solidFill>
-                  <a:srgbClr val="FFFFFF"/>
+                  <a:srgbClr val="17222C"/>
                 </a:solidFill>
                 <a:latin typeface="Arial" pitchFamily="34" charset="0"/>
                 <a:ea typeface="Arial" pitchFamily="34" charset="-122"/>
@@ -1485,7 +1485,7 @@
             <a:r>
               <a:rPr lang="en-US" sz="2100" dirty="0">
                 <a:solidFill>
-                  <a:srgbClr val="A8B8C8"/>
+                  <a:srgbClr val="5C6B7A"/>
                 </a:solidFill>
                 <a:latin typeface="Calibri" pitchFamily="34" charset="0"/>
                 <a:ea typeface="Calibri" pitchFamily="34" charset="-122"/>
@@ -1514,11 +1514,11 @@
             </a:avLst>
           </a:prstGeom>
           <a:solidFill>
-            <a:srgbClr val="1B2732"/>
+            <a:srgbClr val="F2F5F7"/>
           </a:solidFill>
           <a:ln w="9525">
             <a:solidFill>
-              <a:srgbClr val="35475A"/>
+              <a:srgbClr val="D3DBE3"/>
             </a:solidFill>
             <a:prstDash val="solid"/>
           </a:ln>
@@ -1551,7 +1551,7 @@
             <a:r>
               <a:rPr lang="en-US" sz="1200" dirty="0">
                 <a:solidFill>
-                  <a:srgbClr val="C9D6E2"/>
+                  <a:srgbClr val="17222C"/>
                 </a:solidFill>
                 <a:latin typeface="Courier New" pitchFamily="34" charset="0"/>
                 <a:ea typeface="Courier New" pitchFamily="34" charset="-122"/>
@@ -1580,11 +1580,11 @@
             </a:avLst>
           </a:prstGeom>
           <a:solidFill>
-            <a:srgbClr val="1B2732"/>
+            <a:srgbClr val="F2F5F7"/>
           </a:solidFill>
           <a:ln w="9525">
             <a:solidFill>
-              <a:srgbClr val="35475A"/>
+              <a:srgbClr val="D3DBE3"/>
             </a:solidFill>
             <a:prstDash val="solid"/>
           </a:ln>
@@ -1617,7 +1617,7 @@
             <a:r>
               <a:rPr lang="en-US" sz="1200" dirty="0">
                 <a:solidFill>
-                  <a:srgbClr val="C9D6E2"/>
+                  <a:srgbClr val="17222C"/>
                 </a:solidFill>
                 <a:latin typeface="Courier New" pitchFamily="34" charset="0"/>
                 <a:ea typeface="Courier New" pitchFamily="34" charset="-122"/>
@@ -1646,11 +1646,11 @@
             </a:avLst>
           </a:prstGeom>
           <a:solidFill>
-            <a:srgbClr val="1B2732"/>
+            <a:srgbClr val="F2F5F7"/>
           </a:solidFill>
           <a:ln w="9525">
             <a:solidFill>
-              <a:srgbClr val="35475A"/>
+              <a:srgbClr val="D3DBE3"/>
             </a:solidFill>
             <a:prstDash val="solid"/>
           </a:ln>
@@ -1683,7 +1683,7 @@
             <a:r>
               <a:rPr lang="en-US" sz="1200" dirty="0">
                 <a:solidFill>
-                  <a:srgbClr val="C9D6E2"/>
+                  <a:srgbClr val="17222C"/>
                 </a:solidFill>
                 <a:latin typeface="Courier New" pitchFamily="34" charset="0"/>
                 <a:ea typeface="Courier New" pitchFamily="34" charset="-122"/>
@@ -1712,11 +1712,11 @@
             </a:avLst>
           </a:prstGeom>
           <a:solidFill>
-            <a:srgbClr val="1B2732"/>
+            <a:srgbClr val="F2F5F7"/>
           </a:solidFill>
           <a:ln w="9525">
             <a:solidFill>
-              <a:srgbClr val="35475A"/>
+              <a:srgbClr val="D3DBE3"/>
             </a:solidFill>
             <a:prstDash val="solid"/>
           </a:ln>
@@ -1749,7 +1749,7 @@
             <a:r>
               <a:rPr lang="en-US" sz="1200" dirty="0">
                 <a:solidFill>
-                  <a:srgbClr val="C9D6E2"/>
+                  <a:srgbClr val="17222C"/>
                 </a:solidFill>
                 <a:latin typeface="Courier New" pitchFamily="34" charset="0"/>
                 <a:ea typeface="Courier New" pitchFamily="34" charset="-122"/>
@@ -1788,7 +1788,7 @@
             <a:r>
               <a:rPr lang="en-US" sz="1600" dirty="0">
                 <a:solidFill>
-                  <a:srgbClr val="FFFFFF"/>
+                  <a:srgbClr val="17222C"/>
                 </a:solidFill>
                 <a:latin typeface="Calibri" pitchFamily="34" charset="0"/>
                 <a:ea typeface="Calibri" pitchFamily="34" charset="-122"/>
@@ -1827,7 +1827,7 @@
             <a:r>
               <a:rPr lang="en-US" sz="1300" dirty="0">
                 <a:solidFill>
-                  <a:srgbClr val="7A8C9E"/>
+                  <a:srgbClr val="5C6B7A"/>
                 </a:solidFill>
                 <a:latin typeface="Calibri" pitchFamily="34" charset="0"/>
                 <a:ea typeface="Calibri" pitchFamily="34" charset="-122"/>
@@ -1856,11 +1856,11 @@
             </a:avLst>
           </a:prstGeom>
           <a:solidFill>
-            <a:srgbClr val="1B2732"/>
+            <a:srgbClr val="F2F5F7"/>
           </a:solidFill>
           <a:ln w="9525">
             <a:solidFill>
-              <a:srgbClr val="35475A"/>
+              <a:srgbClr val="D3DBE3"/>
             </a:solidFill>
             <a:prstDash val="solid"/>
           </a:ln>
@@ -1893,7 +1893,7 @@
             <a:r>
               <a:rPr lang="en-US" sz="1250" dirty="0">
                 <a:solidFill>
-                  <a:srgbClr val="C9D6E2"/>
+                  <a:srgbClr val="17222C"/>
                 </a:solidFill>
                 <a:latin typeface="Courier New" pitchFamily="34" charset="0"/>
                 <a:ea typeface="Courier New" pitchFamily="34" charset="-122"/>
@@ -7231,7 +7231,7 @@
     <p:bg>
       <p:bgPr>
         <a:solidFill>
-          <a:srgbClr val="0F1720"/>
+          <a:srgbClr val="FFFFFF"/>
         </a:solidFill>
       </p:bgPr>
     </p:bg>
@@ -7301,7 +7301,7 @@
             <a:r>
               <a:rPr lang="en-US" sz="1200" spc="200" kern="0" dirty="0">
                 <a:solidFill>
-                  <a:srgbClr val="E08B1F"/>
+                  <a:srgbClr val="9E5D06"/>
                 </a:solidFill>
                 <a:latin typeface="Courier New" pitchFamily="34" charset="0"/>
                 <a:ea typeface="Courier New" pitchFamily="34" charset="-122"/>
@@ -7340,7 +7340,7 @@
             <a:r>
               <a:rPr lang="en-US" sz="3400" b="1" dirty="0">
                 <a:solidFill>
-                  <a:srgbClr val="FFFFFF"/>
+                  <a:srgbClr val="17222C"/>
                 </a:solidFill>
                 <a:latin typeface="Arial" pitchFamily="34" charset="0"/>
                 <a:ea typeface="Arial" pitchFamily="34" charset="-122"/>
@@ -7369,11 +7369,11 @@
             </a:avLst>
           </a:prstGeom>
           <a:solidFill>
-            <a:srgbClr val="1B2732"/>
+            <a:srgbClr val="FFFFFF"/>
           </a:solidFill>
           <a:ln w="9525">
             <a:solidFill>
-              <a:srgbClr val="35475A"/>
+              <a:srgbClr val="D3DBE3"/>
             </a:solidFill>
             <a:prstDash val="solid"/>
           </a:ln>
@@ -7468,7 +7468,7 @@
             <a:r>
               <a:rPr lang="en-US" sz="1050" dirty="0">
                 <a:solidFill>
-                  <a:srgbClr val="C9D6E2"/>
+                  <a:srgbClr val="17222C"/>
                 </a:solidFill>
                 <a:latin typeface="Calibri" pitchFamily="34" charset="0"/>
                 <a:ea typeface="Calibri" pitchFamily="34" charset="-122"/>
@@ -7507,7 +7507,7 @@
             <a:r>
               <a:rPr lang="en-US" sz="1050" dirty="0">
                 <a:solidFill>
-                  <a:srgbClr val="C9D6E2"/>
+                  <a:srgbClr val="17222C"/>
                 </a:solidFill>
                 <a:latin typeface="Calibri" pitchFamily="34" charset="0"/>
                 <a:ea typeface="Calibri" pitchFamily="34" charset="-122"/>
@@ -7546,7 +7546,7 @@
             <a:r>
               <a:rPr lang="en-US" sz="1050" dirty="0">
                 <a:solidFill>
-                  <a:srgbClr val="C9D6E2"/>
+                  <a:srgbClr val="17222C"/>
                 </a:solidFill>
                 <a:latin typeface="Calibri" pitchFamily="34" charset="0"/>
                 <a:ea typeface="Calibri" pitchFamily="34" charset="-122"/>
@@ -7585,7 +7585,7 @@
             <a:r>
               <a:rPr lang="en-US" sz="1050" dirty="0">
                 <a:solidFill>
-                  <a:srgbClr val="C9D6E2"/>
+                  <a:srgbClr val="17222C"/>
                 </a:solidFill>
                 <a:latin typeface="Calibri" pitchFamily="34" charset="0"/>
                 <a:ea typeface="Calibri" pitchFamily="34" charset="-122"/>
@@ -7614,11 +7614,11 @@
             </a:avLst>
           </a:prstGeom>
           <a:solidFill>
-            <a:srgbClr val="1B2732"/>
+            <a:srgbClr val="FFFFFF"/>
           </a:solidFill>
           <a:ln w="9525">
             <a:solidFill>
-              <a:srgbClr val="35475A"/>
+              <a:srgbClr val="D3DBE3"/>
             </a:solidFill>
             <a:prstDash val="solid"/>
           </a:ln>
@@ -7641,7 +7641,7 @@
           <a:noFill/>
           <a:ln w="25400">
             <a:solidFill>
-              <a:srgbClr val="E08B1F"/>
+              <a:srgbClr val="9E5D06"/>
             </a:solidFill>
             <a:prstDash val="solid"/>
           </a:ln>
@@ -7674,7 +7674,7 @@
             <a:r>
               <a:rPr lang="en-US" sz="1000" b="1" spc="50" kern="0" dirty="0">
                 <a:solidFill>
-                  <a:srgbClr val="E08B1F"/>
+                  <a:srgbClr val="9E5D06"/>
                 </a:solidFill>
                 <a:latin typeface="Courier New" pitchFamily="34" charset="0"/>
                 <a:ea typeface="Courier New" pitchFamily="34" charset="-122"/>
@@ -7713,7 +7713,7 @@
             <a:r>
               <a:rPr lang="en-US" sz="1050" dirty="0">
                 <a:solidFill>
-                  <a:srgbClr val="C9D6E2"/>
+                  <a:srgbClr val="17222C"/>
                 </a:solidFill>
                 <a:latin typeface="Calibri" pitchFamily="34" charset="0"/>
                 <a:ea typeface="Calibri" pitchFamily="34" charset="-122"/>
@@ -7752,7 +7752,7 @@
             <a:r>
               <a:rPr lang="en-US" sz="1050" dirty="0">
                 <a:solidFill>
-                  <a:srgbClr val="C9D6E2"/>
+                  <a:srgbClr val="17222C"/>
                 </a:solidFill>
                 <a:latin typeface="Calibri" pitchFamily="34" charset="0"/>
                 <a:ea typeface="Calibri" pitchFamily="34" charset="-122"/>
@@ -7791,7 +7791,7 @@
             <a:r>
               <a:rPr lang="en-US" sz="1050" dirty="0">
                 <a:solidFill>
-                  <a:srgbClr val="C9D6E2"/>
+                  <a:srgbClr val="17222C"/>
                 </a:solidFill>
                 <a:latin typeface="Calibri" pitchFamily="34" charset="0"/>
                 <a:ea typeface="Calibri" pitchFamily="34" charset="-122"/>
@@ -7830,7 +7830,7 @@
             <a:r>
               <a:rPr lang="en-US" sz="1050" dirty="0">
                 <a:solidFill>
-                  <a:srgbClr val="C9D6E2"/>
+                  <a:srgbClr val="17222C"/>
                 </a:solidFill>
                 <a:latin typeface="Calibri" pitchFamily="34" charset="0"/>
                 <a:ea typeface="Calibri" pitchFamily="34" charset="-122"/>
@@ -7859,11 +7859,11 @@
             </a:avLst>
           </a:prstGeom>
           <a:solidFill>
-            <a:srgbClr val="1B2732"/>
+            <a:srgbClr val="FFFFFF"/>
           </a:solidFill>
           <a:ln w="9525">
             <a:solidFill>
-              <a:srgbClr val="35475A"/>
+              <a:srgbClr val="D3DBE3"/>
             </a:solidFill>
             <a:prstDash val="solid"/>
           </a:ln>
@@ -7886,7 +7886,7 @@
           <a:noFill/>
           <a:ln w="25400">
             <a:solidFill>
-              <a:srgbClr val="8FA3B5"/>
+              <a:srgbClr val="5C6B7A"/>
             </a:solidFill>
             <a:prstDash val="solid"/>
           </a:ln>
@@ -7919,7 +7919,7 @@
             <a:r>
               <a:rPr lang="en-US" sz="1000" b="1" spc="50" kern="0" dirty="0">
                 <a:solidFill>
-                  <a:srgbClr val="8FA3B5"/>
+                  <a:srgbClr val="5C6B7A"/>
                 </a:solidFill>
                 <a:latin typeface="Courier New" pitchFamily="34" charset="0"/>
                 <a:ea typeface="Courier New" pitchFamily="34" charset="-122"/>
@@ -7958,7 +7958,7 @@
             <a:r>
               <a:rPr lang="en-US" sz="1050" dirty="0">
                 <a:solidFill>
-                  <a:srgbClr val="C9D6E2"/>
+                  <a:srgbClr val="17222C"/>
                 </a:solidFill>
                 <a:latin typeface="Calibri" pitchFamily="34" charset="0"/>
                 <a:ea typeface="Calibri" pitchFamily="34" charset="-122"/>
@@ -7997,7 +7997,7 @@
             <a:r>
               <a:rPr lang="en-US" sz="1050" dirty="0">
                 <a:solidFill>
-                  <a:srgbClr val="C9D6E2"/>
+                  <a:srgbClr val="17222C"/>
                 </a:solidFill>
                 <a:latin typeface="Calibri" pitchFamily="34" charset="0"/>
                 <a:ea typeface="Calibri" pitchFamily="34" charset="-122"/>
@@ -8036,7 +8036,7 @@
             <a:r>
               <a:rPr lang="en-US" sz="1050" dirty="0">
                 <a:solidFill>
-                  <a:srgbClr val="C9D6E2"/>
+                  <a:srgbClr val="17222C"/>
                 </a:solidFill>
                 <a:latin typeface="Calibri" pitchFamily="34" charset="0"/>
                 <a:ea typeface="Calibri" pitchFamily="34" charset="-122"/>
@@ -8075,7 +8075,7 @@
             <a:r>
               <a:rPr lang="en-US" sz="1050" dirty="0">
                 <a:solidFill>
-                  <a:srgbClr val="C9D6E2"/>
+                  <a:srgbClr val="17222C"/>
                 </a:solidFill>
                 <a:latin typeface="Calibri" pitchFamily="34" charset="0"/>
                 <a:ea typeface="Calibri" pitchFamily="34" charset="-122"/>
@@ -8114,7 +8114,7 @@
             <a:r>
               <a:rPr lang="en-US" sz="1800" b="1" dirty="0">
                 <a:solidFill>
-                  <a:srgbClr val="FFFFFF"/>
+                  <a:srgbClr val="17222C"/>
                 </a:solidFill>
                 <a:latin typeface="Arial" pitchFamily="34" charset="0"/>
                 <a:ea typeface="Arial" pitchFamily="34" charset="-122"/>
@@ -8153,7 +8153,7 @@
             <a:r>
               <a:rPr lang="en-US" sz="1200" dirty="0">
                 <a:solidFill>
-                  <a:srgbClr val="7A8C9E"/>
+                  <a:srgbClr val="5C6B7A"/>
                 </a:solidFill>
                 <a:latin typeface="Calibri" pitchFamily="34" charset="0"/>
                 <a:ea typeface="Calibri" pitchFamily="34" charset="-122"/>
